--- a/docs/presentations/MBSE_Pipeline_Executive_Brief.pptx
+++ b/docs/presentations/MBSE_Pipeline_Executive_Brief.pptx
@@ -8091,7 +8091,7 @@
                   <a:srgbClr val="555555"/>
                 </a:solidFill>
               </a:rPr>
-              <a:t>The MBSE pipeline operates at the System and Acceptance test layers — verifying requirements against the deployed product.</a:t>
+              <a:t>The MBSE pipeline operates at the System Test layer — verifying requirements against the deployed product through automated log analysis.</a:t>
             </a:r>
           </a:p>
         </p:txBody>
@@ -8401,12 +8401,10 @@
             <a:avLst/>
           </a:prstGeom>
           <a:solidFill>
-            <a:srgbClr val="0082CC"/>
+            <a:srgbClr val="888888"/>
           </a:solidFill>
-          <a:ln w="25400">
-            <a:solidFill>
-              <a:srgbClr val="0099D6"/>
-            </a:solidFill>
+          <a:ln>
+            <a:noFill/>
           </a:ln>
         </p:spPr>
         <p:style>
@@ -8479,7 +8477,7 @@
                   <a:srgbClr val="BBBBBB"/>
                 </a:solidFill>
               </a:rPr>
-              <a:t>Requirement-level validation</a:t>
+              <a:t>Customer-driven validation</a:t>
             </a:r>
           </a:p>
         </p:txBody>
@@ -8492,7 +8490,7 @@
         </p:nvSpPr>
         <p:spPr>
           <a:xfrm>
-            <a:off x="5303520" y="2560320"/>
+            <a:off x="5303520" y="3200400"/>
             <a:ext cx="1371600" cy="274320"/>
           </a:xfrm>
           <a:prstGeom prst="rect">
@@ -8858,7 +8856,7 @@
                   <a:srgbClr val="888888"/>
                 </a:solidFill>
               </a:rPr>
-              <a:t>Unit and Integration tests are owned by developers in their respective repos. The MBSE pipeline adds the System and Acceptance layers with full traceability.</a:t>
+              <a:t>Unit and Integration tests are owned by developers in their respective repos. The MBSE pipeline adds the System Test layer with full requirement traceability.</a:t>
             </a:r>
           </a:p>
         </p:txBody>

--- a/docs/presentations/MBSE_Pipeline_Executive_Brief.pptx
+++ b/docs/presentations/MBSE_Pipeline_Executive_Brief.pptx
@@ -8091,7 +8091,7 @@
                   <a:srgbClr val="555555"/>
                 </a:solidFill>
               </a:rPr>
-              <a:t>The MBSE pipeline operates at the System Test layer — verifying requirements against the deployed product through automated log analysis.</a:t>
+              <a:t>The MBSE pipeline operates at the System Verification layer — verifying requirements against the deployed product through automated log analysis.</a:t>
             </a:r>
           </a:p>
         </p:txBody>
@@ -8104,8 +8104,8 @@
         </p:nvSpPr>
         <p:spPr>
           <a:xfrm>
-            <a:off x="1371600" y="4754880"/>
-            <a:ext cx="4572000" cy="731520"/>
+            <a:off x="1371600" y="4572000"/>
+            <a:ext cx="4572000" cy="822960"/>
           </a:xfrm>
           <a:prstGeom prst="roundRect">
             <a:avLst/>
@@ -8147,8 +8147,8 @@
         </p:nvSpPr>
         <p:spPr>
           <a:xfrm>
-            <a:off x="1508760" y="4846320"/>
-            <a:ext cx="4297680" cy="594360"/>
+            <a:off x="1508760" y="4663440"/>
+            <a:ext cx="4297680" cy="685800"/>
           </a:xfrm>
           <a:prstGeom prst="rect">
             <a:avLst/>
@@ -8172,7 +8172,7 @@
                   <a:srgbClr val="FFFFFF"/>
                 </a:solidFill>
               </a:rPr>
-              <a:t>Unit Tests</a:t>
+              <a:t>Component Tests</a:t>
             </a:r>
           </a:p>
           <a:p>
@@ -8187,7 +8187,7 @@
                   <a:srgbClr val="BBBBBB"/>
                 </a:solidFill>
               </a:rPr>
-              <a:t>Component-level code coverage</a:t>
+              <a:t>Unit-level code coverage</a:t>
             </a:r>
           </a:p>
         </p:txBody>
@@ -8200,8 +8200,8 @@
         </p:nvSpPr>
         <p:spPr>
           <a:xfrm>
-            <a:off x="1828800" y="3931920"/>
-            <a:ext cx="3657600" cy="731520"/>
+            <a:off x="1828800" y="3566160"/>
+            <a:ext cx="3657600" cy="822960"/>
           </a:xfrm>
           <a:prstGeom prst="roundRect">
             <a:avLst/>
@@ -8243,8 +8243,8 @@
         </p:nvSpPr>
         <p:spPr>
           <a:xfrm>
-            <a:off x="1965960" y="4023360"/>
-            <a:ext cx="3383280" cy="594360"/>
+            <a:off x="1965960" y="3657600"/>
+            <a:ext cx="3383280" cy="685800"/>
           </a:xfrm>
           <a:prstGeom prst="rect">
             <a:avLst/>
@@ -8296,8 +8296,8 @@
         </p:nvSpPr>
         <p:spPr>
           <a:xfrm>
-            <a:off x="2286000" y="3108960"/>
-            <a:ext cx="2743200" cy="731520"/>
+            <a:off x="2286000" y="2560320"/>
+            <a:ext cx="2743200" cy="822960"/>
           </a:xfrm>
           <a:prstGeom prst="roundRect">
             <a:avLst/>
@@ -8341,8 +8341,8 @@
         </p:nvSpPr>
         <p:spPr>
           <a:xfrm>
-            <a:off x="2423160" y="3200400"/>
-            <a:ext cx="2468880" cy="594360"/>
+            <a:off x="2423160" y="2651760"/>
+            <a:ext cx="2468880" cy="685800"/>
           </a:xfrm>
           <a:prstGeom prst="rect">
             <a:avLst/>
@@ -8366,7 +8366,7 @@
                   <a:srgbClr val="FFFFFF"/>
                 </a:solidFill>
               </a:rPr>
-              <a:t>System Tests</a:t>
+              <a:t>System Verification</a:t>
             </a:r>
           </a:p>
           <a:p>
@@ -8381,148 +8381,53 @@
                   <a:srgbClr val="BBBBBB"/>
                 </a:solidFill>
               </a:rPr>
-              <a:t>End-to-end behavior verification</a:t>
-            </a:r>
-          </a:p>
-        </p:txBody>
-      </p:sp>
-      <p:sp>
-        <p:nvSpPr>
-          <p:cNvPr id="10" name="Rounded Rectangle 9"/>
-          <p:cNvSpPr/>
-          <p:nvPr/>
-        </p:nvSpPr>
-        <p:spPr>
-          <a:xfrm>
-            <a:off x="2743200" y="2286000"/>
-            <a:ext cx="1828800" cy="731520"/>
-          </a:xfrm>
-          <a:prstGeom prst="roundRect">
-            <a:avLst/>
-          </a:prstGeom>
-          <a:solidFill>
-            <a:srgbClr val="888888"/>
-          </a:solidFill>
-          <a:ln>
-            <a:noFill/>
-          </a:ln>
-        </p:spPr>
-        <p:style>
-          <a:lnRef idx="1">
-            <a:schemeClr val="accent1"/>
-          </a:lnRef>
-          <a:fillRef idx="3">
-            <a:schemeClr val="accent1"/>
-          </a:fillRef>
-          <a:effectRef idx="2">
-            <a:schemeClr val="accent1"/>
-          </a:effectRef>
-          <a:fontRef idx="minor">
-            <a:schemeClr val="lt1"/>
-          </a:fontRef>
-        </p:style>
-        <p:txBody>
-          <a:bodyPr rtlCol="0" anchor="ctr"/>
-          <a:lstStyle/>
-          <a:p>
-            <a:pPr algn="ctr"/>
+              <a:t>Requirement-level verification
+against the deployed product</a:t>
+            </a:r>
+          </a:p>
+        </p:txBody>
+      </p:sp>
+      <p:sp>
+        <p:nvSpPr>
+          <p:cNvPr id="10" name="TextBox 9"/>
+          <p:cNvSpPr txBox="1"/>
+          <p:nvPr/>
+        </p:nvSpPr>
+        <p:spPr>
+          <a:xfrm>
+            <a:off x="5303520" y="2743200"/>
+            <a:ext cx="1371600" cy="274320"/>
+          </a:xfrm>
+          <a:prstGeom prst="rect">
+            <a:avLst/>
+          </a:prstGeom>
+          <a:noFill/>
+        </p:spPr>
+        <p:txBody>
+          <a:bodyPr wrap="square">
+            <a:spAutoFit/>
+          </a:bodyPr>
+          <a:lstStyle/>
+          <a:p>
+            <a:pPr algn="l">
+              <a:spcAft>
+                <a:spcPts val="0"/>
+              </a:spcAft>
+            </a:pPr>
+            <a:r>
+              <a:rPr sz="1000" b="1">
+                <a:solidFill>
+                  <a:srgbClr val="0069B0"/>
+                </a:solidFill>
+              </a:rPr>
+              <a:t>◀ MBSE Pipeline</a:t>
+            </a:r>
           </a:p>
         </p:txBody>
       </p:sp>
       <p:sp>
         <p:nvSpPr>
           <p:cNvPr id="11" name="TextBox 10"/>
-          <p:cNvSpPr txBox="1"/>
-          <p:nvPr/>
-        </p:nvSpPr>
-        <p:spPr>
-          <a:xfrm>
-            <a:off x="2880360" y="2377440"/>
-            <a:ext cx="1554480" cy="594360"/>
-          </a:xfrm>
-          <a:prstGeom prst="rect">
-            <a:avLst/>
-          </a:prstGeom>
-          <a:noFill/>
-        </p:spPr>
-        <p:txBody>
-          <a:bodyPr wrap="square">
-            <a:spAutoFit/>
-          </a:bodyPr>
-          <a:lstStyle/>
-          <a:p>
-            <a:pPr algn="ctr">
-              <a:spcAft>
-                <a:spcPts val="100"/>
-              </a:spcAft>
-            </a:pPr>
-            <a:r>
-              <a:rPr sz="1100" b="1">
-                <a:solidFill>
-                  <a:srgbClr val="FFFFFF"/>
-                </a:solidFill>
-              </a:rPr>
-              <a:t>Acceptance Tests</a:t>
-            </a:r>
-          </a:p>
-          <a:p>
-            <a:pPr algn="ctr">
-              <a:spcAft>
-                <a:spcPts val="0"/>
-              </a:spcAft>
-            </a:pPr>
-            <a:r>
-              <a:rPr sz="800" b="0">
-                <a:solidFill>
-                  <a:srgbClr val="BBBBBB"/>
-                </a:solidFill>
-              </a:rPr>
-              <a:t>Customer-driven validation</a:t>
-            </a:r>
-          </a:p>
-        </p:txBody>
-      </p:sp>
-      <p:sp>
-        <p:nvSpPr>
-          <p:cNvPr id="12" name="TextBox 11"/>
-          <p:cNvSpPr txBox="1"/>
-          <p:nvPr/>
-        </p:nvSpPr>
-        <p:spPr>
-          <a:xfrm>
-            <a:off x="5303520" y="3200400"/>
-            <a:ext cx="1371600" cy="274320"/>
-          </a:xfrm>
-          <a:prstGeom prst="rect">
-            <a:avLst/>
-          </a:prstGeom>
-          <a:noFill/>
-        </p:spPr>
-        <p:txBody>
-          <a:bodyPr wrap="square">
-            <a:spAutoFit/>
-          </a:bodyPr>
-          <a:lstStyle/>
-          <a:p>
-            <a:pPr algn="l">
-              <a:spcAft>
-                <a:spcPts val="0"/>
-              </a:spcAft>
-            </a:pPr>
-            <a:r>
-              <a:rPr sz="1000" b="1">
-                <a:solidFill>
-                  <a:srgbClr val="0069B0"/>
-                </a:solidFill>
-              </a:rPr>
-              <a:t>◀ MBSE Pipeline</a:t>
-            </a:r>
-          </a:p>
-        </p:txBody>
-      </p:sp>
-      <p:sp>
-        <p:nvSpPr>
-          <p:cNvPr id="13" name="TextBox 12"/>
           <p:cNvSpPr txBox="1"/>
           <p:nvPr/>
         </p:nvSpPr>
@@ -8560,7 +8465,7 @@
       </p:sp>
       <p:sp>
         <p:nvSpPr>
-          <p:cNvPr id="14" name="TextBox 13"/>
+          <p:cNvPr id="12" name="TextBox 11"/>
           <p:cNvSpPr txBox="1"/>
           <p:nvPr/>
         </p:nvSpPr>
@@ -8613,7 +8518,7 @@
       </p:sp>
       <p:sp>
         <p:nvSpPr>
-          <p:cNvPr id="15" name="TextBox 14"/>
+          <p:cNvPr id="13" name="TextBox 12"/>
           <p:cNvSpPr txBox="1"/>
           <p:nvPr/>
         </p:nvSpPr>
@@ -8666,7 +8571,7 @@
       </p:sp>
       <p:sp>
         <p:nvSpPr>
-          <p:cNvPr id="16" name="TextBox 15"/>
+          <p:cNvPr id="14" name="TextBox 13"/>
           <p:cNvSpPr txBox="1"/>
           <p:nvPr/>
         </p:nvSpPr>
@@ -8719,7 +8624,7 @@
       </p:sp>
       <p:sp>
         <p:nvSpPr>
-          <p:cNvPr id="17" name="TextBox 16"/>
+          <p:cNvPr id="15" name="TextBox 14"/>
           <p:cNvSpPr txBox="1"/>
           <p:nvPr/>
         </p:nvSpPr>
@@ -8772,7 +8677,7 @@
       </p:sp>
       <p:sp>
         <p:nvSpPr>
-          <p:cNvPr id="18" name="TextBox 17"/>
+          <p:cNvPr id="16" name="TextBox 15"/>
           <p:cNvSpPr txBox="1"/>
           <p:nvPr/>
         </p:nvSpPr>
@@ -8825,7 +8730,7 @@
       </p:sp>
       <p:sp>
         <p:nvSpPr>
-          <p:cNvPr id="19" name="TextBox 18"/>
+          <p:cNvPr id="17" name="TextBox 16"/>
           <p:cNvSpPr txBox="1"/>
           <p:nvPr/>
         </p:nvSpPr>
@@ -8856,14 +8761,14 @@
                   <a:srgbClr val="888888"/>
                 </a:solidFill>
               </a:rPr>
-              <a:t>Unit and Integration tests are owned by developers in their respective repos. The MBSE pipeline adds the System Test layer with full requirement traceability.</a:t>
-            </a:r>
-          </a:p>
-        </p:txBody>
-      </p:sp>
-      <p:sp>
-        <p:nvSpPr>
-          <p:cNvPr id="20" name="TextBox 19"/>
+              <a:t>Component and Integration tests are owned by developers. The MBSE pipeline adds System Verification with full requirement traceability from the Cameo model.</a:t>
+            </a:r>
+          </a:p>
+        </p:txBody>
+      </p:sp>
+      <p:sp>
+        <p:nvSpPr>
+          <p:cNvPr id="18" name="TextBox 17"/>
           <p:cNvSpPr txBox="1"/>
           <p:nvPr/>
         </p:nvSpPr>

--- a/docs/presentations/MBSE_Pipeline_Executive_Brief.pptx
+++ b/docs/presentations/MBSE_Pipeline_Executive_Brief.pptx
@@ -8091,7 +8091,7 @@
                   <a:srgbClr val="555555"/>
                 </a:solidFill>
               </a:rPr>
-              <a:t>The MBSE pipeline operates at the System Verification layer — verifying requirements against the deployed product through automated log analysis.</a:t>
+              <a:t>The MBSE pipeline automates E2E testing — deploying the product, running simulations, and verifying requirements through log analysis.</a:t>
             </a:r>
           </a:p>
         </p:txBody>
@@ -8104,8 +8104,170 @@
         </p:nvSpPr>
         <p:spPr>
           <a:xfrm>
-            <a:off x="1371600" y="4572000"/>
-            <a:ext cx="4572000" cy="822960"/>
+            <a:off x="457200" y="4937760"/>
+            <a:ext cx="5029200" cy="685800"/>
+          </a:xfrm>
+          <a:prstGeom prst="roundRect">
+            <a:avLst/>
+          </a:prstGeom>
+          <a:solidFill>
+            <a:srgbClr val="003057"/>
+          </a:solidFill>
+          <a:ln>
+            <a:noFill/>
+          </a:ln>
+        </p:spPr>
+        <p:style>
+          <a:lnRef idx="1">
+            <a:schemeClr val="accent1"/>
+          </a:lnRef>
+          <a:fillRef idx="3">
+            <a:schemeClr val="accent1"/>
+          </a:fillRef>
+          <a:effectRef idx="2">
+            <a:schemeClr val="accent1"/>
+          </a:effectRef>
+          <a:fontRef idx="minor">
+            <a:schemeClr val="lt1"/>
+          </a:fontRef>
+        </p:style>
+        <p:txBody>
+          <a:bodyPr rtlCol="0" anchor="ctr"/>
+          <a:lstStyle/>
+          <a:p>
+            <a:pPr algn="ctr"/>
+          </a:p>
+        </p:txBody>
+      </p:sp>
+      <p:sp>
+        <p:nvSpPr>
+          <p:cNvPr id="5" name="TextBox 4"/>
+          <p:cNvSpPr txBox="1"/>
+          <p:nvPr/>
+        </p:nvSpPr>
+        <p:spPr>
+          <a:xfrm>
+            <a:off x="548640" y="5029200"/>
+            <a:ext cx="4846320" cy="594360"/>
+          </a:xfrm>
+          <a:prstGeom prst="rect">
+            <a:avLst/>
+          </a:prstGeom>
+          <a:noFill/>
+        </p:spPr>
+        <p:txBody>
+          <a:bodyPr wrap="square">
+            <a:spAutoFit/>
+          </a:bodyPr>
+          <a:lstStyle/>
+          <a:p>
+            <a:pPr algn="ctr">
+              <a:spcAft>
+                <a:spcPts val="0"/>
+              </a:spcAft>
+            </a:pPr>
+            <a:r>
+              <a:rPr sz="1100" b="1">
+                <a:solidFill>
+                  <a:srgbClr val="FFFFFF"/>
+                </a:solidFill>
+              </a:rPr>
+              <a:t>Static Analysis</a:t>
+            </a:r>
+          </a:p>
+        </p:txBody>
+      </p:sp>
+      <p:sp>
+        <p:nvSpPr>
+          <p:cNvPr id="6" name="Rounded Rectangle 5"/>
+          <p:cNvSpPr/>
+          <p:nvPr/>
+        </p:nvSpPr>
+        <p:spPr>
+          <a:xfrm>
+            <a:off x="822960" y="4114800"/>
+            <a:ext cx="4297680" cy="685800"/>
+          </a:xfrm>
+          <a:prstGeom prst="roundRect">
+            <a:avLst/>
+          </a:prstGeom>
+          <a:solidFill>
+            <a:srgbClr val="004A87"/>
+          </a:solidFill>
+          <a:ln>
+            <a:noFill/>
+          </a:ln>
+        </p:spPr>
+        <p:style>
+          <a:lnRef idx="1">
+            <a:schemeClr val="accent1"/>
+          </a:lnRef>
+          <a:fillRef idx="3">
+            <a:schemeClr val="accent1"/>
+          </a:fillRef>
+          <a:effectRef idx="2">
+            <a:schemeClr val="accent1"/>
+          </a:effectRef>
+          <a:fontRef idx="minor">
+            <a:schemeClr val="lt1"/>
+          </a:fontRef>
+        </p:style>
+        <p:txBody>
+          <a:bodyPr rtlCol="0" anchor="ctr"/>
+          <a:lstStyle/>
+          <a:p>
+            <a:pPr algn="ctr"/>
+          </a:p>
+        </p:txBody>
+      </p:sp>
+      <p:sp>
+        <p:nvSpPr>
+          <p:cNvPr id="7" name="TextBox 6"/>
+          <p:cNvSpPr txBox="1"/>
+          <p:nvPr/>
+        </p:nvSpPr>
+        <p:spPr>
+          <a:xfrm>
+            <a:off x="914400" y="4206240"/>
+            <a:ext cx="4114800" cy="594360"/>
+          </a:xfrm>
+          <a:prstGeom prst="rect">
+            <a:avLst/>
+          </a:prstGeom>
+          <a:noFill/>
+        </p:spPr>
+        <p:txBody>
+          <a:bodyPr wrap="square">
+            <a:spAutoFit/>
+          </a:bodyPr>
+          <a:lstStyle/>
+          <a:p>
+            <a:pPr algn="ctr">
+              <a:spcAft>
+                <a:spcPts val="0"/>
+              </a:spcAft>
+            </a:pPr>
+            <a:r>
+              <a:rPr sz="1100" b="1">
+                <a:solidFill>
+                  <a:srgbClr val="FFFFFF"/>
+                </a:solidFill>
+              </a:rPr>
+              <a:t>Unit Tests</a:t>
+            </a:r>
+          </a:p>
+        </p:txBody>
+      </p:sp>
+      <p:sp>
+        <p:nvSpPr>
+          <p:cNvPr id="8" name="Rounded Rectangle 7"/>
+          <p:cNvSpPr/>
+          <p:nvPr/>
+        </p:nvSpPr>
+        <p:spPr>
+          <a:xfrm>
+            <a:off x="1188720" y="3291840"/>
+            <a:ext cx="3566160" cy="685800"/>
           </a:xfrm>
           <a:prstGeom prst="roundRect">
             <a:avLst/>
@@ -8141,14 +8303,14 @@
       </p:sp>
       <p:sp>
         <p:nvSpPr>
-          <p:cNvPr id="5" name="TextBox 4"/>
-          <p:cNvSpPr txBox="1"/>
-          <p:nvPr/>
-        </p:nvSpPr>
-        <p:spPr>
-          <a:xfrm>
-            <a:off x="1508760" y="4663440"/>
-            <a:ext cx="4297680" cy="685800"/>
+          <p:cNvPr id="9" name="TextBox 8"/>
+          <p:cNvSpPr txBox="1"/>
+          <p:nvPr/>
+        </p:nvSpPr>
+        <p:spPr>
+          <a:xfrm>
+            <a:off x="1280160" y="3383280"/>
+            <a:ext cx="3383280" cy="594360"/>
           </a:xfrm>
           <a:prstGeom prst="rect">
             <a:avLst/>
@@ -8163,7 +8325,7 @@
           <a:p>
             <a:pPr algn="ctr">
               <a:spcAft>
-                <a:spcPts val="100"/>
+                <a:spcPts val="0"/>
               </a:spcAft>
             </a:pPr>
             <a:r>
@@ -8172,9 +8334,77 @@
                   <a:srgbClr val="FFFFFF"/>
                 </a:solidFill>
               </a:rPr>
-              <a:t>Component Tests</a:t>
-            </a:r>
-          </a:p>
+              <a:t>Integration Tests</a:t>
+            </a:r>
+          </a:p>
+        </p:txBody>
+      </p:sp>
+      <p:sp>
+        <p:nvSpPr>
+          <p:cNvPr id="10" name="Rounded Rectangle 9"/>
+          <p:cNvSpPr/>
+          <p:nvPr/>
+        </p:nvSpPr>
+        <p:spPr>
+          <a:xfrm>
+            <a:off x="1554480" y="2468880"/>
+            <a:ext cx="2834640" cy="685800"/>
+          </a:xfrm>
+          <a:prstGeom prst="roundRect">
+            <a:avLst/>
+          </a:prstGeom>
+          <a:solidFill>
+            <a:srgbClr val="0069B0"/>
+          </a:solidFill>
+          <a:ln w="31750">
+            <a:solidFill>
+              <a:srgbClr val="0099D6"/>
+            </a:solidFill>
+          </a:ln>
+        </p:spPr>
+        <p:style>
+          <a:lnRef idx="1">
+            <a:schemeClr val="accent1"/>
+          </a:lnRef>
+          <a:fillRef idx="3">
+            <a:schemeClr val="accent1"/>
+          </a:fillRef>
+          <a:effectRef idx="2">
+            <a:schemeClr val="accent1"/>
+          </a:effectRef>
+          <a:fontRef idx="minor">
+            <a:schemeClr val="lt1"/>
+          </a:fontRef>
+        </p:style>
+        <p:txBody>
+          <a:bodyPr rtlCol="0" anchor="ctr"/>
+          <a:lstStyle/>
+          <a:p>
+            <a:pPr algn="ctr"/>
+          </a:p>
+        </p:txBody>
+      </p:sp>
+      <p:sp>
+        <p:nvSpPr>
+          <p:cNvPr id="11" name="TextBox 10"/>
+          <p:cNvSpPr txBox="1"/>
+          <p:nvPr/>
+        </p:nvSpPr>
+        <p:spPr>
+          <a:xfrm>
+            <a:off x="1645920" y="2560320"/>
+            <a:ext cx="2651760" cy="594360"/>
+          </a:xfrm>
+          <a:prstGeom prst="rect">
+            <a:avLst/>
+          </a:prstGeom>
+          <a:noFill/>
+        </p:spPr>
+        <p:txBody>
+          <a:bodyPr wrap="square">
+            <a:spAutoFit/>
+          </a:bodyPr>
+          <a:lstStyle/>
           <a:p>
             <a:pPr algn="ctr">
               <a:spcAft>
@@ -8182,26 +8412,26 @@
               </a:spcAft>
             </a:pPr>
             <a:r>
-              <a:rPr sz="800" b="0">
-                <a:solidFill>
-                  <a:srgbClr val="BBBBBB"/>
-                </a:solidFill>
-              </a:rPr>
-              <a:t>Unit-level code coverage</a:t>
-            </a:r>
-          </a:p>
-        </p:txBody>
-      </p:sp>
-      <p:sp>
-        <p:nvSpPr>
-          <p:cNvPr id="6" name="Rounded Rectangle 5"/>
+              <a:rPr sz="1100" b="1">
+                <a:solidFill>
+                  <a:srgbClr val="FFFFFF"/>
+                </a:solidFill>
+              </a:rPr>
+              <a:t>E2E Tests</a:t>
+            </a:r>
+          </a:p>
+        </p:txBody>
+      </p:sp>
+      <p:sp>
+        <p:nvSpPr>
+          <p:cNvPr id="12" name="Rounded Rectangle 11"/>
           <p:cNvSpPr/>
           <p:nvPr/>
         </p:nvSpPr>
         <p:spPr>
           <a:xfrm>
-            <a:off x="1828800" y="3566160"/>
-            <a:ext cx="3657600" cy="822960"/>
+            <a:off x="1920240" y="1645920"/>
+            <a:ext cx="2103120" cy="685800"/>
           </a:xfrm>
           <a:prstGeom prst="roundRect">
             <a:avLst/>
@@ -8237,14 +8467,14 @@
       </p:sp>
       <p:sp>
         <p:nvSpPr>
-          <p:cNvPr id="7" name="TextBox 6"/>
-          <p:cNvSpPr txBox="1"/>
-          <p:nvPr/>
-        </p:nvSpPr>
-        <p:spPr>
-          <a:xfrm>
-            <a:off x="1965960" y="3657600"/>
-            <a:ext cx="3383280" cy="685800"/>
+          <p:cNvPr id="13" name="TextBox 12"/>
+          <p:cNvSpPr txBox="1"/>
+          <p:nvPr/>
+        </p:nvSpPr>
+        <p:spPr>
+          <a:xfrm>
+            <a:off x="2011680" y="1737360"/>
+            <a:ext cx="1920240" cy="594360"/>
           </a:xfrm>
           <a:prstGeom prst="rect">
             <a:avLst/>
@@ -8259,7 +8489,7 @@
           <a:p>
             <a:pPr algn="ctr">
               <a:spcAft>
-                <a:spcPts val="100"/>
+                <a:spcPts val="0"/>
               </a:spcAft>
             </a:pPr>
             <a:r>
@@ -8268,9 +8498,33 @@
                   <a:srgbClr val="FFFFFF"/>
                 </a:solidFill>
               </a:rPr>
-              <a:t>Integration Tests</a:t>
-            </a:r>
-          </a:p>
+              <a:t>Manual &amp;
+Exploratory</a:t>
+            </a:r>
+          </a:p>
+        </p:txBody>
+      </p:sp>
+      <p:sp>
+        <p:nvSpPr>
+          <p:cNvPr id="14" name="TextBox 13"/>
+          <p:cNvSpPr txBox="1"/>
+          <p:nvPr/>
+        </p:nvSpPr>
+        <p:spPr>
+          <a:xfrm>
+            <a:off x="45720" y="1554480"/>
+            <a:ext cx="365760" cy="4114800"/>
+          </a:xfrm>
+          <a:prstGeom prst="rect">
+            <a:avLst/>
+          </a:prstGeom>
+          <a:noFill/>
+        </p:spPr>
+        <p:txBody>
+          <a:bodyPr wrap="square">
+            <a:spAutoFit/>
+          </a:bodyPr>
+          <a:lstStyle/>
           <a:p>
             <a:pPr algn="ctr">
               <a:spcAft>
@@ -8278,145 +8532,84 @@
               </a:spcAft>
             </a:pPr>
             <a:r>
-              <a:rPr sz="800" b="0">
-                <a:solidFill>
-                  <a:srgbClr val="BBBBBB"/>
-                </a:solidFill>
-              </a:rPr>
-              <a:t>Module interfaces &amp; data flow</a:t>
-            </a:r>
-          </a:p>
-        </p:txBody>
-      </p:sp>
-      <p:sp>
-        <p:nvSpPr>
-          <p:cNvPr id="8" name="Rounded Rectangle 7"/>
-          <p:cNvSpPr/>
-          <p:nvPr/>
-        </p:nvSpPr>
-        <p:spPr>
-          <a:xfrm>
-            <a:off x="2286000" y="2560320"/>
-            <a:ext cx="2743200" cy="822960"/>
-          </a:xfrm>
-          <a:prstGeom prst="roundRect">
-            <a:avLst/>
-          </a:prstGeom>
-          <a:solidFill>
-            <a:srgbClr val="0069B0"/>
-          </a:solidFill>
-          <a:ln w="25400">
-            <a:solidFill>
-              <a:srgbClr val="0099D6"/>
-            </a:solidFill>
-          </a:ln>
-        </p:spPr>
-        <p:style>
-          <a:lnRef idx="1">
-            <a:schemeClr val="accent1"/>
-          </a:lnRef>
-          <a:fillRef idx="3">
-            <a:schemeClr val="accent1"/>
-          </a:fillRef>
-          <a:effectRef idx="2">
-            <a:schemeClr val="accent1"/>
-          </a:effectRef>
-          <a:fontRef idx="minor">
-            <a:schemeClr val="lt1"/>
-          </a:fontRef>
-        </p:style>
-        <p:txBody>
-          <a:bodyPr rtlCol="0" anchor="ctr"/>
-          <a:lstStyle/>
-          <a:p>
-            <a:pPr algn="ctr"/>
-          </a:p>
-        </p:txBody>
-      </p:sp>
-      <p:sp>
-        <p:nvSpPr>
-          <p:cNvPr id="9" name="TextBox 8"/>
-          <p:cNvSpPr txBox="1"/>
-          <p:nvPr/>
-        </p:nvSpPr>
-        <p:spPr>
-          <a:xfrm>
-            <a:off x="2423160" y="2651760"/>
-            <a:ext cx="2468880" cy="685800"/>
-          </a:xfrm>
-          <a:prstGeom prst="rect">
-            <a:avLst/>
-          </a:prstGeom>
-          <a:noFill/>
-        </p:spPr>
-        <p:txBody>
-          <a:bodyPr wrap="square">
-            <a:spAutoFit/>
-          </a:bodyPr>
-          <a:lstStyle/>
-          <a:p>
-            <a:pPr algn="ctr">
-              <a:spcAft>
-                <a:spcPts val="100"/>
+              <a:rPr sz="900" b="1">
+                <a:solidFill>
+                  <a:srgbClr val="888888"/>
+                </a:solidFill>
+              </a:rPr>
+              <a:t>Cost ↑</a:t>
+            </a:r>
+          </a:p>
+        </p:txBody>
+      </p:sp>
+      <p:sp>
+        <p:nvSpPr>
+          <p:cNvPr id="15" name="TextBox 14"/>
+          <p:cNvSpPr txBox="1"/>
+          <p:nvPr/>
+        </p:nvSpPr>
+        <p:spPr>
+          <a:xfrm>
+            <a:off x="5029200" y="5669280"/>
+            <a:ext cx="731520" cy="274320"/>
+          </a:xfrm>
+          <a:prstGeom prst="rect">
+            <a:avLst/>
+          </a:prstGeom>
+          <a:noFill/>
+        </p:spPr>
+        <p:txBody>
+          <a:bodyPr wrap="square">
+            <a:spAutoFit/>
+          </a:bodyPr>
+          <a:lstStyle/>
+          <a:p>
+            <a:pPr algn="l">
+              <a:spcAft>
+                <a:spcPts val="0"/>
+              </a:spcAft>
+            </a:pPr>
+            <a:r>
+              <a:rPr sz="900" b="1">
+                <a:solidFill>
+                  <a:srgbClr val="888888"/>
+                </a:solidFill>
+              </a:rPr>
+              <a:t>Speed →</a:t>
+            </a:r>
+          </a:p>
+        </p:txBody>
+      </p:sp>
+      <p:sp>
+        <p:nvSpPr>
+          <p:cNvPr id="16" name="TextBox 15"/>
+          <p:cNvSpPr txBox="1"/>
+          <p:nvPr/>
+        </p:nvSpPr>
+        <p:spPr>
+          <a:xfrm>
+            <a:off x="4663440" y="2560320"/>
+            <a:ext cx="1645920" cy="274320"/>
+          </a:xfrm>
+          <a:prstGeom prst="rect">
+            <a:avLst/>
+          </a:prstGeom>
+          <a:noFill/>
+        </p:spPr>
+        <p:txBody>
+          <a:bodyPr wrap="square">
+            <a:spAutoFit/>
+          </a:bodyPr>
+          <a:lstStyle/>
+          <a:p>
+            <a:pPr algn="l">
+              <a:spcAft>
+                <a:spcPts val="0"/>
               </a:spcAft>
             </a:pPr>
             <a:r>
               <a:rPr sz="1100" b="1">
                 <a:solidFill>
-                  <a:srgbClr val="FFFFFF"/>
-                </a:solidFill>
-              </a:rPr>
-              <a:t>System Verification</a:t>
-            </a:r>
-          </a:p>
-          <a:p>
-            <a:pPr algn="ctr">
-              <a:spcAft>
-                <a:spcPts val="0"/>
-              </a:spcAft>
-            </a:pPr>
-            <a:r>
-              <a:rPr sz="800" b="0">
-                <a:solidFill>
-                  <a:srgbClr val="BBBBBB"/>
-                </a:solidFill>
-              </a:rPr>
-              <a:t>Requirement-level verification
-against the deployed product</a:t>
-            </a:r>
-          </a:p>
-        </p:txBody>
-      </p:sp>
-      <p:sp>
-        <p:nvSpPr>
-          <p:cNvPr id="10" name="TextBox 9"/>
-          <p:cNvSpPr txBox="1"/>
-          <p:nvPr/>
-        </p:nvSpPr>
-        <p:spPr>
-          <a:xfrm>
-            <a:off x="5303520" y="2743200"/>
-            <a:ext cx="1371600" cy="274320"/>
-          </a:xfrm>
-          <a:prstGeom prst="rect">
-            <a:avLst/>
-          </a:prstGeom>
-          <a:noFill/>
-        </p:spPr>
-        <p:txBody>
-          <a:bodyPr wrap="square">
-            <a:spAutoFit/>
-          </a:bodyPr>
-          <a:lstStyle/>
-          <a:p>
-            <a:pPr algn="l">
-              <a:spcAft>
-                <a:spcPts val="0"/>
-              </a:spcAft>
-            </a:pPr>
-            <a:r>
-              <a:rPr sz="1000" b="1">
-                <a:solidFill>
                   <a:srgbClr val="0069B0"/>
                 </a:solidFill>
               </a:rPr>
@@ -8427,7 +8620,7 @@
       </p:sp>
       <p:sp>
         <p:nvSpPr>
-          <p:cNvPr id="11" name="TextBox 10"/>
+          <p:cNvPr id="17" name="TextBox 16"/>
           <p:cNvSpPr txBox="1"/>
           <p:nvPr/>
         </p:nvSpPr>
@@ -8465,7 +8658,7 @@
       </p:sp>
       <p:sp>
         <p:nvSpPr>
-          <p:cNvPr id="12" name="TextBox 11"/>
+          <p:cNvPr id="18" name="TextBox 17"/>
           <p:cNvSpPr txBox="1"/>
           <p:nvPr/>
         </p:nvSpPr>
@@ -8518,7 +8711,7 @@
       </p:sp>
       <p:sp>
         <p:nvSpPr>
-          <p:cNvPr id="13" name="TextBox 12"/>
+          <p:cNvPr id="19" name="TextBox 18"/>
           <p:cNvSpPr txBox="1"/>
           <p:nvPr/>
         </p:nvSpPr>
@@ -8549,7 +8742,7 @@
                   <a:srgbClr val="0069B0"/>
                 </a:solidFill>
               </a:rPr>
-              <a:t>Automated Verification</a:t>
+              <a:t>Automated E2E Verification</a:t>
             </a:r>
           </a:p>
           <a:p>
@@ -8564,14 +8757,14 @@
                   <a:srgbClr val="555555"/>
                 </a:solidFill>
               </a:rPr>
-              <a:t>BDD scenarios run against simulation logs after deployment. Results are captured automatically.</a:t>
-            </a:r>
-          </a:p>
-        </p:txBody>
-      </p:sp>
-      <p:sp>
-        <p:nvSpPr>
-          <p:cNvPr id="14" name="TextBox 13"/>
+              <a:t>BDD scenarios run against simulation logs after product deployment. Results captured automatically.</a:t>
+            </a:r>
+          </a:p>
+        </p:txBody>
+      </p:sp>
+      <p:sp>
+        <p:nvSpPr>
+          <p:cNvPr id="20" name="TextBox 19"/>
           <p:cNvSpPr txBox="1"/>
           <p:nvPr/>
         </p:nvSpPr>
@@ -8624,7 +8817,7 @@
       </p:sp>
       <p:sp>
         <p:nvSpPr>
-          <p:cNvPr id="15" name="TextBox 14"/>
+          <p:cNvPr id="21" name="TextBox 20"/>
           <p:cNvSpPr txBox="1"/>
           <p:nvPr/>
         </p:nvSpPr>
@@ -8677,7 +8870,7 @@
       </p:sp>
       <p:sp>
         <p:nvSpPr>
-          <p:cNvPr id="16" name="TextBox 15"/>
+          <p:cNvPr id="22" name="TextBox 21"/>
           <p:cNvSpPr txBox="1"/>
           <p:nvPr/>
         </p:nvSpPr>
@@ -8730,13 +8923,13 @@
       </p:sp>
       <p:sp>
         <p:nvSpPr>
-          <p:cNvPr id="17" name="TextBox 16"/>
-          <p:cNvSpPr txBox="1"/>
-          <p:nvPr/>
-        </p:nvSpPr>
-        <p:spPr>
-          <a:xfrm>
-            <a:off x="731520" y="5943600"/>
+          <p:cNvPr id="23" name="TextBox 22"/>
+          <p:cNvSpPr txBox="1"/>
+          <p:nvPr/>
+        </p:nvSpPr>
+        <p:spPr>
+          <a:xfrm>
+            <a:off x="731520" y="6035040"/>
             <a:ext cx="10972800" cy="274320"/>
           </a:xfrm>
           <a:prstGeom prst="rect">
@@ -8761,14 +8954,14 @@
                   <a:srgbClr val="888888"/>
                 </a:solidFill>
               </a:rPr>
-              <a:t>Component and Integration tests are owned by developers. The MBSE pipeline adds System Verification with full requirement traceability from the Cameo model.</a:t>
-            </a:r>
-          </a:p>
-        </p:txBody>
-      </p:sp>
-      <p:sp>
-        <p:nvSpPr>
-          <p:cNvPr id="18" name="TextBox 17"/>
+              <a:t>Static analysis, unit, and integration tests are owned by developers. The MBSE pipeline automates the E2E layer with full requirement traceability.</a:t>
+            </a:r>
+          </a:p>
+        </p:txBody>
+      </p:sp>
+      <p:sp>
+        <p:nvSpPr>
+          <p:cNvPr id="24" name="TextBox 23"/>
           <p:cNvSpPr txBox="1"/>
           <p:nvPr/>
         </p:nvSpPr>

--- a/docs/presentations/MBSE_Pipeline_Executive_Brief.pptx
+++ b/docs/presentations/MBSE_Pipeline_Executive_Brief.pptx
@@ -8111,7 +8111,7 @@
             <a:avLst/>
           </a:prstGeom>
           <a:solidFill>
-            <a:srgbClr val="003057"/>
+            <a:srgbClr val="888888"/>
           </a:solidFill>
           <a:ln>
             <a:noFill/>
@@ -8192,7 +8192,7 @@
             <a:avLst/>
           </a:prstGeom>
           <a:solidFill>
-            <a:srgbClr val="004A87"/>
+            <a:srgbClr val="888888"/>
           </a:solidFill>
           <a:ln>
             <a:noFill/>

--- a/docs/presentations/MBSE_Pipeline_Executive_Brief.pptx
+++ b/docs/presentations/MBSE_Pipeline_Executive_Brief.pptx
@@ -16,6 +16,7 @@
     <p:sldId id="264" r:id="rId15"/>
     <p:sldId id="265" r:id="rId16"/>
     <p:sldId id="266" r:id="rId17"/>
+    <p:sldId id="267" r:id="rId18"/>
   </p:sldIdLst>
   <p:sldSz cx="12191695" cy="6858000" type="screen4x3"/>
   <p:notesSz cx="6858000" cy="9144000"/>
@@ -3207,7 +3208,7 @@
                   <a:srgbClr val="888888"/>
                 </a:solidFill>
               </a:rPr>
-              <a:t>1 / 11</a:t>
+              <a:t>1 / 12</a:t>
             </a:r>
           </a:p>
         </p:txBody>
@@ -3246,7 +3247,7 @@
         </p:nvSpPr>
         <p:spPr>
           <a:xfrm>
-            <a:off x="731520" y="457200"/>
+            <a:off x="731520" y="365760"/>
             <a:ext cx="10058400" cy="457200"/>
           </a:xfrm>
           <a:prstGeom prst="rect">
@@ -3271,7 +3272,7 @@
                   <a:srgbClr val="0D1B2A"/>
                 </a:solidFill>
               </a:rPr>
-              <a:t>Traceability &amp; Audit Evidence</a:t>
+              <a:t>Cyber: Supply Chain Security</a:t>
             </a:r>
           </a:p>
         </p:txBody>
@@ -3284,8 +3285,8 @@
         </p:nvSpPr>
         <p:spPr>
           <a:xfrm>
-            <a:off x="731520" y="960120"/>
-            <a:ext cx="10058400" cy="274320"/>
+            <a:off x="731520" y="868680"/>
+            <a:ext cx="9144000" cy="320040"/>
           </a:xfrm>
           <a:prstGeom prst="rect">
             <a:avLst/>
@@ -3309,27 +3310,65 @@
                   <a:srgbClr val="555555"/>
                 </a:solidFill>
               </a:rPr>
-              <a:t>Every pipeline run produces a complete, machine-generated evidence chain — no manual assembly required.</a:t>
-            </a:r>
-          </a:p>
-        </p:txBody>
-      </p:sp>
-      <p:sp>
-        <p:nvSpPr>
-          <p:cNvPr id="4" name="Rounded Rectangle 3"/>
+              <a:t>Every container image is scanned for known vulnerabilities before deployment. A full Software Bill of Materials is generated on every build.</a:t>
+            </a:r>
+          </a:p>
+        </p:txBody>
+      </p:sp>
+      <p:sp>
+        <p:nvSpPr>
+          <p:cNvPr id="4" name="TextBox 3"/>
+          <p:cNvSpPr txBox="1"/>
+          <p:nvPr/>
+        </p:nvSpPr>
+        <p:spPr>
+          <a:xfrm>
+            <a:off x="731520" y="1463040"/>
+            <a:ext cx="4572000" cy="274320"/>
+          </a:xfrm>
+          <a:prstGeom prst="rect">
+            <a:avLst/>
+          </a:prstGeom>
+          <a:noFill/>
+        </p:spPr>
+        <p:txBody>
+          <a:bodyPr wrap="square">
+            <a:spAutoFit/>
+          </a:bodyPr>
+          <a:lstStyle/>
+          <a:p>
+            <a:pPr algn="l">
+              <a:spcAft>
+                <a:spcPts val="0"/>
+              </a:spcAft>
+            </a:pPr>
+            <a:r>
+              <a:rPr sz="1600" b="1">
+                <a:solidFill>
+                  <a:srgbClr val="0D1B2A"/>
+                </a:solidFill>
+              </a:rPr>
+              <a:t>Automated Scanning Pipeline</a:t>
+            </a:r>
+          </a:p>
+        </p:txBody>
+      </p:sp>
+      <p:sp>
+        <p:nvSpPr>
+          <p:cNvPr id="5" name="Rounded Rectangle 4"/>
           <p:cNvSpPr/>
           <p:nvPr/>
         </p:nvSpPr>
         <p:spPr>
           <a:xfrm>
-            <a:off x="457200" y="1554480"/>
-            <a:ext cx="2011680" cy="777240"/>
+            <a:off x="457200" y="1920240"/>
+            <a:ext cx="2560320" cy="777240"/>
           </a:xfrm>
           <a:prstGeom prst="roundRect">
             <a:avLst/>
           </a:prstGeom>
           <a:solidFill>
-            <a:srgbClr val="003057"/>
+            <a:srgbClr val="888888"/>
           </a:solidFill>
           <a:ln>
             <a:noFill/>
@@ -3359,14 +3398,14 @@
       </p:sp>
       <p:sp>
         <p:nvSpPr>
-          <p:cNvPr id="5" name="TextBox 4"/>
-          <p:cNvSpPr txBox="1"/>
-          <p:nvPr/>
-        </p:nvSpPr>
-        <p:spPr>
-          <a:xfrm>
-            <a:off x="548640" y="1627632"/>
-            <a:ext cx="1828800" cy="685800"/>
+          <p:cNvPr id="6" name="TextBox 5"/>
+          <p:cNvSpPr txBox="1"/>
+          <p:nvPr/>
+        </p:nvSpPr>
+        <p:spPr>
+          <a:xfrm>
+            <a:off x="548640" y="1965960"/>
+            <a:ext cx="2377440" cy="685800"/>
           </a:xfrm>
           <a:prstGeom prst="rect">
             <a:avLst/>
@@ -3390,8 +3429,7 @@
                   <a:srgbClr val="FFFFFF"/>
                 </a:solidFill>
               </a:rPr>
-              <a:t>Requirement
-in Cameo</a:t>
+              <a:t>Container Image</a:t>
             </a:r>
           </a:p>
           <a:p>
@@ -3406,118 +3444,22 @@
                   <a:srgbClr val="BBBBBB"/>
                 </a:solidFill>
               </a:rPr>
-              <a:t/>
-            </a:r>
-          </a:p>
-        </p:txBody>
-      </p:sp>
-      <p:sp>
-        <p:nvSpPr>
-          <p:cNvPr id="6" name="Rounded Rectangle 5"/>
+              <a:t>Product containers
+built by CI/CD</a:t>
+            </a:r>
+          </a:p>
+        </p:txBody>
+      </p:sp>
+      <p:sp>
+        <p:nvSpPr>
+          <p:cNvPr id="7" name="Rounded Rectangle 6"/>
           <p:cNvSpPr/>
           <p:nvPr/>
         </p:nvSpPr>
         <p:spPr>
           <a:xfrm>
-            <a:off x="2651760" y="1554480"/>
-            <a:ext cx="2011680" cy="777240"/>
-          </a:xfrm>
-          <a:prstGeom prst="roundRect">
-            <a:avLst/>
-          </a:prstGeom>
-          <a:solidFill>
-            <a:srgbClr val="004A87"/>
-          </a:solidFill>
-          <a:ln>
-            <a:noFill/>
-          </a:ln>
-        </p:spPr>
-        <p:style>
-          <a:lnRef idx="1">
-            <a:schemeClr val="accent1"/>
-          </a:lnRef>
-          <a:fillRef idx="3">
-            <a:schemeClr val="accent1"/>
-          </a:fillRef>
-          <a:effectRef idx="2">
-            <a:schemeClr val="accent1"/>
-          </a:effectRef>
-          <a:fontRef idx="minor">
-            <a:schemeClr val="lt1"/>
-          </a:fontRef>
-        </p:style>
-        <p:txBody>
-          <a:bodyPr rtlCol="0" anchor="ctr"/>
-          <a:lstStyle/>
-          <a:p>
-            <a:pPr algn="ctr"/>
-          </a:p>
-        </p:txBody>
-      </p:sp>
-      <p:sp>
-        <p:nvSpPr>
-          <p:cNvPr id="7" name="TextBox 6"/>
-          <p:cNvSpPr txBox="1"/>
-          <p:nvPr/>
-        </p:nvSpPr>
-        <p:spPr>
-          <a:xfrm>
-            <a:off x="2743200" y="1627632"/>
-            <a:ext cx="1828800" cy="685800"/>
-          </a:xfrm>
-          <a:prstGeom prst="rect">
-            <a:avLst/>
-          </a:prstGeom>
-          <a:noFill/>
-        </p:spPr>
-        <p:txBody>
-          <a:bodyPr wrap="square">
-            <a:spAutoFit/>
-          </a:bodyPr>
-          <a:lstStyle/>
-          <a:p>
-            <a:pPr algn="l">
-              <a:spcAft>
-                <a:spcPts val="100"/>
-              </a:spcAft>
-            </a:pPr>
-            <a:r>
-              <a:rPr sz="900" b="1">
-                <a:solidFill>
-                  <a:srgbClr val="FFFFFF"/>
-                </a:solidFill>
-              </a:rPr>
-              <a:t>Verification
-Criteria (VC)</a:t>
-            </a:r>
-          </a:p>
-          <a:p>
-            <a:pPr algn="l">
-              <a:spcAft>
-                <a:spcPts val="0"/>
-              </a:spcAft>
-            </a:pPr>
-            <a:r>
-              <a:rPr sz="700" b="0">
-                <a:solidFill>
-                  <a:srgbClr val="BBBBBB"/>
-                </a:solidFill>
-              </a:rPr>
-              <a:t/>
-            </a:r>
-          </a:p>
-        </p:txBody>
-      </p:sp>
-      <p:sp>
-        <p:nvSpPr>
-          <p:cNvPr id="8" name="Rounded Rectangle 7"/>
-          <p:cNvSpPr/>
-          <p:nvPr/>
-        </p:nvSpPr>
-        <p:spPr>
-          <a:xfrm>
-            <a:off x="4846320" y="1554480"/>
-            <a:ext cx="2011680" cy="777240"/>
+            <a:off x="3108960" y="1920240"/>
+            <a:ext cx="2560320" cy="777240"/>
           </a:xfrm>
           <a:prstGeom prst="roundRect">
             <a:avLst/>
@@ -3553,14 +3495,14 @@
       </p:sp>
       <p:sp>
         <p:nvSpPr>
-          <p:cNvPr id="9" name="TextBox 8"/>
-          <p:cNvSpPr txBox="1"/>
-          <p:nvPr/>
-        </p:nvSpPr>
-        <p:spPr>
-          <a:xfrm>
-            <a:off x="4937760" y="1627632"/>
-            <a:ext cx="1828800" cy="685800"/>
+          <p:cNvPr id="8" name="TextBox 7"/>
+          <p:cNvSpPr txBox="1"/>
+          <p:nvPr/>
+        </p:nvSpPr>
+        <p:spPr>
+          <a:xfrm>
+            <a:off x="3200400" y="1965960"/>
+            <a:ext cx="2377440" cy="685800"/>
           </a:xfrm>
           <a:prstGeom prst="rect">
             <a:avLst/>
@@ -3584,8 +3526,7 @@
                   <a:srgbClr val="FFFFFF"/>
                 </a:solidFill>
               </a:rPr>
-              <a:t>Gherkin
-Scenario</a:t>
+              <a:t>→  Syft (SBOM)</a:t>
             </a:r>
           </a:p>
           <a:p>
@@ -3600,21 +3541,22 @@
                   <a:srgbClr val="BBBBBB"/>
                 </a:solidFill>
               </a:rPr>
-              <a:t/>
-            </a:r>
-          </a:p>
-        </p:txBody>
-      </p:sp>
-      <p:sp>
-        <p:nvSpPr>
-          <p:cNvPr id="10" name="Rounded Rectangle 9"/>
+              <a:t>Generates CycloneDX
+Software Bill of Materials</a:t>
+            </a:r>
+          </a:p>
+        </p:txBody>
+      </p:sp>
+      <p:sp>
+        <p:nvSpPr>
+          <p:cNvPr id="9" name="Rounded Rectangle 8"/>
           <p:cNvSpPr/>
           <p:nvPr/>
         </p:nvSpPr>
         <p:spPr>
           <a:xfrm>
-            <a:off x="7040880" y="1554480"/>
-            <a:ext cx="2011680" cy="777240"/>
+            <a:off x="5760720" y="1920240"/>
+            <a:ext cx="2560320" cy="777240"/>
           </a:xfrm>
           <a:prstGeom prst="roundRect">
             <a:avLst/>
@@ -3650,14 +3592,14 @@
       </p:sp>
       <p:sp>
         <p:nvSpPr>
-          <p:cNvPr id="11" name="TextBox 10"/>
-          <p:cNvSpPr txBox="1"/>
-          <p:nvPr/>
-        </p:nvSpPr>
-        <p:spPr>
-          <a:xfrm>
-            <a:off x="7132320" y="1627632"/>
-            <a:ext cx="1828800" cy="685800"/>
+          <p:cNvPr id="10" name="TextBox 9"/>
+          <p:cNvSpPr txBox="1"/>
+          <p:nvPr/>
+        </p:nvSpPr>
+        <p:spPr>
+          <a:xfrm>
+            <a:off x="5852160" y="1965960"/>
+            <a:ext cx="2377440" cy="685800"/>
           </a:xfrm>
           <a:prstGeom prst="rect">
             <a:avLst/>
@@ -3681,8 +3623,7 @@
                   <a:srgbClr val="FFFFFF"/>
                 </a:solidFill>
               </a:rPr>
-              <a:t>BDD Test
-Result</a:t>
+              <a:t>→  Grype (Scan)</a:t>
             </a:r>
           </a:p>
           <a:p>
@@ -3697,27 +3638,28 @@
                   <a:srgbClr val="BBBBBB"/>
                 </a:solidFill>
               </a:rPr>
-              <a:t/>
-            </a:r>
-          </a:p>
-        </p:txBody>
-      </p:sp>
-      <p:sp>
-        <p:nvSpPr>
-          <p:cNvPr id="12" name="Rounded Rectangle 11"/>
+              <a:t>Scans SBOM against
+known vulnerability DBs</a:t>
+            </a:r>
+          </a:p>
+        </p:txBody>
+      </p:sp>
+      <p:sp>
+        <p:nvSpPr>
+          <p:cNvPr id="11" name="Rounded Rectangle 10"/>
           <p:cNvSpPr/>
           <p:nvPr/>
         </p:nvSpPr>
         <p:spPr>
           <a:xfrm>
-            <a:off x="9235440" y="1554480"/>
-            <a:ext cx="2011680" cy="777240"/>
+            <a:off x="8412480" y="1920240"/>
+            <a:ext cx="2560320" cy="777240"/>
           </a:xfrm>
           <a:prstGeom prst="roundRect">
             <a:avLst/>
           </a:prstGeom>
           <a:solidFill>
-            <a:srgbClr val="0099D6"/>
+            <a:srgbClr val="B45309"/>
           </a:solidFill>
           <a:ln>
             <a:noFill/>
@@ -3747,54 +3689,92 @@
       </p:sp>
       <p:sp>
         <p:nvSpPr>
+          <p:cNvPr id="12" name="TextBox 11"/>
+          <p:cNvSpPr txBox="1"/>
+          <p:nvPr/>
+        </p:nvSpPr>
+        <p:spPr>
+          <a:xfrm>
+            <a:off x="8503920" y="1965960"/>
+            <a:ext cx="2377440" cy="685800"/>
+          </a:xfrm>
+          <a:prstGeom prst="rect">
+            <a:avLst/>
+          </a:prstGeom>
+          <a:noFill/>
+        </p:spPr>
+        <p:txBody>
+          <a:bodyPr wrap="square">
+            <a:spAutoFit/>
+          </a:bodyPr>
+          <a:lstStyle/>
+          <a:p>
+            <a:pPr algn="l">
+              <a:spcAft>
+                <a:spcPts val="100"/>
+              </a:spcAft>
+            </a:pPr>
+            <a:r>
+              <a:rPr sz="900" b="1">
+                <a:solidFill>
+                  <a:srgbClr val="FFFFFF"/>
+                </a:solidFill>
+              </a:rPr>
+              <a:t>→  Policy Gate</a:t>
+            </a:r>
+          </a:p>
+          <a:p>
+            <a:pPr algn="l">
+              <a:spcAft>
+                <a:spcPts val="0"/>
+              </a:spcAft>
+            </a:pPr>
+            <a:r>
+              <a:rPr sz="700" b="0">
+                <a:solidFill>
+                  <a:srgbClr val="BBBBBB"/>
+                </a:solidFill>
+              </a:rPr>
+              <a:t>Fail on Critical/High
+Pass with advisory</a:t>
+            </a:r>
+          </a:p>
+        </p:txBody>
+      </p:sp>
+      <p:sp>
+        <p:nvSpPr>
           <p:cNvPr id="13" name="TextBox 12"/>
           <p:cNvSpPr txBox="1"/>
           <p:nvPr/>
         </p:nvSpPr>
         <p:spPr>
           <a:xfrm>
-            <a:off x="9326880" y="1627632"/>
-            <a:ext cx="1828800" cy="685800"/>
-          </a:xfrm>
-          <a:prstGeom prst="rect">
-            <a:avLst/>
-          </a:prstGeom>
-          <a:noFill/>
-        </p:spPr>
-        <p:txBody>
-          <a:bodyPr wrap="square">
-            <a:spAutoFit/>
-          </a:bodyPr>
-          <a:lstStyle/>
-          <a:p>
-            <a:pPr algn="l">
-              <a:spcAft>
-                <a:spcPts val="100"/>
-              </a:spcAft>
-            </a:pPr>
-            <a:r>
-              <a:rPr sz="900" b="1">
-                <a:solidFill>
-                  <a:srgbClr val="FFFFFF"/>
-                </a:solidFill>
-              </a:rPr>
-              <a:t>Deployment
-Pipeline Report</a:t>
-            </a:r>
-          </a:p>
-          <a:p>
-            <a:pPr algn="l">
-              <a:spcAft>
-                <a:spcPts val="0"/>
-              </a:spcAft>
-            </a:pPr>
-            <a:r>
-              <a:rPr sz="700" b="0">
-                <a:solidFill>
-                  <a:srgbClr val="BBBBBB"/>
-                </a:solidFill>
-              </a:rPr>
-              <a:t/>
+            <a:off x="731520" y="3017520"/>
+            <a:ext cx="4572000" cy="274320"/>
+          </a:xfrm>
+          <a:prstGeom prst="rect">
+            <a:avLst/>
+          </a:prstGeom>
+          <a:noFill/>
+        </p:spPr>
+        <p:txBody>
+          <a:bodyPr wrap="square">
+            <a:spAutoFit/>
+          </a:bodyPr>
+          <a:lstStyle/>
+          <a:p>
+            <a:pPr algn="l">
+              <a:spcAft>
+                <a:spcPts val="0"/>
+              </a:spcAft>
+            </a:pPr>
+            <a:r>
+              <a:rPr sz="1400" b="1">
+                <a:solidFill>
+                  <a:srgbClr val="0D1B2A"/>
+                </a:solidFill>
+              </a:rPr>
+              <a:t>What Gets Produced</a:t>
             </a:r>
           </a:p>
         </p:txBody>
@@ -3807,8 +3787,265 @@
         </p:nvSpPr>
         <p:spPr>
           <a:xfrm>
-            <a:off x="731520" y="2743200"/>
-            <a:ext cx="4572000" cy="274320"/>
+            <a:off x="731520" y="3383280"/>
+            <a:ext cx="5029200" cy="548640"/>
+          </a:xfrm>
+          <a:prstGeom prst="rect">
+            <a:avLst/>
+          </a:prstGeom>
+          <a:noFill/>
+        </p:spPr>
+        <p:txBody>
+          <a:bodyPr wrap="square">
+            <a:spAutoFit/>
+          </a:bodyPr>
+          <a:lstStyle/>
+          <a:p>
+            <a:pPr algn="l">
+              <a:spcAft>
+                <a:spcPts val="200"/>
+              </a:spcAft>
+            </a:pPr>
+            <a:r>
+              <a:rPr sz="1100" b="1">
+                <a:solidFill>
+                  <a:srgbClr val="0069B0"/>
+                </a:solidFill>
+              </a:rPr>
+              <a:t>SBOM (CycloneDX)</a:t>
+            </a:r>
+          </a:p>
+          <a:p>
+            <a:pPr algn="l">
+              <a:spcAft>
+                <a:spcPts val="0"/>
+              </a:spcAft>
+            </a:pPr>
+            <a:r>
+              <a:rPr sz="900" b="0">
+                <a:solidFill>
+                  <a:srgbClr val="555555"/>
+                </a:solidFill>
+              </a:rPr>
+              <a:t>Complete inventory of every software component, version, and source in the deployed artifact.</a:t>
+            </a:r>
+          </a:p>
+        </p:txBody>
+      </p:sp>
+      <p:sp>
+        <p:nvSpPr>
+          <p:cNvPr id="15" name="TextBox 14"/>
+          <p:cNvSpPr txBox="1"/>
+          <p:nvPr/>
+        </p:nvSpPr>
+        <p:spPr>
+          <a:xfrm>
+            <a:off x="731520" y="3977640"/>
+            <a:ext cx="5029200" cy="548640"/>
+          </a:xfrm>
+          <a:prstGeom prst="rect">
+            <a:avLst/>
+          </a:prstGeom>
+          <a:noFill/>
+        </p:spPr>
+        <p:txBody>
+          <a:bodyPr wrap="square">
+            <a:spAutoFit/>
+          </a:bodyPr>
+          <a:lstStyle/>
+          <a:p>
+            <a:pPr algn="l">
+              <a:spcAft>
+                <a:spcPts val="200"/>
+              </a:spcAft>
+            </a:pPr>
+            <a:r>
+              <a:rPr sz="1100" b="1">
+                <a:solidFill>
+                  <a:srgbClr val="0069B0"/>
+                </a:solidFill>
+              </a:rPr>
+              <a:t>Vulnerability Report</a:t>
+            </a:r>
+          </a:p>
+          <a:p>
+            <a:pPr algn="l">
+              <a:spcAft>
+                <a:spcPts val="0"/>
+              </a:spcAft>
+            </a:pPr>
+            <a:r>
+              <a:rPr sz="900" b="0">
+                <a:solidFill>
+                  <a:srgbClr val="555555"/>
+                </a:solidFill>
+              </a:rPr>
+              <a:t>CVE-level findings with severity, affected package, version, and fix availability.</a:t>
+            </a:r>
+          </a:p>
+        </p:txBody>
+      </p:sp>
+      <p:sp>
+        <p:nvSpPr>
+          <p:cNvPr id="16" name="TextBox 15"/>
+          <p:cNvSpPr txBox="1"/>
+          <p:nvPr/>
+        </p:nvSpPr>
+        <p:spPr>
+          <a:xfrm>
+            <a:off x="731520" y="4572000"/>
+            <a:ext cx="5029200" cy="548640"/>
+          </a:xfrm>
+          <a:prstGeom prst="rect">
+            <a:avLst/>
+          </a:prstGeom>
+          <a:noFill/>
+        </p:spPr>
+        <p:txBody>
+          <a:bodyPr wrap="square">
+            <a:spAutoFit/>
+          </a:bodyPr>
+          <a:lstStyle/>
+          <a:p>
+            <a:pPr algn="l">
+              <a:spcAft>
+                <a:spcPts val="200"/>
+              </a:spcAft>
+            </a:pPr>
+            <a:r>
+              <a:rPr sz="1100" b="1">
+                <a:solidFill>
+                  <a:srgbClr val="0069B0"/>
+                </a:solidFill>
+              </a:rPr>
+              <a:t>Policy Verdict</a:t>
+            </a:r>
+          </a:p>
+          <a:p>
+            <a:pPr algn="l">
+              <a:spcAft>
+                <a:spcPts val="0"/>
+              </a:spcAft>
+            </a:pPr>
+            <a:r>
+              <a:rPr sz="900" b="0">
+                <a:solidFill>
+                  <a:srgbClr val="555555"/>
+                </a:solidFill>
+              </a:rPr>
+              <a:t>PASS / WARNING / FAIL based on configurable severity thresholds. Blocks deployment on Critical/High.</a:t>
+            </a:r>
+          </a:p>
+        </p:txBody>
+      </p:sp>
+      <p:sp>
+        <p:nvSpPr>
+          <p:cNvPr id="17" name="TextBox 16"/>
+          <p:cNvSpPr txBox="1"/>
+          <p:nvPr/>
+        </p:nvSpPr>
+        <p:spPr>
+          <a:xfrm>
+            <a:off x="731520" y="5166360"/>
+            <a:ext cx="5029200" cy="548640"/>
+          </a:xfrm>
+          <a:prstGeom prst="rect">
+            <a:avLst/>
+          </a:prstGeom>
+          <a:noFill/>
+        </p:spPr>
+        <p:txBody>
+          <a:bodyPr wrap="square">
+            <a:spAutoFit/>
+          </a:bodyPr>
+          <a:lstStyle/>
+          <a:p>
+            <a:pPr algn="l">
+              <a:spcAft>
+                <a:spcPts val="200"/>
+              </a:spcAft>
+            </a:pPr>
+            <a:r>
+              <a:rPr sz="1100" b="1">
+                <a:solidFill>
+                  <a:srgbClr val="0069B0"/>
+                </a:solidFill>
+              </a:rPr>
+              <a:t>Severity Dashboard</a:t>
+            </a:r>
+          </a:p>
+          <a:p>
+            <a:pPr algn="l">
+              <a:spcAft>
+                <a:spcPts val="0"/>
+              </a:spcAft>
+            </a:pPr>
+            <a:r>
+              <a:rPr sz="900" b="0">
+                <a:solidFill>
+                  <a:srgbClr val="555555"/>
+                </a:solidFill>
+              </a:rPr>
+              <a:t>Visual breakdown by severity level in the Deployment Pipeline Report — filterable, searchable, CSV-exportable.</a:t>
+            </a:r>
+          </a:p>
+        </p:txBody>
+      </p:sp>
+      <p:sp>
+        <p:nvSpPr>
+          <p:cNvPr id="18" name="Rounded Rectangle 17"/>
+          <p:cNvSpPr/>
+          <p:nvPr/>
+        </p:nvSpPr>
+        <p:spPr>
+          <a:xfrm>
+            <a:off x="6217920" y="1371600"/>
+            <a:ext cx="5303520" cy="4572000"/>
+          </a:xfrm>
+          <a:prstGeom prst="roundRect">
+            <a:avLst/>
+          </a:prstGeom>
+          <a:solidFill>
+            <a:srgbClr val="F4F7FA"/>
+          </a:solidFill>
+          <a:ln w="12700">
+            <a:solidFill>
+              <a:srgbClr val="D0E8F8"/>
+            </a:solidFill>
+          </a:ln>
+        </p:spPr>
+        <p:style>
+          <a:lnRef idx="1">
+            <a:schemeClr val="accent1"/>
+          </a:lnRef>
+          <a:fillRef idx="3">
+            <a:schemeClr val="accent1"/>
+          </a:fillRef>
+          <a:effectRef idx="2">
+            <a:schemeClr val="accent1"/>
+          </a:effectRef>
+          <a:fontRef idx="minor">
+            <a:schemeClr val="lt1"/>
+          </a:fontRef>
+        </p:style>
+        <p:txBody>
+          <a:bodyPr rtlCol="0" anchor="ctr"/>
+          <a:lstStyle/>
+          <a:p>
+            <a:pPr algn="ctr"/>
+          </a:p>
+        </p:txBody>
+      </p:sp>
+      <p:sp>
+        <p:nvSpPr>
+          <p:cNvPr id="19" name="TextBox 18"/>
+          <p:cNvSpPr txBox="1"/>
+          <p:nvPr/>
+        </p:nvSpPr>
+        <p:spPr>
+          <a:xfrm>
+            <a:off x="6400800" y="1554480"/>
+            <a:ext cx="4937760" cy="274320"/>
           </a:xfrm>
           <a:prstGeom prst="rect">
             <a:avLst/>
@@ -3832,21 +4069,21 @@
                   <a:srgbClr val="0D1B2A"/>
                 </a:solidFill>
               </a:rPr>
-              <a:t>What This Means for Compliance</a:t>
-            </a:r>
-          </a:p>
-        </p:txBody>
-      </p:sp>
-      <p:sp>
-        <p:nvSpPr>
-          <p:cNvPr id="15" name="TextBox 14"/>
-          <p:cNvSpPr txBox="1"/>
-          <p:nvPr/>
-        </p:nvSpPr>
-        <p:spPr>
-          <a:xfrm>
-            <a:off x="731520" y="3200400"/>
-            <a:ext cx="5029200" cy="822960"/>
+              <a:t>Why This Matters for Compliance</a:t>
+            </a:r>
+          </a:p>
+        </p:txBody>
+      </p:sp>
+      <p:sp>
+        <p:nvSpPr>
+          <p:cNvPr id="20" name="TextBox 19"/>
+          <p:cNvSpPr txBox="1"/>
+          <p:nvPr/>
+        </p:nvSpPr>
+        <p:spPr>
+          <a:xfrm>
+            <a:off x="6400800" y="2011680"/>
+            <a:ext cx="4937760" cy="731520"/>
           </a:xfrm>
           <a:prstGeom prst="rect">
             <a:avLst/>
@@ -3865,299 +4102,329 @@
               </a:spcAft>
             </a:pPr>
             <a:r>
-              <a:rPr sz="1200" b="1">
+              <a:rPr sz="1100" b="1">
+                <a:solidFill>
+                  <a:srgbClr val="0069B0"/>
+                </a:solidFill>
+              </a:rPr>
+              <a:t>Executive Order 14028</a:t>
+            </a:r>
+          </a:p>
+          <a:p>
+            <a:pPr algn="l">
+              <a:spcAft>
+                <a:spcPts val="0"/>
+              </a:spcAft>
+            </a:pPr>
+            <a:r>
+              <a:rPr sz="800" b="0">
+                <a:solidFill>
+                  <a:srgbClr val="555555"/>
+                </a:solidFill>
+              </a:rPr>
+              <a:t>Federal mandate requiring SBOMs for all software sold to the government. The pipeline generates CycloneDX SBOMs automatically on every build.</a:t>
+            </a:r>
+          </a:p>
+        </p:txBody>
+      </p:sp>
+      <p:sp>
+        <p:nvSpPr>
+          <p:cNvPr id="21" name="TextBox 20"/>
+          <p:cNvSpPr txBox="1"/>
+          <p:nvPr/>
+        </p:nvSpPr>
+        <p:spPr>
+          <a:xfrm>
+            <a:off x="6400800" y="2788920"/>
+            <a:ext cx="4937760" cy="731520"/>
+          </a:xfrm>
+          <a:prstGeom prst="rect">
+            <a:avLst/>
+          </a:prstGeom>
+          <a:noFill/>
+        </p:spPr>
+        <p:txBody>
+          <a:bodyPr wrap="square">
+            <a:spAutoFit/>
+          </a:bodyPr>
+          <a:lstStyle/>
+          <a:p>
+            <a:pPr algn="l">
+              <a:spcAft>
+                <a:spcPts val="200"/>
+              </a:spcAft>
+            </a:pPr>
+            <a:r>
+              <a:rPr sz="1100" b="1">
+                <a:solidFill>
+                  <a:srgbClr val="0069B0"/>
+                </a:solidFill>
+              </a:rPr>
+              <a:t>NIST SP 800-218 (SSDF)</a:t>
+            </a:r>
+          </a:p>
+          <a:p>
+            <a:pPr algn="l">
+              <a:spcAft>
+                <a:spcPts val="0"/>
+              </a:spcAft>
+            </a:pPr>
+            <a:r>
+              <a:rPr sz="800" b="0">
+                <a:solidFill>
+                  <a:srgbClr val="555555"/>
+                </a:solidFill>
+              </a:rPr>
+              <a:t>Secure Software Development Framework requires vulnerability scanning and remediation tracking. Grype scan results are stored per build as immutable CI artifacts.</a:t>
+            </a:r>
+          </a:p>
+        </p:txBody>
+      </p:sp>
+      <p:sp>
+        <p:nvSpPr>
+          <p:cNvPr id="22" name="TextBox 21"/>
+          <p:cNvSpPr txBox="1"/>
+          <p:nvPr/>
+        </p:nvSpPr>
+        <p:spPr>
+          <a:xfrm>
+            <a:off x="6400800" y="3566160"/>
+            <a:ext cx="4937760" cy="731520"/>
+          </a:xfrm>
+          <a:prstGeom prst="rect">
+            <a:avLst/>
+          </a:prstGeom>
+          <a:noFill/>
+        </p:spPr>
+        <p:txBody>
+          <a:bodyPr wrap="square">
+            <a:spAutoFit/>
+          </a:bodyPr>
+          <a:lstStyle/>
+          <a:p>
+            <a:pPr algn="l">
+              <a:spcAft>
+                <a:spcPts val="200"/>
+              </a:spcAft>
+            </a:pPr>
+            <a:r>
+              <a:rPr sz="1100" b="1">
+                <a:solidFill>
+                  <a:srgbClr val="0069B0"/>
+                </a:solidFill>
+              </a:rPr>
+              <a:t>Supply Chain Transparency</a:t>
+            </a:r>
+          </a:p>
+          <a:p>
+            <a:pPr algn="l">
+              <a:spcAft>
+                <a:spcPts val="0"/>
+              </a:spcAft>
+            </a:pPr>
+            <a:r>
+              <a:rPr sz="800" b="0">
+                <a:solidFill>
+                  <a:srgbClr val="555555"/>
+                </a:solidFill>
+              </a:rPr>
+              <a:t>Every component in the deployed product is inventoried with name, version, type, and package URL. No hidden dependencies.</a:t>
+            </a:r>
+          </a:p>
+        </p:txBody>
+      </p:sp>
+      <p:sp>
+        <p:nvSpPr>
+          <p:cNvPr id="23" name="TextBox 22"/>
+          <p:cNvSpPr txBox="1"/>
+          <p:nvPr/>
+        </p:nvSpPr>
+        <p:spPr>
+          <a:xfrm>
+            <a:off x="6400800" y="4343400"/>
+            <a:ext cx="4937760" cy="731520"/>
+          </a:xfrm>
+          <a:prstGeom prst="rect">
+            <a:avLst/>
+          </a:prstGeom>
+          <a:noFill/>
+        </p:spPr>
+        <p:txBody>
+          <a:bodyPr wrap="square">
+            <a:spAutoFit/>
+          </a:bodyPr>
+          <a:lstStyle/>
+          <a:p>
+            <a:pPr algn="l">
+              <a:spcAft>
+                <a:spcPts val="200"/>
+              </a:spcAft>
+            </a:pPr>
+            <a:r>
+              <a:rPr sz="1100" b="1">
+                <a:solidFill>
+                  <a:srgbClr val="0069B0"/>
+                </a:solidFill>
+              </a:rPr>
+              <a:t>Audit-Ready Evidence</a:t>
+            </a:r>
+          </a:p>
+          <a:p>
+            <a:pPr algn="l">
+              <a:spcAft>
+                <a:spcPts val="0"/>
+              </a:spcAft>
+            </a:pPr>
+            <a:r>
+              <a:rPr sz="800" b="0">
+                <a:solidFill>
+                  <a:srgbClr val="555555"/>
+                </a:solidFill>
+              </a:rPr>
+              <a:t>SBOM + vulnerability scan results are included in the deployment evidence bundle. No manual assembly — generated fresh on every pipeline run.</a:t>
+            </a:r>
+          </a:p>
+        </p:txBody>
+      </p:sp>
+      <p:sp>
+        <p:nvSpPr>
+          <p:cNvPr id="24" name="TextBox 23"/>
+          <p:cNvSpPr txBox="1"/>
+          <p:nvPr/>
+        </p:nvSpPr>
+        <p:spPr>
+          <a:xfrm>
+            <a:off x="6400800" y="5120640"/>
+            <a:ext cx="4937760" cy="731520"/>
+          </a:xfrm>
+          <a:prstGeom prst="rect">
+            <a:avLst/>
+          </a:prstGeom>
+          <a:noFill/>
+        </p:spPr>
+        <p:txBody>
+          <a:bodyPr wrap="square">
+            <a:spAutoFit/>
+          </a:bodyPr>
+          <a:lstStyle/>
+          <a:p>
+            <a:pPr algn="l">
+              <a:spcAft>
+                <a:spcPts val="200"/>
+              </a:spcAft>
+            </a:pPr>
+            <a:r>
+              <a:rPr sz="1100" b="1">
+                <a:solidFill>
+                  <a:srgbClr val="0069B0"/>
+                </a:solidFill>
+              </a:rPr>
+              <a:t>Air-Gapped Compatible</a:t>
+            </a:r>
+          </a:p>
+          <a:p>
+            <a:pPr algn="l">
+              <a:spcAft>
+                <a:spcPts val="0"/>
+              </a:spcAft>
+            </a:pPr>
+            <a:r>
+              <a:rPr sz="800" b="0">
+                <a:solidFill>
+                  <a:srgbClr val="555555"/>
+                </a:solidFill>
+              </a:rPr>
+              <a:t>Grype vulnerability database can be mirrored internally. Syft runs against local container images. No internet required at scan time.</a:t>
+            </a:r>
+          </a:p>
+        </p:txBody>
+      </p:sp>
+      <p:sp>
+        <p:nvSpPr>
+          <p:cNvPr id="25" name="Rounded Rectangle 24"/>
+          <p:cNvSpPr/>
+          <p:nvPr/>
+        </p:nvSpPr>
+        <p:spPr>
+          <a:xfrm>
+            <a:off x="457200" y="6035040"/>
+            <a:ext cx="11247120" cy="411480"/>
+          </a:xfrm>
+          <a:prstGeom prst="roundRect">
+            <a:avLst/>
+          </a:prstGeom>
+          <a:solidFill>
+            <a:srgbClr val="F4F7FA"/>
+          </a:solidFill>
+          <a:ln w="12700">
+            <a:solidFill>
+              <a:srgbClr val="0069B0"/>
+            </a:solidFill>
+          </a:ln>
+        </p:spPr>
+        <p:style>
+          <a:lnRef idx="1">
+            <a:schemeClr val="accent1"/>
+          </a:lnRef>
+          <a:fillRef idx="3">
+            <a:schemeClr val="accent1"/>
+          </a:fillRef>
+          <a:effectRef idx="2">
+            <a:schemeClr val="accent1"/>
+          </a:effectRef>
+          <a:fontRef idx="minor">
+            <a:schemeClr val="lt1"/>
+          </a:fontRef>
+        </p:style>
+        <p:txBody>
+          <a:bodyPr rtlCol="0" anchor="ctr"/>
+          <a:lstStyle/>
+          <a:p>
+            <a:pPr algn="ctr"/>
+          </a:p>
+        </p:txBody>
+      </p:sp>
+      <p:sp>
+        <p:nvSpPr>
+          <p:cNvPr id="26" name="TextBox 25"/>
+          <p:cNvSpPr txBox="1"/>
+          <p:nvPr/>
+        </p:nvSpPr>
+        <p:spPr>
+          <a:xfrm>
+            <a:off x="731520" y="6089904"/>
+            <a:ext cx="10789920" cy="320040"/>
+          </a:xfrm>
+          <a:prstGeom prst="rect">
+            <a:avLst/>
+          </a:prstGeom>
+          <a:noFill/>
+        </p:spPr>
+        <p:txBody>
+          <a:bodyPr wrap="square">
+            <a:spAutoFit/>
+          </a:bodyPr>
+          <a:lstStyle/>
+          <a:p>
+            <a:pPr algn="ctr">
+              <a:spcAft>
+                <a:spcPts val="0"/>
+              </a:spcAft>
+            </a:pPr>
+            <a:r>
+              <a:rPr sz="1100" b="1">
                 <a:solidFill>
                   <a:srgbClr val="0D1B2A"/>
                 </a:solidFill>
               </a:rPr>
-              <a:t>Minutes, Not Weeks</a:t>
-            </a:r>
-          </a:p>
-          <a:p>
-            <a:pPr algn="l">
-              <a:spcAft>
-                <a:spcPts val="0"/>
-              </a:spcAft>
-            </a:pPr>
-            <a:r>
-              <a:rPr sz="900" b="0">
-                <a:solidFill>
-                  <a:srgbClr val="555555"/>
-                </a:solidFill>
-              </a:rPr>
-              <a:t>Traceability report is generated on every commit — always current, always complete.</a:t>
-            </a:r>
-          </a:p>
-        </p:txBody>
-      </p:sp>
-      <p:sp>
-        <p:nvSpPr>
-          <p:cNvPr id="16" name="TextBox 15"/>
-          <p:cNvSpPr txBox="1"/>
-          <p:nvPr/>
-        </p:nvSpPr>
-        <p:spPr>
-          <a:xfrm>
-            <a:off x="731520" y="4114800"/>
-            <a:ext cx="5029200" cy="822960"/>
-          </a:xfrm>
-          <a:prstGeom prst="rect">
-            <a:avLst/>
-          </a:prstGeom>
-          <a:noFill/>
-        </p:spPr>
-        <p:txBody>
-          <a:bodyPr wrap="square">
-            <a:spAutoFit/>
-          </a:bodyPr>
-          <a:lstStyle/>
-          <a:p>
-            <a:pPr algn="l">
-              <a:spcAft>
-                <a:spcPts val="200"/>
-              </a:spcAft>
-            </a:pPr>
-            <a:r>
-              <a:rPr sz="1200" b="1">
-                <a:solidFill>
-                  <a:srgbClr val="0D1B2A"/>
-                </a:solidFill>
-              </a:rPr>
-              <a:t>Every Change Tracked</a:t>
-            </a:r>
-          </a:p>
-          <a:p>
-            <a:pPr algn="l">
-              <a:spcAft>
-                <a:spcPts val="0"/>
-              </a:spcAft>
-            </a:pPr>
-            <a:r>
-              <a:rPr sz="900" b="0">
-                <a:solidFill>
-                  <a:srgbClr val="555555"/>
-                </a:solidFill>
-              </a:rPr>
-              <a:t>Git history + baseline diffs show exactly when requirements changed and who acknowledged them.</a:t>
-            </a:r>
-          </a:p>
-        </p:txBody>
-      </p:sp>
-      <p:sp>
-        <p:nvSpPr>
-          <p:cNvPr id="17" name="TextBox 16"/>
-          <p:cNvSpPr txBox="1"/>
-          <p:nvPr/>
-        </p:nvSpPr>
-        <p:spPr>
-          <a:xfrm>
-            <a:off x="731520" y="5029200"/>
-            <a:ext cx="5029200" cy="822960"/>
-          </a:xfrm>
-          <a:prstGeom prst="rect">
-            <a:avLst/>
-          </a:prstGeom>
-          <a:noFill/>
-        </p:spPr>
-        <p:txBody>
-          <a:bodyPr wrap="square">
-            <a:spAutoFit/>
-          </a:bodyPr>
-          <a:lstStyle/>
-          <a:p>
-            <a:pPr algn="l">
-              <a:spcAft>
-                <a:spcPts val="200"/>
-              </a:spcAft>
-            </a:pPr>
-            <a:r>
-              <a:rPr sz="1200" b="1">
-                <a:solidFill>
-                  <a:srgbClr val="0D1B2A"/>
-                </a:solidFill>
-              </a:rPr>
-              <a:t>No Missing Tests</a:t>
-            </a:r>
-          </a:p>
-          <a:p>
-            <a:pPr algn="l">
-              <a:spcAft>
-                <a:spcPts val="0"/>
-              </a:spcAft>
-            </a:pPr>
-            <a:r>
-              <a:rPr sz="900" b="0">
-                <a:solidFill>
-                  <a:srgbClr val="555555"/>
-                </a:solidFill>
-              </a:rPr>
-              <a:t>Gate A ensures every verification criteria has coverage — gaps are caught before merge.</a:t>
-            </a:r>
-          </a:p>
-        </p:txBody>
-      </p:sp>
-      <p:sp>
-        <p:nvSpPr>
-          <p:cNvPr id="18" name="TextBox 17"/>
-          <p:cNvSpPr txBox="1"/>
-          <p:nvPr/>
-        </p:nvSpPr>
-        <p:spPr>
-          <a:xfrm>
-            <a:off x="6217920" y="3200400"/>
-            <a:ext cx="5029200" cy="822960"/>
-          </a:xfrm>
-          <a:prstGeom prst="rect">
-            <a:avLst/>
-          </a:prstGeom>
-          <a:noFill/>
-        </p:spPr>
-        <p:txBody>
-          <a:bodyPr wrap="square">
-            <a:spAutoFit/>
-          </a:bodyPr>
-          <a:lstStyle/>
-          <a:p>
-            <a:pPr algn="l">
-              <a:spcAft>
-                <a:spcPts val="200"/>
-              </a:spcAft>
-            </a:pPr>
-            <a:r>
-              <a:rPr sz="1200" b="1">
-                <a:solidFill>
-                  <a:srgbClr val="0D1B2A"/>
-                </a:solidFill>
-              </a:rPr>
-              <a:t>No Stale Tests</a:t>
-            </a:r>
-          </a:p>
-          <a:p>
-            <a:pPr algn="l">
-              <a:spcAft>
-                <a:spcPts val="0"/>
-              </a:spcAft>
-            </a:pPr>
-            <a:r>
-              <a:rPr sz="900" b="0">
-                <a:solidFill>
-                  <a:srgbClr val="555555"/>
-                </a:solidFill>
-              </a:rPr>
-              <a:t>Gate B detects criteria drift — existing tests are flagged for re-review when requirements change.</a:t>
-            </a:r>
-          </a:p>
-        </p:txBody>
-      </p:sp>
-      <p:sp>
-        <p:nvSpPr>
-          <p:cNvPr id="19" name="TextBox 18"/>
-          <p:cNvSpPr txBox="1"/>
-          <p:nvPr/>
-        </p:nvSpPr>
-        <p:spPr>
-          <a:xfrm>
-            <a:off x="6217920" y="4114800"/>
-            <a:ext cx="5029200" cy="822960"/>
-          </a:xfrm>
-          <a:prstGeom prst="rect">
-            <a:avLst/>
-          </a:prstGeom>
-          <a:noFill/>
-        </p:spPr>
-        <p:txBody>
-          <a:bodyPr wrap="square">
-            <a:spAutoFit/>
-          </a:bodyPr>
-          <a:lstStyle/>
-          <a:p>
-            <a:pPr algn="l">
-              <a:spcAft>
-                <a:spcPts val="200"/>
-              </a:spcAft>
-            </a:pPr>
-            <a:r>
-              <a:rPr sz="1200" b="1">
-                <a:solidFill>
-                  <a:srgbClr val="0D1B2A"/>
-                </a:solidFill>
-              </a:rPr>
-              <a:t>No Ghost Tests</a:t>
-            </a:r>
-          </a:p>
-          <a:p>
-            <a:pPr algn="l">
-              <a:spcAft>
-                <a:spcPts val="0"/>
-              </a:spcAft>
-            </a:pPr>
-            <a:r>
-              <a:rPr sz="900" b="0">
-                <a:solidFill>
-                  <a:srgbClr val="555555"/>
-                </a:solidFill>
-              </a:rPr>
-              <a:t>Gate C catches orphaned tests — scenarios for deleted requirements are flagged for removal.</a:t>
-            </a:r>
-          </a:p>
-        </p:txBody>
-      </p:sp>
-      <p:sp>
-        <p:nvSpPr>
-          <p:cNvPr id="20" name="TextBox 19"/>
-          <p:cNvSpPr txBox="1"/>
-          <p:nvPr/>
-        </p:nvSpPr>
-        <p:spPr>
-          <a:xfrm>
-            <a:off x="6217920" y="5029200"/>
-            <a:ext cx="5029200" cy="822960"/>
-          </a:xfrm>
-          <a:prstGeom prst="rect">
-            <a:avLst/>
-          </a:prstGeom>
-          <a:noFill/>
-        </p:spPr>
-        <p:txBody>
-          <a:bodyPr wrap="square">
-            <a:spAutoFit/>
-          </a:bodyPr>
-          <a:lstStyle/>
-          <a:p>
-            <a:pPr algn="l">
-              <a:spcAft>
-                <a:spcPts val="200"/>
-              </a:spcAft>
-            </a:pPr>
-            <a:r>
-              <a:rPr sz="1200" b="1">
-                <a:solidFill>
-                  <a:srgbClr val="0D1B2A"/>
-                </a:solidFill>
-              </a:rPr>
-              <a:t>Immutable Evidence</a:t>
-            </a:r>
-          </a:p>
-          <a:p>
-            <a:pPr algn="l">
-              <a:spcAft>
-                <a:spcPts val="0"/>
-              </a:spcAft>
-            </a:pPr>
-            <a:r>
-              <a:rPr sz="900" b="0">
-                <a:solidFill>
-                  <a:srgbClr val="555555"/>
-                </a:solidFill>
-              </a:rPr>
-              <a:t>CI artifacts (HTML + JSON reports) are stored per build — reproducible audit trail.</a:t>
-            </a:r>
-          </a:p>
-        </p:txBody>
-      </p:sp>
-      <p:sp>
-        <p:nvSpPr>
-          <p:cNvPr id="21" name="TextBox 20"/>
+              <a:t>Every build produces a complete SBOM and vulnerability scan — no manual steps, no gaps, always current.</a:t>
+            </a:r>
+          </a:p>
+        </p:txBody>
+      </p:sp>
+      <p:sp>
+        <p:nvSpPr>
+          <p:cNvPr id="27" name="TextBox 26"/>
           <p:cNvSpPr txBox="1"/>
           <p:nvPr/>
         </p:nvSpPr>
@@ -4188,7 +4455,7 @@
                   <a:srgbClr val="888888"/>
                 </a:solidFill>
               </a:rPr>
-              <a:t>10 / 11</a:t>
+              <a:t>10 / 12</a:t>
             </a:r>
           </a:p>
         </p:txBody>
@@ -4202,6 +4469,987 @@
 </file>
 
 <file path=ppt/slides/slide11.xml><?xml version="1.0" encoding="utf-8"?>
+<p:sld xmlns:a="http://schemas.openxmlformats.org/drawingml/2006/main" xmlns:p="http://schemas.openxmlformats.org/presentationml/2006/main" xmlns:r="http://schemas.openxmlformats.org/officeDocument/2006/relationships">
+  <p:cSld>
+    <p:bg>
+      <p:bgPr>
+        <a:solidFill>
+          <a:srgbClr val="FFFFFF"/>
+        </a:solidFill>
+        <a:effectLst/>
+      </p:bgPr>
+    </p:bg>
+    <p:spTree>
+      <p:nvGrpSpPr>
+        <p:cNvPr id="1" name=""/>
+        <p:cNvGrpSpPr/>
+        <p:nvPr/>
+      </p:nvGrpSpPr>
+      <p:grpSpPr/>
+      <p:sp>
+        <p:nvSpPr>
+          <p:cNvPr id="2" name="TextBox 1"/>
+          <p:cNvSpPr txBox="1"/>
+          <p:nvPr/>
+        </p:nvSpPr>
+        <p:spPr>
+          <a:xfrm>
+            <a:off x="731520" y="457200"/>
+            <a:ext cx="10058400" cy="457200"/>
+          </a:xfrm>
+          <a:prstGeom prst="rect">
+            <a:avLst/>
+          </a:prstGeom>
+          <a:noFill/>
+        </p:spPr>
+        <p:txBody>
+          <a:bodyPr wrap="square">
+            <a:spAutoFit/>
+          </a:bodyPr>
+          <a:lstStyle/>
+          <a:p>
+            <a:pPr algn="l">
+              <a:spcAft>
+                <a:spcPts val="0"/>
+              </a:spcAft>
+            </a:pPr>
+            <a:r>
+              <a:rPr sz="2800" b="1">
+                <a:solidFill>
+                  <a:srgbClr val="0D1B2A"/>
+                </a:solidFill>
+              </a:rPr>
+              <a:t>Traceability &amp; Audit Evidence</a:t>
+            </a:r>
+          </a:p>
+        </p:txBody>
+      </p:sp>
+      <p:sp>
+        <p:nvSpPr>
+          <p:cNvPr id="3" name="TextBox 2"/>
+          <p:cNvSpPr txBox="1"/>
+          <p:nvPr/>
+        </p:nvSpPr>
+        <p:spPr>
+          <a:xfrm>
+            <a:off x="731520" y="960120"/>
+            <a:ext cx="10058400" cy="274320"/>
+          </a:xfrm>
+          <a:prstGeom prst="rect">
+            <a:avLst/>
+          </a:prstGeom>
+          <a:noFill/>
+        </p:spPr>
+        <p:txBody>
+          <a:bodyPr wrap="square">
+            <a:spAutoFit/>
+          </a:bodyPr>
+          <a:lstStyle/>
+          <a:p>
+            <a:pPr algn="l">
+              <a:spcAft>
+                <a:spcPts val="0"/>
+              </a:spcAft>
+            </a:pPr>
+            <a:r>
+              <a:rPr sz="1100" b="0">
+                <a:solidFill>
+                  <a:srgbClr val="555555"/>
+                </a:solidFill>
+              </a:rPr>
+              <a:t>Every pipeline run produces a complete, machine-generated evidence chain — no manual assembly required.</a:t>
+            </a:r>
+          </a:p>
+        </p:txBody>
+      </p:sp>
+      <p:sp>
+        <p:nvSpPr>
+          <p:cNvPr id="4" name="Rounded Rectangle 3"/>
+          <p:cNvSpPr/>
+          <p:nvPr/>
+        </p:nvSpPr>
+        <p:spPr>
+          <a:xfrm>
+            <a:off x="457200" y="1554480"/>
+            <a:ext cx="2011680" cy="777240"/>
+          </a:xfrm>
+          <a:prstGeom prst="roundRect">
+            <a:avLst/>
+          </a:prstGeom>
+          <a:solidFill>
+            <a:srgbClr val="003057"/>
+          </a:solidFill>
+          <a:ln>
+            <a:noFill/>
+          </a:ln>
+        </p:spPr>
+        <p:style>
+          <a:lnRef idx="1">
+            <a:schemeClr val="accent1"/>
+          </a:lnRef>
+          <a:fillRef idx="3">
+            <a:schemeClr val="accent1"/>
+          </a:fillRef>
+          <a:effectRef idx="2">
+            <a:schemeClr val="accent1"/>
+          </a:effectRef>
+          <a:fontRef idx="minor">
+            <a:schemeClr val="lt1"/>
+          </a:fontRef>
+        </p:style>
+        <p:txBody>
+          <a:bodyPr rtlCol="0" anchor="ctr"/>
+          <a:lstStyle/>
+          <a:p>
+            <a:pPr algn="ctr"/>
+          </a:p>
+        </p:txBody>
+      </p:sp>
+      <p:sp>
+        <p:nvSpPr>
+          <p:cNvPr id="5" name="TextBox 4"/>
+          <p:cNvSpPr txBox="1"/>
+          <p:nvPr/>
+        </p:nvSpPr>
+        <p:spPr>
+          <a:xfrm>
+            <a:off x="548640" y="1627632"/>
+            <a:ext cx="1828800" cy="685800"/>
+          </a:xfrm>
+          <a:prstGeom prst="rect">
+            <a:avLst/>
+          </a:prstGeom>
+          <a:noFill/>
+        </p:spPr>
+        <p:txBody>
+          <a:bodyPr wrap="square">
+            <a:spAutoFit/>
+          </a:bodyPr>
+          <a:lstStyle/>
+          <a:p>
+            <a:pPr algn="l">
+              <a:spcAft>
+                <a:spcPts val="100"/>
+              </a:spcAft>
+            </a:pPr>
+            <a:r>
+              <a:rPr sz="900" b="1">
+                <a:solidFill>
+                  <a:srgbClr val="FFFFFF"/>
+                </a:solidFill>
+              </a:rPr>
+              <a:t>Requirement
+in Cameo</a:t>
+            </a:r>
+          </a:p>
+          <a:p>
+            <a:pPr algn="l">
+              <a:spcAft>
+                <a:spcPts val="0"/>
+              </a:spcAft>
+            </a:pPr>
+            <a:r>
+              <a:rPr sz="700" b="0">
+                <a:solidFill>
+                  <a:srgbClr val="BBBBBB"/>
+                </a:solidFill>
+              </a:rPr>
+              <a:t/>
+            </a:r>
+          </a:p>
+        </p:txBody>
+      </p:sp>
+      <p:sp>
+        <p:nvSpPr>
+          <p:cNvPr id="6" name="Rounded Rectangle 5"/>
+          <p:cNvSpPr/>
+          <p:nvPr/>
+        </p:nvSpPr>
+        <p:spPr>
+          <a:xfrm>
+            <a:off x="2651760" y="1554480"/>
+            <a:ext cx="2011680" cy="777240"/>
+          </a:xfrm>
+          <a:prstGeom prst="roundRect">
+            <a:avLst/>
+          </a:prstGeom>
+          <a:solidFill>
+            <a:srgbClr val="004A87"/>
+          </a:solidFill>
+          <a:ln>
+            <a:noFill/>
+          </a:ln>
+        </p:spPr>
+        <p:style>
+          <a:lnRef idx="1">
+            <a:schemeClr val="accent1"/>
+          </a:lnRef>
+          <a:fillRef idx="3">
+            <a:schemeClr val="accent1"/>
+          </a:fillRef>
+          <a:effectRef idx="2">
+            <a:schemeClr val="accent1"/>
+          </a:effectRef>
+          <a:fontRef idx="minor">
+            <a:schemeClr val="lt1"/>
+          </a:fontRef>
+        </p:style>
+        <p:txBody>
+          <a:bodyPr rtlCol="0" anchor="ctr"/>
+          <a:lstStyle/>
+          <a:p>
+            <a:pPr algn="ctr"/>
+          </a:p>
+        </p:txBody>
+      </p:sp>
+      <p:sp>
+        <p:nvSpPr>
+          <p:cNvPr id="7" name="TextBox 6"/>
+          <p:cNvSpPr txBox="1"/>
+          <p:nvPr/>
+        </p:nvSpPr>
+        <p:spPr>
+          <a:xfrm>
+            <a:off x="2743200" y="1627632"/>
+            <a:ext cx="1828800" cy="685800"/>
+          </a:xfrm>
+          <a:prstGeom prst="rect">
+            <a:avLst/>
+          </a:prstGeom>
+          <a:noFill/>
+        </p:spPr>
+        <p:txBody>
+          <a:bodyPr wrap="square">
+            <a:spAutoFit/>
+          </a:bodyPr>
+          <a:lstStyle/>
+          <a:p>
+            <a:pPr algn="l">
+              <a:spcAft>
+                <a:spcPts val="100"/>
+              </a:spcAft>
+            </a:pPr>
+            <a:r>
+              <a:rPr sz="900" b="1">
+                <a:solidFill>
+                  <a:srgbClr val="FFFFFF"/>
+                </a:solidFill>
+              </a:rPr>
+              <a:t>Verification
+Criteria (VC)</a:t>
+            </a:r>
+          </a:p>
+          <a:p>
+            <a:pPr algn="l">
+              <a:spcAft>
+                <a:spcPts val="0"/>
+              </a:spcAft>
+            </a:pPr>
+            <a:r>
+              <a:rPr sz="700" b="0">
+                <a:solidFill>
+                  <a:srgbClr val="BBBBBB"/>
+                </a:solidFill>
+              </a:rPr>
+              <a:t/>
+            </a:r>
+          </a:p>
+        </p:txBody>
+      </p:sp>
+      <p:sp>
+        <p:nvSpPr>
+          <p:cNvPr id="8" name="Rounded Rectangle 7"/>
+          <p:cNvSpPr/>
+          <p:nvPr/>
+        </p:nvSpPr>
+        <p:spPr>
+          <a:xfrm>
+            <a:off x="4846320" y="1554480"/>
+            <a:ext cx="2011680" cy="777240"/>
+          </a:xfrm>
+          <a:prstGeom prst="roundRect">
+            <a:avLst/>
+          </a:prstGeom>
+          <a:solidFill>
+            <a:srgbClr val="0069B0"/>
+          </a:solidFill>
+          <a:ln>
+            <a:noFill/>
+          </a:ln>
+        </p:spPr>
+        <p:style>
+          <a:lnRef idx="1">
+            <a:schemeClr val="accent1"/>
+          </a:lnRef>
+          <a:fillRef idx="3">
+            <a:schemeClr val="accent1"/>
+          </a:fillRef>
+          <a:effectRef idx="2">
+            <a:schemeClr val="accent1"/>
+          </a:effectRef>
+          <a:fontRef idx="minor">
+            <a:schemeClr val="lt1"/>
+          </a:fontRef>
+        </p:style>
+        <p:txBody>
+          <a:bodyPr rtlCol="0" anchor="ctr"/>
+          <a:lstStyle/>
+          <a:p>
+            <a:pPr algn="ctr"/>
+          </a:p>
+        </p:txBody>
+      </p:sp>
+      <p:sp>
+        <p:nvSpPr>
+          <p:cNvPr id="9" name="TextBox 8"/>
+          <p:cNvSpPr txBox="1"/>
+          <p:nvPr/>
+        </p:nvSpPr>
+        <p:spPr>
+          <a:xfrm>
+            <a:off x="4937760" y="1627632"/>
+            <a:ext cx="1828800" cy="685800"/>
+          </a:xfrm>
+          <a:prstGeom prst="rect">
+            <a:avLst/>
+          </a:prstGeom>
+          <a:noFill/>
+        </p:spPr>
+        <p:txBody>
+          <a:bodyPr wrap="square">
+            <a:spAutoFit/>
+          </a:bodyPr>
+          <a:lstStyle/>
+          <a:p>
+            <a:pPr algn="l">
+              <a:spcAft>
+                <a:spcPts val="100"/>
+              </a:spcAft>
+            </a:pPr>
+            <a:r>
+              <a:rPr sz="900" b="1">
+                <a:solidFill>
+                  <a:srgbClr val="FFFFFF"/>
+                </a:solidFill>
+              </a:rPr>
+              <a:t>Gherkin
+Scenario</a:t>
+            </a:r>
+          </a:p>
+          <a:p>
+            <a:pPr algn="l">
+              <a:spcAft>
+                <a:spcPts val="0"/>
+              </a:spcAft>
+            </a:pPr>
+            <a:r>
+              <a:rPr sz="700" b="0">
+                <a:solidFill>
+                  <a:srgbClr val="BBBBBB"/>
+                </a:solidFill>
+              </a:rPr>
+              <a:t/>
+            </a:r>
+          </a:p>
+        </p:txBody>
+      </p:sp>
+      <p:sp>
+        <p:nvSpPr>
+          <p:cNvPr id="10" name="Rounded Rectangle 9"/>
+          <p:cNvSpPr/>
+          <p:nvPr/>
+        </p:nvSpPr>
+        <p:spPr>
+          <a:xfrm>
+            <a:off x="7040880" y="1554480"/>
+            <a:ext cx="2011680" cy="777240"/>
+          </a:xfrm>
+          <a:prstGeom prst="roundRect">
+            <a:avLst/>
+          </a:prstGeom>
+          <a:solidFill>
+            <a:srgbClr val="0082CC"/>
+          </a:solidFill>
+          <a:ln>
+            <a:noFill/>
+          </a:ln>
+        </p:spPr>
+        <p:style>
+          <a:lnRef idx="1">
+            <a:schemeClr val="accent1"/>
+          </a:lnRef>
+          <a:fillRef idx="3">
+            <a:schemeClr val="accent1"/>
+          </a:fillRef>
+          <a:effectRef idx="2">
+            <a:schemeClr val="accent1"/>
+          </a:effectRef>
+          <a:fontRef idx="minor">
+            <a:schemeClr val="lt1"/>
+          </a:fontRef>
+        </p:style>
+        <p:txBody>
+          <a:bodyPr rtlCol="0" anchor="ctr"/>
+          <a:lstStyle/>
+          <a:p>
+            <a:pPr algn="ctr"/>
+          </a:p>
+        </p:txBody>
+      </p:sp>
+      <p:sp>
+        <p:nvSpPr>
+          <p:cNvPr id="11" name="TextBox 10"/>
+          <p:cNvSpPr txBox="1"/>
+          <p:nvPr/>
+        </p:nvSpPr>
+        <p:spPr>
+          <a:xfrm>
+            <a:off x="7132320" y="1627632"/>
+            <a:ext cx="1828800" cy="685800"/>
+          </a:xfrm>
+          <a:prstGeom prst="rect">
+            <a:avLst/>
+          </a:prstGeom>
+          <a:noFill/>
+        </p:spPr>
+        <p:txBody>
+          <a:bodyPr wrap="square">
+            <a:spAutoFit/>
+          </a:bodyPr>
+          <a:lstStyle/>
+          <a:p>
+            <a:pPr algn="l">
+              <a:spcAft>
+                <a:spcPts val="100"/>
+              </a:spcAft>
+            </a:pPr>
+            <a:r>
+              <a:rPr sz="900" b="1">
+                <a:solidFill>
+                  <a:srgbClr val="FFFFFF"/>
+                </a:solidFill>
+              </a:rPr>
+              <a:t>BDD Test
+Result</a:t>
+            </a:r>
+          </a:p>
+          <a:p>
+            <a:pPr algn="l">
+              <a:spcAft>
+                <a:spcPts val="0"/>
+              </a:spcAft>
+            </a:pPr>
+            <a:r>
+              <a:rPr sz="700" b="0">
+                <a:solidFill>
+                  <a:srgbClr val="BBBBBB"/>
+                </a:solidFill>
+              </a:rPr>
+              <a:t/>
+            </a:r>
+          </a:p>
+        </p:txBody>
+      </p:sp>
+      <p:sp>
+        <p:nvSpPr>
+          <p:cNvPr id="12" name="Rounded Rectangle 11"/>
+          <p:cNvSpPr/>
+          <p:nvPr/>
+        </p:nvSpPr>
+        <p:spPr>
+          <a:xfrm>
+            <a:off x="9235440" y="1554480"/>
+            <a:ext cx="2011680" cy="777240"/>
+          </a:xfrm>
+          <a:prstGeom prst="roundRect">
+            <a:avLst/>
+          </a:prstGeom>
+          <a:solidFill>
+            <a:srgbClr val="0099D6"/>
+          </a:solidFill>
+          <a:ln>
+            <a:noFill/>
+          </a:ln>
+        </p:spPr>
+        <p:style>
+          <a:lnRef idx="1">
+            <a:schemeClr val="accent1"/>
+          </a:lnRef>
+          <a:fillRef idx="3">
+            <a:schemeClr val="accent1"/>
+          </a:fillRef>
+          <a:effectRef idx="2">
+            <a:schemeClr val="accent1"/>
+          </a:effectRef>
+          <a:fontRef idx="minor">
+            <a:schemeClr val="lt1"/>
+          </a:fontRef>
+        </p:style>
+        <p:txBody>
+          <a:bodyPr rtlCol="0" anchor="ctr"/>
+          <a:lstStyle/>
+          <a:p>
+            <a:pPr algn="ctr"/>
+          </a:p>
+        </p:txBody>
+      </p:sp>
+      <p:sp>
+        <p:nvSpPr>
+          <p:cNvPr id="13" name="TextBox 12"/>
+          <p:cNvSpPr txBox="1"/>
+          <p:nvPr/>
+        </p:nvSpPr>
+        <p:spPr>
+          <a:xfrm>
+            <a:off x="9326880" y="1627632"/>
+            <a:ext cx="1828800" cy="685800"/>
+          </a:xfrm>
+          <a:prstGeom prst="rect">
+            <a:avLst/>
+          </a:prstGeom>
+          <a:noFill/>
+        </p:spPr>
+        <p:txBody>
+          <a:bodyPr wrap="square">
+            <a:spAutoFit/>
+          </a:bodyPr>
+          <a:lstStyle/>
+          <a:p>
+            <a:pPr algn="l">
+              <a:spcAft>
+                <a:spcPts val="100"/>
+              </a:spcAft>
+            </a:pPr>
+            <a:r>
+              <a:rPr sz="900" b="1">
+                <a:solidFill>
+                  <a:srgbClr val="FFFFFF"/>
+                </a:solidFill>
+              </a:rPr>
+              <a:t>Deployment
+Pipeline Report</a:t>
+            </a:r>
+          </a:p>
+          <a:p>
+            <a:pPr algn="l">
+              <a:spcAft>
+                <a:spcPts val="0"/>
+              </a:spcAft>
+            </a:pPr>
+            <a:r>
+              <a:rPr sz="700" b="0">
+                <a:solidFill>
+                  <a:srgbClr val="BBBBBB"/>
+                </a:solidFill>
+              </a:rPr>
+              <a:t/>
+            </a:r>
+          </a:p>
+        </p:txBody>
+      </p:sp>
+      <p:sp>
+        <p:nvSpPr>
+          <p:cNvPr id="14" name="TextBox 13"/>
+          <p:cNvSpPr txBox="1"/>
+          <p:nvPr/>
+        </p:nvSpPr>
+        <p:spPr>
+          <a:xfrm>
+            <a:off x="731520" y="2743200"/>
+            <a:ext cx="4572000" cy="274320"/>
+          </a:xfrm>
+          <a:prstGeom prst="rect">
+            <a:avLst/>
+          </a:prstGeom>
+          <a:noFill/>
+        </p:spPr>
+        <p:txBody>
+          <a:bodyPr wrap="square">
+            <a:spAutoFit/>
+          </a:bodyPr>
+          <a:lstStyle/>
+          <a:p>
+            <a:pPr algn="l">
+              <a:spcAft>
+                <a:spcPts val="0"/>
+              </a:spcAft>
+            </a:pPr>
+            <a:r>
+              <a:rPr sz="1600" b="1">
+                <a:solidFill>
+                  <a:srgbClr val="0D1B2A"/>
+                </a:solidFill>
+              </a:rPr>
+              <a:t>What This Means for Compliance</a:t>
+            </a:r>
+          </a:p>
+        </p:txBody>
+      </p:sp>
+      <p:sp>
+        <p:nvSpPr>
+          <p:cNvPr id="15" name="TextBox 14"/>
+          <p:cNvSpPr txBox="1"/>
+          <p:nvPr/>
+        </p:nvSpPr>
+        <p:spPr>
+          <a:xfrm>
+            <a:off x="731520" y="3200400"/>
+            <a:ext cx="5029200" cy="822960"/>
+          </a:xfrm>
+          <a:prstGeom prst="rect">
+            <a:avLst/>
+          </a:prstGeom>
+          <a:noFill/>
+        </p:spPr>
+        <p:txBody>
+          <a:bodyPr wrap="square">
+            <a:spAutoFit/>
+          </a:bodyPr>
+          <a:lstStyle/>
+          <a:p>
+            <a:pPr algn="l">
+              <a:spcAft>
+                <a:spcPts val="200"/>
+              </a:spcAft>
+            </a:pPr>
+            <a:r>
+              <a:rPr sz="1200" b="1">
+                <a:solidFill>
+                  <a:srgbClr val="0D1B2A"/>
+                </a:solidFill>
+              </a:rPr>
+              <a:t>Minutes, Not Weeks</a:t>
+            </a:r>
+          </a:p>
+          <a:p>
+            <a:pPr algn="l">
+              <a:spcAft>
+                <a:spcPts val="0"/>
+              </a:spcAft>
+            </a:pPr>
+            <a:r>
+              <a:rPr sz="900" b="0">
+                <a:solidFill>
+                  <a:srgbClr val="555555"/>
+                </a:solidFill>
+              </a:rPr>
+              <a:t>Traceability report is generated on every commit — always current, always complete.</a:t>
+            </a:r>
+          </a:p>
+        </p:txBody>
+      </p:sp>
+      <p:sp>
+        <p:nvSpPr>
+          <p:cNvPr id="16" name="TextBox 15"/>
+          <p:cNvSpPr txBox="1"/>
+          <p:nvPr/>
+        </p:nvSpPr>
+        <p:spPr>
+          <a:xfrm>
+            <a:off x="731520" y="4114800"/>
+            <a:ext cx="5029200" cy="822960"/>
+          </a:xfrm>
+          <a:prstGeom prst="rect">
+            <a:avLst/>
+          </a:prstGeom>
+          <a:noFill/>
+        </p:spPr>
+        <p:txBody>
+          <a:bodyPr wrap="square">
+            <a:spAutoFit/>
+          </a:bodyPr>
+          <a:lstStyle/>
+          <a:p>
+            <a:pPr algn="l">
+              <a:spcAft>
+                <a:spcPts val="200"/>
+              </a:spcAft>
+            </a:pPr>
+            <a:r>
+              <a:rPr sz="1200" b="1">
+                <a:solidFill>
+                  <a:srgbClr val="0D1B2A"/>
+                </a:solidFill>
+              </a:rPr>
+              <a:t>Every Change Tracked</a:t>
+            </a:r>
+          </a:p>
+          <a:p>
+            <a:pPr algn="l">
+              <a:spcAft>
+                <a:spcPts val="0"/>
+              </a:spcAft>
+            </a:pPr>
+            <a:r>
+              <a:rPr sz="900" b="0">
+                <a:solidFill>
+                  <a:srgbClr val="555555"/>
+                </a:solidFill>
+              </a:rPr>
+              <a:t>Git history + baseline diffs show exactly when requirements changed and who acknowledged them.</a:t>
+            </a:r>
+          </a:p>
+        </p:txBody>
+      </p:sp>
+      <p:sp>
+        <p:nvSpPr>
+          <p:cNvPr id="17" name="TextBox 16"/>
+          <p:cNvSpPr txBox="1"/>
+          <p:nvPr/>
+        </p:nvSpPr>
+        <p:spPr>
+          <a:xfrm>
+            <a:off x="731520" y="5029200"/>
+            <a:ext cx="5029200" cy="822960"/>
+          </a:xfrm>
+          <a:prstGeom prst="rect">
+            <a:avLst/>
+          </a:prstGeom>
+          <a:noFill/>
+        </p:spPr>
+        <p:txBody>
+          <a:bodyPr wrap="square">
+            <a:spAutoFit/>
+          </a:bodyPr>
+          <a:lstStyle/>
+          <a:p>
+            <a:pPr algn="l">
+              <a:spcAft>
+                <a:spcPts val="200"/>
+              </a:spcAft>
+            </a:pPr>
+            <a:r>
+              <a:rPr sz="1200" b="1">
+                <a:solidFill>
+                  <a:srgbClr val="0D1B2A"/>
+                </a:solidFill>
+              </a:rPr>
+              <a:t>No Missing Tests</a:t>
+            </a:r>
+          </a:p>
+          <a:p>
+            <a:pPr algn="l">
+              <a:spcAft>
+                <a:spcPts val="0"/>
+              </a:spcAft>
+            </a:pPr>
+            <a:r>
+              <a:rPr sz="900" b="0">
+                <a:solidFill>
+                  <a:srgbClr val="555555"/>
+                </a:solidFill>
+              </a:rPr>
+              <a:t>Gate A ensures every verification criteria has coverage — gaps are caught before merge.</a:t>
+            </a:r>
+          </a:p>
+        </p:txBody>
+      </p:sp>
+      <p:sp>
+        <p:nvSpPr>
+          <p:cNvPr id="18" name="TextBox 17"/>
+          <p:cNvSpPr txBox="1"/>
+          <p:nvPr/>
+        </p:nvSpPr>
+        <p:spPr>
+          <a:xfrm>
+            <a:off x="6217920" y="3200400"/>
+            <a:ext cx="5029200" cy="822960"/>
+          </a:xfrm>
+          <a:prstGeom prst="rect">
+            <a:avLst/>
+          </a:prstGeom>
+          <a:noFill/>
+        </p:spPr>
+        <p:txBody>
+          <a:bodyPr wrap="square">
+            <a:spAutoFit/>
+          </a:bodyPr>
+          <a:lstStyle/>
+          <a:p>
+            <a:pPr algn="l">
+              <a:spcAft>
+                <a:spcPts val="200"/>
+              </a:spcAft>
+            </a:pPr>
+            <a:r>
+              <a:rPr sz="1200" b="1">
+                <a:solidFill>
+                  <a:srgbClr val="0D1B2A"/>
+                </a:solidFill>
+              </a:rPr>
+              <a:t>No Stale Tests</a:t>
+            </a:r>
+          </a:p>
+          <a:p>
+            <a:pPr algn="l">
+              <a:spcAft>
+                <a:spcPts val="0"/>
+              </a:spcAft>
+            </a:pPr>
+            <a:r>
+              <a:rPr sz="900" b="0">
+                <a:solidFill>
+                  <a:srgbClr val="555555"/>
+                </a:solidFill>
+              </a:rPr>
+              <a:t>Gate B detects criteria drift — existing tests are flagged for re-review when requirements change.</a:t>
+            </a:r>
+          </a:p>
+        </p:txBody>
+      </p:sp>
+      <p:sp>
+        <p:nvSpPr>
+          <p:cNvPr id="19" name="TextBox 18"/>
+          <p:cNvSpPr txBox="1"/>
+          <p:nvPr/>
+        </p:nvSpPr>
+        <p:spPr>
+          <a:xfrm>
+            <a:off x="6217920" y="4114800"/>
+            <a:ext cx="5029200" cy="822960"/>
+          </a:xfrm>
+          <a:prstGeom prst="rect">
+            <a:avLst/>
+          </a:prstGeom>
+          <a:noFill/>
+        </p:spPr>
+        <p:txBody>
+          <a:bodyPr wrap="square">
+            <a:spAutoFit/>
+          </a:bodyPr>
+          <a:lstStyle/>
+          <a:p>
+            <a:pPr algn="l">
+              <a:spcAft>
+                <a:spcPts val="200"/>
+              </a:spcAft>
+            </a:pPr>
+            <a:r>
+              <a:rPr sz="1200" b="1">
+                <a:solidFill>
+                  <a:srgbClr val="0D1B2A"/>
+                </a:solidFill>
+              </a:rPr>
+              <a:t>No Ghost Tests</a:t>
+            </a:r>
+          </a:p>
+          <a:p>
+            <a:pPr algn="l">
+              <a:spcAft>
+                <a:spcPts val="0"/>
+              </a:spcAft>
+            </a:pPr>
+            <a:r>
+              <a:rPr sz="900" b="0">
+                <a:solidFill>
+                  <a:srgbClr val="555555"/>
+                </a:solidFill>
+              </a:rPr>
+              <a:t>Gate C catches orphaned tests — scenarios for deleted requirements are flagged for removal.</a:t>
+            </a:r>
+          </a:p>
+        </p:txBody>
+      </p:sp>
+      <p:sp>
+        <p:nvSpPr>
+          <p:cNvPr id="20" name="TextBox 19"/>
+          <p:cNvSpPr txBox="1"/>
+          <p:nvPr/>
+        </p:nvSpPr>
+        <p:spPr>
+          <a:xfrm>
+            <a:off x="6217920" y="5029200"/>
+            <a:ext cx="5029200" cy="822960"/>
+          </a:xfrm>
+          <a:prstGeom prst="rect">
+            <a:avLst/>
+          </a:prstGeom>
+          <a:noFill/>
+        </p:spPr>
+        <p:txBody>
+          <a:bodyPr wrap="square">
+            <a:spAutoFit/>
+          </a:bodyPr>
+          <a:lstStyle/>
+          <a:p>
+            <a:pPr algn="l">
+              <a:spcAft>
+                <a:spcPts val="200"/>
+              </a:spcAft>
+            </a:pPr>
+            <a:r>
+              <a:rPr sz="1200" b="1">
+                <a:solidFill>
+                  <a:srgbClr val="0D1B2A"/>
+                </a:solidFill>
+              </a:rPr>
+              <a:t>Immutable Evidence</a:t>
+            </a:r>
+          </a:p>
+          <a:p>
+            <a:pPr algn="l">
+              <a:spcAft>
+                <a:spcPts val="0"/>
+              </a:spcAft>
+            </a:pPr>
+            <a:r>
+              <a:rPr sz="900" b="0">
+                <a:solidFill>
+                  <a:srgbClr val="555555"/>
+                </a:solidFill>
+              </a:rPr>
+              <a:t>CI artifacts (HTML + JSON reports) are stored per build — reproducible audit trail.</a:t>
+            </a:r>
+          </a:p>
+        </p:txBody>
+      </p:sp>
+      <p:sp>
+        <p:nvSpPr>
+          <p:cNvPr id="21" name="TextBox 20"/>
+          <p:cNvSpPr txBox="1"/>
+          <p:nvPr/>
+        </p:nvSpPr>
+        <p:spPr>
+          <a:xfrm>
+            <a:off x="10972800" y="6400800"/>
+            <a:ext cx="914400" cy="274320"/>
+          </a:xfrm>
+          <a:prstGeom prst="rect">
+            <a:avLst/>
+          </a:prstGeom>
+          <a:noFill/>
+        </p:spPr>
+        <p:txBody>
+          <a:bodyPr wrap="square">
+            <a:spAutoFit/>
+          </a:bodyPr>
+          <a:lstStyle/>
+          <a:p>
+            <a:pPr algn="r">
+              <a:spcAft>
+                <a:spcPts val="0"/>
+              </a:spcAft>
+            </a:pPr>
+            <a:r>
+              <a:rPr sz="900" b="0">
+                <a:solidFill>
+                  <a:srgbClr val="888888"/>
+                </a:solidFill>
+              </a:rPr>
+              <a:t>11 / 12</a:t>
+            </a:r>
+          </a:p>
+        </p:txBody>
+      </p:sp>
+    </p:spTree>
+  </p:cSld>
+  <p:clrMapOvr>
+    <a:masterClrMapping/>
+  </p:clrMapOvr>
+</p:sld>
+</file>
+
+<file path=ppt/slides/slide12.xml><?xml version="1.0" encoding="utf-8"?>
 <p:sld xmlns:a="http://schemas.openxmlformats.org/drawingml/2006/main" xmlns:p="http://schemas.openxmlformats.org/presentationml/2006/main" xmlns:r="http://schemas.openxmlformats.org/officeDocument/2006/relationships">
   <p:cSld>
     <p:bg>
@@ -4525,7 +5773,7 @@
                   <a:srgbClr val="888888"/>
                 </a:solidFill>
               </a:rPr>
-              <a:t>11 / 11</a:t>
+              <a:t>12 / 12</a:t>
             </a:r>
           </a:p>
         </p:txBody>
@@ -5028,7 +6276,7 @@
                   <a:srgbClr val="888888"/>
                 </a:solidFill>
               </a:rPr>
-              <a:t>2 / 11</a:t>
+              <a:t>2 / 12</a:t>
             </a:r>
           </a:p>
         </p:txBody>
@@ -6357,7 +7605,7 @@
                   <a:srgbClr val="888888"/>
                 </a:solidFill>
               </a:rPr>
-              <a:t>3 / 11</a:t>
+              <a:t>3 / 12</a:t>
             </a:r>
           </a:p>
         </p:txBody>
@@ -7989,7 +9237,7 @@
                   <a:srgbClr val="888888"/>
                 </a:solidFill>
               </a:rPr>
-              <a:t>4 / 11</a:t>
+              <a:t>4 / 12</a:t>
             </a:r>
           </a:p>
         </p:txBody>
@@ -8992,7 +10240,7 @@
                   <a:srgbClr val="888888"/>
                 </a:solidFill>
               </a:rPr>
-              <a:t>5 / 11</a:t>
+              <a:t>5 / 12</a:t>
             </a:r>
           </a:p>
         </p:txBody>
@@ -9714,7 +10962,7 @@
                   <a:srgbClr val="888888"/>
                 </a:solidFill>
               </a:rPr>
-              <a:t>6 / 11</a:t>
+              <a:t>6 / 12</a:t>
             </a:r>
           </a:p>
         </p:txBody>
@@ -10340,7 +11588,7 @@
                   <a:srgbClr val="888888"/>
                 </a:solidFill>
               </a:rPr>
-              <a:t>7 / 11</a:t>
+              <a:t>7 / 12</a:t>
             </a:r>
           </a:p>
         </p:txBody>
@@ -11024,7 +12272,7 @@
                   <a:srgbClr val="888888"/>
                 </a:solidFill>
               </a:rPr>
-              <a:t>8 / 11</a:t>
+              <a:t>8 / 12</a:t>
             </a:r>
           </a:p>
         </p:txBody>
@@ -12307,7 +13555,7 @@
                   <a:srgbClr val="888888"/>
                 </a:solidFill>
               </a:rPr>
-              <a:t>9 / 11</a:t>
+              <a:t>9 / 12</a:t>
             </a:r>
           </a:p>
         </p:txBody>

--- a/docs/presentations/MBSE_Pipeline_Executive_Brief.pptx
+++ b/docs/presentations/MBSE_Pipeline_Executive_Brief.pptx
@@ -3343,7 +3343,7 @@
               </a:spcAft>
             </a:pPr>
             <a:r>
-              <a:rPr sz="1600" b="1">
+              <a:rPr sz="1400" b="1">
                 <a:solidFill>
                   <a:srgbClr val="0D1B2A"/>
                 </a:solidFill>
@@ -3361,8 +3361,8 @@
         </p:nvSpPr>
         <p:spPr>
           <a:xfrm>
-            <a:off x="457200" y="1920240"/>
-            <a:ext cx="2560320" cy="777240"/>
+            <a:off x="457200" y="1828800"/>
+            <a:ext cx="5303520" cy="502920"/>
           </a:xfrm>
           <a:prstGeom prst="roundRect">
             <a:avLst/>
@@ -3404,48 +3404,40 @@
         </p:nvSpPr>
         <p:spPr>
           <a:xfrm>
-            <a:off x="548640" y="1965960"/>
-            <a:ext cx="2377440" cy="685800"/>
-          </a:xfrm>
-          <a:prstGeom prst="rect">
-            <a:avLst/>
-          </a:prstGeom>
-          <a:noFill/>
-        </p:spPr>
-        <p:txBody>
-          <a:bodyPr wrap="square">
-            <a:spAutoFit/>
-          </a:bodyPr>
-          <a:lstStyle/>
-          <a:p>
-            <a:pPr algn="l">
-              <a:spcAft>
-                <a:spcPts val="100"/>
-              </a:spcAft>
-            </a:pPr>
-            <a:r>
-              <a:rPr sz="900" b="1">
+            <a:off x="548640" y="1874520"/>
+            <a:ext cx="5120640" cy="411480"/>
+          </a:xfrm>
+          <a:prstGeom prst="rect">
+            <a:avLst/>
+          </a:prstGeom>
+          <a:noFill/>
+        </p:spPr>
+        <p:txBody>
+          <a:bodyPr wrap="square">
+            <a:spAutoFit/>
+          </a:bodyPr>
+          <a:lstStyle/>
+          <a:p>
+            <a:pPr algn="l">
+              <a:spcAft>
+                <a:spcPts val="0"/>
+              </a:spcAft>
+            </a:pPr>
+            <a:r>
+              <a:rPr sz="1000" b="1">
                 <a:solidFill>
                   <a:srgbClr val="FFFFFF"/>
                 </a:solidFill>
               </a:rPr>
               <a:t>Container Image</a:t>
             </a:r>
-          </a:p>
-          <a:p>
-            <a:pPr algn="l">
-              <a:spcAft>
-                <a:spcPts val="0"/>
-              </a:spcAft>
-            </a:pPr>
-            <a:r>
-              <a:rPr sz="700" b="0">
+            <a:r>
+              <a:rPr sz="800" b="0">
                 <a:solidFill>
                   <a:srgbClr val="BBBBBB"/>
                 </a:solidFill>
               </a:rPr>
-              <a:t>Product containers
-built by CI/CD</a:t>
+              <a:t>  —  Product containers built by CI/CD</a:t>
             </a:r>
           </a:p>
         </p:txBody>
@@ -3458,8 +3450,8 @@
         </p:nvSpPr>
         <p:spPr>
           <a:xfrm>
-            <a:off x="3108960" y="1920240"/>
-            <a:ext cx="2560320" cy="777240"/>
+            <a:off x="457200" y="2395728"/>
+            <a:ext cx="5303520" cy="502920"/>
           </a:xfrm>
           <a:prstGeom prst="roundRect">
             <a:avLst/>
@@ -3501,48 +3493,40 @@
         </p:nvSpPr>
         <p:spPr>
           <a:xfrm>
-            <a:off x="3200400" y="1965960"/>
-            <a:ext cx="2377440" cy="685800"/>
-          </a:xfrm>
-          <a:prstGeom prst="rect">
-            <a:avLst/>
-          </a:prstGeom>
-          <a:noFill/>
-        </p:spPr>
-        <p:txBody>
-          <a:bodyPr wrap="square">
-            <a:spAutoFit/>
-          </a:bodyPr>
-          <a:lstStyle/>
-          <a:p>
-            <a:pPr algn="l">
-              <a:spcAft>
-                <a:spcPts val="100"/>
-              </a:spcAft>
-            </a:pPr>
-            <a:r>
-              <a:rPr sz="900" b="1">
+            <a:off x="548640" y="2441448"/>
+            <a:ext cx="5120640" cy="411480"/>
+          </a:xfrm>
+          <a:prstGeom prst="rect">
+            <a:avLst/>
+          </a:prstGeom>
+          <a:noFill/>
+        </p:spPr>
+        <p:txBody>
+          <a:bodyPr wrap="square">
+            <a:spAutoFit/>
+          </a:bodyPr>
+          <a:lstStyle/>
+          <a:p>
+            <a:pPr algn="l">
+              <a:spcAft>
+                <a:spcPts val="0"/>
+              </a:spcAft>
+            </a:pPr>
+            <a:r>
+              <a:rPr sz="1000" b="1">
                 <a:solidFill>
                   <a:srgbClr val="FFFFFF"/>
                 </a:solidFill>
               </a:rPr>
-              <a:t>→  Syft (SBOM)</a:t>
-            </a:r>
-          </a:p>
-          <a:p>
-            <a:pPr algn="l">
-              <a:spcAft>
-                <a:spcPts val="0"/>
-              </a:spcAft>
-            </a:pPr>
-            <a:r>
-              <a:rPr sz="700" b="0">
+              <a:t>Syft → SBOM</a:t>
+            </a:r>
+            <a:r>
+              <a:rPr sz="800" b="0">
                 <a:solidFill>
                   <a:srgbClr val="BBBBBB"/>
                 </a:solidFill>
               </a:rPr>
-              <a:t>Generates CycloneDX
-Software Bill of Materials</a:t>
+              <a:t>  —  Generates CycloneDX Software Bill of Materials</a:t>
             </a:r>
           </a:p>
         </p:txBody>
@@ -3555,8 +3539,8 @@
         </p:nvSpPr>
         <p:spPr>
           <a:xfrm>
-            <a:off x="5760720" y="1920240"/>
-            <a:ext cx="2560320" cy="777240"/>
+            <a:off x="457200" y="2962656"/>
+            <a:ext cx="5303520" cy="502920"/>
           </a:xfrm>
           <a:prstGeom prst="roundRect">
             <a:avLst/>
@@ -3598,48 +3582,40 @@
         </p:nvSpPr>
         <p:spPr>
           <a:xfrm>
-            <a:off x="5852160" y="1965960"/>
-            <a:ext cx="2377440" cy="685800"/>
-          </a:xfrm>
-          <a:prstGeom prst="rect">
-            <a:avLst/>
-          </a:prstGeom>
-          <a:noFill/>
-        </p:spPr>
-        <p:txBody>
-          <a:bodyPr wrap="square">
-            <a:spAutoFit/>
-          </a:bodyPr>
-          <a:lstStyle/>
-          <a:p>
-            <a:pPr algn="l">
-              <a:spcAft>
-                <a:spcPts val="100"/>
-              </a:spcAft>
-            </a:pPr>
-            <a:r>
-              <a:rPr sz="900" b="1">
+            <a:off x="548640" y="3008376"/>
+            <a:ext cx="5120640" cy="411480"/>
+          </a:xfrm>
+          <a:prstGeom prst="rect">
+            <a:avLst/>
+          </a:prstGeom>
+          <a:noFill/>
+        </p:spPr>
+        <p:txBody>
+          <a:bodyPr wrap="square">
+            <a:spAutoFit/>
+          </a:bodyPr>
+          <a:lstStyle/>
+          <a:p>
+            <a:pPr algn="l">
+              <a:spcAft>
+                <a:spcPts val="0"/>
+              </a:spcAft>
+            </a:pPr>
+            <a:r>
+              <a:rPr sz="1000" b="1">
                 <a:solidFill>
                   <a:srgbClr val="FFFFFF"/>
                 </a:solidFill>
               </a:rPr>
-              <a:t>→  Grype (Scan)</a:t>
-            </a:r>
-          </a:p>
-          <a:p>
-            <a:pPr algn="l">
-              <a:spcAft>
-                <a:spcPts val="0"/>
-              </a:spcAft>
-            </a:pPr>
-            <a:r>
-              <a:rPr sz="700" b="0">
+              <a:t>Grype → Scan</a:t>
+            </a:r>
+            <a:r>
+              <a:rPr sz="800" b="0">
                 <a:solidFill>
                   <a:srgbClr val="BBBBBB"/>
                 </a:solidFill>
               </a:rPr>
-              <a:t>Scans SBOM against
-known vulnerability DBs</a:t>
+              <a:t>  —  Scans SBOM against known vulnerability databases</a:t>
             </a:r>
           </a:p>
         </p:txBody>
@@ -3652,8 +3628,8 @@
         </p:nvSpPr>
         <p:spPr>
           <a:xfrm>
-            <a:off x="8412480" y="1920240"/>
-            <a:ext cx="2560320" cy="777240"/>
+            <a:off x="457200" y="3529584"/>
+            <a:ext cx="5303520" cy="502920"/>
           </a:xfrm>
           <a:prstGeom prst="roundRect">
             <a:avLst/>
@@ -3695,48 +3671,40 @@
         </p:nvSpPr>
         <p:spPr>
           <a:xfrm>
-            <a:off x="8503920" y="1965960"/>
-            <a:ext cx="2377440" cy="685800"/>
-          </a:xfrm>
-          <a:prstGeom prst="rect">
-            <a:avLst/>
-          </a:prstGeom>
-          <a:noFill/>
-        </p:spPr>
-        <p:txBody>
-          <a:bodyPr wrap="square">
-            <a:spAutoFit/>
-          </a:bodyPr>
-          <a:lstStyle/>
-          <a:p>
-            <a:pPr algn="l">
-              <a:spcAft>
-                <a:spcPts val="100"/>
-              </a:spcAft>
-            </a:pPr>
-            <a:r>
-              <a:rPr sz="900" b="1">
+            <a:off x="548640" y="3575304"/>
+            <a:ext cx="5120640" cy="411480"/>
+          </a:xfrm>
+          <a:prstGeom prst="rect">
+            <a:avLst/>
+          </a:prstGeom>
+          <a:noFill/>
+        </p:spPr>
+        <p:txBody>
+          <a:bodyPr wrap="square">
+            <a:spAutoFit/>
+          </a:bodyPr>
+          <a:lstStyle/>
+          <a:p>
+            <a:pPr algn="l">
+              <a:spcAft>
+                <a:spcPts val="0"/>
+              </a:spcAft>
+            </a:pPr>
+            <a:r>
+              <a:rPr sz="1000" b="1">
                 <a:solidFill>
                   <a:srgbClr val="FFFFFF"/>
                 </a:solidFill>
               </a:rPr>
-              <a:t>→  Policy Gate</a:t>
-            </a:r>
-          </a:p>
-          <a:p>
-            <a:pPr algn="l">
-              <a:spcAft>
-                <a:spcPts val="0"/>
-              </a:spcAft>
-            </a:pPr>
-            <a:r>
-              <a:rPr sz="700" b="0">
+              <a:t>Policy Gate</a:t>
+            </a:r>
+            <a:r>
+              <a:rPr sz="800" b="0">
                 <a:solidFill>
                   <a:srgbClr val="BBBBBB"/>
                 </a:solidFill>
               </a:rPr>
-              <a:t>Fail on Critical/High
-Pass with advisory</a:t>
+              <a:t>  —  PASS / WARNING / FAIL based on severity thresholds</a:t>
             </a:r>
           </a:p>
         </p:txBody>
@@ -3749,8 +3717,8 @@
         </p:nvSpPr>
         <p:spPr>
           <a:xfrm>
-            <a:off x="731520" y="3017520"/>
-            <a:ext cx="4572000" cy="274320"/>
+            <a:off x="731520" y="4206240"/>
+            <a:ext cx="5029200" cy="274320"/>
           </a:xfrm>
           <a:prstGeom prst="rect">
             <a:avLst/>
@@ -3787,47 +3755,40 @@
         </p:nvSpPr>
         <p:spPr>
           <a:xfrm>
-            <a:off x="731520" y="3383280"/>
-            <a:ext cx="5029200" cy="548640"/>
-          </a:xfrm>
-          <a:prstGeom prst="rect">
-            <a:avLst/>
-          </a:prstGeom>
-          <a:noFill/>
-        </p:spPr>
-        <p:txBody>
-          <a:bodyPr wrap="square">
-            <a:spAutoFit/>
-          </a:bodyPr>
-          <a:lstStyle/>
-          <a:p>
-            <a:pPr algn="l">
-              <a:spcAft>
-                <a:spcPts val="200"/>
-              </a:spcAft>
-            </a:pPr>
-            <a:r>
-              <a:rPr sz="1100" b="1">
+            <a:off x="731520" y="4572000"/>
+            <a:ext cx="5029200" cy="320040"/>
+          </a:xfrm>
+          <a:prstGeom prst="rect">
+            <a:avLst/>
+          </a:prstGeom>
+          <a:noFill/>
+        </p:spPr>
+        <p:txBody>
+          <a:bodyPr wrap="square">
+            <a:spAutoFit/>
+          </a:bodyPr>
+          <a:lstStyle/>
+          <a:p>
+            <a:pPr algn="l">
+              <a:spcAft>
+                <a:spcPts val="0"/>
+              </a:spcAft>
+            </a:pPr>
+            <a:r>
+              <a:rPr sz="1000" b="1">
                 <a:solidFill>
                   <a:srgbClr val="0069B0"/>
                 </a:solidFill>
               </a:rPr>
               <a:t>SBOM (CycloneDX)</a:t>
             </a:r>
-          </a:p>
-          <a:p>
-            <a:pPr algn="l">
-              <a:spcAft>
-                <a:spcPts val="0"/>
-              </a:spcAft>
-            </a:pPr>
             <a:r>
               <a:rPr sz="900" b="0">
                 <a:solidFill>
                   <a:srgbClr val="555555"/>
                 </a:solidFill>
               </a:rPr>
-              <a:t>Complete inventory of every software component, version, and source in the deployed artifact.</a:t>
+              <a:t>  —  Complete component inventory with versions and sources.</a:t>
             </a:r>
           </a:p>
         </p:txBody>
@@ -3840,47 +3801,40 @@
         </p:nvSpPr>
         <p:spPr>
           <a:xfrm>
-            <a:off x="731520" y="3977640"/>
-            <a:ext cx="5029200" cy="548640"/>
-          </a:xfrm>
-          <a:prstGeom prst="rect">
-            <a:avLst/>
-          </a:prstGeom>
-          <a:noFill/>
-        </p:spPr>
-        <p:txBody>
-          <a:bodyPr wrap="square">
-            <a:spAutoFit/>
-          </a:bodyPr>
-          <a:lstStyle/>
-          <a:p>
-            <a:pPr algn="l">
-              <a:spcAft>
-                <a:spcPts val="200"/>
-              </a:spcAft>
-            </a:pPr>
-            <a:r>
-              <a:rPr sz="1100" b="1">
+            <a:off x="731520" y="4919472"/>
+            <a:ext cx="5029200" cy="320040"/>
+          </a:xfrm>
+          <a:prstGeom prst="rect">
+            <a:avLst/>
+          </a:prstGeom>
+          <a:noFill/>
+        </p:spPr>
+        <p:txBody>
+          <a:bodyPr wrap="square">
+            <a:spAutoFit/>
+          </a:bodyPr>
+          <a:lstStyle/>
+          <a:p>
+            <a:pPr algn="l">
+              <a:spcAft>
+                <a:spcPts val="0"/>
+              </a:spcAft>
+            </a:pPr>
+            <a:r>
+              <a:rPr sz="1000" b="1">
                 <a:solidFill>
                   <a:srgbClr val="0069B0"/>
                 </a:solidFill>
               </a:rPr>
               <a:t>Vulnerability Report</a:t>
             </a:r>
-          </a:p>
-          <a:p>
-            <a:pPr algn="l">
-              <a:spcAft>
-                <a:spcPts val="0"/>
-              </a:spcAft>
-            </a:pPr>
             <a:r>
               <a:rPr sz="900" b="0">
                 <a:solidFill>
                   <a:srgbClr val="555555"/>
                 </a:solidFill>
               </a:rPr>
-              <a:t>CVE-level findings with severity, affected package, version, and fix availability.</a:t>
+              <a:t>  —  CVE-level findings with severity and fix availability.</a:t>
             </a:r>
           </a:p>
         </p:txBody>
@@ -3893,47 +3847,40 @@
         </p:nvSpPr>
         <p:spPr>
           <a:xfrm>
-            <a:off x="731520" y="4572000"/>
-            <a:ext cx="5029200" cy="548640"/>
-          </a:xfrm>
-          <a:prstGeom prst="rect">
-            <a:avLst/>
-          </a:prstGeom>
-          <a:noFill/>
-        </p:spPr>
-        <p:txBody>
-          <a:bodyPr wrap="square">
-            <a:spAutoFit/>
-          </a:bodyPr>
-          <a:lstStyle/>
-          <a:p>
-            <a:pPr algn="l">
-              <a:spcAft>
-                <a:spcPts val="200"/>
-              </a:spcAft>
-            </a:pPr>
-            <a:r>
-              <a:rPr sz="1100" b="1">
+            <a:off x="731520" y="5266944"/>
+            <a:ext cx="5029200" cy="320040"/>
+          </a:xfrm>
+          <a:prstGeom prst="rect">
+            <a:avLst/>
+          </a:prstGeom>
+          <a:noFill/>
+        </p:spPr>
+        <p:txBody>
+          <a:bodyPr wrap="square">
+            <a:spAutoFit/>
+          </a:bodyPr>
+          <a:lstStyle/>
+          <a:p>
+            <a:pPr algn="l">
+              <a:spcAft>
+                <a:spcPts val="0"/>
+              </a:spcAft>
+            </a:pPr>
+            <a:r>
+              <a:rPr sz="1000" b="1">
                 <a:solidFill>
                   <a:srgbClr val="0069B0"/>
                 </a:solidFill>
               </a:rPr>
               <a:t>Policy Verdict</a:t>
             </a:r>
-          </a:p>
-          <a:p>
-            <a:pPr algn="l">
-              <a:spcAft>
-                <a:spcPts val="0"/>
-              </a:spcAft>
-            </a:pPr>
             <a:r>
               <a:rPr sz="900" b="0">
                 <a:solidFill>
                   <a:srgbClr val="555555"/>
                 </a:solidFill>
               </a:rPr>
-              <a:t>PASS / WARNING / FAIL based on configurable severity thresholds. Blocks deployment on Critical/High.</a:t>
+              <a:t>  —  Blocks deployment on Critical/High findings.</a:t>
             </a:r>
           </a:p>
         </p:txBody>
@@ -3946,47 +3893,40 @@
         </p:nvSpPr>
         <p:spPr>
           <a:xfrm>
-            <a:off x="731520" y="5166360"/>
-            <a:ext cx="5029200" cy="548640"/>
-          </a:xfrm>
-          <a:prstGeom prst="rect">
-            <a:avLst/>
-          </a:prstGeom>
-          <a:noFill/>
-        </p:spPr>
-        <p:txBody>
-          <a:bodyPr wrap="square">
-            <a:spAutoFit/>
-          </a:bodyPr>
-          <a:lstStyle/>
-          <a:p>
-            <a:pPr algn="l">
-              <a:spcAft>
-                <a:spcPts val="200"/>
-              </a:spcAft>
-            </a:pPr>
-            <a:r>
-              <a:rPr sz="1100" b="1">
+            <a:off x="731520" y="5614416"/>
+            <a:ext cx="5029200" cy="320040"/>
+          </a:xfrm>
+          <a:prstGeom prst="rect">
+            <a:avLst/>
+          </a:prstGeom>
+          <a:noFill/>
+        </p:spPr>
+        <p:txBody>
+          <a:bodyPr wrap="square">
+            <a:spAutoFit/>
+          </a:bodyPr>
+          <a:lstStyle/>
+          <a:p>
+            <a:pPr algn="l">
+              <a:spcAft>
+                <a:spcPts val="0"/>
+              </a:spcAft>
+            </a:pPr>
+            <a:r>
+              <a:rPr sz="1000" b="1">
                 <a:solidFill>
                   <a:srgbClr val="0069B0"/>
                 </a:solidFill>
               </a:rPr>
               <a:t>Severity Dashboard</a:t>
             </a:r>
-          </a:p>
-          <a:p>
-            <a:pPr algn="l">
-              <a:spcAft>
-                <a:spcPts val="0"/>
-              </a:spcAft>
-            </a:pPr>
             <a:r>
               <a:rPr sz="900" b="0">
                 <a:solidFill>
                   <a:srgbClr val="555555"/>
                 </a:solidFill>
               </a:rPr>
-              <a:t>Visual breakdown by severity level in the Deployment Pipeline Report — filterable, searchable, CSV-exportable.</a:t>
+              <a:t>  —  Visual breakdown in the Deployment Pipeline Report.</a:t>
             </a:r>
           </a:p>
         </p:txBody>
@@ -4000,7 +3940,7 @@
         <p:spPr>
           <a:xfrm>
             <a:off x="6217920" y="1371600"/>
-            <a:ext cx="5303520" cy="4572000"/>
+            <a:ext cx="5486400" cy="4572000"/>
           </a:xfrm>
           <a:prstGeom prst="roundRect">
             <a:avLst/>
@@ -4044,27 +3984,27 @@
         </p:nvSpPr>
         <p:spPr>
           <a:xfrm>
-            <a:off x="6400800" y="1554480"/>
-            <a:ext cx="4937760" cy="274320"/>
-          </a:xfrm>
-          <a:prstGeom prst="rect">
-            <a:avLst/>
-          </a:prstGeom>
-          <a:noFill/>
-        </p:spPr>
-        <p:txBody>
-          <a:bodyPr wrap="square">
-            <a:spAutoFit/>
-          </a:bodyPr>
-          <a:lstStyle/>
-          <a:p>
-            <a:pPr algn="l">
-              <a:spcAft>
-                <a:spcPts val="0"/>
-              </a:spcAft>
-            </a:pPr>
-            <a:r>
-              <a:rPr sz="1600" b="1">
+            <a:off x="6400800" y="1508760"/>
+            <a:ext cx="5120640" cy="274320"/>
+          </a:xfrm>
+          <a:prstGeom prst="rect">
+            <a:avLst/>
+          </a:prstGeom>
+          <a:noFill/>
+        </p:spPr>
+        <p:txBody>
+          <a:bodyPr wrap="square">
+            <a:spAutoFit/>
+          </a:bodyPr>
+          <a:lstStyle/>
+          <a:p>
+            <a:pPr algn="l">
+              <a:spcAft>
+                <a:spcPts val="0"/>
+              </a:spcAft>
+            </a:pPr>
+            <a:r>
+              <a:rPr sz="1400" b="1">
                 <a:solidFill>
                   <a:srgbClr val="0D1B2A"/>
                 </a:solidFill>
@@ -4082,8 +4022,8 @@
         </p:nvSpPr>
         <p:spPr>
           <a:xfrm>
-            <a:off x="6400800" y="2011680"/>
-            <a:ext cx="4937760" cy="731520"/>
+            <a:off x="6400800" y="1965960"/>
+            <a:ext cx="5120640" cy="640080"/>
           </a:xfrm>
           <a:prstGeom prst="rect">
             <a:avLst/>
@@ -4117,12 +4057,12 @@
               </a:spcAft>
             </a:pPr>
             <a:r>
-              <a:rPr sz="800" b="0">
+              <a:rPr sz="900" b="0">
                 <a:solidFill>
                   <a:srgbClr val="555555"/>
                 </a:solidFill>
               </a:rPr>
-              <a:t>Federal mandate requiring SBOMs for all software sold to the government. The pipeline generates CycloneDX SBOMs automatically on every build.</a:t>
+              <a:t>Federal mandate requiring SBOMs for all software sold to the government.</a:t>
             </a:r>
           </a:p>
         </p:txBody>
@@ -4135,8 +4075,8 @@
         </p:nvSpPr>
         <p:spPr>
           <a:xfrm>
-            <a:off x="6400800" y="2788920"/>
-            <a:ext cx="4937760" cy="731520"/>
+            <a:off x="6400800" y="2606040"/>
+            <a:ext cx="5120640" cy="640080"/>
           </a:xfrm>
           <a:prstGeom prst="rect">
             <a:avLst/>
@@ -4170,12 +4110,12 @@
               </a:spcAft>
             </a:pPr>
             <a:r>
-              <a:rPr sz="800" b="0">
+              <a:rPr sz="900" b="0">
                 <a:solidFill>
                   <a:srgbClr val="555555"/>
                 </a:solidFill>
               </a:rPr>
-              <a:t>Secure Software Development Framework requires vulnerability scanning and remediation tracking. Grype scan results are stored per build as immutable CI artifacts.</a:t>
+              <a:t>Requires vulnerability scanning and remediation tracking per build.</a:t>
             </a:r>
           </a:p>
         </p:txBody>
@@ -4188,8 +4128,8 @@
         </p:nvSpPr>
         <p:spPr>
           <a:xfrm>
-            <a:off x="6400800" y="3566160"/>
-            <a:ext cx="4937760" cy="731520"/>
+            <a:off x="6400800" y="3246120"/>
+            <a:ext cx="5120640" cy="640080"/>
           </a:xfrm>
           <a:prstGeom prst="rect">
             <a:avLst/>
@@ -4223,12 +4163,12 @@
               </a:spcAft>
             </a:pPr>
             <a:r>
-              <a:rPr sz="800" b="0">
+              <a:rPr sz="900" b="0">
                 <a:solidFill>
                   <a:srgbClr val="555555"/>
                 </a:solidFill>
               </a:rPr>
-              <a:t>Every component in the deployed product is inventoried with name, version, type, and package URL. No hidden dependencies.</a:t>
+              <a:t>Every component inventoried with name, version, type, and package URL.</a:t>
             </a:r>
           </a:p>
         </p:txBody>
@@ -4241,8 +4181,8 @@
         </p:nvSpPr>
         <p:spPr>
           <a:xfrm>
-            <a:off x="6400800" y="4343400"/>
-            <a:ext cx="4937760" cy="731520"/>
+            <a:off x="6400800" y="3886200"/>
+            <a:ext cx="5120640" cy="640080"/>
           </a:xfrm>
           <a:prstGeom prst="rect">
             <a:avLst/>
@@ -4276,12 +4216,12 @@
               </a:spcAft>
             </a:pPr>
             <a:r>
-              <a:rPr sz="800" b="0">
+              <a:rPr sz="900" b="0">
                 <a:solidFill>
                   <a:srgbClr val="555555"/>
                 </a:solidFill>
               </a:rPr>
-              <a:t>SBOM + vulnerability scan results are included in the deployment evidence bundle. No manual assembly — generated fresh on every pipeline run.</a:t>
+              <a:t>SBOM + scan results included in evidence bundle. No manual assembly.</a:t>
             </a:r>
           </a:p>
         </p:txBody>
@@ -4294,8 +4234,8 @@
         </p:nvSpPr>
         <p:spPr>
           <a:xfrm>
-            <a:off x="6400800" y="5120640"/>
-            <a:ext cx="4937760" cy="731520"/>
+            <a:off x="6400800" y="4526280"/>
+            <a:ext cx="5120640" cy="640080"/>
           </a:xfrm>
           <a:prstGeom prst="rect">
             <a:avLst/>
@@ -4329,12 +4269,12 @@
               </a:spcAft>
             </a:pPr>
             <a:r>
-              <a:rPr sz="800" b="0">
+              <a:rPr sz="900" b="0">
                 <a:solidFill>
                   <a:srgbClr val="555555"/>
                 </a:solidFill>
               </a:rPr>
-              <a:t>Grype vulnerability database can be mirrored internally. Syft runs against local container images. No internet required at scan time.</a:t>
+              <a:t>Grype DB mirrored internally. Syft runs against local images. No internet.</a:t>
             </a:r>
           </a:p>
         </p:txBody>
@@ -4347,8 +4287,8 @@
         </p:nvSpPr>
         <p:spPr>
           <a:xfrm>
-            <a:off x="457200" y="6035040"/>
-            <a:ext cx="11247120" cy="411480"/>
+            <a:off x="457200" y="6126480"/>
+            <a:ext cx="11247120" cy="365760"/>
           </a:xfrm>
           <a:prstGeom prst="roundRect">
             <a:avLst/>
@@ -4392,8 +4332,8 @@
         </p:nvSpPr>
         <p:spPr>
           <a:xfrm>
-            <a:off x="731520" y="6089904"/>
-            <a:ext cx="10789920" cy="320040"/>
+            <a:off x="731520" y="6172200"/>
+            <a:ext cx="10789920" cy="274320"/>
           </a:xfrm>
           <a:prstGeom prst="rect">
             <a:avLst/>
@@ -4412,7 +4352,7 @@
               </a:spcAft>
             </a:pPr>
             <a:r>
-              <a:rPr sz="1100" b="1">
+              <a:rPr sz="1000" b="1">
                 <a:solidFill>
                   <a:srgbClr val="0D1B2A"/>
                 </a:solidFill>

--- a/docs/presentations/MBSE_Pipeline_Executive_Brief.pptx
+++ b/docs/presentations/MBSE_Pipeline_Executive_Brief.pptx
@@ -3635,7 +3635,7 @@
             <a:avLst/>
           </a:prstGeom>
           <a:solidFill>
-            <a:srgbClr val="B45309"/>
+            <a:srgbClr val="004A87"/>
           </a:solidFill>
           <a:ln>
             <a:noFill/>
@@ -7115,7 +7115,7 @@
             <a:avLst/>
           </a:prstGeom>
           <a:solidFill>
-            <a:srgbClr val="B45309"/>
+            <a:srgbClr val="004A87"/>
           </a:solidFill>
           <a:ln>
             <a:noFill/>
@@ -12954,7 +12954,7 @@
             <a:avLst/>
           </a:prstGeom>
           <a:solidFill>
-            <a:srgbClr val="B45309"/>
+            <a:srgbClr val="004A87"/>
           </a:solidFill>
           <a:ln>
             <a:noFill/>
@@ -13051,7 +13051,7 @@
             <a:avLst/>
           </a:prstGeom>
           <a:solidFill>
-            <a:srgbClr val="B45309"/>
+            <a:srgbClr val="004A87"/>
           </a:solidFill>
           <a:ln>
             <a:noFill/>
@@ -13148,7 +13148,7 @@
             <a:avLst/>
           </a:prstGeom>
           <a:solidFill>
-            <a:srgbClr val="B45309"/>
+            <a:srgbClr val="004A87"/>
           </a:solidFill>
           <a:ln>
             <a:noFill/>

--- a/docs/presentations/MBSE_Pipeline_Executive_Brief.pptx
+++ b/docs/presentations/MBSE_Pipeline_Executive_Brief.pptx
@@ -6280,7 +6280,7 @@
                   <a:srgbClr val="0D1B2A"/>
                 </a:solidFill>
               </a:rPr>
-              <a:t>The Solution: Two Pipelines, One Thread</a:t>
+              <a:t>The Solution: Gherkin as the Common Language</a:t>
             </a:r>
           </a:p>
         </p:txBody>
@@ -6294,7 +6294,7 @@
         <p:spPr>
           <a:xfrm>
             <a:off x="731520" y="868680"/>
-            <a:ext cx="9144000" cy="320040"/>
+            <a:ext cx="10058400" cy="320040"/>
           </a:xfrm>
           <a:prstGeom prst="rect">
             <a:avLst/>
@@ -6318,7 +6318,7 @@
                   <a:srgbClr val="555555"/>
                 </a:solidFill>
               </a:rPr>
-              <a:t>A single automated thread connects the Cameo model to the deployed product — with quality gates enforcing traceability at every stage.</a:t>
+              <a:t>Systems Engineers and developers communicate through executable specifications — Gherkin scenarios that trace directly to Cameo requirements and run as automated tests.</a:t>
             </a:r>
           </a:p>
         </p:txBody>
@@ -6332,7 +6332,7 @@
         <p:spPr>
           <a:xfrm>
             <a:off x="457200" y="1554480"/>
-            <a:ext cx="11247120" cy="1645920"/>
+            <a:ext cx="3200400" cy="2560320"/>
           </a:xfrm>
           <a:prstGeom prst="roundRect">
             <a:avLst/>
@@ -6376,46 +6376,69 @@
         </p:nvSpPr>
         <p:spPr>
           <a:xfrm>
-            <a:off x="640080" y="1627632"/>
-            <a:ext cx="3657600" cy="457200"/>
-          </a:xfrm>
-          <a:prstGeom prst="rect">
-            <a:avLst/>
-          </a:prstGeom>
-          <a:noFill/>
-        </p:spPr>
-        <p:txBody>
-          <a:bodyPr wrap="square">
-            <a:spAutoFit/>
-          </a:bodyPr>
-          <a:lstStyle/>
-          <a:p>
-            <a:pPr algn="l">
-              <a:spcAft>
-                <a:spcPts val="100"/>
-              </a:spcAft>
-            </a:pPr>
-            <a:r>
-              <a:rPr sz="900" b="1">
+            <a:off x="640080" y="1645920"/>
+            <a:ext cx="2834640" cy="274320"/>
+          </a:xfrm>
+          <a:prstGeom prst="rect">
+            <a:avLst/>
+          </a:prstGeom>
+          <a:noFill/>
+        </p:spPr>
+        <p:txBody>
+          <a:bodyPr wrap="square">
+            <a:spAutoFit/>
+          </a:bodyPr>
+          <a:lstStyle/>
+          <a:p>
+            <a:pPr algn="l">
+              <a:spcAft>
+                <a:spcPts val="0"/>
+              </a:spcAft>
+            </a:pPr>
+            <a:r>
+              <a:rPr sz="1400" b="1">
+                <a:solidFill>
+                  <a:srgbClr val="0D1B2A"/>
+                </a:solidFill>
+              </a:rPr>
+              <a:t>Cameo Model</a:t>
+            </a:r>
+          </a:p>
+        </p:txBody>
+      </p:sp>
+      <p:sp>
+        <p:nvSpPr>
+          <p:cNvPr id="6" name="TextBox 5"/>
+          <p:cNvSpPr txBox="1"/>
+          <p:nvPr/>
+        </p:nvSpPr>
+        <p:spPr>
+          <a:xfrm>
+            <a:off x="640080" y="1965960"/>
+            <a:ext cx="2834640" cy="228600"/>
+          </a:xfrm>
+          <a:prstGeom prst="rect">
+            <a:avLst/>
+          </a:prstGeom>
+          <a:noFill/>
+        </p:spPr>
+        <p:txBody>
+          <a:bodyPr wrap="square">
+            <a:spAutoFit/>
+          </a:bodyPr>
+          <a:lstStyle/>
+          <a:p>
+            <a:pPr algn="l">
+              <a:spcAft>
+                <a:spcPts val="0"/>
+              </a:spcAft>
+            </a:pPr>
+            <a:r>
+              <a:rPr sz="900" b="0">
                 <a:solidFill>
                   <a:srgbClr val="0099D6"/>
                 </a:solidFill>
               </a:rPr>
-              <a:t>MODEL PIPELINE  •  cameo-model-pipeline</a:t>
-            </a:r>
-          </a:p>
-          <a:p>
-            <a:pPr algn="l">
-              <a:spcAft>
-                <a:spcPts val="0"/>
-              </a:spcAft>
-            </a:pPr>
-            <a:r>
-              <a:rPr sz="800" b="0">
-                <a:solidFill>
-                  <a:srgbClr val="888888"/>
-                </a:solidFill>
-              </a:rPr>
               <a:t>Owned by Systems Engineers</a:t>
             </a:r>
           </a:p>
@@ -6423,97 +6446,83 @@
       </p:sp>
       <p:sp>
         <p:nvSpPr>
-          <p:cNvPr id="6" name="Rounded Rectangle 5"/>
-          <p:cNvSpPr/>
-          <p:nvPr/>
-        </p:nvSpPr>
-        <p:spPr>
-          <a:xfrm>
-            <a:off x="640080" y="2194560"/>
-            <a:ext cx="2103120" cy="731520"/>
-          </a:xfrm>
-          <a:prstGeom prst="roundRect">
-            <a:avLst/>
-          </a:prstGeom>
-          <a:solidFill>
-            <a:srgbClr val="003057"/>
-          </a:solidFill>
-          <a:ln>
-            <a:noFill/>
-          </a:ln>
-        </p:spPr>
-        <p:style>
-          <a:lnRef idx="1">
-            <a:schemeClr val="accent1"/>
-          </a:lnRef>
-          <a:fillRef idx="3">
-            <a:schemeClr val="accent1"/>
-          </a:fillRef>
-          <a:effectRef idx="2">
-            <a:schemeClr val="accent1"/>
-          </a:effectRef>
-          <a:fontRef idx="minor">
-            <a:schemeClr val="lt1"/>
-          </a:fontRef>
-        </p:style>
-        <p:txBody>
-          <a:bodyPr rtlCol="0" anchor="ctr"/>
-          <a:lstStyle/>
-          <a:p>
-            <a:pPr algn="ctr"/>
-          </a:p>
-        </p:txBody>
-      </p:sp>
-      <p:sp>
-        <p:nvSpPr>
           <p:cNvPr id="7" name="TextBox 6"/>
           <p:cNvSpPr txBox="1"/>
           <p:nvPr/>
         </p:nvSpPr>
         <p:spPr>
           <a:xfrm>
-            <a:off x="731520" y="2267712"/>
-            <a:ext cx="1920240" cy="640080"/>
-          </a:xfrm>
-          <a:prstGeom prst="rect">
-            <a:avLst/>
-          </a:prstGeom>
-          <a:noFill/>
-        </p:spPr>
-        <p:txBody>
-          <a:bodyPr wrap="square">
-            <a:spAutoFit/>
-          </a:bodyPr>
-          <a:lstStyle/>
-          <a:p>
-            <a:pPr algn="l">
-              <a:spcAft>
-                <a:spcPts val="100"/>
-              </a:spcAft>
-            </a:pPr>
-            <a:r>
-              <a:rPr sz="900" b="1">
-                <a:solidFill>
-                  <a:srgbClr val="FFFFFF"/>
-                </a:solidFill>
-              </a:rPr>
-              <a:t>Cameo Model</a:t>
-            </a:r>
-          </a:p>
-          <a:p>
-            <a:pPr algn="l">
-              <a:spcAft>
-                <a:spcPts val="0"/>
-              </a:spcAft>
-            </a:pPr>
-            <a:r>
-              <a:rPr sz="700" b="0">
-                <a:solidFill>
-                  <a:srgbClr val="BBBBBB"/>
-                </a:solidFill>
-              </a:rPr>
-              <a:t>Author requirements
-&amp; ICD in the model</a:t>
+            <a:off x="640080" y="2331720"/>
+            <a:ext cx="2834640" cy="1645920"/>
+          </a:xfrm>
+          <a:prstGeom prst="rect">
+            <a:avLst/>
+          </a:prstGeom>
+          <a:noFill/>
+        </p:spPr>
+        <p:txBody>
+          <a:bodyPr wrap="square">
+            <a:spAutoFit/>
+          </a:bodyPr>
+          <a:lstStyle/>
+          <a:p>
+            <a:pPr algn="l">
+              <a:spcAft>
+                <a:spcPts val="500"/>
+              </a:spcAft>
+            </a:pPr>
+            <a:r>
+              <a:rPr sz="900" b="0">
+                <a:solidFill>
+                  <a:srgbClr val="555555"/>
+                </a:solidFill>
+              </a:rPr>
+              <a:t>•  Requirements with verification criteria</a:t>
+            </a:r>
+          </a:p>
+          <a:p>
+            <a:pPr algn="l">
+              <a:spcAft>
+                <a:spcPts val="500"/>
+              </a:spcAft>
+            </a:pPr>
+            <a:r>
+              <a:rPr sz="900" b="0">
+                <a:solidFill>
+                  <a:srgbClr val="555555"/>
+                </a:solidFill>
+              </a:rPr>
+              <a:t>•  ICD definitions and message types</a:t>
+            </a:r>
+          </a:p>
+          <a:p>
+            <a:pPr algn="l">
+              <a:spcAft>
+                <a:spcPts val="500"/>
+              </a:spcAft>
+            </a:pPr>
+            <a:r>
+              <a:rPr sz="900" b="0">
+                <a:solidFill>
+                  <a:srgbClr val="555555"/>
+                </a:solidFill>
+              </a:rPr>
+              <a:t>•  Criteria text drives test intent</a:t>
+            </a:r>
+          </a:p>
+          <a:p>
+            <a:pPr algn="l">
+              <a:spcAft>
+                <a:spcPts val="500"/>
+              </a:spcAft>
+            </a:pPr>
+            <a:r>
+              <a:rPr sz="900" b="0">
+                <a:solidFill>
+                  <a:srgbClr val="555555"/>
+                </a:solidFill>
+              </a:rPr>
+              <a:t>•  Model changes trigger drift detection</a:t>
             </a:r>
           </a:p>
         </p:txBody>
@@ -6526,105 +6535,8 @@
         </p:nvSpPr>
         <p:spPr>
           <a:xfrm>
-            <a:off x="2880360" y="2194560"/>
-            <a:ext cx="2103120" cy="731520"/>
-          </a:xfrm>
-          <a:prstGeom prst="roundRect">
-            <a:avLst/>
-          </a:prstGeom>
-          <a:solidFill>
-            <a:srgbClr val="004A87"/>
-          </a:solidFill>
-          <a:ln>
-            <a:noFill/>
-          </a:ln>
-        </p:spPr>
-        <p:style>
-          <a:lnRef idx="1">
-            <a:schemeClr val="accent1"/>
-          </a:lnRef>
-          <a:fillRef idx="3">
-            <a:schemeClr val="accent1"/>
-          </a:fillRef>
-          <a:effectRef idx="2">
-            <a:schemeClr val="accent1"/>
-          </a:effectRef>
-          <a:fontRef idx="minor">
-            <a:schemeClr val="lt1"/>
-          </a:fontRef>
-        </p:style>
-        <p:txBody>
-          <a:bodyPr rtlCol="0" anchor="ctr"/>
-          <a:lstStyle/>
-          <a:p>
-            <a:pPr algn="ctr"/>
-          </a:p>
-        </p:txBody>
-      </p:sp>
-      <p:sp>
-        <p:nvSpPr>
-          <p:cNvPr id="9" name="TextBox 8"/>
-          <p:cNvSpPr txBox="1"/>
-          <p:nvPr/>
-        </p:nvSpPr>
-        <p:spPr>
-          <a:xfrm>
-            <a:off x="2971800" y="2267712"/>
-            <a:ext cx="1920240" cy="640080"/>
-          </a:xfrm>
-          <a:prstGeom prst="rect">
-            <a:avLst/>
-          </a:prstGeom>
-          <a:noFill/>
-        </p:spPr>
-        <p:txBody>
-          <a:bodyPr wrap="square">
-            <a:spAutoFit/>
-          </a:bodyPr>
-          <a:lstStyle/>
-          <a:p>
-            <a:pPr algn="l">
-              <a:spcAft>
-                <a:spcPts val="100"/>
-              </a:spcAft>
-            </a:pPr>
-            <a:r>
-              <a:rPr sz="900" b="1">
-                <a:solidFill>
-                  <a:srgbClr val="FFFFFF"/>
-                </a:solidFill>
-              </a:rPr>
-              <a:t>→  Export &amp; Validate</a:t>
-            </a:r>
-          </a:p>
-          <a:p>
-            <a:pPr algn="l">
-              <a:spcAft>
-                <a:spcPts val="0"/>
-              </a:spcAft>
-            </a:pPr>
-            <a:r>
-              <a:rPr sz="700" b="0">
-                <a:solidFill>
-                  <a:srgbClr val="BBBBBB"/>
-                </a:solidFill>
-              </a:rPr>
-              <a:t>Schema validation
-of JSON exports</a:t>
-            </a:r>
-          </a:p>
-        </p:txBody>
-      </p:sp>
-      <p:sp>
-        <p:nvSpPr>
-          <p:cNvPr id="10" name="Rounded Rectangle 9"/>
-          <p:cNvSpPr/>
-          <p:nvPr/>
-        </p:nvSpPr>
-        <p:spPr>
-          <a:xfrm>
-            <a:off x="5120640" y="2194560"/>
-            <a:ext cx="2103120" cy="731520"/>
+            <a:off x="4023360" y="1371600"/>
+            <a:ext cx="4114800" cy="2926080"/>
           </a:xfrm>
           <a:prstGeom prst="roundRect">
             <a:avLst/>
@@ -6660,14 +6572,90 @@
       </p:sp>
       <p:sp>
         <p:nvSpPr>
+          <p:cNvPr id="9" name="TextBox 8"/>
+          <p:cNvSpPr txBox="1"/>
+          <p:nvPr/>
+        </p:nvSpPr>
+        <p:spPr>
+          <a:xfrm>
+            <a:off x="4206240" y="1463040"/>
+            <a:ext cx="3749039" cy="274320"/>
+          </a:xfrm>
+          <a:prstGeom prst="rect">
+            <a:avLst/>
+          </a:prstGeom>
+          <a:noFill/>
+        </p:spPr>
+        <p:txBody>
+          <a:bodyPr wrap="square">
+            <a:spAutoFit/>
+          </a:bodyPr>
+          <a:lstStyle/>
+          <a:p>
+            <a:pPr algn="ctr">
+              <a:spcAft>
+                <a:spcPts val="0"/>
+              </a:spcAft>
+            </a:pPr>
+            <a:r>
+              <a:rPr sz="1600" b="1">
+                <a:solidFill>
+                  <a:srgbClr val="FFFFFF"/>
+                </a:solidFill>
+              </a:rPr>
+              <a:t>Gherkin Specifications</a:t>
+            </a:r>
+          </a:p>
+        </p:txBody>
+      </p:sp>
+      <p:sp>
+        <p:nvSpPr>
+          <p:cNvPr id="10" name="TextBox 9"/>
+          <p:cNvSpPr txBox="1"/>
+          <p:nvPr/>
+        </p:nvSpPr>
+        <p:spPr>
+          <a:xfrm>
+            <a:off x="4206240" y="1783080"/>
+            <a:ext cx="3749039" cy="228600"/>
+          </a:xfrm>
+          <a:prstGeom prst="rect">
+            <a:avLst/>
+          </a:prstGeom>
+          <a:noFill/>
+        </p:spPr>
+        <p:txBody>
+          <a:bodyPr wrap="square">
+            <a:spAutoFit/>
+          </a:bodyPr>
+          <a:lstStyle/>
+          <a:p>
+            <a:pPr algn="ctr">
+              <a:spcAft>
+                <a:spcPts val="0"/>
+              </a:spcAft>
+            </a:pPr>
+            <a:r>
+              <a:rPr sz="900" b="0">
+                <a:solidFill>
+                  <a:srgbClr val="BBBBBB"/>
+                </a:solidFill>
+              </a:rPr>
+              <a:t>Co-authored by SEs + Developers</a:t>
+            </a:r>
+          </a:p>
+        </p:txBody>
+      </p:sp>
+      <p:sp>
+        <p:nvSpPr>
           <p:cNvPr id="11" name="TextBox 10"/>
           <p:cNvSpPr txBox="1"/>
           <p:nvPr/>
         </p:nvSpPr>
         <p:spPr>
           <a:xfrm>
-            <a:off x="5212080" y="2267712"/>
-            <a:ext cx="1920240" cy="640080"/>
+            <a:off x="4297680" y="2194560"/>
+            <a:ext cx="3566160" cy="1920240"/>
           </a:xfrm>
           <a:prstGeom prst="rect">
             <a:avLst/>
@@ -6686,28 +6674,117 @@
               </a:spcAft>
             </a:pPr>
             <a:r>
-              <a:rPr sz="900" b="1">
+              <a:rPr sz="800" b="1">
                 <a:solidFill>
                   <a:srgbClr val="FFFFFF"/>
                 </a:solidFill>
               </a:rPr>
-              <a:t>→  Package &amp; Version</a:t>
-            </a:r>
-          </a:p>
-          <a:p>
-            <a:pPr algn="l">
-              <a:spcAft>
-                <a:spcPts val="0"/>
-              </a:spcAft>
-            </a:pPr>
-            <a:r>
-              <a:rPr sz="700" b="0">
+              <a:t>@REQ:SYS-REQ-001</a:t>
+            </a:r>
+          </a:p>
+          <a:p>
+            <a:pPr algn="l">
+              <a:spcAft>
+                <a:spcPts val="100"/>
+              </a:spcAft>
+            </a:pPr>
+            <a:r>
+              <a:rPr sz="800" b="1">
+                <a:solidFill>
+                  <a:srgbClr val="FFFFFF"/>
+                </a:solidFill>
+              </a:rPr>
+              <a:t>Feature: Basic ICD Communications</a:t>
+            </a:r>
+          </a:p>
+          <a:p>
+            <a:pPr algn="l">
+              <a:spcAft>
+                <a:spcPts val="100"/>
+              </a:spcAft>
+            </a:pPr>
+            <a:r>
+              <a:rPr sz="800" b="0">
                 <a:solidFill>
                   <a:srgbClr val="BBBBBB"/>
                 </a:solidFill>
               </a:rPr>
-              <a:t>Semantic versioning
-&amp; artifact assembly</a:t>
+              <a:t> </a:t>
+            </a:r>
+          </a:p>
+          <a:p>
+            <a:pPr algn="l">
+              <a:spcAft>
+                <a:spcPts val="100"/>
+              </a:spcAft>
+            </a:pPr>
+            <a:r>
+              <a:rPr sz="800" b="1">
+                <a:solidFill>
+                  <a:srgbClr val="FFFFFF"/>
+                </a:solidFill>
+              </a:rPr>
+              <a:t>  @VC:SYS-REQ-001-VC-01 @VER:Test</a:t>
+            </a:r>
+          </a:p>
+          <a:p>
+            <a:pPr algn="l">
+              <a:spcAft>
+                <a:spcPts val="100"/>
+              </a:spcAft>
+            </a:pPr>
+            <a:r>
+              <a:rPr sz="800" b="0">
+                <a:solidFill>
+                  <a:srgbClr val="BBBBBB"/>
+                </a:solidFill>
+              </a:rPr>
+              <a:t>  Scenario: Valid ICD response</a:t>
+            </a:r>
+          </a:p>
+          <a:p>
+            <a:pPr algn="l">
+              <a:spcAft>
+                <a:spcPts val="100"/>
+              </a:spcAft>
+            </a:pPr>
+            <a:r>
+              <a:rPr sz="800" b="0">
+                <a:solidFill>
+                  <a:srgbClr val="BBBBBB"/>
+                </a:solidFill>
+              </a:rPr>
+              <a:t>    Given the simulation logs are loaded</a:t>
+            </a:r>
+          </a:p>
+          <a:p>
+            <a:pPr algn="l">
+              <a:spcAft>
+                <a:spcPts val="100"/>
+              </a:spcAft>
+            </a:pPr>
+            <a:r>
+              <a:rPr sz="800" b="0">
+                <a:solidFill>
+                  <a:srgbClr val="BBBBBB"/>
+                </a:solidFill>
+              </a:rPr>
+              <a:t>    Then the logs should contain</a:t>
+            </a:r>
+          </a:p>
+          <a:p>
+            <a:pPr algn="l">
+              <a:spcAft>
+                <a:spcPts val="100"/>
+              </a:spcAft>
+            </a:pPr>
+            <a:r>
+              <a:rPr sz="800" b="0">
+                <a:solidFill>
+                  <a:srgbClr val="BBBBBB"/>
+                </a:solidFill>
+              </a:rPr>
+              <a:t>         "IcdResponse: status=OK"</a:t>
             </a:r>
           </a:p>
         </p:txBody>
@@ -6720,201 +6797,8 @@
         </p:nvSpPr>
         <p:spPr>
           <a:xfrm>
-            <a:off x="7360920" y="2194560"/>
-            <a:ext cx="2103120" cy="731520"/>
-          </a:xfrm>
-          <a:prstGeom prst="roundRect">
-            <a:avLst/>
-          </a:prstGeom>
-          <a:solidFill>
-            <a:srgbClr val="0082CC"/>
-          </a:solidFill>
-          <a:ln>
-            <a:noFill/>
-          </a:ln>
-        </p:spPr>
-        <p:style>
-          <a:lnRef idx="1">
-            <a:schemeClr val="accent1"/>
-          </a:lnRef>
-          <a:fillRef idx="3">
-            <a:schemeClr val="accent1"/>
-          </a:fillRef>
-          <a:effectRef idx="2">
-            <a:schemeClr val="accent1"/>
-          </a:effectRef>
-          <a:fontRef idx="minor">
-            <a:schemeClr val="lt1"/>
-          </a:fontRef>
-        </p:style>
-        <p:txBody>
-          <a:bodyPr rtlCol="0" anchor="ctr"/>
-          <a:lstStyle/>
-          <a:p>
-            <a:pPr algn="ctr"/>
-          </a:p>
-        </p:txBody>
-      </p:sp>
-      <p:sp>
-        <p:nvSpPr>
-          <p:cNvPr id="13" name="TextBox 12"/>
-          <p:cNvSpPr txBox="1"/>
-          <p:nvPr/>
-        </p:nvSpPr>
-        <p:spPr>
-          <a:xfrm>
-            <a:off x="7452360" y="2267712"/>
-            <a:ext cx="1920240" cy="640080"/>
-          </a:xfrm>
-          <a:prstGeom prst="rect">
-            <a:avLst/>
-          </a:prstGeom>
-          <a:noFill/>
-        </p:spPr>
-        <p:txBody>
-          <a:bodyPr wrap="square">
-            <a:spAutoFit/>
-          </a:bodyPr>
-          <a:lstStyle/>
-          <a:p>
-            <a:pPr algn="l">
-              <a:spcAft>
-                <a:spcPts val="100"/>
-              </a:spcAft>
-            </a:pPr>
-            <a:r>
-              <a:rPr sz="900" b="1">
-                <a:solidFill>
-                  <a:srgbClr val="FFFFFF"/>
-                </a:solidFill>
-              </a:rPr>
-              <a:t>→  Publish Artifact</a:t>
-            </a:r>
-          </a:p>
-          <a:p>
-            <a:pPr algn="l">
-              <a:spcAft>
-                <a:spcPts val="0"/>
-              </a:spcAft>
-            </a:pPr>
-            <a:r>
-              <a:rPr sz="700" b="0">
-                <a:solidFill>
-                  <a:srgbClr val="BBBBBB"/>
-                </a:solidFill>
-              </a:rPr>
-              <a:t>Versioned ZIP to
-GitHub Releases</a:t>
-            </a:r>
-          </a:p>
-        </p:txBody>
-      </p:sp>
-      <p:sp>
-        <p:nvSpPr>
-          <p:cNvPr id="14" name="Down Arrow 13"/>
-          <p:cNvSpPr/>
-          <p:nvPr/>
-        </p:nvSpPr>
-        <p:spPr>
-          <a:xfrm>
-            <a:off x="5303520" y="3246120"/>
-            <a:ext cx="457200" cy="457200"/>
-          </a:xfrm>
-          <a:prstGeom prst="downArrow">
-            <a:avLst/>
-          </a:prstGeom>
-          <a:solidFill>
-            <a:srgbClr val="0069B0"/>
-          </a:solidFill>
-          <a:ln>
-            <a:noFill/>
-          </a:ln>
-        </p:spPr>
-        <p:style>
-          <a:lnRef idx="1">
-            <a:schemeClr val="accent1"/>
-          </a:lnRef>
-          <a:fillRef idx="3">
-            <a:schemeClr val="accent1"/>
-          </a:fillRef>
-          <a:effectRef idx="2">
-            <a:schemeClr val="accent1"/>
-          </a:effectRef>
-          <a:fontRef idx="minor">
-            <a:schemeClr val="lt1"/>
-          </a:fontRef>
-        </p:style>
-        <p:txBody>
-          <a:bodyPr rtlCol="0" anchor="ctr"/>
-          <a:lstStyle/>
-          <a:p>
-            <a:pPr algn="ctr"/>
-          </a:p>
-        </p:txBody>
-      </p:sp>
-      <p:sp>
-        <p:nvSpPr>
-          <p:cNvPr id="15" name="TextBox 14"/>
-          <p:cNvSpPr txBox="1"/>
-          <p:nvPr/>
-        </p:nvSpPr>
-        <p:spPr>
-          <a:xfrm>
-            <a:off x="5852160" y="3264408"/>
-            <a:ext cx="2286000" cy="365760"/>
-          </a:xfrm>
-          <a:prstGeom prst="rect">
-            <a:avLst/>
-          </a:prstGeom>
-          <a:noFill/>
-        </p:spPr>
-        <p:txBody>
-          <a:bodyPr wrap="square">
-            <a:spAutoFit/>
-          </a:bodyPr>
-          <a:lstStyle/>
-          <a:p>
-            <a:pPr algn="l">
-              <a:spcAft>
-                <a:spcPts val="100"/>
-              </a:spcAft>
-            </a:pPr>
-            <a:r>
-              <a:rPr sz="900" b="1">
-                <a:solidFill>
-                  <a:srgbClr val="0099D6"/>
-                </a:solidFill>
-              </a:rPr>
-              <a:t>Versioned Artifact</a:t>
-            </a:r>
-          </a:p>
-          <a:p>
-            <a:pPr algn="l">
-              <a:spcAft>
-                <a:spcPts val="0"/>
-              </a:spcAft>
-            </a:pPr>
-            <a:r>
-              <a:rPr sz="700" b="0">
-                <a:solidFill>
-                  <a:srgbClr val="888888"/>
-                </a:solidFill>
-              </a:rPr>
-              <a:t>requirements.json + proto files</a:t>
-            </a:r>
-          </a:p>
-        </p:txBody>
-      </p:sp>
-      <p:sp>
-        <p:nvSpPr>
-          <p:cNvPr id="16" name="Rounded Rectangle 15"/>
-          <p:cNvSpPr/>
-          <p:nvPr/>
-        </p:nvSpPr>
-        <p:spPr>
-          <a:xfrm>
-            <a:off x="457200" y="3794760"/>
-            <a:ext cx="11247120" cy="1645920"/>
+            <a:off x="8503920" y="1554480"/>
+            <a:ext cx="3200400" cy="2560320"/>
           </a:xfrm>
           <a:prstGeom prst="roundRect">
             <a:avLst/>
@@ -6952,263 +6836,175 @@
       </p:sp>
       <p:sp>
         <p:nvSpPr>
-          <p:cNvPr id="17" name="TextBox 16"/>
-          <p:cNvSpPr txBox="1"/>
-          <p:nvPr/>
-        </p:nvSpPr>
-        <p:spPr>
-          <a:xfrm>
-            <a:off x="640080" y="3867912"/>
-            <a:ext cx="4572000" cy="457200"/>
-          </a:xfrm>
-          <a:prstGeom prst="rect">
-            <a:avLst/>
-          </a:prstGeom>
-          <a:noFill/>
-        </p:spPr>
-        <p:txBody>
-          <a:bodyPr wrap="square">
-            <a:spAutoFit/>
-          </a:bodyPr>
-          <a:lstStyle/>
-          <a:p>
-            <a:pPr algn="l">
-              <a:spcAft>
-                <a:spcPts val="100"/>
-              </a:spcAft>
-            </a:pPr>
-            <a:r>
-              <a:rPr sz="900" b="1">
+          <p:cNvPr id="13" name="TextBox 12"/>
+          <p:cNvSpPr txBox="1"/>
+          <p:nvPr/>
+        </p:nvSpPr>
+        <p:spPr>
+          <a:xfrm>
+            <a:off x="8686800" y="1645920"/>
+            <a:ext cx="2834640" cy="274320"/>
+          </a:xfrm>
+          <a:prstGeom prst="rect">
+            <a:avLst/>
+          </a:prstGeom>
+          <a:noFill/>
+        </p:spPr>
+        <p:txBody>
+          <a:bodyPr wrap="square">
+            <a:spAutoFit/>
+          </a:bodyPr>
+          <a:lstStyle/>
+          <a:p>
+            <a:pPr algn="l">
+              <a:spcAft>
+                <a:spcPts val="0"/>
+              </a:spcAft>
+            </a:pPr>
+            <a:r>
+              <a:rPr sz="1400" b="1">
+                <a:solidFill>
+                  <a:srgbClr val="0D1B2A"/>
+                </a:solidFill>
+              </a:rPr>
+              <a:t>Automated Tests</a:t>
+            </a:r>
+          </a:p>
+        </p:txBody>
+      </p:sp>
+      <p:sp>
+        <p:nvSpPr>
+          <p:cNvPr id="14" name="TextBox 13"/>
+          <p:cNvSpPr txBox="1"/>
+          <p:nvPr/>
+        </p:nvSpPr>
+        <p:spPr>
+          <a:xfrm>
+            <a:off x="8686800" y="1965960"/>
+            <a:ext cx="2834640" cy="228600"/>
+          </a:xfrm>
+          <a:prstGeom prst="rect">
+            <a:avLst/>
+          </a:prstGeom>
+          <a:noFill/>
+        </p:spPr>
+        <p:txBody>
+          <a:bodyPr wrap="square">
+            <a:spAutoFit/>
+          </a:bodyPr>
+          <a:lstStyle/>
+          <a:p>
+            <a:pPr algn="l">
+              <a:spcAft>
+                <a:spcPts val="0"/>
+              </a:spcAft>
+            </a:pPr>
+            <a:r>
+              <a:rPr sz="900" b="0">
                 <a:solidFill>
                   <a:srgbClr val="0099D6"/>
                 </a:solidFill>
               </a:rPr>
-              <a:t>PRODUCT PIPELINE  •  product-pipeline</a:t>
-            </a:r>
-          </a:p>
-          <a:p>
-            <a:pPr algn="l">
-              <a:spcAft>
-                <a:spcPts val="0"/>
-              </a:spcAft>
-            </a:pPr>
-            <a:r>
-              <a:rPr sz="800" b="0">
-                <a:solidFill>
-                  <a:srgbClr val="888888"/>
-                </a:solidFill>
-              </a:rPr>
-              <a:t>Owned by Developers + Systems Engineers</a:t>
-            </a:r>
-          </a:p>
-        </p:txBody>
-      </p:sp>
-      <p:sp>
-        <p:nvSpPr>
-          <p:cNvPr id="18" name="Rounded Rectangle 17"/>
+              <a:t>Owned by Developers</a:t>
+            </a:r>
+          </a:p>
+        </p:txBody>
+      </p:sp>
+      <p:sp>
+        <p:nvSpPr>
+          <p:cNvPr id="15" name="TextBox 14"/>
+          <p:cNvSpPr txBox="1"/>
+          <p:nvPr/>
+        </p:nvSpPr>
+        <p:spPr>
+          <a:xfrm>
+            <a:off x="8686800" y="2331720"/>
+            <a:ext cx="2834640" cy="1645920"/>
+          </a:xfrm>
+          <a:prstGeom prst="rect">
+            <a:avLst/>
+          </a:prstGeom>
+          <a:noFill/>
+        </p:spPr>
+        <p:txBody>
+          <a:bodyPr wrap="square">
+            <a:spAutoFit/>
+          </a:bodyPr>
+          <a:lstStyle/>
+          <a:p>
+            <a:pPr algn="l">
+              <a:spcAft>
+                <a:spcPts val="500"/>
+              </a:spcAft>
+            </a:pPr>
+            <a:r>
+              <a:rPr sz="900" b="0">
+                <a:solidFill>
+                  <a:srgbClr val="555555"/>
+                </a:solidFill>
+              </a:rPr>
+              <a:t>•  Step definitions implement the HOW</a:t>
+            </a:r>
+          </a:p>
+          <a:p>
+            <a:pPr algn="l">
+              <a:spcAft>
+                <a:spcPts val="500"/>
+              </a:spcAft>
+            </a:pPr>
+            <a:r>
+              <a:rPr sz="900" b="0">
+                <a:solidFill>
+                  <a:srgbClr val="555555"/>
+                </a:solidFill>
+              </a:rPr>
+              <a:t>•  Log analysis against deployed product</a:t>
+            </a:r>
+          </a:p>
+          <a:p>
+            <a:pPr algn="l">
+              <a:spcAft>
+                <a:spcPts val="500"/>
+              </a:spcAft>
+            </a:pPr>
+            <a:r>
+              <a:rPr sz="900" b="0">
+                <a:solidFill>
+                  <a:srgbClr val="555555"/>
+                </a:solidFill>
+              </a:rPr>
+              <a:t>•  Results feed the pipeline report</a:t>
+            </a:r>
+          </a:p>
+          <a:p>
+            <a:pPr algn="l">
+              <a:spcAft>
+                <a:spcPts val="500"/>
+              </a:spcAft>
+            </a:pPr>
+            <a:r>
+              <a:rPr sz="900" b="0">
+                <a:solidFill>
+                  <a:srgbClr val="555555"/>
+                </a:solidFill>
+              </a:rPr>
+              <a:t>•  CI/CD runs on every commit</a:t>
+            </a:r>
+          </a:p>
+        </p:txBody>
+      </p:sp>
+      <p:sp>
+        <p:nvSpPr>
+          <p:cNvPr id="16" name="Right Arrow 15"/>
           <p:cNvSpPr/>
           <p:nvPr/>
         </p:nvSpPr>
         <p:spPr>
           <a:xfrm>
-            <a:off x="640080" y="4434840"/>
-            <a:ext cx="2103120" cy="731520"/>
-          </a:xfrm>
-          <a:prstGeom prst="roundRect">
-            <a:avLst/>
-          </a:prstGeom>
-          <a:solidFill>
-            <a:srgbClr val="003057"/>
-          </a:solidFill>
-          <a:ln>
-            <a:noFill/>
-          </a:ln>
-        </p:spPr>
-        <p:style>
-          <a:lnRef idx="1">
-            <a:schemeClr val="accent1"/>
-          </a:lnRef>
-          <a:fillRef idx="3">
-            <a:schemeClr val="accent1"/>
-          </a:fillRef>
-          <a:effectRef idx="2">
-            <a:schemeClr val="accent1"/>
-          </a:effectRef>
-          <a:fontRef idx="minor">
-            <a:schemeClr val="lt1"/>
-          </a:fontRef>
-        </p:style>
-        <p:txBody>
-          <a:bodyPr rtlCol="0" anchor="ctr"/>
-          <a:lstStyle/>
-          <a:p>
-            <a:pPr algn="ctr"/>
-          </a:p>
-        </p:txBody>
-      </p:sp>
-      <p:sp>
-        <p:nvSpPr>
-          <p:cNvPr id="19" name="TextBox 18"/>
-          <p:cNvSpPr txBox="1"/>
-          <p:nvPr/>
-        </p:nvSpPr>
-        <p:spPr>
-          <a:xfrm>
-            <a:off x="731520" y="4507992"/>
-            <a:ext cx="1920240" cy="640080"/>
-          </a:xfrm>
-          <a:prstGeom prst="rect">
-            <a:avLst/>
-          </a:prstGeom>
-          <a:noFill/>
-        </p:spPr>
-        <p:txBody>
-          <a:bodyPr wrap="square">
-            <a:spAutoFit/>
-          </a:bodyPr>
-          <a:lstStyle/>
-          <a:p>
-            <a:pPr algn="l">
-              <a:spcAft>
-                <a:spcPts val="100"/>
-              </a:spcAft>
-            </a:pPr>
-            <a:r>
-              <a:rPr sz="900" b="1">
-                <a:solidFill>
-                  <a:srgbClr val="FFFFFF"/>
-                </a:solidFill>
-              </a:rPr>
-              <a:t>Fetch Model</a:t>
-            </a:r>
-          </a:p>
-          <a:p>
-            <a:pPr algn="l">
-              <a:spcAft>
-                <a:spcPts val="0"/>
-              </a:spcAft>
-            </a:pPr>
-            <a:r>
-              <a:rPr sz="700" b="0">
-                <a:solidFill>
-                  <a:srgbClr val="BBBBBB"/>
-                </a:solidFill>
-              </a:rPr>
-              <a:t>Download versioned
-artifact from release</a:t>
-            </a:r>
-          </a:p>
-        </p:txBody>
-      </p:sp>
-      <p:sp>
-        <p:nvSpPr>
-          <p:cNvPr id="20" name="Rounded Rectangle 19"/>
-          <p:cNvSpPr/>
-          <p:nvPr/>
-        </p:nvSpPr>
-        <p:spPr>
-          <a:xfrm>
-            <a:off x="2880360" y="4434840"/>
-            <a:ext cx="2103120" cy="731520"/>
-          </a:xfrm>
-          <a:prstGeom prst="roundRect">
-            <a:avLst/>
-          </a:prstGeom>
-          <a:solidFill>
-            <a:srgbClr val="004A87"/>
-          </a:solidFill>
-          <a:ln>
-            <a:noFill/>
-          </a:ln>
-        </p:spPr>
-        <p:style>
-          <a:lnRef idx="1">
-            <a:schemeClr val="accent1"/>
-          </a:lnRef>
-          <a:fillRef idx="3">
-            <a:schemeClr val="accent1"/>
-          </a:fillRef>
-          <a:effectRef idx="2">
-            <a:schemeClr val="accent1"/>
-          </a:effectRef>
-          <a:fontRef idx="minor">
-            <a:schemeClr val="lt1"/>
-          </a:fontRef>
-        </p:style>
-        <p:txBody>
-          <a:bodyPr rtlCol="0" anchor="ctr"/>
-          <a:lstStyle/>
-          <a:p>
-            <a:pPr algn="ctr"/>
-          </a:p>
-        </p:txBody>
-      </p:sp>
-      <p:sp>
-        <p:nvSpPr>
-          <p:cNvPr id="21" name="TextBox 20"/>
-          <p:cNvSpPr txBox="1"/>
-          <p:nvPr/>
-        </p:nvSpPr>
-        <p:spPr>
-          <a:xfrm>
-            <a:off x="2971800" y="4507992"/>
-            <a:ext cx="1920240" cy="640080"/>
-          </a:xfrm>
-          <a:prstGeom prst="rect">
-            <a:avLst/>
-          </a:prstGeom>
-          <a:noFill/>
-        </p:spPr>
-        <p:txBody>
-          <a:bodyPr wrap="square">
-            <a:spAutoFit/>
-          </a:bodyPr>
-          <a:lstStyle/>
-          <a:p>
-            <a:pPr algn="l">
-              <a:spcAft>
-                <a:spcPts val="100"/>
-              </a:spcAft>
-            </a:pPr>
-            <a:r>
-              <a:rPr sz="900" b="1">
-                <a:solidFill>
-                  <a:srgbClr val="FFFFFF"/>
-                </a:solidFill>
-              </a:rPr>
-              <a:t>→  Quality Gates</a:t>
-            </a:r>
-          </a:p>
-          <a:p>
-            <a:pPr algn="l">
-              <a:spcAft>
-                <a:spcPts val="0"/>
-              </a:spcAft>
-            </a:pPr>
-            <a:r>
-              <a:rPr sz="700" b="0">
-                <a:solidFill>
-                  <a:srgbClr val="BBBBBB"/>
-                </a:solidFill>
-              </a:rPr>
-              <a:t>Coverage, drift &amp;
-orphan detection</a:t>
-            </a:r>
-          </a:p>
-        </p:txBody>
-      </p:sp>
-      <p:sp>
-        <p:nvSpPr>
-          <p:cNvPr id="22" name="Rounded Rectangle 21"/>
-          <p:cNvSpPr/>
-          <p:nvPr/>
-        </p:nvSpPr>
-        <p:spPr>
-          <a:xfrm>
-            <a:off x="5120640" y="4434840"/>
-            <a:ext cx="2103120" cy="731520"/>
-          </a:xfrm>
-          <a:prstGeom prst="roundRect">
+            <a:off x="3703320" y="2651760"/>
+            <a:ext cx="274320" cy="274320"/>
+          </a:xfrm>
+          <a:prstGeom prst="rightArrow">
             <a:avLst/>
           </a:prstGeom>
           <a:solidFill>
@@ -7242,74 +7038,20 @@
       </p:sp>
       <p:sp>
         <p:nvSpPr>
-          <p:cNvPr id="23" name="TextBox 22"/>
-          <p:cNvSpPr txBox="1"/>
-          <p:nvPr/>
-        </p:nvSpPr>
-        <p:spPr>
-          <a:xfrm>
-            <a:off x="5212080" y="4507992"/>
-            <a:ext cx="1920240" cy="640080"/>
-          </a:xfrm>
-          <a:prstGeom prst="rect">
-            <a:avLst/>
-          </a:prstGeom>
-          <a:noFill/>
-        </p:spPr>
-        <p:txBody>
-          <a:bodyPr wrap="square">
-            <a:spAutoFit/>
-          </a:bodyPr>
-          <a:lstStyle/>
-          <a:p>
-            <a:pPr algn="l">
-              <a:spcAft>
-                <a:spcPts val="100"/>
-              </a:spcAft>
-            </a:pPr>
-            <a:r>
-              <a:rPr sz="900" b="1">
-                <a:solidFill>
-                  <a:srgbClr val="FFFFFF"/>
-                </a:solidFill>
-              </a:rPr>
-              <a:t>→  BDD Verification</a:t>
-            </a:r>
-          </a:p>
-          <a:p>
-            <a:pPr algn="l">
-              <a:spcAft>
-                <a:spcPts val="0"/>
-              </a:spcAft>
-            </a:pPr>
-            <a:r>
-              <a:rPr sz="700" b="0">
-                <a:solidFill>
-                  <a:srgbClr val="BBBBBB"/>
-                </a:solidFill>
-              </a:rPr>
-              <a:t>Automated Gherkin
-log-analysis tests</a:t>
-            </a:r>
-          </a:p>
-        </p:txBody>
-      </p:sp>
-      <p:sp>
-        <p:nvSpPr>
-          <p:cNvPr id="24" name="Rounded Rectangle 23"/>
+          <p:cNvPr id="17" name="Right Arrow 16"/>
           <p:cNvSpPr/>
           <p:nvPr/>
         </p:nvSpPr>
         <p:spPr>
           <a:xfrm>
-            <a:off x="7360920" y="4434840"/>
-            <a:ext cx="2103120" cy="731520"/>
-          </a:xfrm>
-          <a:prstGeom prst="roundRect">
+            <a:off x="8183879" y="2651760"/>
+            <a:ext cx="274320" cy="274320"/>
+          </a:xfrm>
+          <a:prstGeom prst="rightArrow">
             <a:avLst/>
           </a:prstGeom>
           <a:solidFill>
-            <a:srgbClr val="0082CC"/>
+            <a:srgbClr val="0069B0"/>
           </a:solidFill>
           <a:ln>
             <a:noFill/>
@@ -7339,68 +7081,415 @@
       </p:sp>
       <p:sp>
         <p:nvSpPr>
+          <p:cNvPr id="18" name="TextBox 17"/>
+          <p:cNvSpPr txBox="1"/>
+          <p:nvPr/>
+        </p:nvSpPr>
+        <p:spPr>
+          <a:xfrm>
+            <a:off x="731520" y="4480560"/>
+            <a:ext cx="4572000" cy="274320"/>
+          </a:xfrm>
+          <a:prstGeom prst="rect">
+            <a:avLst/>
+          </a:prstGeom>
+          <a:noFill/>
+        </p:spPr>
+        <p:txBody>
+          <a:bodyPr wrap="square">
+            <a:spAutoFit/>
+          </a:bodyPr>
+          <a:lstStyle/>
+          <a:p>
+            <a:pPr algn="l">
+              <a:spcAft>
+                <a:spcPts val="0"/>
+              </a:spcAft>
+            </a:pPr>
+            <a:r>
+              <a:rPr sz="1400" b="1">
+                <a:solidFill>
+                  <a:srgbClr val="0D1B2A"/>
+                </a:solidFill>
+              </a:rPr>
+              <a:t>How It Flows Through the Pipelines</a:t>
+            </a:r>
+          </a:p>
+        </p:txBody>
+      </p:sp>
+      <p:sp>
+        <p:nvSpPr>
+          <p:cNvPr id="19" name="Rounded Rectangle 18"/>
+          <p:cNvSpPr/>
+          <p:nvPr/>
+        </p:nvSpPr>
+        <p:spPr>
+          <a:xfrm>
+            <a:off x="457200" y="4846320"/>
+            <a:ext cx="5486400" cy="457200"/>
+          </a:xfrm>
+          <a:prstGeom prst="roundRect">
+            <a:avLst/>
+          </a:prstGeom>
+          <a:solidFill>
+            <a:srgbClr val="F4F7FA"/>
+          </a:solidFill>
+          <a:ln w="12700">
+            <a:solidFill>
+              <a:srgbClr val="D0E8F8"/>
+            </a:solidFill>
+          </a:ln>
+        </p:spPr>
+        <p:style>
+          <a:lnRef idx="1">
+            <a:schemeClr val="accent1"/>
+          </a:lnRef>
+          <a:fillRef idx="3">
+            <a:schemeClr val="accent1"/>
+          </a:fillRef>
+          <a:effectRef idx="2">
+            <a:schemeClr val="accent1"/>
+          </a:effectRef>
+          <a:fontRef idx="minor">
+            <a:schemeClr val="lt1"/>
+          </a:fontRef>
+        </p:style>
+        <p:txBody>
+          <a:bodyPr rtlCol="0" anchor="ctr"/>
+          <a:lstStyle/>
+          <a:p>
+            <a:pPr algn="ctr"/>
+          </a:p>
+        </p:txBody>
+      </p:sp>
+      <p:sp>
+        <p:nvSpPr>
+          <p:cNvPr id="20" name="TextBox 19"/>
+          <p:cNvSpPr txBox="1"/>
+          <p:nvPr/>
+        </p:nvSpPr>
+        <p:spPr>
+          <a:xfrm>
+            <a:off x="548640" y="4873752"/>
+            <a:ext cx="5303520" cy="365760"/>
+          </a:xfrm>
+          <a:prstGeom prst="rect">
+            <a:avLst/>
+          </a:prstGeom>
+          <a:noFill/>
+        </p:spPr>
+        <p:txBody>
+          <a:bodyPr wrap="square">
+            <a:spAutoFit/>
+          </a:bodyPr>
+          <a:lstStyle/>
+          <a:p>
+            <a:pPr algn="l">
+              <a:spcAft>
+                <a:spcPts val="0"/>
+              </a:spcAft>
+            </a:pPr>
+            <a:r>
+              <a:rPr sz="800" b="1">
+                <a:solidFill>
+                  <a:srgbClr val="0099D6"/>
+                </a:solidFill>
+              </a:rPr>
+              <a:t>MODEL PIPELINE</a:t>
+            </a:r>
+            <a:r>
+              <a:rPr sz="800" b="0">
+                <a:solidFill>
+                  <a:srgbClr val="555555"/>
+                </a:solidFill>
+              </a:rPr>
+              <a:t>    Cameo  →  Export  →  Package  →  Publish Artifact</a:t>
+            </a:r>
+          </a:p>
+        </p:txBody>
+      </p:sp>
+      <p:sp>
+        <p:nvSpPr>
+          <p:cNvPr id="21" name="Down Arrow 20"/>
+          <p:cNvSpPr/>
+          <p:nvPr/>
+        </p:nvSpPr>
+        <p:spPr>
+          <a:xfrm>
+            <a:off x="2743200" y="5349240"/>
+            <a:ext cx="274320" cy="228600"/>
+          </a:xfrm>
+          <a:prstGeom prst="downArrow">
+            <a:avLst/>
+          </a:prstGeom>
+          <a:solidFill>
+            <a:srgbClr val="0069B0"/>
+          </a:solidFill>
+          <a:ln>
+            <a:noFill/>
+          </a:ln>
+        </p:spPr>
+        <p:style>
+          <a:lnRef idx="1">
+            <a:schemeClr val="accent1"/>
+          </a:lnRef>
+          <a:fillRef idx="3">
+            <a:schemeClr val="accent1"/>
+          </a:fillRef>
+          <a:effectRef idx="2">
+            <a:schemeClr val="accent1"/>
+          </a:effectRef>
+          <a:fontRef idx="minor">
+            <a:schemeClr val="lt1"/>
+          </a:fontRef>
+        </p:style>
+        <p:txBody>
+          <a:bodyPr rtlCol="0" anchor="ctr"/>
+          <a:lstStyle/>
+          <a:p>
+            <a:pPr algn="ctr"/>
+          </a:p>
+        </p:txBody>
+      </p:sp>
+      <p:sp>
+        <p:nvSpPr>
+          <p:cNvPr id="22" name="Rounded Rectangle 21"/>
+          <p:cNvSpPr/>
+          <p:nvPr/>
+        </p:nvSpPr>
+        <p:spPr>
+          <a:xfrm>
+            <a:off x="457200" y="5623560"/>
+            <a:ext cx="5486400" cy="457200"/>
+          </a:xfrm>
+          <a:prstGeom prst="roundRect">
+            <a:avLst/>
+          </a:prstGeom>
+          <a:solidFill>
+            <a:srgbClr val="F4F7FA"/>
+          </a:solidFill>
+          <a:ln w="12700">
+            <a:solidFill>
+              <a:srgbClr val="D0E8F8"/>
+            </a:solidFill>
+          </a:ln>
+        </p:spPr>
+        <p:style>
+          <a:lnRef idx="1">
+            <a:schemeClr val="accent1"/>
+          </a:lnRef>
+          <a:fillRef idx="3">
+            <a:schemeClr val="accent1"/>
+          </a:fillRef>
+          <a:effectRef idx="2">
+            <a:schemeClr val="accent1"/>
+          </a:effectRef>
+          <a:fontRef idx="minor">
+            <a:schemeClr val="lt1"/>
+          </a:fontRef>
+        </p:style>
+        <p:txBody>
+          <a:bodyPr rtlCol="0" anchor="ctr"/>
+          <a:lstStyle/>
+          <a:p>
+            <a:pPr algn="ctr"/>
+          </a:p>
+        </p:txBody>
+      </p:sp>
+      <p:sp>
+        <p:nvSpPr>
+          <p:cNvPr id="23" name="TextBox 22"/>
+          <p:cNvSpPr txBox="1"/>
+          <p:nvPr/>
+        </p:nvSpPr>
+        <p:spPr>
+          <a:xfrm>
+            <a:off x="548640" y="5650992"/>
+            <a:ext cx="5303520" cy="365760"/>
+          </a:xfrm>
+          <a:prstGeom prst="rect">
+            <a:avLst/>
+          </a:prstGeom>
+          <a:noFill/>
+        </p:spPr>
+        <p:txBody>
+          <a:bodyPr wrap="square">
+            <a:spAutoFit/>
+          </a:bodyPr>
+          <a:lstStyle/>
+          <a:p>
+            <a:pPr algn="l">
+              <a:spcAft>
+                <a:spcPts val="0"/>
+              </a:spcAft>
+            </a:pPr>
+            <a:r>
+              <a:rPr sz="800" b="1">
+                <a:solidFill>
+                  <a:srgbClr val="0099D6"/>
+                </a:solidFill>
+              </a:rPr>
+              <a:t>PRODUCT PIPELINE</a:t>
+            </a:r>
+            <a:r>
+              <a:rPr sz="800" b="0">
+                <a:solidFill>
+                  <a:srgbClr val="555555"/>
+                </a:solidFill>
+              </a:rPr>
+              <a:t>    Fetch  →  Quality Gates  →  BDD Tests  →  Deploy + Report</a:t>
+            </a:r>
+          </a:p>
+        </p:txBody>
+      </p:sp>
+      <p:sp>
+        <p:nvSpPr>
+          <p:cNvPr id="24" name="TextBox 23"/>
+          <p:cNvSpPr txBox="1"/>
+          <p:nvPr/>
+        </p:nvSpPr>
+        <p:spPr>
+          <a:xfrm>
+            <a:off x="6400800" y="4709160"/>
+            <a:ext cx="5029200" cy="411480"/>
+          </a:xfrm>
+          <a:prstGeom prst="rect">
+            <a:avLst/>
+          </a:prstGeom>
+          <a:noFill/>
+        </p:spPr>
+        <p:txBody>
+          <a:bodyPr wrap="square">
+            <a:spAutoFit/>
+          </a:bodyPr>
+          <a:lstStyle/>
+          <a:p>
+            <a:pPr algn="l">
+              <a:spcAft>
+                <a:spcPts val="0"/>
+              </a:spcAft>
+            </a:pPr>
+            <a:r>
+              <a:rPr sz="1000" b="1">
+                <a:solidFill>
+                  <a:srgbClr val="0069B0"/>
+                </a:solidFill>
+              </a:rPr>
+              <a:t>Readable by both sides</a:t>
+            </a:r>
+            <a:r>
+              <a:rPr sz="900" b="0">
+                <a:solidFill>
+                  <a:srgbClr val="555555"/>
+                </a:solidFill>
+              </a:rPr>
+              <a:t>  —  SEs validate intent, developers implement steps.</a:t>
+            </a:r>
+          </a:p>
+        </p:txBody>
+      </p:sp>
+      <p:sp>
+        <p:nvSpPr>
           <p:cNvPr id="25" name="TextBox 24"/>
           <p:cNvSpPr txBox="1"/>
           <p:nvPr/>
         </p:nvSpPr>
         <p:spPr>
           <a:xfrm>
-            <a:off x="7452360" y="4507992"/>
-            <a:ext cx="1920240" cy="640080"/>
-          </a:xfrm>
-          <a:prstGeom prst="rect">
-            <a:avLst/>
-          </a:prstGeom>
-          <a:noFill/>
-        </p:spPr>
-        <p:txBody>
-          <a:bodyPr wrap="square">
-            <a:spAutoFit/>
-          </a:bodyPr>
-          <a:lstStyle/>
-          <a:p>
-            <a:pPr algn="l">
-              <a:spcAft>
-                <a:spcPts val="100"/>
-              </a:spcAft>
-            </a:pPr>
-            <a:r>
-              <a:rPr sz="900" b="1">
-                <a:solidFill>
-                  <a:srgbClr val="FFFFFF"/>
-                </a:solidFill>
-              </a:rPr>
-              <a:t>→  Deploy + Report</a:t>
-            </a:r>
-          </a:p>
-          <a:p>
-            <a:pPr algn="l">
-              <a:spcAft>
-                <a:spcPts val="0"/>
-              </a:spcAft>
-            </a:pPr>
-            <a:r>
-              <a:rPr sz="700" b="0">
-                <a:solidFill>
-                  <a:srgbClr val="BBBBBB"/>
-                </a:solidFill>
-              </a:rPr>
-              <a:t>Helm deploy with
-evidence bundle</a:t>
-            </a:r>
-          </a:p>
-        </p:txBody>
-      </p:sp>
-      <p:sp>
-        <p:nvSpPr>
-          <p:cNvPr id="26" name="Rounded Rectangle 25"/>
+            <a:off x="6400800" y="5166360"/>
+            <a:ext cx="5029200" cy="411480"/>
+          </a:xfrm>
+          <a:prstGeom prst="rect">
+            <a:avLst/>
+          </a:prstGeom>
+          <a:noFill/>
+        </p:spPr>
+        <p:txBody>
+          <a:bodyPr wrap="square">
+            <a:spAutoFit/>
+          </a:bodyPr>
+          <a:lstStyle/>
+          <a:p>
+            <a:pPr algn="l">
+              <a:spcAft>
+                <a:spcPts val="0"/>
+              </a:spcAft>
+            </a:pPr>
+            <a:r>
+              <a:rPr sz="1000" b="1">
+                <a:solidFill>
+                  <a:srgbClr val="0069B0"/>
+                </a:solidFill>
+              </a:rPr>
+              <a:t>Machine-traceable</a:t>
+            </a:r>
+            <a:r>
+              <a:rPr sz="900" b="0">
+                <a:solidFill>
+                  <a:srgbClr val="555555"/>
+                </a:solidFill>
+              </a:rPr>
+              <a:t>  —  Tags (@REQ, @VC) create the link to requirements.</a:t>
+            </a:r>
+          </a:p>
+        </p:txBody>
+      </p:sp>
+      <p:sp>
+        <p:nvSpPr>
+          <p:cNvPr id="26" name="TextBox 25"/>
+          <p:cNvSpPr txBox="1"/>
+          <p:nvPr/>
+        </p:nvSpPr>
+        <p:spPr>
+          <a:xfrm>
+            <a:off x="6400800" y="5623560"/>
+            <a:ext cx="5029200" cy="411480"/>
+          </a:xfrm>
+          <a:prstGeom prst="rect">
+            <a:avLst/>
+          </a:prstGeom>
+          <a:noFill/>
+        </p:spPr>
+        <p:txBody>
+          <a:bodyPr wrap="square">
+            <a:spAutoFit/>
+          </a:bodyPr>
+          <a:lstStyle/>
+          <a:p>
+            <a:pPr algn="l">
+              <a:spcAft>
+                <a:spcPts val="0"/>
+              </a:spcAft>
+            </a:pPr>
+            <a:r>
+              <a:rPr sz="1000" b="1">
+                <a:solidFill>
+                  <a:srgbClr val="0069B0"/>
+                </a:solidFill>
+              </a:rPr>
+              <a:t>Pipeline-enforced</a:t>
+            </a:r>
+            <a:r>
+              <a:rPr sz="900" b="0">
+                <a:solidFill>
+                  <a:srgbClr val="555555"/>
+                </a:solidFill>
+              </a:rPr>
+              <a:t>  —  Quality gates ensure every VC has a scenario.</a:t>
+            </a:r>
+          </a:p>
+        </p:txBody>
+      </p:sp>
+      <p:sp>
+        <p:nvSpPr>
+          <p:cNvPr id="27" name="Rounded Rectangle 26"/>
           <p:cNvSpPr/>
           <p:nvPr/>
         </p:nvSpPr>
         <p:spPr>
           <a:xfrm>
-            <a:off x="457200" y="5532120"/>
-            <a:ext cx="11247120" cy="411480"/>
+            <a:off x="6400800" y="6126480"/>
+            <a:ext cx="5303520" cy="365760"/>
           </a:xfrm>
           <a:prstGeom prst="roundRect">
             <a:avLst/>
@@ -7438,14 +7527,14 @@
       </p:sp>
       <p:sp>
         <p:nvSpPr>
-          <p:cNvPr id="27" name="TextBox 26"/>
-          <p:cNvSpPr txBox="1"/>
-          <p:nvPr/>
-        </p:nvSpPr>
-        <p:spPr>
-          <a:xfrm>
-            <a:off x="731520" y="5586984"/>
-            <a:ext cx="10789920" cy="320040"/>
+          <p:cNvPr id="28" name="TextBox 27"/>
+          <p:cNvSpPr txBox="1"/>
+          <p:nvPr/>
+        </p:nvSpPr>
+        <p:spPr>
+          <a:xfrm>
+            <a:off x="6583680" y="6163056"/>
+            <a:ext cx="4937760" cy="274320"/>
           </a:xfrm>
           <a:prstGeom prst="rect">
             <a:avLst/>
@@ -7464,50 +7553,12 @@
               </a:spcAft>
             </a:pPr>
             <a:r>
-              <a:rPr sz="1100" b="1">
+              <a:rPr sz="1000" b="1">
                 <a:solidFill>
                   <a:srgbClr val="FFFFFF"/>
                 </a:solidFill>
               </a:rPr>
-              <a:t>Every requirement is automatically traced from model to test to deployment. No manual assembly. No gaps. No drift.</a:t>
-            </a:r>
-          </a:p>
-        </p:txBody>
-      </p:sp>
-      <p:sp>
-        <p:nvSpPr>
-          <p:cNvPr id="28" name="TextBox 27"/>
-          <p:cNvSpPr txBox="1"/>
-          <p:nvPr/>
-        </p:nvSpPr>
-        <p:spPr>
-          <a:xfrm>
-            <a:off x="8686800" y="365760"/>
-            <a:ext cx="3017520" cy="274320"/>
-          </a:xfrm>
-          <a:prstGeom prst="rect">
-            <a:avLst/>
-          </a:prstGeom>
-          <a:noFill/>
-        </p:spPr>
-        <p:txBody>
-          <a:bodyPr wrap="square">
-            <a:spAutoFit/>
-          </a:bodyPr>
-          <a:lstStyle/>
-          <a:p>
-            <a:pPr algn="r">
-              <a:spcAft>
-                <a:spcPts val="0"/>
-              </a:spcAft>
-            </a:pPr>
-            <a:r>
-              <a:rPr sz="700" b="0">
-                <a:solidFill>
-                  <a:srgbClr val="888888"/>
-                </a:solidFill>
-              </a:rPr>
-              <a:t>Cameo • Python • Behave • Gherkin • Helm • GitHub Actions</a:t>
+              <a:t>One language. Model to deployment. Both sides own the spec.</a:t>
             </a:r>
           </a:p>
         </p:txBody>

--- a/docs/presentations/MBSE_Pipeline_Executive_Brief.pptx
+++ b/docs/presentations/MBSE_Pipeline_Executive_Brief.pptx
@@ -6867,7 +6867,7 @@
                   <a:srgbClr val="0D1B2A"/>
                 </a:solidFill>
               </a:rPr>
-              <a:t>Automated Tests</a:t>
+              <a:t>System Verification</a:t>
             </a:r>
           </a:p>
         </p:txBody>
@@ -6905,7 +6905,7 @@
                   <a:srgbClr val="0099D6"/>
                 </a:solidFill>
               </a:rPr>
-              <a:t>Owned by Developers</a:t>
+              <a:t>Implemented by Developers</a:t>
             </a:r>
           </a:p>
         </p:txBody>
@@ -6958,7 +6958,7 @@
                   <a:srgbClr val="555555"/>
                 </a:solidFill>
               </a:rPr>
-              <a:t>•  Log analysis against deployed product</a:t>
+              <a:t>•  Log analysis against the deployed product</a:t>
             </a:r>
           </a:p>
           <a:p>
@@ -6973,22 +6973,22 @@
                   <a:srgbClr val="555555"/>
                 </a:solidFill>
               </a:rPr>
+              <a:t>•  E2E verification on every build</a:t>
+            </a:r>
+          </a:p>
+          <a:p>
+            <a:pPr algn="l">
+              <a:spcAft>
+                <a:spcPts val="500"/>
+              </a:spcAft>
+            </a:pPr>
+            <a:r>
+              <a:rPr sz="900" b="0">
+                <a:solidFill>
+                  <a:srgbClr val="555555"/>
+                </a:solidFill>
+              </a:rPr>
               <a:t>•  Results feed the pipeline report</a:t>
-            </a:r>
-          </a:p>
-          <a:p>
-            <a:pPr algn="l">
-              <a:spcAft>
-                <a:spcPts val="500"/>
-              </a:spcAft>
-            </a:pPr>
-            <a:r>
-              <a:rPr sz="900" b="0">
-                <a:solidFill>
-                  <a:srgbClr val="555555"/>
-                </a:solidFill>
-              </a:rPr>
-              <a:t>•  CI/CD runs on every commit</a:t>
             </a:r>
           </a:p>
         </p:txBody>

--- a/docs/presentations/MBSE_Pipeline_Executive_Brief.pptx
+++ b/docs/presentations/MBSE_Pipeline_Executive_Brief.pptx
@@ -16,7 +16,6 @@
     <p:sldId id="264" r:id="rId15"/>
     <p:sldId id="265" r:id="rId16"/>
     <p:sldId id="266" r:id="rId17"/>
-    <p:sldId id="267" r:id="rId18"/>
   </p:sldIdLst>
   <p:sldSz cx="12191695" cy="6858000" type="screen4x3"/>
   <p:notesSz cx="6858000" cy="9144000"/>
@@ -3208,7 +3207,7 @@
                   <a:srgbClr val="888888"/>
                 </a:solidFill>
               </a:rPr>
-              <a:t>1 / 12</a:t>
+              <a:t>1 / 11</a:t>
             </a:r>
           </a:p>
         </p:txBody>
@@ -3247,7 +3246,7 @@
         </p:nvSpPr>
         <p:spPr>
           <a:xfrm>
-            <a:off x="731520" y="365760"/>
+            <a:off x="731520" y="457200"/>
             <a:ext cx="10058400" cy="457200"/>
           </a:xfrm>
           <a:prstGeom prst="rect">
@@ -3272,7 +3271,7 @@
                   <a:srgbClr val="0D1B2A"/>
                 </a:solidFill>
               </a:rPr>
-              <a:t>Cyber: Supply Chain Security</a:t>
+              <a:t>Traceability &amp; Audit Evidence</a:t>
             </a:r>
           </a:p>
         </p:txBody>
@@ -3285,8 +3284,8 @@
         </p:nvSpPr>
         <p:spPr>
           <a:xfrm>
-            <a:off x="731520" y="868680"/>
-            <a:ext cx="9144000" cy="320040"/>
+            <a:off x="731520" y="960120"/>
+            <a:ext cx="10058400" cy="274320"/>
           </a:xfrm>
           <a:prstGeom prst="rect">
             <a:avLst/>
@@ -3310,65 +3309,27 @@
                   <a:srgbClr val="555555"/>
                 </a:solidFill>
               </a:rPr>
-              <a:t>Every container image is scanned for known vulnerabilities before deployment. A full Software Bill of Materials is generated on every build.</a:t>
-            </a:r>
-          </a:p>
-        </p:txBody>
-      </p:sp>
-      <p:sp>
-        <p:nvSpPr>
-          <p:cNvPr id="4" name="TextBox 3"/>
-          <p:cNvSpPr txBox="1"/>
-          <p:nvPr/>
-        </p:nvSpPr>
-        <p:spPr>
-          <a:xfrm>
-            <a:off x="731520" y="1463040"/>
-            <a:ext cx="4572000" cy="274320"/>
-          </a:xfrm>
-          <a:prstGeom prst="rect">
-            <a:avLst/>
-          </a:prstGeom>
-          <a:noFill/>
-        </p:spPr>
-        <p:txBody>
-          <a:bodyPr wrap="square">
-            <a:spAutoFit/>
-          </a:bodyPr>
-          <a:lstStyle/>
-          <a:p>
-            <a:pPr algn="l">
-              <a:spcAft>
-                <a:spcPts val="0"/>
-              </a:spcAft>
-            </a:pPr>
-            <a:r>
-              <a:rPr sz="1400" b="1">
-                <a:solidFill>
-                  <a:srgbClr val="0D1B2A"/>
-                </a:solidFill>
-              </a:rPr>
-              <a:t>Automated Scanning Pipeline</a:t>
-            </a:r>
-          </a:p>
-        </p:txBody>
-      </p:sp>
-      <p:sp>
-        <p:nvSpPr>
-          <p:cNvPr id="5" name="Rounded Rectangle 4"/>
+              <a:t>Every pipeline run produces a complete, machine-generated evidence chain — no manual assembly required.</a:t>
+            </a:r>
+          </a:p>
+        </p:txBody>
+      </p:sp>
+      <p:sp>
+        <p:nvSpPr>
+          <p:cNvPr id="4" name="Rounded Rectangle 3"/>
           <p:cNvSpPr/>
           <p:nvPr/>
         </p:nvSpPr>
         <p:spPr>
           <a:xfrm>
-            <a:off x="457200" y="1828800"/>
-            <a:ext cx="5303520" cy="502920"/>
+            <a:off x="457200" y="1554480"/>
+            <a:ext cx="2011680" cy="777240"/>
           </a:xfrm>
           <a:prstGeom prst="roundRect">
             <a:avLst/>
           </a:prstGeom>
           <a:solidFill>
-            <a:srgbClr val="888888"/>
+            <a:srgbClr val="003057"/>
           </a:solidFill>
           <a:ln>
             <a:noFill/>
@@ -3398,60 +3359,165 @@
       </p:sp>
       <p:sp>
         <p:nvSpPr>
-          <p:cNvPr id="6" name="TextBox 5"/>
-          <p:cNvSpPr txBox="1"/>
-          <p:nvPr/>
-        </p:nvSpPr>
-        <p:spPr>
-          <a:xfrm>
-            <a:off x="548640" y="1874520"/>
-            <a:ext cx="5120640" cy="411480"/>
-          </a:xfrm>
-          <a:prstGeom prst="rect">
-            <a:avLst/>
-          </a:prstGeom>
-          <a:noFill/>
-        </p:spPr>
-        <p:txBody>
-          <a:bodyPr wrap="square">
-            <a:spAutoFit/>
-          </a:bodyPr>
-          <a:lstStyle/>
-          <a:p>
-            <a:pPr algn="l">
-              <a:spcAft>
-                <a:spcPts val="0"/>
-              </a:spcAft>
-            </a:pPr>
-            <a:r>
-              <a:rPr sz="1000" b="1">
+          <p:cNvPr id="5" name="TextBox 4"/>
+          <p:cNvSpPr txBox="1"/>
+          <p:nvPr/>
+        </p:nvSpPr>
+        <p:spPr>
+          <a:xfrm>
+            <a:off x="548640" y="1627632"/>
+            <a:ext cx="1828800" cy="685800"/>
+          </a:xfrm>
+          <a:prstGeom prst="rect">
+            <a:avLst/>
+          </a:prstGeom>
+          <a:noFill/>
+        </p:spPr>
+        <p:txBody>
+          <a:bodyPr wrap="square">
+            <a:spAutoFit/>
+          </a:bodyPr>
+          <a:lstStyle/>
+          <a:p>
+            <a:pPr algn="l">
+              <a:spcAft>
+                <a:spcPts val="100"/>
+              </a:spcAft>
+            </a:pPr>
+            <a:r>
+              <a:rPr sz="900" b="1">
                 <a:solidFill>
                   <a:srgbClr val="FFFFFF"/>
                 </a:solidFill>
               </a:rPr>
-              <a:t>Container Image</a:t>
-            </a:r>
-            <a:r>
-              <a:rPr sz="800" b="0">
+              <a:t>Requirement
+in Cameo</a:t>
+            </a:r>
+          </a:p>
+          <a:p>
+            <a:pPr algn="l">
+              <a:spcAft>
+                <a:spcPts val="0"/>
+              </a:spcAft>
+            </a:pPr>
+            <a:r>
+              <a:rPr sz="700" b="0">
                 <a:solidFill>
                   <a:srgbClr val="BBBBBB"/>
                 </a:solidFill>
               </a:rPr>
-              <a:t>  —  Product containers built by CI/CD</a:t>
-            </a:r>
-          </a:p>
-        </p:txBody>
-      </p:sp>
-      <p:sp>
-        <p:nvSpPr>
-          <p:cNvPr id="7" name="Rounded Rectangle 6"/>
+              <a:t/>
+            </a:r>
+          </a:p>
+        </p:txBody>
+      </p:sp>
+      <p:sp>
+        <p:nvSpPr>
+          <p:cNvPr id="6" name="Rounded Rectangle 5"/>
           <p:cNvSpPr/>
           <p:nvPr/>
         </p:nvSpPr>
         <p:spPr>
           <a:xfrm>
-            <a:off x="457200" y="2395728"/>
-            <a:ext cx="5303520" cy="502920"/>
+            <a:off x="2651760" y="1554480"/>
+            <a:ext cx="2011680" cy="777240"/>
+          </a:xfrm>
+          <a:prstGeom prst="roundRect">
+            <a:avLst/>
+          </a:prstGeom>
+          <a:solidFill>
+            <a:srgbClr val="004A87"/>
+          </a:solidFill>
+          <a:ln>
+            <a:noFill/>
+          </a:ln>
+        </p:spPr>
+        <p:style>
+          <a:lnRef idx="1">
+            <a:schemeClr val="accent1"/>
+          </a:lnRef>
+          <a:fillRef idx="3">
+            <a:schemeClr val="accent1"/>
+          </a:fillRef>
+          <a:effectRef idx="2">
+            <a:schemeClr val="accent1"/>
+          </a:effectRef>
+          <a:fontRef idx="minor">
+            <a:schemeClr val="lt1"/>
+          </a:fontRef>
+        </p:style>
+        <p:txBody>
+          <a:bodyPr rtlCol="0" anchor="ctr"/>
+          <a:lstStyle/>
+          <a:p>
+            <a:pPr algn="ctr"/>
+          </a:p>
+        </p:txBody>
+      </p:sp>
+      <p:sp>
+        <p:nvSpPr>
+          <p:cNvPr id="7" name="TextBox 6"/>
+          <p:cNvSpPr txBox="1"/>
+          <p:nvPr/>
+        </p:nvSpPr>
+        <p:spPr>
+          <a:xfrm>
+            <a:off x="2743200" y="1627632"/>
+            <a:ext cx="1828800" cy="685800"/>
+          </a:xfrm>
+          <a:prstGeom prst="rect">
+            <a:avLst/>
+          </a:prstGeom>
+          <a:noFill/>
+        </p:spPr>
+        <p:txBody>
+          <a:bodyPr wrap="square">
+            <a:spAutoFit/>
+          </a:bodyPr>
+          <a:lstStyle/>
+          <a:p>
+            <a:pPr algn="l">
+              <a:spcAft>
+                <a:spcPts val="100"/>
+              </a:spcAft>
+            </a:pPr>
+            <a:r>
+              <a:rPr sz="900" b="1">
+                <a:solidFill>
+                  <a:srgbClr val="FFFFFF"/>
+                </a:solidFill>
+              </a:rPr>
+              <a:t>Verification
+Criteria (VC)</a:t>
+            </a:r>
+          </a:p>
+          <a:p>
+            <a:pPr algn="l">
+              <a:spcAft>
+                <a:spcPts val="0"/>
+              </a:spcAft>
+            </a:pPr>
+            <a:r>
+              <a:rPr sz="700" b="0">
+                <a:solidFill>
+                  <a:srgbClr val="BBBBBB"/>
+                </a:solidFill>
+              </a:rPr>
+              <a:t/>
+            </a:r>
+          </a:p>
+        </p:txBody>
+      </p:sp>
+      <p:sp>
+        <p:nvSpPr>
+          <p:cNvPr id="8" name="Rounded Rectangle 7"/>
+          <p:cNvSpPr/>
+          <p:nvPr/>
+        </p:nvSpPr>
+        <p:spPr>
+          <a:xfrm>
+            <a:off x="4846320" y="1554480"/>
+            <a:ext cx="2011680" cy="777240"/>
           </a:xfrm>
           <a:prstGeom prst="roundRect">
             <a:avLst/>
@@ -3487,60 +3553,68 @@
       </p:sp>
       <p:sp>
         <p:nvSpPr>
-          <p:cNvPr id="8" name="TextBox 7"/>
-          <p:cNvSpPr txBox="1"/>
-          <p:nvPr/>
-        </p:nvSpPr>
-        <p:spPr>
-          <a:xfrm>
-            <a:off x="548640" y="2441448"/>
-            <a:ext cx="5120640" cy="411480"/>
-          </a:xfrm>
-          <a:prstGeom prst="rect">
-            <a:avLst/>
-          </a:prstGeom>
-          <a:noFill/>
-        </p:spPr>
-        <p:txBody>
-          <a:bodyPr wrap="square">
-            <a:spAutoFit/>
-          </a:bodyPr>
-          <a:lstStyle/>
-          <a:p>
-            <a:pPr algn="l">
-              <a:spcAft>
-                <a:spcPts val="0"/>
-              </a:spcAft>
-            </a:pPr>
-            <a:r>
-              <a:rPr sz="1000" b="1">
+          <p:cNvPr id="9" name="TextBox 8"/>
+          <p:cNvSpPr txBox="1"/>
+          <p:nvPr/>
+        </p:nvSpPr>
+        <p:spPr>
+          <a:xfrm>
+            <a:off x="4937760" y="1627632"/>
+            <a:ext cx="1828800" cy="685800"/>
+          </a:xfrm>
+          <a:prstGeom prst="rect">
+            <a:avLst/>
+          </a:prstGeom>
+          <a:noFill/>
+        </p:spPr>
+        <p:txBody>
+          <a:bodyPr wrap="square">
+            <a:spAutoFit/>
+          </a:bodyPr>
+          <a:lstStyle/>
+          <a:p>
+            <a:pPr algn="l">
+              <a:spcAft>
+                <a:spcPts val="100"/>
+              </a:spcAft>
+            </a:pPr>
+            <a:r>
+              <a:rPr sz="900" b="1">
                 <a:solidFill>
                   <a:srgbClr val="FFFFFF"/>
                 </a:solidFill>
               </a:rPr>
-              <a:t>Syft → SBOM</a:t>
-            </a:r>
-            <a:r>
-              <a:rPr sz="800" b="0">
+              <a:t>Gherkin
+Scenario</a:t>
+            </a:r>
+          </a:p>
+          <a:p>
+            <a:pPr algn="l">
+              <a:spcAft>
+                <a:spcPts val="0"/>
+              </a:spcAft>
+            </a:pPr>
+            <a:r>
+              <a:rPr sz="700" b="0">
                 <a:solidFill>
                   <a:srgbClr val="BBBBBB"/>
                 </a:solidFill>
               </a:rPr>
-              <a:t>  —  Generates CycloneDX Software Bill of Materials</a:t>
-            </a:r>
-          </a:p>
-        </p:txBody>
-      </p:sp>
-      <p:sp>
-        <p:nvSpPr>
-          <p:cNvPr id="9" name="Rounded Rectangle 8"/>
+              <a:t/>
+            </a:r>
+          </a:p>
+        </p:txBody>
+      </p:sp>
+      <p:sp>
+        <p:nvSpPr>
+          <p:cNvPr id="10" name="Rounded Rectangle 9"/>
           <p:cNvSpPr/>
           <p:nvPr/>
         </p:nvSpPr>
         <p:spPr>
           <a:xfrm>
-            <a:off x="457200" y="2962656"/>
-            <a:ext cx="5303520" cy="502920"/>
+            <a:off x="7040880" y="1554480"/>
+            <a:ext cx="2011680" cy="777240"/>
           </a:xfrm>
           <a:prstGeom prst="roundRect">
             <a:avLst/>
@@ -3576,66 +3650,74 @@
       </p:sp>
       <p:sp>
         <p:nvSpPr>
-          <p:cNvPr id="10" name="TextBox 9"/>
-          <p:cNvSpPr txBox="1"/>
-          <p:nvPr/>
-        </p:nvSpPr>
-        <p:spPr>
-          <a:xfrm>
-            <a:off x="548640" y="3008376"/>
-            <a:ext cx="5120640" cy="411480"/>
-          </a:xfrm>
-          <a:prstGeom prst="rect">
-            <a:avLst/>
-          </a:prstGeom>
-          <a:noFill/>
-        </p:spPr>
-        <p:txBody>
-          <a:bodyPr wrap="square">
-            <a:spAutoFit/>
-          </a:bodyPr>
-          <a:lstStyle/>
-          <a:p>
-            <a:pPr algn="l">
-              <a:spcAft>
-                <a:spcPts val="0"/>
-              </a:spcAft>
-            </a:pPr>
-            <a:r>
-              <a:rPr sz="1000" b="1">
+          <p:cNvPr id="11" name="TextBox 10"/>
+          <p:cNvSpPr txBox="1"/>
+          <p:nvPr/>
+        </p:nvSpPr>
+        <p:spPr>
+          <a:xfrm>
+            <a:off x="7132320" y="1627632"/>
+            <a:ext cx="1828800" cy="685800"/>
+          </a:xfrm>
+          <a:prstGeom prst="rect">
+            <a:avLst/>
+          </a:prstGeom>
+          <a:noFill/>
+        </p:spPr>
+        <p:txBody>
+          <a:bodyPr wrap="square">
+            <a:spAutoFit/>
+          </a:bodyPr>
+          <a:lstStyle/>
+          <a:p>
+            <a:pPr algn="l">
+              <a:spcAft>
+                <a:spcPts val="100"/>
+              </a:spcAft>
+            </a:pPr>
+            <a:r>
+              <a:rPr sz="900" b="1">
                 <a:solidFill>
                   <a:srgbClr val="FFFFFF"/>
                 </a:solidFill>
               </a:rPr>
-              <a:t>Grype → Scan</a:t>
-            </a:r>
-            <a:r>
-              <a:rPr sz="800" b="0">
+              <a:t>BDD Test
+Result</a:t>
+            </a:r>
+          </a:p>
+          <a:p>
+            <a:pPr algn="l">
+              <a:spcAft>
+                <a:spcPts val="0"/>
+              </a:spcAft>
+            </a:pPr>
+            <a:r>
+              <a:rPr sz="700" b="0">
                 <a:solidFill>
                   <a:srgbClr val="BBBBBB"/>
                 </a:solidFill>
               </a:rPr>
-              <a:t>  —  Scans SBOM against known vulnerability databases</a:t>
-            </a:r>
-          </a:p>
-        </p:txBody>
-      </p:sp>
-      <p:sp>
-        <p:nvSpPr>
-          <p:cNvPr id="11" name="Rounded Rectangle 10"/>
+              <a:t/>
+            </a:r>
+          </a:p>
+        </p:txBody>
+      </p:sp>
+      <p:sp>
+        <p:nvSpPr>
+          <p:cNvPr id="12" name="Rounded Rectangle 11"/>
           <p:cNvSpPr/>
           <p:nvPr/>
         </p:nvSpPr>
         <p:spPr>
           <a:xfrm>
-            <a:off x="457200" y="3529584"/>
-            <a:ext cx="5303520" cy="502920"/>
+            <a:off x="9235440" y="1554480"/>
+            <a:ext cx="2011680" cy="777240"/>
           </a:xfrm>
           <a:prstGeom prst="roundRect">
             <a:avLst/>
           </a:prstGeom>
           <a:solidFill>
-            <a:srgbClr val="004A87"/>
+            <a:srgbClr val="0099D6"/>
           </a:solidFill>
           <a:ln>
             <a:noFill/>
@@ -3665,314 +3747,305 @@
       </p:sp>
       <p:sp>
         <p:nvSpPr>
-          <p:cNvPr id="12" name="TextBox 11"/>
-          <p:cNvSpPr txBox="1"/>
-          <p:nvPr/>
-        </p:nvSpPr>
-        <p:spPr>
-          <a:xfrm>
-            <a:off x="548640" y="3575304"/>
-            <a:ext cx="5120640" cy="411480"/>
-          </a:xfrm>
-          <a:prstGeom prst="rect">
-            <a:avLst/>
-          </a:prstGeom>
-          <a:noFill/>
-        </p:spPr>
-        <p:txBody>
-          <a:bodyPr wrap="square">
-            <a:spAutoFit/>
-          </a:bodyPr>
-          <a:lstStyle/>
-          <a:p>
-            <a:pPr algn="l">
-              <a:spcAft>
-                <a:spcPts val="0"/>
-              </a:spcAft>
-            </a:pPr>
-            <a:r>
-              <a:rPr sz="1000" b="1">
+          <p:cNvPr id="13" name="TextBox 12"/>
+          <p:cNvSpPr txBox="1"/>
+          <p:nvPr/>
+        </p:nvSpPr>
+        <p:spPr>
+          <a:xfrm>
+            <a:off x="9326880" y="1627632"/>
+            <a:ext cx="1828800" cy="685800"/>
+          </a:xfrm>
+          <a:prstGeom prst="rect">
+            <a:avLst/>
+          </a:prstGeom>
+          <a:noFill/>
+        </p:spPr>
+        <p:txBody>
+          <a:bodyPr wrap="square">
+            <a:spAutoFit/>
+          </a:bodyPr>
+          <a:lstStyle/>
+          <a:p>
+            <a:pPr algn="l">
+              <a:spcAft>
+                <a:spcPts val="100"/>
+              </a:spcAft>
+            </a:pPr>
+            <a:r>
+              <a:rPr sz="900" b="1">
                 <a:solidFill>
                   <a:srgbClr val="FFFFFF"/>
                 </a:solidFill>
               </a:rPr>
-              <a:t>Policy Gate</a:t>
-            </a:r>
-            <a:r>
-              <a:rPr sz="800" b="0">
+              <a:t>Deployment
+Pipeline Report</a:t>
+            </a:r>
+          </a:p>
+          <a:p>
+            <a:pPr algn="l">
+              <a:spcAft>
+                <a:spcPts val="0"/>
+              </a:spcAft>
+            </a:pPr>
+            <a:r>
+              <a:rPr sz="700" b="0">
                 <a:solidFill>
                   <a:srgbClr val="BBBBBB"/>
                 </a:solidFill>
               </a:rPr>
-              <a:t>  —  PASS / WARNING / FAIL based on severity thresholds</a:t>
-            </a:r>
-          </a:p>
-        </p:txBody>
-      </p:sp>
-      <p:sp>
-        <p:nvSpPr>
-          <p:cNvPr id="13" name="TextBox 12"/>
-          <p:cNvSpPr txBox="1"/>
-          <p:nvPr/>
-        </p:nvSpPr>
-        <p:spPr>
-          <a:xfrm>
-            <a:off x="731520" y="4206240"/>
-            <a:ext cx="5029200" cy="274320"/>
-          </a:xfrm>
-          <a:prstGeom prst="rect">
-            <a:avLst/>
-          </a:prstGeom>
-          <a:noFill/>
-        </p:spPr>
-        <p:txBody>
-          <a:bodyPr wrap="square">
-            <a:spAutoFit/>
-          </a:bodyPr>
-          <a:lstStyle/>
-          <a:p>
-            <a:pPr algn="l">
-              <a:spcAft>
-                <a:spcPts val="0"/>
-              </a:spcAft>
-            </a:pPr>
-            <a:r>
-              <a:rPr sz="1400" b="1">
+              <a:t/>
+            </a:r>
+          </a:p>
+        </p:txBody>
+      </p:sp>
+      <p:sp>
+        <p:nvSpPr>
+          <p:cNvPr id="14" name="TextBox 13"/>
+          <p:cNvSpPr txBox="1"/>
+          <p:nvPr/>
+        </p:nvSpPr>
+        <p:spPr>
+          <a:xfrm>
+            <a:off x="731520" y="2743200"/>
+            <a:ext cx="4572000" cy="274320"/>
+          </a:xfrm>
+          <a:prstGeom prst="rect">
+            <a:avLst/>
+          </a:prstGeom>
+          <a:noFill/>
+        </p:spPr>
+        <p:txBody>
+          <a:bodyPr wrap="square">
+            <a:spAutoFit/>
+          </a:bodyPr>
+          <a:lstStyle/>
+          <a:p>
+            <a:pPr algn="l">
+              <a:spcAft>
+                <a:spcPts val="0"/>
+              </a:spcAft>
+            </a:pPr>
+            <a:r>
+              <a:rPr sz="1600" b="1">
                 <a:solidFill>
                   <a:srgbClr val="0D1B2A"/>
                 </a:solidFill>
               </a:rPr>
-              <a:t>What Gets Produced</a:t>
-            </a:r>
-          </a:p>
-        </p:txBody>
-      </p:sp>
-      <p:sp>
-        <p:nvSpPr>
-          <p:cNvPr id="14" name="TextBox 13"/>
-          <p:cNvSpPr txBox="1"/>
-          <p:nvPr/>
-        </p:nvSpPr>
-        <p:spPr>
-          <a:xfrm>
-            <a:off x="731520" y="4572000"/>
-            <a:ext cx="5029200" cy="320040"/>
-          </a:xfrm>
-          <a:prstGeom prst="rect">
-            <a:avLst/>
-          </a:prstGeom>
-          <a:noFill/>
-        </p:spPr>
-        <p:txBody>
-          <a:bodyPr wrap="square">
-            <a:spAutoFit/>
-          </a:bodyPr>
-          <a:lstStyle/>
-          <a:p>
-            <a:pPr algn="l">
-              <a:spcAft>
-                <a:spcPts val="0"/>
-              </a:spcAft>
-            </a:pPr>
-            <a:r>
-              <a:rPr sz="1000" b="1">
-                <a:solidFill>
-                  <a:srgbClr val="0069B0"/>
-                </a:solidFill>
-              </a:rPr>
-              <a:t>SBOM (CycloneDX)</a:t>
-            </a:r>
+              <a:t>What This Means for Compliance</a:t>
+            </a:r>
+          </a:p>
+        </p:txBody>
+      </p:sp>
+      <p:sp>
+        <p:nvSpPr>
+          <p:cNvPr id="15" name="TextBox 14"/>
+          <p:cNvSpPr txBox="1"/>
+          <p:nvPr/>
+        </p:nvSpPr>
+        <p:spPr>
+          <a:xfrm>
+            <a:off x="731520" y="3200400"/>
+            <a:ext cx="5029200" cy="822960"/>
+          </a:xfrm>
+          <a:prstGeom prst="rect">
+            <a:avLst/>
+          </a:prstGeom>
+          <a:noFill/>
+        </p:spPr>
+        <p:txBody>
+          <a:bodyPr wrap="square">
+            <a:spAutoFit/>
+          </a:bodyPr>
+          <a:lstStyle/>
+          <a:p>
+            <a:pPr algn="l">
+              <a:spcAft>
+                <a:spcPts val="200"/>
+              </a:spcAft>
+            </a:pPr>
+            <a:r>
+              <a:rPr sz="1200" b="1">
+                <a:solidFill>
+                  <a:srgbClr val="0D1B2A"/>
+                </a:solidFill>
+              </a:rPr>
+              <a:t>Minutes, Not Weeks</a:t>
+            </a:r>
+          </a:p>
+          <a:p>
+            <a:pPr algn="l">
+              <a:spcAft>
+                <a:spcPts val="0"/>
+              </a:spcAft>
+            </a:pPr>
             <a:r>
               <a:rPr sz="900" b="0">
                 <a:solidFill>
                   <a:srgbClr val="555555"/>
                 </a:solidFill>
               </a:rPr>
-              <a:t>  —  Complete component inventory with versions and sources.</a:t>
-            </a:r>
-          </a:p>
-        </p:txBody>
-      </p:sp>
-      <p:sp>
-        <p:nvSpPr>
-          <p:cNvPr id="15" name="TextBox 14"/>
-          <p:cNvSpPr txBox="1"/>
-          <p:nvPr/>
-        </p:nvSpPr>
-        <p:spPr>
-          <a:xfrm>
-            <a:off x="731520" y="4919472"/>
-            <a:ext cx="5029200" cy="320040"/>
-          </a:xfrm>
-          <a:prstGeom prst="rect">
-            <a:avLst/>
-          </a:prstGeom>
-          <a:noFill/>
-        </p:spPr>
-        <p:txBody>
-          <a:bodyPr wrap="square">
-            <a:spAutoFit/>
-          </a:bodyPr>
-          <a:lstStyle/>
-          <a:p>
-            <a:pPr algn="l">
-              <a:spcAft>
-                <a:spcPts val="0"/>
-              </a:spcAft>
-            </a:pPr>
-            <a:r>
-              <a:rPr sz="1000" b="1">
-                <a:solidFill>
-                  <a:srgbClr val="0069B0"/>
-                </a:solidFill>
-              </a:rPr>
-              <a:t>Vulnerability Report</a:t>
-            </a:r>
+              <a:t>Traceability report is generated on every commit — always current, always complete.</a:t>
+            </a:r>
+          </a:p>
+        </p:txBody>
+      </p:sp>
+      <p:sp>
+        <p:nvSpPr>
+          <p:cNvPr id="16" name="TextBox 15"/>
+          <p:cNvSpPr txBox="1"/>
+          <p:nvPr/>
+        </p:nvSpPr>
+        <p:spPr>
+          <a:xfrm>
+            <a:off x="731520" y="4114800"/>
+            <a:ext cx="5029200" cy="822960"/>
+          </a:xfrm>
+          <a:prstGeom prst="rect">
+            <a:avLst/>
+          </a:prstGeom>
+          <a:noFill/>
+        </p:spPr>
+        <p:txBody>
+          <a:bodyPr wrap="square">
+            <a:spAutoFit/>
+          </a:bodyPr>
+          <a:lstStyle/>
+          <a:p>
+            <a:pPr algn="l">
+              <a:spcAft>
+                <a:spcPts val="200"/>
+              </a:spcAft>
+            </a:pPr>
+            <a:r>
+              <a:rPr sz="1200" b="1">
+                <a:solidFill>
+                  <a:srgbClr val="0D1B2A"/>
+                </a:solidFill>
+              </a:rPr>
+              <a:t>Every Change Tracked</a:t>
+            </a:r>
+          </a:p>
+          <a:p>
+            <a:pPr algn="l">
+              <a:spcAft>
+                <a:spcPts val="0"/>
+              </a:spcAft>
+            </a:pPr>
             <a:r>
               <a:rPr sz="900" b="0">
                 <a:solidFill>
                   <a:srgbClr val="555555"/>
                 </a:solidFill>
               </a:rPr>
-              <a:t>  —  CVE-level findings with severity and fix availability.</a:t>
-            </a:r>
-          </a:p>
-        </p:txBody>
-      </p:sp>
-      <p:sp>
-        <p:nvSpPr>
-          <p:cNvPr id="16" name="TextBox 15"/>
-          <p:cNvSpPr txBox="1"/>
-          <p:nvPr/>
-        </p:nvSpPr>
-        <p:spPr>
-          <a:xfrm>
-            <a:off x="731520" y="5266944"/>
-            <a:ext cx="5029200" cy="320040"/>
-          </a:xfrm>
-          <a:prstGeom prst="rect">
-            <a:avLst/>
-          </a:prstGeom>
-          <a:noFill/>
-        </p:spPr>
-        <p:txBody>
-          <a:bodyPr wrap="square">
-            <a:spAutoFit/>
-          </a:bodyPr>
-          <a:lstStyle/>
-          <a:p>
-            <a:pPr algn="l">
-              <a:spcAft>
-                <a:spcPts val="0"/>
-              </a:spcAft>
-            </a:pPr>
-            <a:r>
-              <a:rPr sz="1000" b="1">
-                <a:solidFill>
-                  <a:srgbClr val="0069B0"/>
-                </a:solidFill>
-              </a:rPr>
-              <a:t>Policy Verdict</a:t>
-            </a:r>
+              <a:t>Git history + baseline diffs show exactly when requirements changed and who acknowledged them.</a:t>
+            </a:r>
+          </a:p>
+        </p:txBody>
+      </p:sp>
+      <p:sp>
+        <p:nvSpPr>
+          <p:cNvPr id="17" name="TextBox 16"/>
+          <p:cNvSpPr txBox="1"/>
+          <p:nvPr/>
+        </p:nvSpPr>
+        <p:spPr>
+          <a:xfrm>
+            <a:off x="731520" y="5029200"/>
+            <a:ext cx="5029200" cy="822960"/>
+          </a:xfrm>
+          <a:prstGeom prst="rect">
+            <a:avLst/>
+          </a:prstGeom>
+          <a:noFill/>
+        </p:spPr>
+        <p:txBody>
+          <a:bodyPr wrap="square">
+            <a:spAutoFit/>
+          </a:bodyPr>
+          <a:lstStyle/>
+          <a:p>
+            <a:pPr algn="l">
+              <a:spcAft>
+                <a:spcPts val="200"/>
+              </a:spcAft>
+            </a:pPr>
+            <a:r>
+              <a:rPr sz="1200" b="1">
+                <a:solidFill>
+                  <a:srgbClr val="0D1B2A"/>
+                </a:solidFill>
+              </a:rPr>
+              <a:t>No Missing Tests</a:t>
+            </a:r>
+          </a:p>
+          <a:p>
+            <a:pPr algn="l">
+              <a:spcAft>
+                <a:spcPts val="0"/>
+              </a:spcAft>
+            </a:pPr>
             <a:r>
               <a:rPr sz="900" b="0">
                 <a:solidFill>
                   <a:srgbClr val="555555"/>
                 </a:solidFill>
               </a:rPr>
-              <a:t>  —  Blocks deployment on Critical/High findings.</a:t>
-            </a:r>
-          </a:p>
-        </p:txBody>
-      </p:sp>
-      <p:sp>
-        <p:nvSpPr>
-          <p:cNvPr id="17" name="TextBox 16"/>
-          <p:cNvSpPr txBox="1"/>
-          <p:nvPr/>
-        </p:nvSpPr>
-        <p:spPr>
-          <a:xfrm>
-            <a:off x="731520" y="5614416"/>
-            <a:ext cx="5029200" cy="320040"/>
-          </a:xfrm>
-          <a:prstGeom prst="rect">
-            <a:avLst/>
-          </a:prstGeom>
-          <a:noFill/>
-        </p:spPr>
-        <p:txBody>
-          <a:bodyPr wrap="square">
-            <a:spAutoFit/>
-          </a:bodyPr>
-          <a:lstStyle/>
-          <a:p>
-            <a:pPr algn="l">
-              <a:spcAft>
-                <a:spcPts val="0"/>
-              </a:spcAft>
-            </a:pPr>
-            <a:r>
-              <a:rPr sz="1000" b="1">
-                <a:solidFill>
-                  <a:srgbClr val="0069B0"/>
-                </a:solidFill>
-              </a:rPr>
-              <a:t>Severity Dashboard</a:t>
-            </a:r>
+              <a:t>Gate A ensures every verification criteria has coverage — gaps are caught before merge.</a:t>
+            </a:r>
+          </a:p>
+        </p:txBody>
+      </p:sp>
+      <p:sp>
+        <p:nvSpPr>
+          <p:cNvPr id="18" name="TextBox 17"/>
+          <p:cNvSpPr txBox="1"/>
+          <p:nvPr/>
+        </p:nvSpPr>
+        <p:spPr>
+          <a:xfrm>
+            <a:off x="6217920" y="3200400"/>
+            <a:ext cx="5029200" cy="822960"/>
+          </a:xfrm>
+          <a:prstGeom prst="rect">
+            <a:avLst/>
+          </a:prstGeom>
+          <a:noFill/>
+        </p:spPr>
+        <p:txBody>
+          <a:bodyPr wrap="square">
+            <a:spAutoFit/>
+          </a:bodyPr>
+          <a:lstStyle/>
+          <a:p>
+            <a:pPr algn="l">
+              <a:spcAft>
+                <a:spcPts val="200"/>
+              </a:spcAft>
+            </a:pPr>
+            <a:r>
+              <a:rPr sz="1200" b="1">
+                <a:solidFill>
+                  <a:srgbClr val="0D1B2A"/>
+                </a:solidFill>
+              </a:rPr>
+              <a:t>No Stale Tests</a:t>
+            </a:r>
+          </a:p>
+          <a:p>
+            <a:pPr algn="l">
+              <a:spcAft>
+                <a:spcPts val="0"/>
+              </a:spcAft>
+            </a:pPr>
             <a:r>
               <a:rPr sz="900" b="0">
                 <a:solidFill>
                   <a:srgbClr val="555555"/>
                 </a:solidFill>
               </a:rPr>
-              <a:t>  —  Visual breakdown in the Deployment Pipeline Report.</a:t>
-            </a:r>
-          </a:p>
-        </p:txBody>
-      </p:sp>
-      <p:sp>
-        <p:nvSpPr>
-          <p:cNvPr id="18" name="Rounded Rectangle 17"/>
-          <p:cNvSpPr/>
-          <p:nvPr/>
-        </p:nvSpPr>
-        <p:spPr>
-          <a:xfrm>
-            <a:off x="6217920" y="1371600"/>
-            <a:ext cx="5486400" cy="4572000"/>
-          </a:xfrm>
-          <a:prstGeom prst="roundRect">
-            <a:avLst/>
-          </a:prstGeom>
-          <a:solidFill>
-            <a:srgbClr val="F4F7FA"/>
-          </a:solidFill>
-          <a:ln w="12700">
-            <a:solidFill>
-              <a:srgbClr val="D0E8F8"/>
-            </a:solidFill>
-          </a:ln>
-        </p:spPr>
-        <p:style>
-          <a:lnRef idx="1">
-            <a:schemeClr val="accent1"/>
-          </a:lnRef>
-          <a:fillRef idx="3">
-            <a:schemeClr val="accent1"/>
-          </a:fillRef>
-          <a:effectRef idx="2">
-            <a:schemeClr val="accent1"/>
-          </a:effectRef>
-          <a:fontRef idx="minor">
-            <a:schemeClr val="lt1"/>
-          </a:fontRef>
-        </p:style>
-        <p:txBody>
-          <a:bodyPr rtlCol="0" anchor="ctr"/>
-          <a:lstStyle/>
-          <a:p>
-            <a:pPr algn="ctr"/>
+              <a:t>Gate B detects criteria drift — existing tests are flagged for re-review when requirements change.</a:t>
+            </a:r>
           </a:p>
         </p:txBody>
       </p:sp>
@@ -3984,32 +4057,47 @@
         </p:nvSpPr>
         <p:spPr>
           <a:xfrm>
-            <a:off x="6400800" y="1508760"/>
-            <a:ext cx="5120640" cy="274320"/>
-          </a:xfrm>
-          <a:prstGeom prst="rect">
-            <a:avLst/>
-          </a:prstGeom>
-          <a:noFill/>
-        </p:spPr>
-        <p:txBody>
-          <a:bodyPr wrap="square">
-            <a:spAutoFit/>
-          </a:bodyPr>
-          <a:lstStyle/>
-          <a:p>
-            <a:pPr algn="l">
-              <a:spcAft>
-                <a:spcPts val="0"/>
-              </a:spcAft>
-            </a:pPr>
-            <a:r>
-              <a:rPr sz="1400" b="1">
+            <a:off x="6217920" y="4114800"/>
+            <a:ext cx="5029200" cy="822960"/>
+          </a:xfrm>
+          <a:prstGeom prst="rect">
+            <a:avLst/>
+          </a:prstGeom>
+          <a:noFill/>
+        </p:spPr>
+        <p:txBody>
+          <a:bodyPr wrap="square">
+            <a:spAutoFit/>
+          </a:bodyPr>
+          <a:lstStyle/>
+          <a:p>
+            <a:pPr algn="l">
+              <a:spcAft>
+                <a:spcPts val="200"/>
+              </a:spcAft>
+            </a:pPr>
+            <a:r>
+              <a:rPr sz="1200" b="1">
                 <a:solidFill>
                   <a:srgbClr val="0D1B2A"/>
                 </a:solidFill>
               </a:rPr>
-              <a:t>Why This Matters for Compliance</a:t>
+              <a:t>No Ghost Tests</a:t>
+            </a:r>
+          </a:p>
+          <a:p>
+            <a:pPr algn="l">
+              <a:spcAft>
+                <a:spcPts val="0"/>
+              </a:spcAft>
+            </a:pPr>
+            <a:r>
+              <a:rPr sz="900" b="0">
+                <a:solidFill>
+                  <a:srgbClr val="555555"/>
+                </a:solidFill>
+              </a:rPr>
+              <a:t>Gate C catches orphaned tests — scenarios for deleted requirements are flagged for removal.</a:t>
             </a:r>
           </a:p>
         </p:txBody>
@@ -4022,8 +4110,8 @@
         </p:nvSpPr>
         <p:spPr>
           <a:xfrm>
-            <a:off x="6400800" y="1965960"/>
-            <a:ext cx="5120640" cy="640080"/>
+            <a:off x="6217920" y="5029200"/>
+            <a:ext cx="5029200" cy="822960"/>
           </a:xfrm>
           <a:prstGeom prst="rect">
             <a:avLst/>
@@ -4042,12 +4130,12 @@
               </a:spcAft>
             </a:pPr>
             <a:r>
-              <a:rPr sz="1100" b="1">
-                <a:solidFill>
-                  <a:srgbClr val="0069B0"/>
-                </a:solidFill>
-              </a:rPr>
-              <a:t>Executive Order 14028</a:t>
+              <a:rPr sz="1200" b="1">
+                <a:solidFill>
+                  <a:srgbClr val="0D1B2A"/>
+                </a:solidFill>
+              </a:rPr>
+              <a:t>Immutable Evidence</a:t>
             </a:r>
           </a:p>
           <a:p>
@@ -4062,7 +4150,7 @@
                   <a:srgbClr val="555555"/>
                 </a:solidFill>
               </a:rPr>
-              <a:t>Federal mandate requiring SBOMs for all software sold to the government.</a:t>
+              <a:t>CI artifacts (HTML + JSON reports) are stored per build — reproducible audit trail.</a:t>
             </a:r>
           </a:p>
         </p:txBody>
@@ -4070,301 +4158,6 @@
       <p:sp>
         <p:nvSpPr>
           <p:cNvPr id="21" name="TextBox 20"/>
-          <p:cNvSpPr txBox="1"/>
-          <p:nvPr/>
-        </p:nvSpPr>
-        <p:spPr>
-          <a:xfrm>
-            <a:off x="6400800" y="2606040"/>
-            <a:ext cx="5120640" cy="640080"/>
-          </a:xfrm>
-          <a:prstGeom prst="rect">
-            <a:avLst/>
-          </a:prstGeom>
-          <a:noFill/>
-        </p:spPr>
-        <p:txBody>
-          <a:bodyPr wrap="square">
-            <a:spAutoFit/>
-          </a:bodyPr>
-          <a:lstStyle/>
-          <a:p>
-            <a:pPr algn="l">
-              <a:spcAft>
-                <a:spcPts val="200"/>
-              </a:spcAft>
-            </a:pPr>
-            <a:r>
-              <a:rPr sz="1100" b="1">
-                <a:solidFill>
-                  <a:srgbClr val="0069B0"/>
-                </a:solidFill>
-              </a:rPr>
-              <a:t>NIST SP 800-218 (SSDF)</a:t>
-            </a:r>
-          </a:p>
-          <a:p>
-            <a:pPr algn="l">
-              <a:spcAft>
-                <a:spcPts val="0"/>
-              </a:spcAft>
-            </a:pPr>
-            <a:r>
-              <a:rPr sz="900" b="0">
-                <a:solidFill>
-                  <a:srgbClr val="555555"/>
-                </a:solidFill>
-              </a:rPr>
-              <a:t>Requires vulnerability scanning and remediation tracking per build.</a:t>
-            </a:r>
-          </a:p>
-        </p:txBody>
-      </p:sp>
-      <p:sp>
-        <p:nvSpPr>
-          <p:cNvPr id="22" name="TextBox 21"/>
-          <p:cNvSpPr txBox="1"/>
-          <p:nvPr/>
-        </p:nvSpPr>
-        <p:spPr>
-          <a:xfrm>
-            <a:off x="6400800" y="3246120"/>
-            <a:ext cx="5120640" cy="640080"/>
-          </a:xfrm>
-          <a:prstGeom prst="rect">
-            <a:avLst/>
-          </a:prstGeom>
-          <a:noFill/>
-        </p:spPr>
-        <p:txBody>
-          <a:bodyPr wrap="square">
-            <a:spAutoFit/>
-          </a:bodyPr>
-          <a:lstStyle/>
-          <a:p>
-            <a:pPr algn="l">
-              <a:spcAft>
-                <a:spcPts val="200"/>
-              </a:spcAft>
-            </a:pPr>
-            <a:r>
-              <a:rPr sz="1100" b="1">
-                <a:solidFill>
-                  <a:srgbClr val="0069B0"/>
-                </a:solidFill>
-              </a:rPr>
-              <a:t>Supply Chain Transparency</a:t>
-            </a:r>
-          </a:p>
-          <a:p>
-            <a:pPr algn="l">
-              <a:spcAft>
-                <a:spcPts val="0"/>
-              </a:spcAft>
-            </a:pPr>
-            <a:r>
-              <a:rPr sz="900" b="0">
-                <a:solidFill>
-                  <a:srgbClr val="555555"/>
-                </a:solidFill>
-              </a:rPr>
-              <a:t>Every component inventoried with name, version, type, and package URL.</a:t>
-            </a:r>
-          </a:p>
-        </p:txBody>
-      </p:sp>
-      <p:sp>
-        <p:nvSpPr>
-          <p:cNvPr id="23" name="TextBox 22"/>
-          <p:cNvSpPr txBox="1"/>
-          <p:nvPr/>
-        </p:nvSpPr>
-        <p:spPr>
-          <a:xfrm>
-            <a:off x="6400800" y="3886200"/>
-            <a:ext cx="5120640" cy="640080"/>
-          </a:xfrm>
-          <a:prstGeom prst="rect">
-            <a:avLst/>
-          </a:prstGeom>
-          <a:noFill/>
-        </p:spPr>
-        <p:txBody>
-          <a:bodyPr wrap="square">
-            <a:spAutoFit/>
-          </a:bodyPr>
-          <a:lstStyle/>
-          <a:p>
-            <a:pPr algn="l">
-              <a:spcAft>
-                <a:spcPts val="200"/>
-              </a:spcAft>
-            </a:pPr>
-            <a:r>
-              <a:rPr sz="1100" b="1">
-                <a:solidFill>
-                  <a:srgbClr val="0069B0"/>
-                </a:solidFill>
-              </a:rPr>
-              <a:t>Audit-Ready Evidence</a:t>
-            </a:r>
-          </a:p>
-          <a:p>
-            <a:pPr algn="l">
-              <a:spcAft>
-                <a:spcPts val="0"/>
-              </a:spcAft>
-            </a:pPr>
-            <a:r>
-              <a:rPr sz="900" b="0">
-                <a:solidFill>
-                  <a:srgbClr val="555555"/>
-                </a:solidFill>
-              </a:rPr>
-              <a:t>SBOM + scan results included in evidence bundle. No manual assembly.</a:t>
-            </a:r>
-          </a:p>
-        </p:txBody>
-      </p:sp>
-      <p:sp>
-        <p:nvSpPr>
-          <p:cNvPr id="24" name="TextBox 23"/>
-          <p:cNvSpPr txBox="1"/>
-          <p:nvPr/>
-        </p:nvSpPr>
-        <p:spPr>
-          <a:xfrm>
-            <a:off x="6400800" y="4526280"/>
-            <a:ext cx="5120640" cy="640080"/>
-          </a:xfrm>
-          <a:prstGeom prst="rect">
-            <a:avLst/>
-          </a:prstGeom>
-          <a:noFill/>
-        </p:spPr>
-        <p:txBody>
-          <a:bodyPr wrap="square">
-            <a:spAutoFit/>
-          </a:bodyPr>
-          <a:lstStyle/>
-          <a:p>
-            <a:pPr algn="l">
-              <a:spcAft>
-                <a:spcPts val="200"/>
-              </a:spcAft>
-            </a:pPr>
-            <a:r>
-              <a:rPr sz="1100" b="1">
-                <a:solidFill>
-                  <a:srgbClr val="0069B0"/>
-                </a:solidFill>
-              </a:rPr>
-              <a:t>Air-Gapped Compatible</a:t>
-            </a:r>
-          </a:p>
-          <a:p>
-            <a:pPr algn="l">
-              <a:spcAft>
-                <a:spcPts val="0"/>
-              </a:spcAft>
-            </a:pPr>
-            <a:r>
-              <a:rPr sz="900" b="0">
-                <a:solidFill>
-                  <a:srgbClr val="555555"/>
-                </a:solidFill>
-              </a:rPr>
-              <a:t>Grype DB mirrored internally. Syft runs against local images. No internet.</a:t>
-            </a:r>
-          </a:p>
-        </p:txBody>
-      </p:sp>
-      <p:sp>
-        <p:nvSpPr>
-          <p:cNvPr id="25" name="Rounded Rectangle 24"/>
-          <p:cNvSpPr/>
-          <p:nvPr/>
-        </p:nvSpPr>
-        <p:spPr>
-          <a:xfrm>
-            <a:off x="457200" y="6126480"/>
-            <a:ext cx="11247120" cy="365760"/>
-          </a:xfrm>
-          <a:prstGeom prst="roundRect">
-            <a:avLst/>
-          </a:prstGeom>
-          <a:solidFill>
-            <a:srgbClr val="F4F7FA"/>
-          </a:solidFill>
-          <a:ln w="12700">
-            <a:solidFill>
-              <a:srgbClr val="0069B0"/>
-            </a:solidFill>
-          </a:ln>
-        </p:spPr>
-        <p:style>
-          <a:lnRef idx="1">
-            <a:schemeClr val="accent1"/>
-          </a:lnRef>
-          <a:fillRef idx="3">
-            <a:schemeClr val="accent1"/>
-          </a:fillRef>
-          <a:effectRef idx="2">
-            <a:schemeClr val="accent1"/>
-          </a:effectRef>
-          <a:fontRef idx="minor">
-            <a:schemeClr val="lt1"/>
-          </a:fontRef>
-        </p:style>
-        <p:txBody>
-          <a:bodyPr rtlCol="0" anchor="ctr"/>
-          <a:lstStyle/>
-          <a:p>
-            <a:pPr algn="ctr"/>
-          </a:p>
-        </p:txBody>
-      </p:sp>
-      <p:sp>
-        <p:nvSpPr>
-          <p:cNvPr id="26" name="TextBox 25"/>
-          <p:cNvSpPr txBox="1"/>
-          <p:nvPr/>
-        </p:nvSpPr>
-        <p:spPr>
-          <a:xfrm>
-            <a:off x="731520" y="6172200"/>
-            <a:ext cx="10789920" cy="274320"/>
-          </a:xfrm>
-          <a:prstGeom prst="rect">
-            <a:avLst/>
-          </a:prstGeom>
-          <a:noFill/>
-        </p:spPr>
-        <p:txBody>
-          <a:bodyPr wrap="square">
-            <a:spAutoFit/>
-          </a:bodyPr>
-          <a:lstStyle/>
-          <a:p>
-            <a:pPr algn="ctr">
-              <a:spcAft>
-                <a:spcPts val="0"/>
-              </a:spcAft>
-            </a:pPr>
-            <a:r>
-              <a:rPr sz="1000" b="1">
-                <a:solidFill>
-                  <a:srgbClr val="0D1B2A"/>
-                </a:solidFill>
-              </a:rPr>
-              <a:t>Every build produces a complete SBOM and vulnerability scan — no manual steps, no gaps, always current.</a:t>
-            </a:r>
-          </a:p>
-        </p:txBody>
-      </p:sp>
-      <p:sp>
-        <p:nvSpPr>
-          <p:cNvPr id="27" name="TextBox 26"/>
           <p:cNvSpPr txBox="1"/>
           <p:nvPr/>
         </p:nvSpPr>
@@ -4395,7 +4188,7 @@
                   <a:srgbClr val="888888"/>
                 </a:solidFill>
               </a:rPr>
-              <a:t>10 / 12</a:t>
+              <a:t>10 / 11</a:t>
             </a:r>
           </a:p>
         </p:txBody>
@@ -4409,987 +4202,6 @@
 </file>
 
 <file path=ppt/slides/slide11.xml><?xml version="1.0" encoding="utf-8"?>
-<p:sld xmlns:a="http://schemas.openxmlformats.org/drawingml/2006/main" xmlns:p="http://schemas.openxmlformats.org/presentationml/2006/main" xmlns:r="http://schemas.openxmlformats.org/officeDocument/2006/relationships">
-  <p:cSld>
-    <p:bg>
-      <p:bgPr>
-        <a:solidFill>
-          <a:srgbClr val="FFFFFF"/>
-        </a:solidFill>
-        <a:effectLst/>
-      </p:bgPr>
-    </p:bg>
-    <p:spTree>
-      <p:nvGrpSpPr>
-        <p:cNvPr id="1" name=""/>
-        <p:cNvGrpSpPr/>
-        <p:nvPr/>
-      </p:nvGrpSpPr>
-      <p:grpSpPr/>
-      <p:sp>
-        <p:nvSpPr>
-          <p:cNvPr id="2" name="TextBox 1"/>
-          <p:cNvSpPr txBox="1"/>
-          <p:nvPr/>
-        </p:nvSpPr>
-        <p:spPr>
-          <a:xfrm>
-            <a:off x="731520" y="457200"/>
-            <a:ext cx="10058400" cy="457200"/>
-          </a:xfrm>
-          <a:prstGeom prst="rect">
-            <a:avLst/>
-          </a:prstGeom>
-          <a:noFill/>
-        </p:spPr>
-        <p:txBody>
-          <a:bodyPr wrap="square">
-            <a:spAutoFit/>
-          </a:bodyPr>
-          <a:lstStyle/>
-          <a:p>
-            <a:pPr algn="l">
-              <a:spcAft>
-                <a:spcPts val="0"/>
-              </a:spcAft>
-            </a:pPr>
-            <a:r>
-              <a:rPr sz="2800" b="1">
-                <a:solidFill>
-                  <a:srgbClr val="0D1B2A"/>
-                </a:solidFill>
-              </a:rPr>
-              <a:t>Traceability &amp; Audit Evidence</a:t>
-            </a:r>
-          </a:p>
-        </p:txBody>
-      </p:sp>
-      <p:sp>
-        <p:nvSpPr>
-          <p:cNvPr id="3" name="TextBox 2"/>
-          <p:cNvSpPr txBox="1"/>
-          <p:nvPr/>
-        </p:nvSpPr>
-        <p:spPr>
-          <a:xfrm>
-            <a:off x="731520" y="960120"/>
-            <a:ext cx="10058400" cy="274320"/>
-          </a:xfrm>
-          <a:prstGeom prst="rect">
-            <a:avLst/>
-          </a:prstGeom>
-          <a:noFill/>
-        </p:spPr>
-        <p:txBody>
-          <a:bodyPr wrap="square">
-            <a:spAutoFit/>
-          </a:bodyPr>
-          <a:lstStyle/>
-          <a:p>
-            <a:pPr algn="l">
-              <a:spcAft>
-                <a:spcPts val="0"/>
-              </a:spcAft>
-            </a:pPr>
-            <a:r>
-              <a:rPr sz="1100" b="0">
-                <a:solidFill>
-                  <a:srgbClr val="555555"/>
-                </a:solidFill>
-              </a:rPr>
-              <a:t>Every pipeline run produces a complete, machine-generated evidence chain — no manual assembly required.</a:t>
-            </a:r>
-          </a:p>
-        </p:txBody>
-      </p:sp>
-      <p:sp>
-        <p:nvSpPr>
-          <p:cNvPr id="4" name="Rounded Rectangle 3"/>
-          <p:cNvSpPr/>
-          <p:nvPr/>
-        </p:nvSpPr>
-        <p:spPr>
-          <a:xfrm>
-            <a:off x="457200" y="1554480"/>
-            <a:ext cx="2011680" cy="777240"/>
-          </a:xfrm>
-          <a:prstGeom prst="roundRect">
-            <a:avLst/>
-          </a:prstGeom>
-          <a:solidFill>
-            <a:srgbClr val="003057"/>
-          </a:solidFill>
-          <a:ln>
-            <a:noFill/>
-          </a:ln>
-        </p:spPr>
-        <p:style>
-          <a:lnRef idx="1">
-            <a:schemeClr val="accent1"/>
-          </a:lnRef>
-          <a:fillRef idx="3">
-            <a:schemeClr val="accent1"/>
-          </a:fillRef>
-          <a:effectRef idx="2">
-            <a:schemeClr val="accent1"/>
-          </a:effectRef>
-          <a:fontRef idx="minor">
-            <a:schemeClr val="lt1"/>
-          </a:fontRef>
-        </p:style>
-        <p:txBody>
-          <a:bodyPr rtlCol="0" anchor="ctr"/>
-          <a:lstStyle/>
-          <a:p>
-            <a:pPr algn="ctr"/>
-          </a:p>
-        </p:txBody>
-      </p:sp>
-      <p:sp>
-        <p:nvSpPr>
-          <p:cNvPr id="5" name="TextBox 4"/>
-          <p:cNvSpPr txBox="1"/>
-          <p:nvPr/>
-        </p:nvSpPr>
-        <p:spPr>
-          <a:xfrm>
-            <a:off x="548640" y="1627632"/>
-            <a:ext cx="1828800" cy="685800"/>
-          </a:xfrm>
-          <a:prstGeom prst="rect">
-            <a:avLst/>
-          </a:prstGeom>
-          <a:noFill/>
-        </p:spPr>
-        <p:txBody>
-          <a:bodyPr wrap="square">
-            <a:spAutoFit/>
-          </a:bodyPr>
-          <a:lstStyle/>
-          <a:p>
-            <a:pPr algn="l">
-              <a:spcAft>
-                <a:spcPts val="100"/>
-              </a:spcAft>
-            </a:pPr>
-            <a:r>
-              <a:rPr sz="900" b="1">
-                <a:solidFill>
-                  <a:srgbClr val="FFFFFF"/>
-                </a:solidFill>
-              </a:rPr>
-              <a:t>Requirement
-in Cameo</a:t>
-            </a:r>
-          </a:p>
-          <a:p>
-            <a:pPr algn="l">
-              <a:spcAft>
-                <a:spcPts val="0"/>
-              </a:spcAft>
-            </a:pPr>
-            <a:r>
-              <a:rPr sz="700" b="0">
-                <a:solidFill>
-                  <a:srgbClr val="BBBBBB"/>
-                </a:solidFill>
-              </a:rPr>
-              <a:t/>
-            </a:r>
-          </a:p>
-        </p:txBody>
-      </p:sp>
-      <p:sp>
-        <p:nvSpPr>
-          <p:cNvPr id="6" name="Rounded Rectangle 5"/>
-          <p:cNvSpPr/>
-          <p:nvPr/>
-        </p:nvSpPr>
-        <p:spPr>
-          <a:xfrm>
-            <a:off x="2651760" y="1554480"/>
-            <a:ext cx="2011680" cy="777240"/>
-          </a:xfrm>
-          <a:prstGeom prst="roundRect">
-            <a:avLst/>
-          </a:prstGeom>
-          <a:solidFill>
-            <a:srgbClr val="004A87"/>
-          </a:solidFill>
-          <a:ln>
-            <a:noFill/>
-          </a:ln>
-        </p:spPr>
-        <p:style>
-          <a:lnRef idx="1">
-            <a:schemeClr val="accent1"/>
-          </a:lnRef>
-          <a:fillRef idx="3">
-            <a:schemeClr val="accent1"/>
-          </a:fillRef>
-          <a:effectRef idx="2">
-            <a:schemeClr val="accent1"/>
-          </a:effectRef>
-          <a:fontRef idx="minor">
-            <a:schemeClr val="lt1"/>
-          </a:fontRef>
-        </p:style>
-        <p:txBody>
-          <a:bodyPr rtlCol="0" anchor="ctr"/>
-          <a:lstStyle/>
-          <a:p>
-            <a:pPr algn="ctr"/>
-          </a:p>
-        </p:txBody>
-      </p:sp>
-      <p:sp>
-        <p:nvSpPr>
-          <p:cNvPr id="7" name="TextBox 6"/>
-          <p:cNvSpPr txBox="1"/>
-          <p:nvPr/>
-        </p:nvSpPr>
-        <p:spPr>
-          <a:xfrm>
-            <a:off x="2743200" y="1627632"/>
-            <a:ext cx="1828800" cy="685800"/>
-          </a:xfrm>
-          <a:prstGeom prst="rect">
-            <a:avLst/>
-          </a:prstGeom>
-          <a:noFill/>
-        </p:spPr>
-        <p:txBody>
-          <a:bodyPr wrap="square">
-            <a:spAutoFit/>
-          </a:bodyPr>
-          <a:lstStyle/>
-          <a:p>
-            <a:pPr algn="l">
-              <a:spcAft>
-                <a:spcPts val="100"/>
-              </a:spcAft>
-            </a:pPr>
-            <a:r>
-              <a:rPr sz="900" b="1">
-                <a:solidFill>
-                  <a:srgbClr val="FFFFFF"/>
-                </a:solidFill>
-              </a:rPr>
-              <a:t>Verification
-Criteria (VC)</a:t>
-            </a:r>
-          </a:p>
-          <a:p>
-            <a:pPr algn="l">
-              <a:spcAft>
-                <a:spcPts val="0"/>
-              </a:spcAft>
-            </a:pPr>
-            <a:r>
-              <a:rPr sz="700" b="0">
-                <a:solidFill>
-                  <a:srgbClr val="BBBBBB"/>
-                </a:solidFill>
-              </a:rPr>
-              <a:t/>
-            </a:r>
-          </a:p>
-        </p:txBody>
-      </p:sp>
-      <p:sp>
-        <p:nvSpPr>
-          <p:cNvPr id="8" name="Rounded Rectangle 7"/>
-          <p:cNvSpPr/>
-          <p:nvPr/>
-        </p:nvSpPr>
-        <p:spPr>
-          <a:xfrm>
-            <a:off x="4846320" y="1554480"/>
-            <a:ext cx="2011680" cy="777240"/>
-          </a:xfrm>
-          <a:prstGeom prst="roundRect">
-            <a:avLst/>
-          </a:prstGeom>
-          <a:solidFill>
-            <a:srgbClr val="0069B0"/>
-          </a:solidFill>
-          <a:ln>
-            <a:noFill/>
-          </a:ln>
-        </p:spPr>
-        <p:style>
-          <a:lnRef idx="1">
-            <a:schemeClr val="accent1"/>
-          </a:lnRef>
-          <a:fillRef idx="3">
-            <a:schemeClr val="accent1"/>
-          </a:fillRef>
-          <a:effectRef idx="2">
-            <a:schemeClr val="accent1"/>
-          </a:effectRef>
-          <a:fontRef idx="minor">
-            <a:schemeClr val="lt1"/>
-          </a:fontRef>
-        </p:style>
-        <p:txBody>
-          <a:bodyPr rtlCol="0" anchor="ctr"/>
-          <a:lstStyle/>
-          <a:p>
-            <a:pPr algn="ctr"/>
-          </a:p>
-        </p:txBody>
-      </p:sp>
-      <p:sp>
-        <p:nvSpPr>
-          <p:cNvPr id="9" name="TextBox 8"/>
-          <p:cNvSpPr txBox="1"/>
-          <p:nvPr/>
-        </p:nvSpPr>
-        <p:spPr>
-          <a:xfrm>
-            <a:off x="4937760" y="1627632"/>
-            <a:ext cx="1828800" cy="685800"/>
-          </a:xfrm>
-          <a:prstGeom prst="rect">
-            <a:avLst/>
-          </a:prstGeom>
-          <a:noFill/>
-        </p:spPr>
-        <p:txBody>
-          <a:bodyPr wrap="square">
-            <a:spAutoFit/>
-          </a:bodyPr>
-          <a:lstStyle/>
-          <a:p>
-            <a:pPr algn="l">
-              <a:spcAft>
-                <a:spcPts val="100"/>
-              </a:spcAft>
-            </a:pPr>
-            <a:r>
-              <a:rPr sz="900" b="1">
-                <a:solidFill>
-                  <a:srgbClr val="FFFFFF"/>
-                </a:solidFill>
-              </a:rPr>
-              <a:t>Gherkin
-Scenario</a:t>
-            </a:r>
-          </a:p>
-          <a:p>
-            <a:pPr algn="l">
-              <a:spcAft>
-                <a:spcPts val="0"/>
-              </a:spcAft>
-            </a:pPr>
-            <a:r>
-              <a:rPr sz="700" b="0">
-                <a:solidFill>
-                  <a:srgbClr val="BBBBBB"/>
-                </a:solidFill>
-              </a:rPr>
-              <a:t/>
-            </a:r>
-          </a:p>
-        </p:txBody>
-      </p:sp>
-      <p:sp>
-        <p:nvSpPr>
-          <p:cNvPr id="10" name="Rounded Rectangle 9"/>
-          <p:cNvSpPr/>
-          <p:nvPr/>
-        </p:nvSpPr>
-        <p:spPr>
-          <a:xfrm>
-            <a:off x="7040880" y="1554480"/>
-            <a:ext cx="2011680" cy="777240"/>
-          </a:xfrm>
-          <a:prstGeom prst="roundRect">
-            <a:avLst/>
-          </a:prstGeom>
-          <a:solidFill>
-            <a:srgbClr val="0082CC"/>
-          </a:solidFill>
-          <a:ln>
-            <a:noFill/>
-          </a:ln>
-        </p:spPr>
-        <p:style>
-          <a:lnRef idx="1">
-            <a:schemeClr val="accent1"/>
-          </a:lnRef>
-          <a:fillRef idx="3">
-            <a:schemeClr val="accent1"/>
-          </a:fillRef>
-          <a:effectRef idx="2">
-            <a:schemeClr val="accent1"/>
-          </a:effectRef>
-          <a:fontRef idx="minor">
-            <a:schemeClr val="lt1"/>
-          </a:fontRef>
-        </p:style>
-        <p:txBody>
-          <a:bodyPr rtlCol="0" anchor="ctr"/>
-          <a:lstStyle/>
-          <a:p>
-            <a:pPr algn="ctr"/>
-          </a:p>
-        </p:txBody>
-      </p:sp>
-      <p:sp>
-        <p:nvSpPr>
-          <p:cNvPr id="11" name="TextBox 10"/>
-          <p:cNvSpPr txBox="1"/>
-          <p:nvPr/>
-        </p:nvSpPr>
-        <p:spPr>
-          <a:xfrm>
-            <a:off x="7132320" y="1627632"/>
-            <a:ext cx="1828800" cy="685800"/>
-          </a:xfrm>
-          <a:prstGeom prst="rect">
-            <a:avLst/>
-          </a:prstGeom>
-          <a:noFill/>
-        </p:spPr>
-        <p:txBody>
-          <a:bodyPr wrap="square">
-            <a:spAutoFit/>
-          </a:bodyPr>
-          <a:lstStyle/>
-          <a:p>
-            <a:pPr algn="l">
-              <a:spcAft>
-                <a:spcPts val="100"/>
-              </a:spcAft>
-            </a:pPr>
-            <a:r>
-              <a:rPr sz="900" b="1">
-                <a:solidFill>
-                  <a:srgbClr val="FFFFFF"/>
-                </a:solidFill>
-              </a:rPr>
-              <a:t>BDD Test
-Result</a:t>
-            </a:r>
-          </a:p>
-          <a:p>
-            <a:pPr algn="l">
-              <a:spcAft>
-                <a:spcPts val="0"/>
-              </a:spcAft>
-            </a:pPr>
-            <a:r>
-              <a:rPr sz="700" b="0">
-                <a:solidFill>
-                  <a:srgbClr val="BBBBBB"/>
-                </a:solidFill>
-              </a:rPr>
-              <a:t/>
-            </a:r>
-          </a:p>
-        </p:txBody>
-      </p:sp>
-      <p:sp>
-        <p:nvSpPr>
-          <p:cNvPr id="12" name="Rounded Rectangle 11"/>
-          <p:cNvSpPr/>
-          <p:nvPr/>
-        </p:nvSpPr>
-        <p:spPr>
-          <a:xfrm>
-            <a:off x="9235440" y="1554480"/>
-            <a:ext cx="2011680" cy="777240"/>
-          </a:xfrm>
-          <a:prstGeom prst="roundRect">
-            <a:avLst/>
-          </a:prstGeom>
-          <a:solidFill>
-            <a:srgbClr val="0099D6"/>
-          </a:solidFill>
-          <a:ln>
-            <a:noFill/>
-          </a:ln>
-        </p:spPr>
-        <p:style>
-          <a:lnRef idx="1">
-            <a:schemeClr val="accent1"/>
-          </a:lnRef>
-          <a:fillRef idx="3">
-            <a:schemeClr val="accent1"/>
-          </a:fillRef>
-          <a:effectRef idx="2">
-            <a:schemeClr val="accent1"/>
-          </a:effectRef>
-          <a:fontRef idx="minor">
-            <a:schemeClr val="lt1"/>
-          </a:fontRef>
-        </p:style>
-        <p:txBody>
-          <a:bodyPr rtlCol="0" anchor="ctr"/>
-          <a:lstStyle/>
-          <a:p>
-            <a:pPr algn="ctr"/>
-          </a:p>
-        </p:txBody>
-      </p:sp>
-      <p:sp>
-        <p:nvSpPr>
-          <p:cNvPr id="13" name="TextBox 12"/>
-          <p:cNvSpPr txBox="1"/>
-          <p:nvPr/>
-        </p:nvSpPr>
-        <p:spPr>
-          <a:xfrm>
-            <a:off x="9326880" y="1627632"/>
-            <a:ext cx="1828800" cy="685800"/>
-          </a:xfrm>
-          <a:prstGeom prst="rect">
-            <a:avLst/>
-          </a:prstGeom>
-          <a:noFill/>
-        </p:spPr>
-        <p:txBody>
-          <a:bodyPr wrap="square">
-            <a:spAutoFit/>
-          </a:bodyPr>
-          <a:lstStyle/>
-          <a:p>
-            <a:pPr algn="l">
-              <a:spcAft>
-                <a:spcPts val="100"/>
-              </a:spcAft>
-            </a:pPr>
-            <a:r>
-              <a:rPr sz="900" b="1">
-                <a:solidFill>
-                  <a:srgbClr val="FFFFFF"/>
-                </a:solidFill>
-              </a:rPr>
-              <a:t>Deployment
-Pipeline Report</a:t>
-            </a:r>
-          </a:p>
-          <a:p>
-            <a:pPr algn="l">
-              <a:spcAft>
-                <a:spcPts val="0"/>
-              </a:spcAft>
-            </a:pPr>
-            <a:r>
-              <a:rPr sz="700" b="0">
-                <a:solidFill>
-                  <a:srgbClr val="BBBBBB"/>
-                </a:solidFill>
-              </a:rPr>
-              <a:t/>
-            </a:r>
-          </a:p>
-        </p:txBody>
-      </p:sp>
-      <p:sp>
-        <p:nvSpPr>
-          <p:cNvPr id="14" name="TextBox 13"/>
-          <p:cNvSpPr txBox="1"/>
-          <p:nvPr/>
-        </p:nvSpPr>
-        <p:spPr>
-          <a:xfrm>
-            <a:off x="731520" y="2743200"/>
-            <a:ext cx="4572000" cy="274320"/>
-          </a:xfrm>
-          <a:prstGeom prst="rect">
-            <a:avLst/>
-          </a:prstGeom>
-          <a:noFill/>
-        </p:spPr>
-        <p:txBody>
-          <a:bodyPr wrap="square">
-            <a:spAutoFit/>
-          </a:bodyPr>
-          <a:lstStyle/>
-          <a:p>
-            <a:pPr algn="l">
-              <a:spcAft>
-                <a:spcPts val="0"/>
-              </a:spcAft>
-            </a:pPr>
-            <a:r>
-              <a:rPr sz="1600" b="1">
-                <a:solidFill>
-                  <a:srgbClr val="0D1B2A"/>
-                </a:solidFill>
-              </a:rPr>
-              <a:t>What This Means for Compliance</a:t>
-            </a:r>
-          </a:p>
-        </p:txBody>
-      </p:sp>
-      <p:sp>
-        <p:nvSpPr>
-          <p:cNvPr id="15" name="TextBox 14"/>
-          <p:cNvSpPr txBox="1"/>
-          <p:nvPr/>
-        </p:nvSpPr>
-        <p:spPr>
-          <a:xfrm>
-            <a:off x="731520" y="3200400"/>
-            <a:ext cx="5029200" cy="822960"/>
-          </a:xfrm>
-          <a:prstGeom prst="rect">
-            <a:avLst/>
-          </a:prstGeom>
-          <a:noFill/>
-        </p:spPr>
-        <p:txBody>
-          <a:bodyPr wrap="square">
-            <a:spAutoFit/>
-          </a:bodyPr>
-          <a:lstStyle/>
-          <a:p>
-            <a:pPr algn="l">
-              <a:spcAft>
-                <a:spcPts val="200"/>
-              </a:spcAft>
-            </a:pPr>
-            <a:r>
-              <a:rPr sz="1200" b="1">
-                <a:solidFill>
-                  <a:srgbClr val="0D1B2A"/>
-                </a:solidFill>
-              </a:rPr>
-              <a:t>Minutes, Not Weeks</a:t>
-            </a:r>
-          </a:p>
-          <a:p>
-            <a:pPr algn="l">
-              <a:spcAft>
-                <a:spcPts val="0"/>
-              </a:spcAft>
-            </a:pPr>
-            <a:r>
-              <a:rPr sz="900" b="0">
-                <a:solidFill>
-                  <a:srgbClr val="555555"/>
-                </a:solidFill>
-              </a:rPr>
-              <a:t>Traceability report is generated on every commit — always current, always complete.</a:t>
-            </a:r>
-          </a:p>
-        </p:txBody>
-      </p:sp>
-      <p:sp>
-        <p:nvSpPr>
-          <p:cNvPr id="16" name="TextBox 15"/>
-          <p:cNvSpPr txBox="1"/>
-          <p:nvPr/>
-        </p:nvSpPr>
-        <p:spPr>
-          <a:xfrm>
-            <a:off x="731520" y="4114800"/>
-            <a:ext cx="5029200" cy="822960"/>
-          </a:xfrm>
-          <a:prstGeom prst="rect">
-            <a:avLst/>
-          </a:prstGeom>
-          <a:noFill/>
-        </p:spPr>
-        <p:txBody>
-          <a:bodyPr wrap="square">
-            <a:spAutoFit/>
-          </a:bodyPr>
-          <a:lstStyle/>
-          <a:p>
-            <a:pPr algn="l">
-              <a:spcAft>
-                <a:spcPts val="200"/>
-              </a:spcAft>
-            </a:pPr>
-            <a:r>
-              <a:rPr sz="1200" b="1">
-                <a:solidFill>
-                  <a:srgbClr val="0D1B2A"/>
-                </a:solidFill>
-              </a:rPr>
-              <a:t>Every Change Tracked</a:t>
-            </a:r>
-          </a:p>
-          <a:p>
-            <a:pPr algn="l">
-              <a:spcAft>
-                <a:spcPts val="0"/>
-              </a:spcAft>
-            </a:pPr>
-            <a:r>
-              <a:rPr sz="900" b="0">
-                <a:solidFill>
-                  <a:srgbClr val="555555"/>
-                </a:solidFill>
-              </a:rPr>
-              <a:t>Git history + baseline diffs show exactly when requirements changed and who acknowledged them.</a:t>
-            </a:r>
-          </a:p>
-        </p:txBody>
-      </p:sp>
-      <p:sp>
-        <p:nvSpPr>
-          <p:cNvPr id="17" name="TextBox 16"/>
-          <p:cNvSpPr txBox="1"/>
-          <p:nvPr/>
-        </p:nvSpPr>
-        <p:spPr>
-          <a:xfrm>
-            <a:off x="731520" y="5029200"/>
-            <a:ext cx="5029200" cy="822960"/>
-          </a:xfrm>
-          <a:prstGeom prst="rect">
-            <a:avLst/>
-          </a:prstGeom>
-          <a:noFill/>
-        </p:spPr>
-        <p:txBody>
-          <a:bodyPr wrap="square">
-            <a:spAutoFit/>
-          </a:bodyPr>
-          <a:lstStyle/>
-          <a:p>
-            <a:pPr algn="l">
-              <a:spcAft>
-                <a:spcPts val="200"/>
-              </a:spcAft>
-            </a:pPr>
-            <a:r>
-              <a:rPr sz="1200" b="1">
-                <a:solidFill>
-                  <a:srgbClr val="0D1B2A"/>
-                </a:solidFill>
-              </a:rPr>
-              <a:t>No Missing Tests</a:t>
-            </a:r>
-          </a:p>
-          <a:p>
-            <a:pPr algn="l">
-              <a:spcAft>
-                <a:spcPts val="0"/>
-              </a:spcAft>
-            </a:pPr>
-            <a:r>
-              <a:rPr sz="900" b="0">
-                <a:solidFill>
-                  <a:srgbClr val="555555"/>
-                </a:solidFill>
-              </a:rPr>
-              <a:t>Gate A ensures every verification criteria has coverage — gaps are caught before merge.</a:t>
-            </a:r>
-          </a:p>
-        </p:txBody>
-      </p:sp>
-      <p:sp>
-        <p:nvSpPr>
-          <p:cNvPr id="18" name="TextBox 17"/>
-          <p:cNvSpPr txBox="1"/>
-          <p:nvPr/>
-        </p:nvSpPr>
-        <p:spPr>
-          <a:xfrm>
-            <a:off x="6217920" y="3200400"/>
-            <a:ext cx="5029200" cy="822960"/>
-          </a:xfrm>
-          <a:prstGeom prst="rect">
-            <a:avLst/>
-          </a:prstGeom>
-          <a:noFill/>
-        </p:spPr>
-        <p:txBody>
-          <a:bodyPr wrap="square">
-            <a:spAutoFit/>
-          </a:bodyPr>
-          <a:lstStyle/>
-          <a:p>
-            <a:pPr algn="l">
-              <a:spcAft>
-                <a:spcPts val="200"/>
-              </a:spcAft>
-            </a:pPr>
-            <a:r>
-              <a:rPr sz="1200" b="1">
-                <a:solidFill>
-                  <a:srgbClr val="0D1B2A"/>
-                </a:solidFill>
-              </a:rPr>
-              <a:t>No Stale Tests</a:t>
-            </a:r>
-          </a:p>
-          <a:p>
-            <a:pPr algn="l">
-              <a:spcAft>
-                <a:spcPts val="0"/>
-              </a:spcAft>
-            </a:pPr>
-            <a:r>
-              <a:rPr sz="900" b="0">
-                <a:solidFill>
-                  <a:srgbClr val="555555"/>
-                </a:solidFill>
-              </a:rPr>
-              <a:t>Gate B detects criteria drift — existing tests are flagged for re-review when requirements change.</a:t>
-            </a:r>
-          </a:p>
-        </p:txBody>
-      </p:sp>
-      <p:sp>
-        <p:nvSpPr>
-          <p:cNvPr id="19" name="TextBox 18"/>
-          <p:cNvSpPr txBox="1"/>
-          <p:nvPr/>
-        </p:nvSpPr>
-        <p:spPr>
-          <a:xfrm>
-            <a:off x="6217920" y="4114800"/>
-            <a:ext cx="5029200" cy="822960"/>
-          </a:xfrm>
-          <a:prstGeom prst="rect">
-            <a:avLst/>
-          </a:prstGeom>
-          <a:noFill/>
-        </p:spPr>
-        <p:txBody>
-          <a:bodyPr wrap="square">
-            <a:spAutoFit/>
-          </a:bodyPr>
-          <a:lstStyle/>
-          <a:p>
-            <a:pPr algn="l">
-              <a:spcAft>
-                <a:spcPts val="200"/>
-              </a:spcAft>
-            </a:pPr>
-            <a:r>
-              <a:rPr sz="1200" b="1">
-                <a:solidFill>
-                  <a:srgbClr val="0D1B2A"/>
-                </a:solidFill>
-              </a:rPr>
-              <a:t>No Ghost Tests</a:t>
-            </a:r>
-          </a:p>
-          <a:p>
-            <a:pPr algn="l">
-              <a:spcAft>
-                <a:spcPts val="0"/>
-              </a:spcAft>
-            </a:pPr>
-            <a:r>
-              <a:rPr sz="900" b="0">
-                <a:solidFill>
-                  <a:srgbClr val="555555"/>
-                </a:solidFill>
-              </a:rPr>
-              <a:t>Gate C catches orphaned tests — scenarios for deleted requirements are flagged for removal.</a:t>
-            </a:r>
-          </a:p>
-        </p:txBody>
-      </p:sp>
-      <p:sp>
-        <p:nvSpPr>
-          <p:cNvPr id="20" name="TextBox 19"/>
-          <p:cNvSpPr txBox="1"/>
-          <p:nvPr/>
-        </p:nvSpPr>
-        <p:spPr>
-          <a:xfrm>
-            <a:off x="6217920" y="5029200"/>
-            <a:ext cx="5029200" cy="822960"/>
-          </a:xfrm>
-          <a:prstGeom prst="rect">
-            <a:avLst/>
-          </a:prstGeom>
-          <a:noFill/>
-        </p:spPr>
-        <p:txBody>
-          <a:bodyPr wrap="square">
-            <a:spAutoFit/>
-          </a:bodyPr>
-          <a:lstStyle/>
-          <a:p>
-            <a:pPr algn="l">
-              <a:spcAft>
-                <a:spcPts val="200"/>
-              </a:spcAft>
-            </a:pPr>
-            <a:r>
-              <a:rPr sz="1200" b="1">
-                <a:solidFill>
-                  <a:srgbClr val="0D1B2A"/>
-                </a:solidFill>
-              </a:rPr>
-              <a:t>Immutable Evidence</a:t>
-            </a:r>
-          </a:p>
-          <a:p>
-            <a:pPr algn="l">
-              <a:spcAft>
-                <a:spcPts val="0"/>
-              </a:spcAft>
-            </a:pPr>
-            <a:r>
-              <a:rPr sz="900" b="0">
-                <a:solidFill>
-                  <a:srgbClr val="555555"/>
-                </a:solidFill>
-              </a:rPr>
-              <a:t>CI artifacts (HTML + JSON reports) are stored per build — reproducible audit trail.</a:t>
-            </a:r>
-          </a:p>
-        </p:txBody>
-      </p:sp>
-      <p:sp>
-        <p:nvSpPr>
-          <p:cNvPr id="21" name="TextBox 20"/>
-          <p:cNvSpPr txBox="1"/>
-          <p:nvPr/>
-        </p:nvSpPr>
-        <p:spPr>
-          <a:xfrm>
-            <a:off x="10972800" y="6400800"/>
-            <a:ext cx="914400" cy="274320"/>
-          </a:xfrm>
-          <a:prstGeom prst="rect">
-            <a:avLst/>
-          </a:prstGeom>
-          <a:noFill/>
-        </p:spPr>
-        <p:txBody>
-          <a:bodyPr wrap="square">
-            <a:spAutoFit/>
-          </a:bodyPr>
-          <a:lstStyle/>
-          <a:p>
-            <a:pPr algn="r">
-              <a:spcAft>
-                <a:spcPts val="0"/>
-              </a:spcAft>
-            </a:pPr>
-            <a:r>
-              <a:rPr sz="900" b="0">
-                <a:solidFill>
-                  <a:srgbClr val="888888"/>
-                </a:solidFill>
-              </a:rPr>
-              <a:t>11 / 12</a:t>
-            </a:r>
-          </a:p>
-        </p:txBody>
-      </p:sp>
-    </p:spTree>
-  </p:cSld>
-  <p:clrMapOvr>
-    <a:masterClrMapping/>
-  </p:clrMapOvr>
-</p:sld>
-</file>
-
-<file path=ppt/slides/slide12.xml><?xml version="1.0" encoding="utf-8"?>
 <p:sld xmlns:a="http://schemas.openxmlformats.org/drawingml/2006/main" xmlns:p="http://schemas.openxmlformats.org/presentationml/2006/main" xmlns:r="http://schemas.openxmlformats.org/officeDocument/2006/relationships">
   <p:cSld>
     <p:bg>
@@ -5713,7 +4525,7 @@
                   <a:srgbClr val="888888"/>
                 </a:solidFill>
               </a:rPr>
-              <a:t>12 / 12</a:t>
+              <a:t>11 / 11</a:t>
             </a:r>
           </a:p>
         </p:txBody>
@@ -6216,7 +5028,7 @@
                   <a:srgbClr val="888888"/>
                 </a:solidFill>
               </a:rPr>
-              <a:t>2 / 12</a:t>
+              <a:t>2 / 11</a:t>
             </a:r>
           </a:p>
         </p:txBody>
@@ -7596,7 +6408,7 @@
                   <a:srgbClr val="888888"/>
                 </a:solidFill>
               </a:rPr>
-              <a:t>3 / 12</a:t>
+              <a:t>3 / 11</a:t>
             </a:r>
           </a:p>
         </p:txBody>
@@ -9228,7 +8040,7 @@
                   <a:srgbClr val="888888"/>
                 </a:solidFill>
               </a:rPr>
-              <a:t>4 / 12</a:t>
+              <a:t>4 / 11</a:t>
             </a:r>
           </a:p>
         </p:txBody>
@@ -10231,7 +9043,7 @@
                   <a:srgbClr val="888888"/>
                 </a:solidFill>
               </a:rPr>
-              <a:t>5 / 12</a:t>
+              <a:t>5 / 11</a:t>
             </a:r>
           </a:p>
         </p:txBody>
@@ -10953,7 +9765,7 @@
                   <a:srgbClr val="888888"/>
                 </a:solidFill>
               </a:rPr>
-              <a:t>6 / 12</a:t>
+              <a:t>6 / 11</a:t>
             </a:r>
           </a:p>
         </p:txBody>
@@ -10967,6 +9779,690 @@
 </file>
 
 <file path=ppt/slides/slide7.xml><?xml version="1.0" encoding="utf-8"?>
+<p:sld xmlns:a="http://schemas.openxmlformats.org/drawingml/2006/main" xmlns:p="http://schemas.openxmlformats.org/presentationml/2006/main" xmlns:r="http://schemas.openxmlformats.org/officeDocument/2006/relationships">
+  <p:cSld>
+    <p:bg>
+      <p:bgPr>
+        <a:solidFill>
+          <a:srgbClr val="0D1B2A"/>
+        </a:solidFill>
+        <a:effectLst/>
+      </p:bgPr>
+    </p:bg>
+    <p:spTree>
+      <p:nvGrpSpPr>
+        <p:cNvPr id="1" name=""/>
+        <p:cNvGrpSpPr/>
+        <p:nvPr/>
+      </p:nvGrpSpPr>
+      <p:grpSpPr/>
+      <p:sp>
+        <p:nvSpPr>
+          <p:cNvPr id="2" name="TextBox 1"/>
+          <p:cNvSpPr txBox="1"/>
+          <p:nvPr/>
+        </p:nvSpPr>
+        <p:spPr>
+          <a:xfrm>
+            <a:off x="731520" y="457200"/>
+            <a:ext cx="10058400" cy="457200"/>
+          </a:xfrm>
+          <a:prstGeom prst="rect">
+            <a:avLst/>
+          </a:prstGeom>
+          <a:noFill/>
+        </p:spPr>
+        <p:txBody>
+          <a:bodyPr wrap="square">
+            <a:spAutoFit/>
+          </a:bodyPr>
+          <a:lstStyle/>
+          <a:p>
+            <a:pPr algn="l">
+              <a:spcAft>
+                <a:spcPts val="0"/>
+              </a:spcAft>
+            </a:pPr>
+            <a:r>
+              <a:rPr sz="2800" b="1">
+                <a:solidFill>
+                  <a:srgbClr val="FFFFFF"/>
+                </a:solidFill>
+              </a:rPr>
+              <a:t>Gherkin Specification &amp; Tag Convention</a:t>
+            </a:r>
+          </a:p>
+        </p:txBody>
+      </p:sp>
+      <p:sp>
+        <p:nvSpPr>
+          <p:cNvPr id="3" name="TextBox 2"/>
+          <p:cNvSpPr txBox="1"/>
+          <p:nvPr/>
+        </p:nvSpPr>
+        <p:spPr>
+          <a:xfrm>
+            <a:off x="731520" y="960120"/>
+            <a:ext cx="10058400" cy="274320"/>
+          </a:xfrm>
+          <a:prstGeom prst="rect">
+            <a:avLst/>
+          </a:prstGeom>
+          <a:noFill/>
+        </p:spPr>
+        <p:txBody>
+          <a:bodyPr wrap="square">
+            <a:spAutoFit/>
+          </a:bodyPr>
+          <a:lstStyle/>
+          <a:p>
+            <a:pPr algn="l">
+              <a:spcAft>
+                <a:spcPts val="0"/>
+              </a:spcAft>
+            </a:pPr>
+            <a:r>
+              <a:rPr sz="1100" b="0">
+                <a:solidFill>
+                  <a:srgbClr val="AAAAAA"/>
+                </a:solidFill>
+              </a:rPr>
+              <a:t>Tags create the machine-readable traceability link between requirements and test scenarios.</a:t>
+            </a:r>
+          </a:p>
+        </p:txBody>
+      </p:sp>
+      <p:sp>
+        <p:nvSpPr>
+          <p:cNvPr id="4" name="Rounded Rectangle 3"/>
+          <p:cNvSpPr/>
+          <p:nvPr/>
+        </p:nvSpPr>
+        <p:spPr>
+          <a:xfrm>
+            <a:off x="457200" y="1554480"/>
+            <a:ext cx="5943600" cy="4114800"/>
+          </a:xfrm>
+          <a:prstGeom prst="roundRect">
+            <a:avLst/>
+          </a:prstGeom>
+          <a:solidFill>
+            <a:srgbClr val="142538"/>
+          </a:solidFill>
+          <a:ln w="12700">
+            <a:solidFill>
+              <a:srgbClr val="2A3A4A"/>
+            </a:solidFill>
+          </a:ln>
+        </p:spPr>
+        <p:style>
+          <a:lnRef idx="1">
+            <a:schemeClr val="accent1"/>
+          </a:lnRef>
+          <a:fillRef idx="3">
+            <a:schemeClr val="accent1"/>
+          </a:fillRef>
+          <a:effectRef idx="2">
+            <a:schemeClr val="accent1"/>
+          </a:effectRef>
+          <a:fontRef idx="minor">
+            <a:schemeClr val="lt1"/>
+          </a:fontRef>
+        </p:style>
+        <p:txBody>
+          <a:bodyPr rtlCol="0" anchor="ctr"/>
+          <a:lstStyle/>
+          <a:p>
+            <a:pPr algn="ctr"/>
+          </a:p>
+        </p:txBody>
+      </p:sp>
+      <p:sp>
+        <p:nvSpPr>
+          <p:cNvPr id="5" name="TextBox 4"/>
+          <p:cNvSpPr txBox="1"/>
+          <p:nvPr/>
+        </p:nvSpPr>
+        <p:spPr>
+          <a:xfrm>
+            <a:off x="640080" y="1691640"/>
+            <a:ext cx="5577840" cy="3840480"/>
+          </a:xfrm>
+          <a:prstGeom prst="rect">
+            <a:avLst/>
+          </a:prstGeom>
+          <a:noFill/>
+        </p:spPr>
+        <p:txBody>
+          <a:bodyPr wrap="square">
+            <a:spAutoFit/>
+          </a:bodyPr>
+          <a:lstStyle/>
+          <a:p>
+            <a:pPr algn="l">
+              <a:spcAft>
+                <a:spcPts val="200"/>
+              </a:spcAft>
+            </a:pPr>
+            <a:r>
+              <a:rPr sz="900" b="1">
+                <a:solidFill>
+                  <a:srgbClr val="0099D6"/>
+                </a:solidFill>
+              </a:rPr>
+              <a:t>@REQ:SYS-REQ-001</a:t>
+            </a:r>
+          </a:p>
+          <a:p>
+            <a:pPr algn="l">
+              <a:spcAft>
+                <a:spcPts val="200"/>
+              </a:spcAft>
+            </a:pPr>
+            <a:r>
+              <a:rPr sz="900" b="1">
+                <a:solidFill>
+                  <a:srgbClr val="FFFFFF"/>
+                </a:solidFill>
+              </a:rPr>
+              <a:t>Feature: Basic ICD Communications</a:t>
+            </a:r>
+          </a:p>
+          <a:p>
+            <a:pPr algn="l">
+              <a:spcAft>
+                <a:spcPts val="200"/>
+              </a:spcAft>
+            </a:pPr>
+            <a:r>
+              <a:rPr sz="900" b="0">
+                <a:solidFill>
+                  <a:srgbClr val="FFFFFF"/>
+                </a:solidFill>
+              </a:rPr>
+              <a:t> </a:t>
+            </a:r>
+          </a:p>
+          <a:p>
+            <a:pPr algn="l">
+              <a:spcAft>
+                <a:spcPts val="200"/>
+              </a:spcAft>
+            </a:pPr>
+            <a:r>
+              <a:rPr sz="900" b="1">
+                <a:solidFill>
+                  <a:srgbClr val="0099D6"/>
+                </a:solidFill>
+              </a:rPr>
+              <a:t>  @VC:SYS-REQ-001-VC-01 @VER:Test</a:t>
+            </a:r>
+          </a:p>
+          <a:p>
+            <a:pPr algn="l">
+              <a:spcAft>
+                <a:spcPts val="200"/>
+              </a:spcAft>
+            </a:pPr>
+            <a:r>
+              <a:rPr sz="900" b="0">
+                <a:solidFill>
+                  <a:srgbClr val="FFFFFF"/>
+                </a:solidFill>
+              </a:rPr>
+              <a:t>  Scenario: Valid ICD produces correct response</a:t>
+            </a:r>
+          </a:p>
+          <a:p>
+            <a:pPr algn="l">
+              <a:spcAft>
+                <a:spcPts val="200"/>
+              </a:spcAft>
+            </a:pPr>
+            <a:r>
+              <a:rPr sz="900" b="0">
+                <a:solidFill>
+                  <a:srgbClr val="BBBBBB"/>
+                </a:solidFill>
+              </a:rPr>
+              <a:t>    Given the simulation logs are loaded</a:t>
+            </a:r>
+          </a:p>
+          <a:p>
+            <a:pPr algn="l">
+              <a:spcAft>
+                <a:spcPts val="200"/>
+              </a:spcAft>
+            </a:pPr>
+            <a:r>
+              <a:rPr sz="900" b="0">
+                <a:solidFill>
+                  <a:srgbClr val="BBBBBB"/>
+                </a:solidFill>
+              </a:rPr>
+              <a:t>    Then the product logs should contain</a:t>
+            </a:r>
+          </a:p>
+          <a:p>
+            <a:pPr algn="l">
+              <a:spcAft>
+                <a:spcPts val="200"/>
+              </a:spcAft>
+            </a:pPr>
+            <a:r>
+              <a:rPr sz="900" b="0">
+                <a:solidFill>
+                  <a:srgbClr val="BBBBBB"/>
+                </a:solidFill>
+              </a:rPr>
+              <a:t>         "Received IcdRequest: test-001"</a:t>
+            </a:r>
+          </a:p>
+        </p:txBody>
+      </p:sp>
+      <p:sp>
+        <p:nvSpPr>
+          <p:cNvPr id="6" name="TextBox 5"/>
+          <p:cNvSpPr txBox="1"/>
+          <p:nvPr/>
+        </p:nvSpPr>
+        <p:spPr>
+          <a:xfrm>
+            <a:off x="6675120" y="1554480"/>
+            <a:ext cx="4754880" cy="274320"/>
+          </a:xfrm>
+          <a:prstGeom prst="rect">
+            <a:avLst/>
+          </a:prstGeom>
+          <a:noFill/>
+        </p:spPr>
+        <p:txBody>
+          <a:bodyPr wrap="square">
+            <a:spAutoFit/>
+          </a:bodyPr>
+          <a:lstStyle/>
+          <a:p>
+            <a:pPr algn="l">
+              <a:spcAft>
+                <a:spcPts val="0"/>
+              </a:spcAft>
+            </a:pPr>
+            <a:r>
+              <a:rPr sz="1400" b="1">
+                <a:solidFill>
+                  <a:srgbClr val="FFFFFF"/>
+                </a:solidFill>
+              </a:rPr>
+              <a:t>Tag Reference</a:t>
+            </a:r>
+          </a:p>
+        </p:txBody>
+      </p:sp>
+      <p:sp>
+        <p:nvSpPr>
+          <p:cNvPr id="7" name="TextBox 6"/>
+          <p:cNvSpPr txBox="1"/>
+          <p:nvPr/>
+        </p:nvSpPr>
+        <p:spPr>
+          <a:xfrm>
+            <a:off x="6675120" y="2011680"/>
+            <a:ext cx="4754880" cy="502920"/>
+          </a:xfrm>
+          <a:prstGeom prst="rect">
+            <a:avLst/>
+          </a:prstGeom>
+          <a:noFill/>
+        </p:spPr>
+        <p:txBody>
+          <a:bodyPr wrap="square">
+            <a:spAutoFit/>
+          </a:bodyPr>
+          <a:lstStyle/>
+          <a:p>
+            <a:pPr algn="l">
+              <a:spcAft>
+                <a:spcPts val="200"/>
+              </a:spcAft>
+            </a:pPr>
+            <a:r>
+              <a:rPr sz="1000" b="1">
+                <a:solidFill>
+                  <a:srgbClr val="0099D6"/>
+                </a:solidFill>
+              </a:rPr>
+              <a:t>@REQ:SYS-REQ-001</a:t>
+            </a:r>
+          </a:p>
+          <a:p>
+            <a:pPr algn="l">
+              <a:spcAft>
+                <a:spcPts val="0"/>
+              </a:spcAft>
+            </a:pPr>
+            <a:r>
+              <a:rPr sz="800" b="0">
+                <a:solidFill>
+                  <a:srgbClr val="AAAAAA"/>
+                </a:solidFill>
+              </a:rPr>
+              <a:t>Links to requirement ID. Placed at Feature level.</a:t>
+            </a:r>
+          </a:p>
+        </p:txBody>
+      </p:sp>
+      <p:sp>
+        <p:nvSpPr>
+          <p:cNvPr id="8" name="TextBox 7"/>
+          <p:cNvSpPr txBox="1"/>
+          <p:nvPr/>
+        </p:nvSpPr>
+        <p:spPr>
+          <a:xfrm>
+            <a:off x="6675120" y="2560320"/>
+            <a:ext cx="4754880" cy="502920"/>
+          </a:xfrm>
+          <a:prstGeom prst="rect">
+            <a:avLst/>
+          </a:prstGeom>
+          <a:noFill/>
+        </p:spPr>
+        <p:txBody>
+          <a:bodyPr wrap="square">
+            <a:spAutoFit/>
+          </a:bodyPr>
+          <a:lstStyle/>
+          <a:p>
+            <a:pPr algn="l">
+              <a:spcAft>
+                <a:spcPts val="200"/>
+              </a:spcAft>
+            </a:pPr>
+            <a:r>
+              <a:rPr sz="1000" b="1">
+                <a:solidFill>
+                  <a:srgbClr val="0099D6"/>
+                </a:solidFill>
+              </a:rPr>
+              <a:t>@VC:...-VC-01</a:t>
+            </a:r>
+          </a:p>
+          <a:p>
+            <a:pPr algn="l">
+              <a:spcAft>
+                <a:spcPts val="0"/>
+              </a:spcAft>
+            </a:pPr>
+            <a:r>
+              <a:rPr sz="800" b="0">
+                <a:solidFill>
+                  <a:srgbClr val="AAAAAA"/>
+                </a:solidFill>
+              </a:rPr>
+              <a:t>Links to specific VC. Placed at Scenario level.</a:t>
+            </a:r>
+          </a:p>
+        </p:txBody>
+      </p:sp>
+      <p:sp>
+        <p:nvSpPr>
+          <p:cNvPr id="9" name="TextBox 8"/>
+          <p:cNvSpPr txBox="1"/>
+          <p:nvPr/>
+        </p:nvSpPr>
+        <p:spPr>
+          <a:xfrm>
+            <a:off x="6675120" y="3108960"/>
+            <a:ext cx="4754880" cy="502920"/>
+          </a:xfrm>
+          <a:prstGeom prst="rect">
+            <a:avLst/>
+          </a:prstGeom>
+          <a:noFill/>
+        </p:spPr>
+        <p:txBody>
+          <a:bodyPr wrap="square">
+            <a:spAutoFit/>
+          </a:bodyPr>
+          <a:lstStyle/>
+          <a:p>
+            <a:pPr algn="l">
+              <a:spcAft>
+                <a:spcPts val="200"/>
+              </a:spcAft>
+            </a:pPr>
+            <a:r>
+              <a:rPr sz="1000" b="1">
+                <a:solidFill>
+                  <a:srgbClr val="0099D6"/>
+                </a:solidFill>
+              </a:rPr>
+              <a:t>@VER:Test</a:t>
+            </a:r>
+          </a:p>
+          <a:p>
+            <a:pPr algn="l">
+              <a:spcAft>
+                <a:spcPts val="0"/>
+              </a:spcAft>
+            </a:pPr>
+            <a:r>
+              <a:rPr sz="800" b="0">
+                <a:solidFill>
+                  <a:srgbClr val="AAAAAA"/>
+                </a:solidFill>
+              </a:rPr>
+              <a:t>Verification criteria type (INCOSE ADIT classification).</a:t>
+            </a:r>
+          </a:p>
+        </p:txBody>
+      </p:sp>
+      <p:sp>
+        <p:nvSpPr>
+          <p:cNvPr id="10" name="TextBox 9"/>
+          <p:cNvSpPr txBox="1"/>
+          <p:nvPr/>
+        </p:nvSpPr>
+        <p:spPr>
+          <a:xfrm>
+            <a:off x="6675120" y="3657600"/>
+            <a:ext cx="4754880" cy="502920"/>
+          </a:xfrm>
+          <a:prstGeom prst="rect">
+            <a:avLst/>
+          </a:prstGeom>
+          <a:noFill/>
+        </p:spPr>
+        <p:txBody>
+          <a:bodyPr wrap="square">
+            <a:spAutoFit/>
+          </a:bodyPr>
+          <a:lstStyle/>
+          <a:p>
+            <a:pPr algn="l">
+              <a:spcAft>
+                <a:spcPts val="200"/>
+              </a:spcAft>
+            </a:pPr>
+            <a:r>
+              <a:rPr sz="1000" b="1">
+                <a:solidFill>
+                  <a:srgbClr val="0099D6"/>
+                </a:solidFill>
+              </a:rPr>
+              <a:t>@REVIEW_REQUIRED</a:t>
+            </a:r>
+          </a:p>
+          <a:p>
+            <a:pPr algn="l">
+              <a:spcAft>
+                <a:spcPts val="0"/>
+              </a:spcAft>
+            </a:pPr>
+            <a:r>
+              <a:rPr sz="800" b="0">
+                <a:solidFill>
+                  <a:srgbClr val="AAAAAA"/>
+                </a:solidFill>
+              </a:rPr>
+              <a:t>Injected by Gate B when criteria text drifts.</a:t>
+            </a:r>
+          </a:p>
+        </p:txBody>
+      </p:sp>
+      <p:sp>
+        <p:nvSpPr>
+          <p:cNvPr id="11" name="TextBox 10"/>
+          <p:cNvSpPr txBox="1"/>
+          <p:nvPr/>
+        </p:nvSpPr>
+        <p:spPr>
+          <a:xfrm>
+            <a:off x="6675120" y="4206240"/>
+            <a:ext cx="4754880" cy="502920"/>
+          </a:xfrm>
+          <a:prstGeom prst="rect">
+            <a:avLst/>
+          </a:prstGeom>
+          <a:noFill/>
+        </p:spPr>
+        <p:txBody>
+          <a:bodyPr wrap="square">
+            <a:spAutoFit/>
+          </a:bodyPr>
+          <a:lstStyle/>
+          <a:p>
+            <a:pPr algn="l">
+              <a:spcAft>
+                <a:spcPts val="200"/>
+              </a:spcAft>
+            </a:pPr>
+            <a:r>
+              <a:rPr sz="1000" b="1">
+                <a:solidFill>
+                  <a:srgbClr val="0099D6"/>
+                </a:solidFill>
+              </a:rPr>
+              <a:t>@STUB</a:t>
+            </a:r>
+          </a:p>
+          <a:p>
+            <a:pPr algn="l">
+              <a:spcAft>
+                <a:spcPts val="0"/>
+              </a:spcAft>
+            </a:pPr>
+            <a:r>
+              <a:rPr sz="800" b="0">
+                <a:solidFill>
+                  <a:srgbClr val="AAAAAA"/>
+                </a:solidFill>
+              </a:rPr>
+              <a:t>Auto-generated placeholder. Replaced by real scenario.</a:t>
+            </a:r>
+          </a:p>
+        </p:txBody>
+      </p:sp>
+      <p:sp>
+        <p:nvSpPr>
+          <p:cNvPr id="12" name="TextBox 11"/>
+          <p:cNvSpPr txBox="1"/>
+          <p:nvPr/>
+        </p:nvSpPr>
+        <p:spPr>
+          <a:xfrm>
+            <a:off x="6675120" y="4754880"/>
+            <a:ext cx="4754880" cy="502920"/>
+          </a:xfrm>
+          <a:prstGeom prst="rect">
+            <a:avLst/>
+          </a:prstGeom>
+          <a:noFill/>
+        </p:spPr>
+        <p:txBody>
+          <a:bodyPr wrap="square">
+            <a:spAutoFit/>
+          </a:bodyPr>
+          <a:lstStyle/>
+          <a:p>
+            <a:pPr algn="l">
+              <a:spcAft>
+                <a:spcPts val="200"/>
+              </a:spcAft>
+            </a:pPr>
+            <a:r>
+              <a:rPr sz="1000" b="1">
+                <a:solidFill>
+                  <a:srgbClr val="0099D6"/>
+                </a:solidFill>
+              </a:rPr>
+              <a:t>@DEFERRED</a:t>
+            </a:r>
+          </a:p>
+          <a:p>
+            <a:pPr algn="l">
+              <a:spcAft>
+                <a:spcPts val="0"/>
+              </a:spcAft>
+            </a:pPr>
+            <a:r>
+              <a:rPr sz="800" b="0">
+                <a:solidFill>
+                  <a:srgbClr val="AAAAAA"/>
+                </a:solidFill>
+              </a:rPr>
+              <a:t>Injected by pipeline when VC is scoped to a future release.</a:t>
+            </a:r>
+          </a:p>
+        </p:txBody>
+      </p:sp>
+      <p:sp>
+        <p:nvSpPr>
+          <p:cNvPr id="13" name="TextBox 12"/>
+          <p:cNvSpPr txBox="1"/>
+          <p:nvPr/>
+        </p:nvSpPr>
+        <p:spPr>
+          <a:xfrm>
+            <a:off x="10972800" y="6400800"/>
+            <a:ext cx="914400" cy="274320"/>
+          </a:xfrm>
+          <a:prstGeom prst="rect">
+            <a:avLst/>
+          </a:prstGeom>
+          <a:noFill/>
+        </p:spPr>
+        <p:txBody>
+          <a:bodyPr wrap="square">
+            <a:spAutoFit/>
+          </a:bodyPr>
+          <a:lstStyle/>
+          <a:p>
+            <a:pPr algn="r">
+              <a:spcAft>
+                <a:spcPts val="0"/>
+              </a:spcAft>
+            </a:pPr>
+            <a:r>
+              <a:rPr sz="900" b="0">
+                <a:solidFill>
+                  <a:srgbClr val="888888"/>
+                </a:solidFill>
+              </a:rPr>
+              <a:t>7 / 11</a:t>
+            </a:r>
+          </a:p>
+        </p:txBody>
+      </p:sp>
+    </p:spTree>
+  </p:cSld>
+  <p:clrMapOvr>
+    <a:masterClrMapping/>
+  </p:clrMapOvr>
+</p:sld>
+</file>
+
+<file path=ppt/slides/slide8.xml><?xml version="1.0" encoding="utf-8"?>
 <p:sld xmlns:a="http://schemas.openxmlformats.org/drawingml/2006/main" xmlns:p="http://schemas.openxmlformats.org/presentationml/2006/main" xmlns:r="http://schemas.openxmlformats.org/officeDocument/2006/relationships">
   <p:cSld>
     <p:bg>
@@ -11017,7 +10513,7 @@
                   <a:srgbClr val="0D1B2A"/>
                 </a:solidFill>
               </a:rPr>
-              <a:t>Collaborative Test Authoring</a:t>
+              <a:t>CI/CD Pipeline Stages</a:t>
             </a:r>
           </a:p>
         </p:txBody>
@@ -11030,32 +10526,32 @@
         </p:nvSpPr>
         <p:spPr>
           <a:xfrm>
-            <a:off x="731520" y="960120"/>
-            <a:ext cx="10058400" cy="274320"/>
-          </a:xfrm>
-          <a:prstGeom prst="rect">
-            <a:avLst/>
-          </a:prstGeom>
-          <a:noFill/>
-        </p:spPr>
-        <p:txBody>
-          <a:bodyPr wrap="square">
-            <a:spAutoFit/>
-          </a:bodyPr>
-          <a:lstStyle/>
-          <a:p>
-            <a:pPr algn="l">
-              <a:spcAft>
-                <a:spcPts val="0"/>
-              </a:spcAft>
-            </a:pPr>
-            <a:r>
-              <a:rPr sz="1100" b="0">
-                <a:solidFill>
-                  <a:srgbClr val="555555"/>
-                </a:solidFill>
-              </a:rPr>
-              <a:t>SEs and Developers co-author Gherkin specifications — SEs define WHAT to verify, developers implement HOW.</a:t>
+            <a:off x="731520" y="1188720"/>
+            <a:ext cx="4572000" cy="274320"/>
+          </a:xfrm>
+          <a:prstGeom prst="rect">
+            <a:avLst/>
+          </a:prstGeom>
+          <a:noFill/>
+        </p:spPr>
+        <p:txBody>
+          <a:bodyPr wrap="square">
+            <a:spAutoFit/>
+          </a:bodyPr>
+          <a:lstStyle/>
+          <a:p>
+            <a:pPr algn="l">
+              <a:spcAft>
+                <a:spcPts val="0"/>
+              </a:spcAft>
+            </a:pPr>
+            <a:r>
+              <a:rPr sz="1200" b="1">
+                <a:solidFill>
+                  <a:srgbClr val="0D1B2A"/>
+                </a:solidFill>
+              </a:rPr>
+              <a:t>Repo 1: Model Pipeline (on every push)</a:t>
             </a:r>
           </a:p>
         </p:txBody>
@@ -11068,53 +10564,8 @@
         </p:nvSpPr>
         <p:spPr>
           <a:xfrm>
-            <a:off x="457200" y="1554480"/>
-            <a:ext cx="5303520" cy="4114800"/>
-          </a:xfrm>
-          <a:prstGeom prst="roundRect">
-            <a:avLst/>
-          </a:prstGeom>
-          <a:solidFill>
-            <a:srgbClr val="F4F7FA"/>
-          </a:solidFill>
-          <a:ln w="12700">
-            <a:solidFill>
-              <a:srgbClr val="D0E8F8"/>
-            </a:solidFill>
-          </a:ln>
-        </p:spPr>
-        <p:style>
-          <a:lnRef idx="1">
-            <a:schemeClr val="accent1"/>
-          </a:lnRef>
-          <a:fillRef idx="3">
-            <a:schemeClr val="accent1"/>
-          </a:fillRef>
-          <a:effectRef idx="2">
-            <a:schemeClr val="accent1"/>
-          </a:effectRef>
-          <a:fontRef idx="minor">
-            <a:schemeClr val="lt1"/>
-          </a:fontRef>
-        </p:style>
-        <p:txBody>
-          <a:bodyPr rtlCol="0" anchor="ctr"/>
-          <a:lstStyle/>
-          <a:p>
-            <a:pPr algn="ctr"/>
-          </a:p>
-        </p:txBody>
-      </p:sp>
-      <p:sp>
-        <p:nvSpPr>
-          <p:cNvPr id="5" name="Rounded Rectangle 4"/>
-          <p:cNvSpPr/>
-          <p:nvPr/>
-        </p:nvSpPr>
-        <p:spPr>
-          <a:xfrm>
-            <a:off x="457200" y="1554480"/>
-            <a:ext cx="5303520" cy="640080"/>
+            <a:off x="457200" y="1645920"/>
+            <a:ext cx="2011680" cy="731520"/>
           </a:xfrm>
           <a:prstGeom prst="roundRect">
             <a:avLst/>
@@ -11150,161 +10601,77 @@
       </p:sp>
       <p:sp>
         <p:nvSpPr>
-          <p:cNvPr id="6" name="TextBox 5"/>
-          <p:cNvSpPr txBox="1"/>
-          <p:nvPr/>
-        </p:nvSpPr>
-        <p:spPr>
-          <a:xfrm>
-            <a:off x="640080" y="1627632"/>
-            <a:ext cx="4937760" cy="502920"/>
-          </a:xfrm>
-          <a:prstGeom prst="rect">
-            <a:avLst/>
-          </a:prstGeom>
-          <a:noFill/>
-        </p:spPr>
-        <p:txBody>
-          <a:bodyPr wrap="square">
-            <a:spAutoFit/>
-          </a:bodyPr>
-          <a:lstStyle/>
-          <a:p>
-            <a:pPr algn="l">
-              <a:spcAft>
-                <a:spcPts val="200"/>
-              </a:spcAft>
-            </a:pPr>
-            <a:r>
-              <a:rPr sz="1600" b="1">
+          <p:cNvPr id="5" name="TextBox 4"/>
+          <p:cNvSpPr txBox="1"/>
+          <p:nvPr/>
+        </p:nvSpPr>
+        <p:spPr>
+          <a:xfrm>
+            <a:off x="548640" y="1719072"/>
+            <a:ext cx="1828800" cy="640080"/>
+          </a:xfrm>
+          <a:prstGeom prst="rect">
+            <a:avLst/>
+          </a:prstGeom>
+          <a:noFill/>
+        </p:spPr>
+        <p:txBody>
+          <a:bodyPr wrap="square">
+            <a:spAutoFit/>
+          </a:bodyPr>
+          <a:lstStyle/>
+          <a:p>
+            <a:pPr algn="l">
+              <a:spcAft>
+                <a:spcPts val="100"/>
+              </a:spcAft>
+            </a:pPr>
+            <a:r>
+              <a:rPr sz="900" b="1">
                 <a:solidFill>
                   <a:srgbClr val="FFFFFF"/>
                 </a:solidFill>
               </a:rPr>
-              <a:t>Systems Engineers</a:t>
-            </a:r>
-          </a:p>
-          <a:p>
-            <a:pPr algn="l">
-              <a:spcAft>
-                <a:spcPts val="0"/>
-              </a:spcAft>
-            </a:pPr>
-            <a:r>
-              <a:rPr sz="1000" b="0">
+              <a:t>Validate
+Exports</a:t>
+            </a:r>
+          </a:p>
+          <a:p>
+            <a:pPr algn="l">
+              <a:spcAft>
+                <a:spcPts val="0"/>
+              </a:spcAft>
+            </a:pPr>
+            <a:r>
+              <a:rPr sz="700" b="0">
                 <a:solidFill>
                   <a:srgbClr val="BBBBBB"/>
                 </a:solidFill>
               </a:rPr>
-              <a:t>Own the WHAT</a:t>
-            </a:r>
-          </a:p>
-        </p:txBody>
-      </p:sp>
-      <p:sp>
-        <p:nvSpPr>
-          <p:cNvPr id="7" name="TextBox 6"/>
-          <p:cNvSpPr txBox="1"/>
-          <p:nvPr/>
-        </p:nvSpPr>
-        <p:spPr>
-          <a:xfrm>
-            <a:off x="640080" y="2377440"/>
-            <a:ext cx="4937760" cy="2926080"/>
-          </a:xfrm>
-          <a:prstGeom prst="rect">
-            <a:avLst/>
-          </a:prstGeom>
-          <a:noFill/>
-        </p:spPr>
-        <p:txBody>
-          <a:bodyPr wrap="square">
-            <a:spAutoFit/>
-          </a:bodyPr>
-          <a:lstStyle/>
-          <a:p>
-            <a:pPr algn="l">
-              <a:spcAft>
-                <a:spcPts val="800"/>
-              </a:spcAft>
-            </a:pPr>
-            <a:r>
-              <a:rPr sz="1000" b="0">
-                <a:solidFill>
-                  <a:srgbClr val="555555"/>
-                </a:solidFill>
-              </a:rPr>
-              <a:t>•  Author requirements &amp; verification criteria in Cameo</a:t>
-            </a:r>
-          </a:p>
-          <a:p>
-            <a:pPr algn="l">
-              <a:spcAft>
-                <a:spcPts val="800"/>
-              </a:spcAft>
-            </a:pPr>
-            <a:r>
-              <a:rPr sz="1000" b="0">
-                <a:solidFill>
-                  <a:srgbClr val="555555"/>
-                </a:solidFill>
-              </a:rPr>
-              <a:t>•  Co-author Gherkin Features &amp; Scenarios</a:t>
-            </a:r>
-          </a:p>
-          <a:p>
-            <a:pPr algn="l">
-              <a:spcAft>
-                <a:spcPts val="800"/>
-              </a:spcAft>
-            </a:pPr>
-            <a:r>
-              <a:rPr sz="1000" b="0">
-                <a:solidFill>
-                  <a:srgbClr val="555555"/>
-                </a:solidFill>
-              </a:rPr>
-              <a:t>•  Write Given / When / Then specifications</a:t>
-            </a:r>
-          </a:p>
-          <a:p>
-            <a:pPr algn="l">
-              <a:spcAft>
-                <a:spcPts val="800"/>
-              </a:spcAft>
-            </a:pPr>
-            <a:r>
-              <a:rPr sz="1000" b="0">
-                <a:solidFill>
-                  <a:srgbClr val="555555"/>
-                </a:solidFill>
-              </a:rPr>
-              <a:t>•  Ensure scenarios satisfy the intent of each VC</a:t>
-            </a:r>
-          </a:p>
-        </p:txBody>
-      </p:sp>
-      <p:sp>
-        <p:nvSpPr>
-          <p:cNvPr id="8" name="Rounded Rectangle 7"/>
+              <a:t/>
+            </a:r>
+          </a:p>
+        </p:txBody>
+      </p:sp>
+      <p:sp>
+        <p:nvSpPr>
+          <p:cNvPr id="6" name="Rounded Rectangle 5"/>
           <p:cNvSpPr/>
           <p:nvPr/>
         </p:nvSpPr>
         <p:spPr>
           <a:xfrm>
-            <a:off x="6126480" y="1554480"/>
-            <a:ext cx="5303520" cy="4114800"/>
+            <a:off x="2606040" y="1645920"/>
+            <a:ext cx="2011680" cy="731520"/>
           </a:xfrm>
           <a:prstGeom prst="roundRect">
             <a:avLst/>
           </a:prstGeom>
           <a:solidFill>
-            <a:srgbClr val="F4F7FA"/>
+            <a:srgbClr val="0069B0"/>
           </a:solidFill>
-          <a:ln w="12700">
-            <a:solidFill>
-              <a:srgbClr val="D0E8F8"/>
-            </a:solidFill>
+          <a:ln>
+            <a:noFill/>
           </a:ln>
         </p:spPr>
         <p:style>
@@ -11331,14 +10698,785 @@
       </p:sp>
       <p:sp>
         <p:nvSpPr>
-          <p:cNvPr id="9" name="Rounded Rectangle 8"/>
+          <p:cNvPr id="7" name="TextBox 6"/>
+          <p:cNvSpPr txBox="1"/>
+          <p:nvPr/>
+        </p:nvSpPr>
+        <p:spPr>
+          <a:xfrm>
+            <a:off x="2697480" y="1719072"/>
+            <a:ext cx="1828800" cy="640080"/>
+          </a:xfrm>
+          <a:prstGeom prst="rect">
+            <a:avLst/>
+          </a:prstGeom>
+          <a:noFill/>
+        </p:spPr>
+        <p:txBody>
+          <a:bodyPr wrap="square">
+            <a:spAutoFit/>
+          </a:bodyPr>
+          <a:lstStyle/>
+          <a:p>
+            <a:pPr algn="l">
+              <a:spcAft>
+                <a:spcPts val="100"/>
+              </a:spcAft>
+            </a:pPr>
+            <a:r>
+              <a:rPr sz="900" b="1">
+                <a:solidFill>
+                  <a:srgbClr val="FFFFFF"/>
+                </a:solidFill>
+              </a:rPr>
+              <a:t>Schema
+Check</a:t>
+            </a:r>
+          </a:p>
+          <a:p>
+            <a:pPr algn="l">
+              <a:spcAft>
+                <a:spcPts val="0"/>
+              </a:spcAft>
+            </a:pPr>
+            <a:r>
+              <a:rPr sz="700" b="0">
+                <a:solidFill>
+                  <a:srgbClr val="BBBBBB"/>
+                </a:solidFill>
+              </a:rPr>
+              <a:t/>
+            </a:r>
+          </a:p>
+        </p:txBody>
+      </p:sp>
+      <p:sp>
+        <p:nvSpPr>
+          <p:cNvPr id="8" name="Rounded Rectangle 7"/>
           <p:cNvSpPr/>
           <p:nvPr/>
         </p:nvSpPr>
         <p:spPr>
           <a:xfrm>
-            <a:off x="6126480" y="1554480"/>
-            <a:ext cx="5303520" cy="640080"/>
+            <a:off x="4754880" y="1645920"/>
+            <a:ext cx="2011680" cy="731520"/>
+          </a:xfrm>
+          <a:prstGeom prst="roundRect">
+            <a:avLst/>
+          </a:prstGeom>
+          <a:solidFill>
+            <a:srgbClr val="0069B0"/>
+          </a:solidFill>
+          <a:ln>
+            <a:noFill/>
+          </a:ln>
+        </p:spPr>
+        <p:style>
+          <a:lnRef idx="1">
+            <a:schemeClr val="accent1"/>
+          </a:lnRef>
+          <a:fillRef idx="3">
+            <a:schemeClr val="accent1"/>
+          </a:fillRef>
+          <a:effectRef idx="2">
+            <a:schemeClr val="accent1"/>
+          </a:effectRef>
+          <a:fontRef idx="minor">
+            <a:schemeClr val="lt1"/>
+          </a:fontRef>
+        </p:style>
+        <p:txBody>
+          <a:bodyPr rtlCol="0" anchor="ctr"/>
+          <a:lstStyle/>
+          <a:p>
+            <a:pPr algn="ctr"/>
+          </a:p>
+        </p:txBody>
+      </p:sp>
+      <p:sp>
+        <p:nvSpPr>
+          <p:cNvPr id="9" name="TextBox 8"/>
+          <p:cNvSpPr txBox="1"/>
+          <p:nvPr/>
+        </p:nvSpPr>
+        <p:spPr>
+          <a:xfrm>
+            <a:off x="4846320" y="1719072"/>
+            <a:ext cx="1828800" cy="640080"/>
+          </a:xfrm>
+          <a:prstGeom prst="rect">
+            <a:avLst/>
+          </a:prstGeom>
+          <a:noFill/>
+        </p:spPr>
+        <p:txBody>
+          <a:bodyPr wrap="square">
+            <a:spAutoFit/>
+          </a:bodyPr>
+          <a:lstStyle/>
+          <a:p>
+            <a:pPr algn="l">
+              <a:spcAft>
+                <a:spcPts val="100"/>
+              </a:spcAft>
+            </a:pPr>
+            <a:r>
+              <a:rPr sz="900" b="1">
+                <a:solidFill>
+                  <a:srgbClr val="FFFFFF"/>
+                </a:solidFill>
+              </a:rPr>
+              <a:t>Generate
+Protos</a:t>
+            </a:r>
+          </a:p>
+          <a:p>
+            <a:pPr algn="l">
+              <a:spcAft>
+                <a:spcPts val="0"/>
+              </a:spcAft>
+            </a:pPr>
+            <a:r>
+              <a:rPr sz="700" b="0">
+                <a:solidFill>
+                  <a:srgbClr val="BBBBBB"/>
+                </a:solidFill>
+              </a:rPr>
+              <a:t/>
+            </a:r>
+          </a:p>
+        </p:txBody>
+      </p:sp>
+      <p:sp>
+        <p:nvSpPr>
+          <p:cNvPr id="10" name="Rounded Rectangle 9"/>
+          <p:cNvSpPr/>
+          <p:nvPr/>
+        </p:nvSpPr>
+        <p:spPr>
+          <a:xfrm>
+            <a:off x="6903720" y="1645920"/>
+            <a:ext cx="2011680" cy="731520"/>
+          </a:xfrm>
+          <a:prstGeom prst="roundRect">
+            <a:avLst/>
+          </a:prstGeom>
+          <a:solidFill>
+            <a:srgbClr val="0069B0"/>
+          </a:solidFill>
+          <a:ln>
+            <a:noFill/>
+          </a:ln>
+        </p:spPr>
+        <p:style>
+          <a:lnRef idx="1">
+            <a:schemeClr val="accent1"/>
+          </a:lnRef>
+          <a:fillRef idx="3">
+            <a:schemeClr val="accent1"/>
+          </a:fillRef>
+          <a:effectRef idx="2">
+            <a:schemeClr val="accent1"/>
+          </a:effectRef>
+          <a:fontRef idx="minor">
+            <a:schemeClr val="lt1"/>
+          </a:fontRef>
+        </p:style>
+        <p:txBody>
+          <a:bodyPr rtlCol="0" anchor="ctr"/>
+          <a:lstStyle/>
+          <a:p>
+            <a:pPr algn="ctr"/>
+          </a:p>
+        </p:txBody>
+      </p:sp>
+      <p:sp>
+        <p:nvSpPr>
+          <p:cNvPr id="11" name="TextBox 10"/>
+          <p:cNvSpPr txBox="1"/>
+          <p:nvPr/>
+        </p:nvSpPr>
+        <p:spPr>
+          <a:xfrm>
+            <a:off x="6995160" y="1719072"/>
+            <a:ext cx="1828800" cy="640080"/>
+          </a:xfrm>
+          <a:prstGeom prst="rect">
+            <a:avLst/>
+          </a:prstGeom>
+          <a:noFill/>
+        </p:spPr>
+        <p:txBody>
+          <a:bodyPr wrap="square">
+            <a:spAutoFit/>
+          </a:bodyPr>
+          <a:lstStyle/>
+          <a:p>
+            <a:pPr algn="l">
+              <a:spcAft>
+                <a:spcPts val="100"/>
+              </a:spcAft>
+            </a:pPr>
+            <a:r>
+              <a:rPr sz="900" b="1">
+                <a:solidFill>
+                  <a:srgbClr val="FFFFFF"/>
+                </a:solidFill>
+              </a:rPr>
+              <a:t>Package
+Artifact</a:t>
+            </a:r>
+          </a:p>
+          <a:p>
+            <a:pPr algn="l">
+              <a:spcAft>
+                <a:spcPts val="0"/>
+              </a:spcAft>
+            </a:pPr>
+            <a:r>
+              <a:rPr sz="700" b="0">
+                <a:solidFill>
+                  <a:srgbClr val="BBBBBB"/>
+                </a:solidFill>
+              </a:rPr>
+              <a:t/>
+            </a:r>
+          </a:p>
+        </p:txBody>
+      </p:sp>
+      <p:sp>
+        <p:nvSpPr>
+          <p:cNvPr id="12" name="Rounded Rectangle 11"/>
+          <p:cNvSpPr/>
+          <p:nvPr/>
+        </p:nvSpPr>
+        <p:spPr>
+          <a:xfrm>
+            <a:off x="9052560" y="1645920"/>
+            <a:ext cx="2011680" cy="731520"/>
+          </a:xfrm>
+          <a:prstGeom prst="roundRect">
+            <a:avLst/>
+          </a:prstGeom>
+          <a:solidFill>
+            <a:srgbClr val="0069B0"/>
+          </a:solidFill>
+          <a:ln>
+            <a:noFill/>
+          </a:ln>
+        </p:spPr>
+        <p:style>
+          <a:lnRef idx="1">
+            <a:schemeClr val="accent1"/>
+          </a:lnRef>
+          <a:fillRef idx="3">
+            <a:schemeClr val="accent1"/>
+          </a:fillRef>
+          <a:effectRef idx="2">
+            <a:schemeClr val="accent1"/>
+          </a:effectRef>
+          <a:fontRef idx="minor">
+            <a:schemeClr val="lt1"/>
+          </a:fontRef>
+        </p:style>
+        <p:txBody>
+          <a:bodyPr rtlCol="0" anchor="ctr"/>
+          <a:lstStyle/>
+          <a:p>
+            <a:pPr algn="ctr"/>
+          </a:p>
+        </p:txBody>
+      </p:sp>
+      <p:sp>
+        <p:nvSpPr>
+          <p:cNvPr id="13" name="TextBox 12"/>
+          <p:cNvSpPr txBox="1"/>
+          <p:nvPr/>
+        </p:nvSpPr>
+        <p:spPr>
+          <a:xfrm>
+            <a:off x="9144000" y="1719072"/>
+            <a:ext cx="1828800" cy="640080"/>
+          </a:xfrm>
+          <a:prstGeom prst="rect">
+            <a:avLst/>
+          </a:prstGeom>
+          <a:noFill/>
+        </p:spPr>
+        <p:txBody>
+          <a:bodyPr wrap="square">
+            <a:spAutoFit/>
+          </a:bodyPr>
+          <a:lstStyle/>
+          <a:p>
+            <a:pPr algn="l">
+              <a:spcAft>
+                <a:spcPts val="100"/>
+              </a:spcAft>
+            </a:pPr>
+            <a:r>
+              <a:rPr sz="900" b="1">
+                <a:solidFill>
+                  <a:srgbClr val="FFFFFF"/>
+                </a:solidFill>
+              </a:rPr>
+              <a:t>Tag &amp;
+Release</a:t>
+            </a:r>
+          </a:p>
+          <a:p>
+            <a:pPr algn="l">
+              <a:spcAft>
+                <a:spcPts val="0"/>
+              </a:spcAft>
+            </a:pPr>
+            <a:r>
+              <a:rPr sz="700" b="0">
+                <a:solidFill>
+                  <a:srgbClr val="BBBBBB"/>
+                </a:solidFill>
+              </a:rPr>
+              <a:t/>
+            </a:r>
+          </a:p>
+        </p:txBody>
+      </p:sp>
+      <p:sp>
+        <p:nvSpPr>
+          <p:cNvPr id="14" name="TextBox 13"/>
+          <p:cNvSpPr txBox="1"/>
+          <p:nvPr/>
+        </p:nvSpPr>
+        <p:spPr>
+          <a:xfrm>
+            <a:off x="731520" y="2926080"/>
+            <a:ext cx="4572000" cy="274320"/>
+          </a:xfrm>
+          <a:prstGeom prst="rect">
+            <a:avLst/>
+          </a:prstGeom>
+          <a:noFill/>
+        </p:spPr>
+        <p:txBody>
+          <a:bodyPr wrap="square">
+            <a:spAutoFit/>
+          </a:bodyPr>
+          <a:lstStyle/>
+          <a:p>
+            <a:pPr algn="l">
+              <a:spcAft>
+                <a:spcPts val="0"/>
+              </a:spcAft>
+            </a:pPr>
+            <a:r>
+              <a:rPr sz="1200" b="1">
+                <a:solidFill>
+                  <a:srgbClr val="0D1B2A"/>
+                </a:solidFill>
+              </a:rPr>
+              <a:t>Repo 2: Product Pipeline (on every push)</a:t>
+            </a:r>
+          </a:p>
+        </p:txBody>
+      </p:sp>
+      <p:sp>
+        <p:nvSpPr>
+          <p:cNvPr id="15" name="Rounded Rectangle 14"/>
+          <p:cNvSpPr/>
+          <p:nvPr/>
+        </p:nvSpPr>
+        <p:spPr>
+          <a:xfrm>
+            <a:off x="274320" y="3383280"/>
+            <a:ext cx="1737360" cy="731520"/>
+          </a:xfrm>
+          <a:prstGeom prst="roundRect">
+            <a:avLst/>
+          </a:prstGeom>
+          <a:solidFill>
+            <a:srgbClr val="0069B0"/>
+          </a:solidFill>
+          <a:ln>
+            <a:noFill/>
+          </a:ln>
+        </p:spPr>
+        <p:style>
+          <a:lnRef idx="1">
+            <a:schemeClr val="accent1"/>
+          </a:lnRef>
+          <a:fillRef idx="3">
+            <a:schemeClr val="accent1"/>
+          </a:fillRef>
+          <a:effectRef idx="2">
+            <a:schemeClr val="accent1"/>
+          </a:effectRef>
+          <a:fontRef idx="minor">
+            <a:schemeClr val="lt1"/>
+          </a:fontRef>
+        </p:style>
+        <p:txBody>
+          <a:bodyPr rtlCol="0" anchor="ctr"/>
+          <a:lstStyle/>
+          <a:p>
+            <a:pPr algn="ctr"/>
+          </a:p>
+        </p:txBody>
+      </p:sp>
+      <p:sp>
+        <p:nvSpPr>
+          <p:cNvPr id="16" name="TextBox 15"/>
+          <p:cNvSpPr txBox="1"/>
+          <p:nvPr/>
+        </p:nvSpPr>
+        <p:spPr>
+          <a:xfrm>
+            <a:off x="365760" y="3456432"/>
+            <a:ext cx="1554480" cy="640080"/>
+          </a:xfrm>
+          <a:prstGeom prst="rect">
+            <a:avLst/>
+          </a:prstGeom>
+          <a:noFill/>
+        </p:spPr>
+        <p:txBody>
+          <a:bodyPr wrap="square">
+            <a:spAutoFit/>
+          </a:bodyPr>
+          <a:lstStyle/>
+          <a:p>
+            <a:pPr algn="l">
+              <a:spcAft>
+                <a:spcPts val="100"/>
+              </a:spcAft>
+            </a:pPr>
+            <a:r>
+              <a:rPr sz="900" b="1">
+                <a:solidFill>
+                  <a:srgbClr val="FFFFFF"/>
+                </a:solidFill>
+              </a:rPr>
+              <a:t>Traceability
+Check</a:t>
+            </a:r>
+          </a:p>
+          <a:p>
+            <a:pPr algn="l">
+              <a:spcAft>
+                <a:spcPts val="0"/>
+              </a:spcAft>
+            </a:pPr>
+            <a:r>
+              <a:rPr sz="700" b="0">
+                <a:solidFill>
+                  <a:srgbClr val="BBBBBB"/>
+                </a:solidFill>
+              </a:rPr>
+              <a:t/>
+            </a:r>
+          </a:p>
+        </p:txBody>
+      </p:sp>
+      <p:sp>
+        <p:nvSpPr>
+          <p:cNvPr id="17" name="Rounded Rectangle 16"/>
+          <p:cNvSpPr/>
+          <p:nvPr/>
+        </p:nvSpPr>
+        <p:spPr>
+          <a:xfrm>
+            <a:off x="2103120" y="3383280"/>
+            <a:ext cx="1737360" cy="731520"/>
+          </a:xfrm>
+          <a:prstGeom prst="roundRect">
+            <a:avLst/>
+          </a:prstGeom>
+          <a:solidFill>
+            <a:srgbClr val="004A87"/>
+          </a:solidFill>
+          <a:ln>
+            <a:noFill/>
+          </a:ln>
+        </p:spPr>
+        <p:style>
+          <a:lnRef idx="1">
+            <a:schemeClr val="accent1"/>
+          </a:lnRef>
+          <a:fillRef idx="3">
+            <a:schemeClr val="accent1"/>
+          </a:fillRef>
+          <a:effectRef idx="2">
+            <a:schemeClr val="accent1"/>
+          </a:effectRef>
+          <a:fontRef idx="minor">
+            <a:schemeClr val="lt1"/>
+          </a:fontRef>
+        </p:style>
+        <p:txBody>
+          <a:bodyPr rtlCol="0" anchor="ctr"/>
+          <a:lstStyle/>
+          <a:p>
+            <a:pPr algn="ctr"/>
+          </a:p>
+        </p:txBody>
+      </p:sp>
+      <p:sp>
+        <p:nvSpPr>
+          <p:cNvPr id="18" name="TextBox 17"/>
+          <p:cNvSpPr txBox="1"/>
+          <p:nvPr/>
+        </p:nvSpPr>
+        <p:spPr>
+          <a:xfrm>
+            <a:off x="2194560" y="3456432"/>
+            <a:ext cx="1554480" cy="640080"/>
+          </a:xfrm>
+          <a:prstGeom prst="rect">
+            <a:avLst/>
+          </a:prstGeom>
+          <a:noFill/>
+        </p:spPr>
+        <p:txBody>
+          <a:bodyPr wrap="square">
+            <a:spAutoFit/>
+          </a:bodyPr>
+          <a:lstStyle/>
+          <a:p>
+            <a:pPr algn="l">
+              <a:spcAft>
+                <a:spcPts val="100"/>
+              </a:spcAft>
+            </a:pPr>
+            <a:r>
+              <a:rPr sz="900" b="1">
+                <a:solidFill>
+                  <a:srgbClr val="FFFFFF"/>
+                </a:solidFill>
+              </a:rPr>
+              <a:t>Gate A
+Coverage</a:t>
+            </a:r>
+          </a:p>
+          <a:p>
+            <a:pPr algn="l">
+              <a:spcAft>
+                <a:spcPts val="0"/>
+              </a:spcAft>
+            </a:pPr>
+            <a:r>
+              <a:rPr sz="700" b="0">
+                <a:solidFill>
+                  <a:srgbClr val="BBBBBB"/>
+                </a:solidFill>
+              </a:rPr>
+              <a:t/>
+            </a:r>
+          </a:p>
+        </p:txBody>
+      </p:sp>
+      <p:sp>
+        <p:nvSpPr>
+          <p:cNvPr id="19" name="Rounded Rectangle 18"/>
+          <p:cNvSpPr/>
+          <p:nvPr/>
+        </p:nvSpPr>
+        <p:spPr>
+          <a:xfrm>
+            <a:off x="3931920" y="3383280"/>
+            <a:ext cx="1737360" cy="731520"/>
+          </a:xfrm>
+          <a:prstGeom prst="roundRect">
+            <a:avLst/>
+          </a:prstGeom>
+          <a:solidFill>
+            <a:srgbClr val="004A87"/>
+          </a:solidFill>
+          <a:ln>
+            <a:noFill/>
+          </a:ln>
+        </p:spPr>
+        <p:style>
+          <a:lnRef idx="1">
+            <a:schemeClr val="accent1"/>
+          </a:lnRef>
+          <a:fillRef idx="3">
+            <a:schemeClr val="accent1"/>
+          </a:fillRef>
+          <a:effectRef idx="2">
+            <a:schemeClr val="accent1"/>
+          </a:effectRef>
+          <a:fontRef idx="minor">
+            <a:schemeClr val="lt1"/>
+          </a:fontRef>
+        </p:style>
+        <p:txBody>
+          <a:bodyPr rtlCol="0" anchor="ctr"/>
+          <a:lstStyle/>
+          <a:p>
+            <a:pPr algn="ctr"/>
+          </a:p>
+        </p:txBody>
+      </p:sp>
+      <p:sp>
+        <p:nvSpPr>
+          <p:cNvPr id="20" name="TextBox 19"/>
+          <p:cNvSpPr txBox="1"/>
+          <p:nvPr/>
+        </p:nvSpPr>
+        <p:spPr>
+          <a:xfrm>
+            <a:off x="4023360" y="3456432"/>
+            <a:ext cx="1554480" cy="640080"/>
+          </a:xfrm>
+          <a:prstGeom prst="rect">
+            <a:avLst/>
+          </a:prstGeom>
+          <a:noFill/>
+        </p:spPr>
+        <p:txBody>
+          <a:bodyPr wrap="square">
+            <a:spAutoFit/>
+          </a:bodyPr>
+          <a:lstStyle/>
+          <a:p>
+            <a:pPr algn="l">
+              <a:spcAft>
+                <a:spcPts val="100"/>
+              </a:spcAft>
+            </a:pPr>
+            <a:r>
+              <a:rPr sz="900" b="1">
+                <a:solidFill>
+                  <a:srgbClr val="FFFFFF"/>
+                </a:solidFill>
+              </a:rPr>
+              <a:t>Gate B
+Drift</a:t>
+            </a:r>
+          </a:p>
+          <a:p>
+            <a:pPr algn="l">
+              <a:spcAft>
+                <a:spcPts val="0"/>
+              </a:spcAft>
+            </a:pPr>
+            <a:r>
+              <a:rPr sz="700" b="0">
+                <a:solidFill>
+                  <a:srgbClr val="BBBBBB"/>
+                </a:solidFill>
+              </a:rPr>
+              <a:t/>
+            </a:r>
+          </a:p>
+        </p:txBody>
+      </p:sp>
+      <p:sp>
+        <p:nvSpPr>
+          <p:cNvPr id="21" name="Rounded Rectangle 20"/>
+          <p:cNvSpPr/>
+          <p:nvPr/>
+        </p:nvSpPr>
+        <p:spPr>
+          <a:xfrm>
+            <a:off x="5760720" y="3383280"/>
+            <a:ext cx="1737360" cy="731520"/>
+          </a:xfrm>
+          <a:prstGeom prst="roundRect">
+            <a:avLst/>
+          </a:prstGeom>
+          <a:solidFill>
+            <a:srgbClr val="004A87"/>
+          </a:solidFill>
+          <a:ln>
+            <a:noFill/>
+          </a:ln>
+        </p:spPr>
+        <p:style>
+          <a:lnRef idx="1">
+            <a:schemeClr val="accent1"/>
+          </a:lnRef>
+          <a:fillRef idx="3">
+            <a:schemeClr val="accent1"/>
+          </a:fillRef>
+          <a:effectRef idx="2">
+            <a:schemeClr val="accent1"/>
+          </a:effectRef>
+          <a:fontRef idx="minor">
+            <a:schemeClr val="lt1"/>
+          </a:fontRef>
+        </p:style>
+        <p:txBody>
+          <a:bodyPr rtlCol="0" anchor="ctr"/>
+          <a:lstStyle/>
+          <a:p>
+            <a:pPr algn="ctr"/>
+          </a:p>
+        </p:txBody>
+      </p:sp>
+      <p:sp>
+        <p:nvSpPr>
+          <p:cNvPr id="22" name="TextBox 21"/>
+          <p:cNvSpPr txBox="1"/>
+          <p:nvPr/>
+        </p:nvSpPr>
+        <p:spPr>
+          <a:xfrm>
+            <a:off x="5852160" y="3456432"/>
+            <a:ext cx="1554480" cy="640080"/>
+          </a:xfrm>
+          <a:prstGeom prst="rect">
+            <a:avLst/>
+          </a:prstGeom>
+          <a:noFill/>
+        </p:spPr>
+        <p:txBody>
+          <a:bodyPr wrap="square">
+            <a:spAutoFit/>
+          </a:bodyPr>
+          <a:lstStyle/>
+          <a:p>
+            <a:pPr algn="l">
+              <a:spcAft>
+                <a:spcPts val="100"/>
+              </a:spcAft>
+            </a:pPr>
+            <a:r>
+              <a:rPr sz="900" b="1">
+                <a:solidFill>
+                  <a:srgbClr val="FFFFFF"/>
+                </a:solidFill>
+              </a:rPr>
+              <a:t>Gate C
+Orphans</a:t>
+            </a:r>
+          </a:p>
+          <a:p>
+            <a:pPr algn="l">
+              <a:spcAft>
+                <a:spcPts val="0"/>
+              </a:spcAft>
+            </a:pPr>
+            <a:r>
+              <a:rPr sz="700" b="0">
+                <a:solidFill>
+                  <a:srgbClr val="BBBBBB"/>
+                </a:solidFill>
+              </a:rPr>
+              <a:t/>
+            </a:r>
+          </a:p>
+        </p:txBody>
+      </p:sp>
+      <p:sp>
+        <p:nvSpPr>
+          <p:cNvPr id="23" name="Rounded Rectangle 22"/>
+          <p:cNvSpPr/>
+          <p:nvPr/>
+        </p:nvSpPr>
+        <p:spPr>
+          <a:xfrm>
+            <a:off x="7589520" y="3383280"/>
+            <a:ext cx="1737360" cy="731520"/>
           </a:xfrm>
           <a:prstGeom prst="roundRect">
             <a:avLst/>
@@ -11374,339 +11512,77 @@
       </p:sp>
       <p:sp>
         <p:nvSpPr>
-          <p:cNvPr id="10" name="TextBox 9"/>
-          <p:cNvSpPr txBox="1"/>
-          <p:nvPr/>
-        </p:nvSpPr>
-        <p:spPr>
-          <a:xfrm>
-            <a:off x="6309360" y="1627632"/>
-            <a:ext cx="4937760" cy="502920"/>
-          </a:xfrm>
-          <a:prstGeom prst="rect">
-            <a:avLst/>
-          </a:prstGeom>
-          <a:noFill/>
-        </p:spPr>
-        <p:txBody>
-          <a:bodyPr wrap="square">
-            <a:spAutoFit/>
-          </a:bodyPr>
-          <a:lstStyle/>
-          <a:p>
-            <a:pPr algn="l">
-              <a:spcAft>
-                <a:spcPts val="200"/>
-              </a:spcAft>
-            </a:pPr>
-            <a:r>
-              <a:rPr sz="1600" b="1">
+          <p:cNvPr id="24" name="TextBox 23"/>
+          <p:cNvSpPr txBox="1"/>
+          <p:nvPr/>
+        </p:nvSpPr>
+        <p:spPr>
+          <a:xfrm>
+            <a:off x="7680960" y="3456432"/>
+            <a:ext cx="1554480" cy="640080"/>
+          </a:xfrm>
+          <a:prstGeom prst="rect">
+            <a:avLst/>
+          </a:prstGeom>
+          <a:noFill/>
+        </p:spPr>
+        <p:txBody>
+          <a:bodyPr wrap="square">
+            <a:spAutoFit/>
+          </a:bodyPr>
+          <a:lstStyle/>
+          <a:p>
+            <a:pPr algn="l">
+              <a:spcAft>
+                <a:spcPts val="100"/>
+              </a:spcAft>
+            </a:pPr>
+            <a:r>
+              <a:rPr sz="900" b="1">
                 <a:solidFill>
                   <a:srgbClr val="FFFFFF"/>
                 </a:solidFill>
               </a:rPr>
-              <a:t>Software Developers</a:t>
-            </a:r>
-          </a:p>
-          <a:p>
-            <a:pPr algn="l">
-              <a:spcAft>
-                <a:spcPts val="0"/>
-              </a:spcAft>
-            </a:pPr>
-            <a:r>
-              <a:rPr sz="1000" b="0">
+              <a:t>BDD Test
+Execution</a:t>
+            </a:r>
+          </a:p>
+          <a:p>
+            <a:pPr algn="l">
+              <a:spcAft>
+                <a:spcPts val="0"/>
+              </a:spcAft>
+            </a:pPr>
+            <a:r>
+              <a:rPr sz="700" b="0">
                 <a:solidFill>
                   <a:srgbClr val="BBBBBB"/>
                 </a:solidFill>
               </a:rPr>
-              <a:t>Own the HOW</a:t>
-            </a:r>
-          </a:p>
-        </p:txBody>
-      </p:sp>
-      <p:sp>
-        <p:nvSpPr>
-          <p:cNvPr id="11" name="TextBox 10"/>
-          <p:cNvSpPr txBox="1"/>
-          <p:nvPr/>
-        </p:nvSpPr>
-        <p:spPr>
-          <a:xfrm>
-            <a:off x="6309360" y="2377440"/>
-            <a:ext cx="4937760" cy="2926080"/>
-          </a:xfrm>
-          <a:prstGeom prst="rect">
-            <a:avLst/>
-          </a:prstGeom>
-          <a:noFill/>
-        </p:spPr>
-        <p:txBody>
-          <a:bodyPr wrap="square">
-            <a:spAutoFit/>
-          </a:bodyPr>
-          <a:lstStyle/>
-          <a:p>
-            <a:pPr algn="l">
-              <a:spcAft>
-                <a:spcPts val="800"/>
-              </a:spcAft>
-            </a:pPr>
-            <a:r>
-              <a:rPr sz="1000" b="0">
-                <a:solidFill>
-                  <a:srgbClr val="555555"/>
-                </a:solidFill>
-              </a:rPr>
-              <a:t>•  Implement step definitions (Python code behind steps)</a:t>
-            </a:r>
-          </a:p>
-          <a:p>
-            <a:pPr algn="l">
-              <a:spcAft>
-                <a:spcPts val="800"/>
-              </a:spcAft>
-            </a:pPr>
-            <a:r>
-              <a:rPr sz="1000" b="0">
-                <a:solidFill>
-                  <a:srgbClr val="555555"/>
-                </a:solidFill>
-              </a:rPr>
-              <a:t>•  Build log-analysis assertions against system output</a:t>
-            </a:r>
-          </a:p>
-          <a:p>
-            <a:pPr algn="l">
-              <a:spcAft>
-                <a:spcPts val="800"/>
-              </a:spcAft>
-            </a:pPr>
-            <a:r>
-              <a:rPr sz="1000" b="0">
-                <a:solidFill>
-                  <a:srgbClr val="555555"/>
-                </a:solidFill>
-              </a:rPr>
-              <a:t>•  Maintain BDD test infrastructure &amp; helpers</a:t>
-            </a:r>
-          </a:p>
-          <a:p>
-            <a:pPr algn="l">
-              <a:spcAft>
-                <a:spcPts val="800"/>
-              </a:spcAft>
-            </a:pPr>
-            <a:r>
-              <a:rPr sz="1000" b="0">
-                <a:solidFill>
-                  <a:srgbClr val="555555"/>
-                </a:solidFill>
-              </a:rPr>
-              <a:t>•  Write product application code</a:t>
-            </a:r>
-          </a:p>
-        </p:txBody>
-      </p:sp>
-      <p:sp>
-        <p:nvSpPr>
-          <p:cNvPr id="12" name="TextBox 11"/>
-          <p:cNvSpPr txBox="1"/>
-          <p:nvPr/>
-        </p:nvSpPr>
-        <p:spPr>
-          <a:xfrm>
-            <a:off x="457200" y="5852160"/>
-            <a:ext cx="11247120" cy="274320"/>
-          </a:xfrm>
-          <a:prstGeom prst="rect">
-            <a:avLst/>
-          </a:prstGeom>
-          <a:noFill/>
-        </p:spPr>
-        <p:txBody>
-          <a:bodyPr wrap="square">
-            <a:spAutoFit/>
-          </a:bodyPr>
-          <a:lstStyle/>
-          <a:p>
-            <a:pPr algn="ctr">
-              <a:spcAft>
-                <a:spcPts val="0"/>
-              </a:spcAft>
-            </a:pPr>
-            <a:r>
-              <a:rPr sz="900" b="1">
-                <a:solidFill>
-                  <a:srgbClr val="0099D6"/>
-                </a:solidFill>
-              </a:rPr>
-              <a:t>JOINTLY OWNED  —  Systems Engineers + Software Developers co-author Gherkin (.feature) files</a:t>
-            </a:r>
-          </a:p>
-        </p:txBody>
-      </p:sp>
-      <p:sp>
-        <p:nvSpPr>
-          <p:cNvPr id="13" name="TextBox 12"/>
-          <p:cNvSpPr txBox="1"/>
-          <p:nvPr/>
-        </p:nvSpPr>
-        <p:spPr>
-          <a:xfrm>
-            <a:off x="10972800" y="6400800"/>
-            <a:ext cx="914400" cy="274320"/>
-          </a:xfrm>
-          <a:prstGeom prst="rect">
-            <a:avLst/>
-          </a:prstGeom>
-          <a:noFill/>
-        </p:spPr>
-        <p:txBody>
-          <a:bodyPr wrap="square">
-            <a:spAutoFit/>
-          </a:bodyPr>
-          <a:lstStyle/>
-          <a:p>
-            <a:pPr algn="r">
-              <a:spcAft>
-                <a:spcPts val="0"/>
-              </a:spcAft>
-            </a:pPr>
-            <a:r>
-              <a:rPr sz="900" b="0">
-                <a:solidFill>
-                  <a:srgbClr val="888888"/>
-                </a:solidFill>
-              </a:rPr>
-              <a:t>7 / 12</a:t>
-            </a:r>
-          </a:p>
-        </p:txBody>
-      </p:sp>
-    </p:spTree>
-  </p:cSld>
-  <p:clrMapOvr>
-    <a:masterClrMapping/>
-  </p:clrMapOvr>
-</p:sld>
-</file>
-
-<file path=ppt/slides/slide8.xml><?xml version="1.0" encoding="utf-8"?>
-<p:sld xmlns:a="http://schemas.openxmlformats.org/drawingml/2006/main" xmlns:p="http://schemas.openxmlformats.org/presentationml/2006/main" xmlns:r="http://schemas.openxmlformats.org/officeDocument/2006/relationships">
-  <p:cSld>
-    <p:bg>
-      <p:bgPr>
-        <a:solidFill>
-          <a:srgbClr val="0D1B2A"/>
-        </a:solidFill>
-        <a:effectLst/>
-      </p:bgPr>
-    </p:bg>
-    <p:spTree>
-      <p:nvGrpSpPr>
-        <p:cNvPr id="1" name=""/>
-        <p:cNvGrpSpPr/>
-        <p:nvPr/>
-      </p:nvGrpSpPr>
-      <p:grpSpPr/>
-      <p:sp>
-        <p:nvSpPr>
-          <p:cNvPr id="2" name="TextBox 1"/>
-          <p:cNvSpPr txBox="1"/>
-          <p:nvPr/>
-        </p:nvSpPr>
-        <p:spPr>
-          <a:xfrm>
-            <a:off x="731520" y="457200"/>
-            <a:ext cx="10058400" cy="457200"/>
-          </a:xfrm>
-          <a:prstGeom prst="rect">
-            <a:avLst/>
-          </a:prstGeom>
-          <a:noFill/>
-        </p:spPr>
-        <p:txBody>
-          <a:bodyPr wrap="square">
-            <a:spAutoFit/>
-          </a:bodyPr>
-          <a:lstStyle/>
-          <a:p>
-            <a:pPr algn="l">
-              <a:spcAft>
-                <a:spcPts val="0"/>
-              </a:spcAft>
-            </a:pPr>
-            <a:r>
-              <a:rPr sz="2800" b="1">
-                <a:solidFill>
-                  <a:srgbClr val="FFFFFF"/>
-                </a:solidFill>
-              </a:rPr>
-              <a:t>Gherkin Specification &amp; Tag Convention</a:t>
-            </a:r>
-          </a:p>
-        </p:txBody>
-      </p:sp>
-      <p:sp>
-        <p:nvSpPr>
-          <p:cNvPr id="3" name="TextBox 2"/>
-          <p:cNvSpPr txBox="1"/>
-          <p:nvPr/>
-        </p:nvSpPr>
-        <p:spPr>
-          <a:xfrm>
-            <a:off x="731520" y="960120"/>
-            <a:ext cx="10058400" cy="274320"/>
-          </a:xfrm>
-          <a:prstGeom prst="rect">
-            <a:avLst/>
-          </a:prstGeom>
-          <a:noFill/>
-        </p:spPr>
-        <p:txBody>
-          <a:bodyPr wrap="square">
-            <a:spAutoFit/>
-          </a:bodyPr>
-          <a:lstStyle/>
-          <a:p>
-            <a:pPr algn="l">
-              <a:spcAft>
-                <a:spcPts val="0"/>
-              </a:spcAft>
-            </a:pPr>
-            <a:r>
-              <a:rPr sz="1100" b="0">
-                <a:solidFill>
-                  <a:srgbClr val="AAAAAA"/>
-                </a:solidFill>
-              </a:rPr>
-              <a:t>Tags create the machine-readable traceability link between requirements and test scenarios.</a:t>
-            </a:r>
-          </a:p>
-        </p:txBody>
-      </p:sp>
-      <p:sp>
-        <p:nvSpPr>
-          <p:cNvPr id="4" name="Rounded Rectangle 3"/>
+              <a:t/>
+            </a:r>
+          </a:p>
+        </p:txBody>
+      </p:sp>
+      <p:sp>
+        <p:nvSpPr>
+          <p:cNvPr id="25" name="Rounded Rectangle 24"/>
           <p:cNvSpPr/>
           <p:nvPr/>
         </p:nvSpPr>
         <p:spPr>
           <a:xfrm>
-            <a:off x="457200" y="1554480"/>
-            <a:ext cx="5943600" cy="4114800"/>
+            <a:off x="9418320" y="3383280"/>
+            <a:ext cx="1737360" cy="731520"/>
           </a:xfrm>
           <a:prstGeom prst="roundRect">
             <a:avLst/>
           </a:prstGeom>
           <a:solidFill>
-            <a:srgbClr val="142538"/>
+            <a:srgbClr val="0082CC"/>
           </a:solidFill>
-          <a:ln w="12700">
-            <a:solidFill>
-              <a:srgbClr val="2A3A4A"/>
-            </a:solidFill>
+          <a:ln>
+            <a:noFill/>
           </a:ln>
         </p:spPr>
         <p:style>
@@ -11733,506 +11609,99 @@
       </p:sp>
       <p:sp>
         <p:nvSpPr>
-          <p:cNvPr id="5" name="TextBox 4"/>
-          <p:cNvSpPr txBox="1"/>
-          <p:nvPr/>
-        </p:nvSpPr>
-        <p:spPr>
-          <a:xfrm>
-            <a:off x="640080" y="1691640"/>
-            <a:ext cx="5577840" cy="3840480"/>
-          </a:xfrm>
-          <a:prstGeom prst="rect">
-            <a:avLst/>
-          </a:prstGeom>
-          <a:noFill/>
-        </p:spPr>
-        <p:txBody>
-          <a:bodyPr wrap="square">
-            <a:spAutoFit/>
-          </a:bodyPr>
-          <a:lstStyle/>
-          <a:p>
-            <a:pPr algn="l">
-              <a:spcAft>
-                <a:spcPts val="200"/>
+          <p:cNvPr id="26" name="TextBox 25"/>
+          <p:cNvSpPr txBox="1"/>
+          <p:nvPr/>
+        </p:nvSpPr>
+        <p:spPr>
+          <a:xfrm>
+            <a:off x="9509760" y="3456432"/>
+            <a:ext cx="1554480" cy="640080"/>
+          </a:xfrm>
+          <a:prstGeom prst="rect">
+            <a:avLst/>
+          </a:prstGeom>
+          <a:noFill/>
+        </p:spPr>
+        <p:txBody>
+          <a:bodyPr wrap="square">
+            <a:spAutoFit/>
+          </a:bodyPr>
+          <a:lstStyle/>
+          <a:p>
+            <a:pPr algn="l">
+              <a:spcAft>
+                <a:spcPts val="100"/>
               </a:spcAft>
             </a:pPr>
             <a:r>
               <a:rPr sz="900" b="1">
                 <a:solidFill>
-                  <a:srgbClr val="0099D6"/>
-                </a:solidFill>
-              </a:rPr>
-              <a:t>@REQ:SYS-REQ-001</a:t>
-            </a:r>
-          </a:p>
-          <a:p>
-            <a:pPr algn="l">
-              <a:spcAft>
-                <a:spcPts val="200"/>
-              </a:spcAft>
-            </a:pPr>
-            <a:r>
-              <a:rPr sz="900" b="1">
-                <a:solidFill>
                   <a:srgbClr val="FFFFFF"/>
                 </a:solidFill>
               </a:rPr>
-              <a:t>Feature: Basic ICD Communications</a:t>
-            </a:r>
-          </a:p>
-          <a:p>
-            <a:pPr algn="l">
-              <a:spcAft>
-                <a:spcPts val="200"/>
+              <a:t>Deploy +
+Report</a:t>
+            </a:r>
+          </a:p>
+          <a:p>
+            <a:pPr algn="l">
+              <a:spcAft>
+                <a:spcPts val="0"/>
+              </a:spcAft>
+            </a:pPr>
+            <a:r>
+              <a:rPr sz="700" b="0">
+                <a:solidFill>
+                  <a:srgbClr val="BBBBBB"/>
+                </a:solidFill>
+              </a:rPr>
+              <a:t/>
+            </a:r>
+          </a:p>
+        </p:txBody>
+      </p:sp>
+      <p:sp>
+        <p:nvSpPr>
+          <p:cNvPr id="27" name="TextBox 26"/>
+          <p:cNvSpPr txBox="1"/>
+          <p:nvPr/>
+        </p:nvSpPr>
+        <p:spPr>
+          <a:xfrm>
+            <a:off x="731520" y="4754880"/>
+            <a:ext cx="10058400" cy="274320"/>
+          </a:xfrm>
+          <a:prstGeom prst="rect">
+            <a:avLst/>
+          </a:prstGeom>
+          <a:noFill/>
+        </p:spPr>
+        <p:txBody>
+          <a:bodyPr wrap="square">
+            <a:spAutoFit/>
+          </a:bodyPr>
+          <a:lstStyle/>
+          <a:p>
+            <a:pPr algn="l">
+              <a:spcAft>
+                <a:spcPts val="0"/>
               </a:spcAft>
             </a:pPr>
             <a:r>
               <a:rPr sz="900" b="0">
                 <a:solidFill>
-                  <a:srgbClr val="FFFFFF"/>
-                </a:solidFill>
-              </a:rPr>
-              <a:t> </a:t>
-            </a:r>
-          </a:p>
-          <a:p>
-            <a:pPr algn="l">
-              <a:spcAft>
-                <a:spcPts val="200"/>
-              </a:spcAft>
-            </a:pPr>
-            <a:r>
-              <a:rPr sz="900" b="1">
-                <a:solidFill>
-                  <a:srgbClr val="0099D6"/>
-                </a:solidFill>
-              </a:rPr>
-              <a:t>  @VC:SYS-REQ-001-VC-01 @VER:Test</a:t>
-            </a:r>
-          </a:p>
-          <a:p>
-            <a:pPr algn="l">
-              <a:spcAft>
-                <a:spcPts val="200"/>
-              </a:spcAft>
-            </a:pPr>
-            <a:r>
-              <a:rPr sz="900" b="0">
-                <a:solidFill>
-                  <a:srgbClr val="FFFFFF"/>
-                </a:solidFill>
-              </a:rPr>
-              <a:t>  Scenario: Valid ICD produces correct response</a:t>
-            </a:r>
-          </a:p>
-          <a:p>
-            <a:pPr algn="l">
-              <a:spcAft>
-                <a:spcPts val="200"/>
-              </a:spcAft>
-            </a:pPr>
-            <a:r>
-              <a:rPr sz="900" b="0">
-                <a:solidFill>
-                  <a:srgbClr val="BBBBBB"/>
-                </a:solidFill>
-              </a:rPr>
-              <a:t>    Given the simulation logs are loaded</a:t>
-            </a:r>
-          </a:p>
-          <a:p>
-            <a:pPr algn="l">
-              <a:spcAft>
-                <a:spcPts val="200"/>
-              </a:spcAft>
-            </a:pPr>
-            <a:r>
-              <a:rPr sz="900" b="0">
-                <a:solidFill>
-                  <a:srgbClr val="BBBBBB"/>
-                </a:solidFill>
-              </a:rPr>
-              <a:t>    Then the product logs should contain</a:t>
-            </a:r>
-          </a:p>
-          <a:p>
-            <a:pPr algn="l">
-              <a:spcAft>
-                <a:spcPts val="200"/>
-              </a:spcAft>
-            </a:pPr>
-            <a:r>
-              <a:rPr sz="900" b="0">
-                <a:solidFill>
-                  <a:srgbClr val="BBBBBB"/>
-                </a:solidFill>
-              </a:rPr>
-              <a:t>         "Received IcdRequest: test-001"</a:t>
-            </a:r>
-          </a:p>
-        </p:txBody>
-      </p:sp>
-      <p:sp>
-        <p:nvSpPr>
-          <p:cNvPr id="6" name="TextBox 5"/>
-          <p:cNvSpPr txBox="1"/>
-          <p:nvPr/>
-        </p:nvSpPr>
-        <p:spPr>
-          <a:xfrm>
-            <a:off x="6675120" y="1554480"/>
-            <a:ext cx="4754880" cy="274320"/>
-          </a:xfrm>
-          <a:prstGeom prst="rect">
-            <a:avLst/>
-          </a:prstGeom>
-          <a:noFill/>
-        </p:spPr>
-        <p:txBody>
-          <a:bodyPr wrap="square">
-            <a:spAutoFit/>
-          </a:bodyPr>
-          <a:lstStyle/>
-          <a:p>
-            <a:pPr algn="l">
-              <a:spcAft>
-                <a:spcPts val="0"/>
-              </a:spcAft>
-            </a:pPr>
-            <a:r>
-              <a:rPr sz="1400" b="1">
-                <a:solidFill>
-                  <a:srgbClr val="FFFFFF"/>
-                </a:solidFill>
-              </a:rPr>
-              <a:t>Tag Reference</a:t>
-            </a:r>
-          </a:p>
-        </p:txBody>
-      </p:sp>
-      <p:sp>
-        <p:nvSpPr>
-          <p:cNvPr id="7" name="TextBox 6"/>
-          <p:cNvSpPr txBox="1"/>
-          <p:nvPr/>
-        </p:nvSpPr>
-        <p:spPr>
-          <a:xfrm>
-            <a:off x="6675120" y="2011680"/>
-            <a:ext cx="4754880" cy="502920"/>
-          </a:xfrm>
-          <a:prstGeom prst="rect">
-            <a:avLst/>
-          </a:prstGeom>
-          <a:noFill/>
-        </p:spPr>
-        <p:txBody>
-          <a:bodyPr wrap="square">
-            <a:spAutoFit/>
-          </a:bodyPr>
-          <a:lstStyle/>
-          <a:p>
-            <a:pPr algn="l">
-              <a:spcAft>
-                <a:spcPts val="200"/>
-              </a:spcAft>
-            </a:pPr>
-            <a:r>
-              <a:rPr sz="1000" b="1">
-                <a:solidFill>
-                  <a:srgbClr val="0099D6"/>
-                </a:solidFill>
-              </a:rPr>
-              <a:t>@REQ:SYS-REQ-001</a:t>
-            </a:r>
-          </a:p>
-          <a:p>
-            <a:pPr algn="l">
-              <a:spcAft>
-                <a:spcPts val="0"/>
-              </a:spcAft>
-            </a:pPr>
-            <a:r>
-              <a:rPr sz="800" b="0">
-                <a:solidFill>
-                  <a:srgbClr val="AAAAAA"/>
-                </a:solidFill>
-              </a:rPr>
-              <a:t>Links to requirement ID. Placed at Feature level.</a:t>
-            </a:r>
-          </a:p>
-        </p:txBody>
-      </p:sp>
-      <p:sp>
-        <p:nvSpPr>
-          <p:cNvPr id="8" name="TextBox 7"/>
-          <p:cNvSpPr txBox="1"/>
-          <p:nvPr/>
-        </p:nvSpPr>
-        <p:spPr>
-          <a:xfrm>
-            <a:off x="6675120" y="2560320"/>
-            <a:ext cx="4754880" cy="502920"/>
-          </a:xfrm>
-          <a:prstGeom prst="rect">
-            <a:avLst/>
-          </a:prstGeom>
-          <a:noFill/>
-        </p:spPr>
-        <p:txBody>
-          <a:bodyPr wrap="square">
-            <a:spAutoFit/>
-          </a:bodyPr>
-          <a:lstStyle/>
-          <a:p>
-            <a:pPr algn="l">
-              <a:spcAft>
-                <a:spcPts val="200"/>
-              </a:spcAft>
-            </a:pPr>
-            <a:r>
-              <a:rPr sz="1000" b="1">
-                <a:solidFill>
-                  <a:srgbClr val="0099D6"/>
-                </a:solidFill>
-              </a:rPr>
-              <a:t>@VC:...-VC-01</a:t>
-            </a:r>
-          </a:p>
-          <a:p>
-            <a:pPr algn="l">
-              <a:spcAft>
-                <a:spcPts val="0"/>
-              </a:spcAft>
-            </a:pPr>
-            <a:r>
-              <a:rPr sz="800" b="0">
-                <a:solidFill>
-                  <a:srgbClr val="AAAAAA"/>
-                </a:solidFill>
-              </a:rPr>
-              <a:t>Links to specific VC. Placed at Scenario level.</a:t>
-            </a:r>
-          </a:p>
-        </p:txBody>
-      </p:sp>
-      <p:sp>
-        <p:nvSpPr>
-          <p:cNvPr id="9" name="TextBox 8"/>
-          <p:cNvSpPr txBox="1"/>
-          <p:nvPr/>
-        </p:nvSpPr>
-        <p:spPr>
-          <a:xfrm>
-            <a:off x="6675120" y="3108960"/>
-            <a:ext cx="4754880" cy="502920"/>
-          </a:xfrm>
-          <a:prstGeom prst="rect">
-            <a:avLst/>
-          </a:prstGeom>
-          <a:noFill/>
-        </p:spPr>
-        <p:txBody>
-          <a:bodyPr wrap="square">
-            <a:spAutoFit/>
-          </a:bodyPr>
-          <a:lstStyle/>
-          <a:p>
-            <a:pPr algn="l">
-              <a:spcAft>
-                <a:spcPts val="200"/>
-              </a:spcAft>
-            </a:pPr>
-            <a:r>
-              <a:rPr sz="1000" b="1">
-                <a:solidFill>
-                  <a:srgbClr val="0099D6"/>
-                </a:solidFill>
-              </a:rPr>
-              <a:t>@VER:Test</a:t>
-            </a:r>
-          </a:p>
-          <a:p>
-            <a:pPr algn="l">
-              <a:spcAft>
-                <a:spcPts val="0"/>
-              </a:spcAft>
-            </a:pPr>
-            <a:r>
-              <a:rPr sz="800" b="0">
-                <a:solidFill>
-                  <a:srgbClr val="AAAAAA"/>
-                </a:solidFill>
-              </a:rPr>
-              <a:t>Verification criteria type (INCOSE ADIT classification).</a:t>
-            </a:r>
-          </a:p>
-        </p:txBody>
-      </p:sp>
-      <p:sp>
-        <p:nvSpPr>
-          <p:cNvPr id="10" name="TextBox 9"/>
-          <p:cNvSpPr txBox="1"/>
-          <p:nvPr/>
-        </p:nvSpPr>
-        <p:spPr>
-          <a:xfrm>
-            <a:off x="6675120" y="3657600"/>
-            <a:ext cx="4754880" cy="502920"/>
-          </a:xfrm>
-          <a:prstGeom prst="rect">
-            <a:avLst/>
-          </a:prstGeom>
-          <a:noFill/>
-        </p:spPr>
-        <p:txBody>
-          <a:bodyPr wrap="square">
-            <a:spAutoFit/>
-          </a:bodyPr>
-          <a:lstStyle/>
-          <a:p>
-            <a:pPr algn="l">
-              <a:spcAft>
-                <a:spcPts val="200"/>
-              </a:spcAft>
-            </a:pPr>
-            <a:r>
-              <a:rPr sz="1000" b="1">
-                <a:solidFill>
-                  <a:srgbClr val="0099D6"/>
-                </a:solidFill>
-              </a:rPr>
-              <a:t>@REVIEW_REQUIRED</a:t>
-            </a:r>
-          </a:p>
-          <a:p>
-            <a:pPr algn="l">
-              <a:spcAft>
-                <a:spcPts val="0"/>
-              </a:spcAft>
-            </a:pPr>
-            <a:r>
-              <a:rPr sz="800" b="0">
-                <a:solidFill>
-                  <a:srgbClr val="AAAAAA"/>
-                </a:solidFill>
-              </a:rPr>
-              <a:t>Injected by Gate B when criteria text drifts.</a:t>
-            </a:r>
-          </a:p>
-        </p:txBody>
-      </p:sp>
-      <p:sp>
-        <p:nvSpPr>
-          <p:cNvPr id="11" name="TextBox 10"/>
-          <p:cNvSpPr txBox="1"/>
-          <p:nvPr/>
-        </p:nvSpPr>
-        <p:spPr>
-          <a:xfrm>
-            <a:off x="6675120" y="4206240"/>
-            <a:ext cx="4754880" cy="502920"/>
-          </a:xfrm>
-          <a:prstGeom prst="rect">
-            <a:avLst/>
-          </a:prstGeom>
-          <a:noFill/>
-        </p:spPr>
-        <p:txBody>
-          <a:bodyPr wrap="square">
-            <a:spAutoFit/>
-          </a:bodyPr>
-          <a:lstStyle/>
-          <a:p>
-            <a:pPr algn="l">
-              <a:spcAft>
-                <a:spcPts val="200"/>
-              </a:spcAft>
-            </a:pPr>
-            <a:r>
-              <a:rPr sz="1000" b="1">
-                <a:solidFill>
-                  <a:srgbClr val="0099D6"/>
-                </a:solidFill>
-              </a:rPr>
-              <a:t>@STUB</a:t>
-            </a:r>
-          </a:p>
-          <a:p>
-            <a:pPr algn="l">
-              <a:spcAft>
-                <a:spcPts val="0"/>
-              </a:spcAft>
-            </a:pPr>
-            <a:r>
-              <a:rPr sz="800" b="0">
-                <a:solidFill>
-                  <a:srgbClr val="AAAAAA"/>
-                </a:solidFill>
-              </a:rPr>
-              <a:t>Auto-generated placeholder. Replaced by real scenario.</a:t>
-            </a:r>
-          </a:p>
-        </p:txBody>
-      </p:sp>
-      <p:sp>
-        <p:nvSpPr>
-          <p:cNvPr id="12" name="TextBox 11"/>
-          <p:cNvSpPr txBox="1"/>
-          <p:nvPr/>
-        </p:nvSpPr>
-        <p:spPr>
-          <a:xfrm>
-            <a:off x="6675120" y="4754880"/>
-            <a:ext cx="4754880" cy="502920"/>
-          </a:xfrm>
-          <a:prstGeom prst="rect">
-            <a:avLst/>
-          </a:prstGeom>
-          <a:noFill/>
-        </p:spPr>
-        <p:txBody>
-          <a:bodyPr wrap="square">
-            <a:spAutoFit/>
-          </a:bodyPr>
-          <a:lstStyle/>
-          <a:p>
-            <a:pPr algn="l">
-              <a:spcAft>
-                <a:spcPts val="200"/>
-              </a:spcAft>
-            </a:pPr>
-            <a:r>
-              <a:rPr sz="1000" b="1">
-                <a:solidFill>
-                  <a:srgbClr val="0099D6"/>
-                </a:solidFill>
-              </a:rPr>
-              <a:t>@DEFERRED</a:t>
-            </a:r>
-          </a:p>
-          <a:p>
-            <a:pPr algn="l">
-              <a:spcAft>
-                <a:spcPts val="0"/>
-              </a:spcAft>
-            </a:pPr>
-            <a:r>
-              <a:rPr sz="800" b="0">
-                <a:solidFill>
-                  <a:srgbClr val="AAAAAA"/>
-                </a:solidFill>
-              </a:rPr>
-              <a:t>Injected by pipeline when VC is scoped to a future release.</a:t>
-            </a:r>
-          </a:p>
-        </p:txBody>
-      </p:sp>
-      <p:sp>
-        <p:nvSpPr>
-          <p:cNvPr id="13" name="TextBox 12"/>
+                  <a:srgbClr val="888888"/>
+                </a:solidFill>
+              </a:rPr>
+              <a:t>Technology Stack:  GitHub Actions • JSON Schema • Python • Behave • Gherkin • Helm • Kubernetes</a:t>
+            </a:r>
+          </a:p>
+        </p:txBody>
+      </p:sp>
+      <p:sp>
+        <p:nvSpPr>
+          <p:cNvPr id="28" name="TextBox 27"/>
           <p:cNvSpPr txBox="1"/>
           <p:nvPr/>
         </p:nvSpPr>
@@ -12263,7 +11732,7 @@
                   <a:srgbClr val="888888"/>
                 </a:solidFill>
               </a:rPr>
-              <a:t>8 / 12</a:t>
+              <a:t>8 / 11</a:t>
             </a:r>
           </a:p>
         </p:txBody>
@@ -12302,7 +11771,7 @@
         </p:nvSpPr>
         <p:spPr>
           <a:xfrm>
-            <a:off x="731520" y="457200"/>
+            <a:off x="731520" y="365760"/>
             <a:ext cx="10058400" cy="457200"/>
           </a:xfrm>
           <a:prstGeom prst="rect">
@@ -12327,7 +11796,7 @@
                   <a:srgbClr val="0D1B2A"/>
                 </a:solidFill>
               </a:rPr>
-              <a:t>CI/CD Pipeline Stages</a:t>
+              <a:t>Cyber: Supply Chain Security</a:t>
             </a:r>
           </a:p>
         </p:txBody>
@@ -12340,7 +11809,45 @@
         </p:nvSpPr>
         <p:spPr>
           <a:xfrm>
-            <a:off x="731520" y="1188720"/>
+            <a:off x="731520" y="868680"/>
+            <a:ext cx="9144000" cy="320040"/>
+          </a:xfrm>
+          <a:prstGeom prst="rect">
+            <a:avLst/>
+          </a:prstGeom>
+          <a:noFill/>
+        </p:spPr>
+        <p:txBody>
+          <a:bodyPr wrap="square">
+            <a:spAutoFit/>
+          </a:bodyPr>
+          <a:lstStyle/>
+          <a:p>
+            <a:pPr algn="l">
+              <a:spcAft>
+                <a:spcPts val="0"/>
+              </a:spcAft>
+            </a:pPr>
+            <a:r>
+              <a:rPr sz="1100" b="0">
+                <a:solidFill>
+                  <a:srgbClr val="555555"/>
+                </a:solidFill>
+              </a:rPr>
+              <a:t>Every container image is scanned for known vulnerabilities before deployment. A full Software Bill of Materials is generated on every build.</a:t>
+            </a:r>
+          </a:p>
+        </p:txBody>
+      </p:sp>
+      <p:sp>
+        <p:nvSpPr>
+          <p:cNvPr id="4" name="TextBox 3"/>
+          <p:cNvSpPr txBox="1"/>
+          <p:nvPr/>
+        </p:nvSpPr>
+        <p:spPr>
+          <a:xfrm>
+            <a:off x="731520" y="1463040"/>
             <a:ext cx="4572000" cy="274320"/>
           </a:xfrm>
           <a:prstGeom prst="rect">
@@ -12360,26 +11867,115 @@
               </a:spcAft>
             </a:pPr>
             <a:r>
-              <a:rPr sz="1200" b="1">
+              <a:rPr sz="1400" b="1">
                 <a:solidFill>
                   <a:srgbClr val="0D1B2A"/>
                 </a:solidFill>
               </a:rPr>
-              <a:t>Repo 1: Model Pipeline (on every push)</a:t>
-            </a:r>
-          </a:p>
-        </p:txBody>
-      </p:sp>
-      <p:sp>
-        <p:nvSpPr>
-          <p:cNvPr id="4" name="Rounded Rectangle 3"/>
+              <a:t>Automated Scanning Pipeline</a:t>
+            </a:r>
+          </a:p>
+        </p:txBody>
+      </p:sp>
+      <p:sp>
+        <p:nvSpPr>
+          <p:cNvPr id="5" name="Rounded Rectangle 4"/>
           <p:cNvSpPr/>
           <p:nvPr/>
         </p:nvSpPr>
         <p:spPr>
           <a:xfrm>
-            <a:off x="457200" y="1645920"/>
-            <a:ext cx="2011680" cy="731520"/>
+            <a:off x="457200" y="1828800"/>
+            <a:ext cx="5303520" cy="502920"/>
+          </a:xfrm>
+          <a:prstGeom prst="roundRect">
+            <a:avLst/>
+          </a:prstGeom>
+          <a:solidFill>
+            <a:srgbClr val="888888"/>
+          </a:solidFill>
+          <a:ln>
+            <a:noFill/>
+          </a:ln>
+        </p:spPr>
+        <p:style>
+          <a:lnRef idx="1">
+            <a:schemeClr val="accent1"/>
+          </a:lnRef>
+          <a:fillRef idx="3">
+            <a:schemeClr val="accent1"/>
+          </a:fillRef>
+          <a:effectRef idx="2">
+            <a:schemeClr val="accent1"/>
+          </a:effectRef>
+          <a:fontRef idx="minor">
+            <a:schemeClr val="lt1"/>
+          </a:fontRef>
+        </p:style>
+        <p:txBody>
+          <a:bodyPr rtlCol="0" anchor="ctr"/>
+          <a:lstStyle/>
+          <a:p>
+            <a:pPr algn="ctr"/>
+          </a:p>
+        </p:txBody>
+      </p:sp>
+      <p:sp>
+        <p:nvSpPr>
+          <p:cNvPr id="6" name="TextBox 5"/>
+          <p:cNvSpPr txBox="1"/>
+          <p:nvPr/>
+        </p:nvSpPr>
+        <p:spPr>
+          <a:xfrm>
+            <a:off x="548640" y="1874520"/>
+            <a:ext cx="5120640" cy="411480"/>
+          </a:xfrm>
+          <a:prstGeom prst="rect">
+            <a:avLst/>
+          </a:prstGeom>
+          <a:noFill/>
+        </p:spPr>
+        <p:txBody>
+          <a:bodyPr wrap="square">
+            <a:spAutoFit/>
+          </a:bodyPr>
+          <a:lstStyle/>
+          <a:p>
+            <a:pPr algn="l">
+              <a:spcAft>
+                <a:spcPts val="0"/>
+              </a:spcAft>
+            </a:pPr>
+            <a:r>
+              <a:rPr sz="1000" b="1">
+                <a:solidFill>
+                  <a:srgbClr val="FFFFFF"/>
+                </a:solidFill>
+              </a:rPr>
+              <a:t>Container Image</a:t>
+            </a:r>
+            <a:r>
+              <a:rPr sz="800" b="0">
+                <a:solidFill>
+                  <a:srgbClr val="BBBBBB"/>
+                </a:solidFill>
+              </a:rPr>
+              <a:t>  —  Product containers built by CI/CD</a:t>
+            </a:r>
+          </a:p>
+        </p:txBody>
+      </p:sp>
+      <p:sp>
+        <p:nvSpPr>
+          <p:cNvPr id="7" name="Rounded Rectangle 6"/>
+          <p:cNvSpPr/>
+          <p:nvPr/>
+        </p:nvSpPr>
+        <p:spPr>
+          <a:xfrm>
+            <a:off x="457200" y="2395728"/>
+            <a:ext cx="5303520" cy="502920"/>
           </a:xfrm>
           <a:prstGeom prst="roundRect">
             <a:avLst/>
@@ -12415,74 +12011,66 @@
       </p:sp>
       <p:sp>
         <p:nvSpPr>
-          <p:cNvPr id="5" name="TextBox 4"/>
-          <p:cNvSpPr txBox="1"/>
-          <p:nvPr/>
-        </p:nvSpPr>
-        <p:spPr>
-          <a:xfrm>
-            <a:off x="548640" y="1719072"/>
-            <a:ext cx="1828800" cy="640080"/>
-          </a:xfrm>
-          <a:prstGeom prst="rect">
-            <a:avLst/>
-          </a:prstGeom>
-          <a:noFill/>
-        </p:spPr>
-        <p:txBody>
-          <a:bodyPr wrap="square">
-            <a:spAutoFit/>
-          </a:bodyPr>
-          <a:lstStyle/>
-          <a:p>
-            <a:pPr algn="l">
-              <a:spcAft>
-                <a:spcPts val="100"/>
-              </a:spcAft>
-            </a:pPr>
-            <a:r>
-              <a:rPr sz="900" b="1">
+          <p:cNvPr id="8" name="TextBox 7"/>
+          <p:cNvSpPr txBox="1"/>
+          <p:nvPr/>
+        </p:nvSpPr>
+        <p:spPr>
+          <a:xfrm>
+            <a:off x="548640" y="2441448"/>
+            <a:ext cx="5120640" cy="411480"/>
+          </a:xfrm>
+          <a:prstGeom prst="rect">
+            <a:avLst/>
+          </a:prstGeom>
+          <a:noFill/>
+        </p:spPr>
+        <p:txBody>
+          <a:bodyPr wrap="square">
+            <a:spAutoFit/>
+          </a:bodyPr>
+          <a:lstStyle/>
+          <a:p>
+            <a:pPr algn="l">
+              <a:spcAft>
+                <a:spcPts val="0"/>
+              </a:spcAft>
+            </a:pPr>
+            <a:r>
+              <a:rPr sz="1000" b="1">
                 <a:solidFill>
                   <a:srgbClr val="FFFFFF"/>
                 </a:solidFill>
               </a:rPr>
-              <a:t>Validate
-Exports</a:t>
-            </a:r>
-          </a:p>
-          <a:p>
-            <a:pPr algn="l">
-              <a:spcAft>
-                <a:spcPts val="0"/>
-              </a:spcAft>
-            </a:pPr>
-            <a:r>
-              <a:rPr sz="700" b="0">
+              <a:t>Syft → SBOM</a:t>
+            </a:r>
+            <a:r>
+              <a:rPr sz="800" b="0">
                 <a:solidFill>
                   <a:srgbClr val="BBBBBB"/>
                 </a:solidFill>
               </a:rPr>
-              <a:t/>
-            </a:r>
-          </a:p>
-        </p:txBody>
-      </p:sp>
-      <p:sp>
-        <p:nvSpPr>
-          <p:cNvPr id="6" name="Rounded Rectangle 5"/>
+              <a:t>  —  Generates CycloneDX Software Bill of Materials</a:t>
+            </a:r>
+          </a:p>
+        </p:txBody>
+      </p:sp>
+      <p:sp>
+        <p:nvSpPr>
+          <p:cNvPr id="9" name="Rounded Rectangle 8"/>
           <p:cNvSpPr/>
           <p:nvPr/>
         </p:nvSpPr>
         <p:spPr>
           <a:xfrm>
-            <a:off x="2606040" y="1645920"/>
-            <a:ext cx="2011680" cy="731520"/>
+            <a:off x="457200" y="2962656"/>
+            <a:ext cx="5303520" cy="502920"/>
           </a:xfrm>
           <a:prstGeom prst="roundRect">
             <a:avLst/>
           </a:prstGeom>
           <a:solidFill>
-            <a:srgbClr val="0069B0"/>
+            <a:srgbClr val="0082CC"/>
           </a:solidFill>
           <a:ln>
             <a:noFill/>
@@ -12512,494 +12100,60 @@
       </p:sp>
       <p:sp>
         <p:nvSpPr>
-          <p:cNvPr id="7" name="TextBox 6"/>
-          <p:cNvSpPr txBox="1"/>
-          <p:nvPr/>
-        </p:nvSpPr>
-        <p:spPr>
-          <a:xfrm>
-            <a:off x="2697480" y="1719072"/>
-            <a:ext cx="1828800" cy="640080"/>
-          </a:xfrm>
-          <a:prstGeom prst="rect">
-            <a:avLst/>
-          </a:prstGeom>
-          <a:noFill/>
-        </p:spPr>
-        <p:txBody>
-          <a:bodyPr wrap="square">
-            <a:spAutoFit/>
-          </a:bodyPr>
-          <a:lstStyle/>
-          <a:p>
-            <a:pPr algn="l">
-              <a:spcAft>
-                <a:spcPts val="100"/>
-              </a:spcAft>
-            </a:pPr>
-            <a:r>
-              <a:rPr sz="900" b="1">
+          <p:cNvPr id="10" name="TextBox 9"/>
+          <p:cNvSpPr txBox="1"/>
+          <p:nvPr/>
+        </p:nvSpPr>
+        <p:spPr>
+          <a:xfrm>
+            <a:off x="548640" y="3008376"/>
+            <a:ext cx="5120640" cy="411480"/>
+          </a:xfrm>
+          <a:prstGeom prst="rect">
+            <a:avLst/>
+          </a:prstGeom>
+          <a:noFill/>
+        </p:spPr>
+        <p:txBody>
+          <a:bodyPr wrap="square">
+            <a:spAutoFit/>
+          </a:bodyPr>
+          <a:lstStyle/>
+          <a:p>
+            <a:pPr algn="l">
+              <a:spcAft>
+                <a:spcPts val="0"/>
+              </a:spcAft>
+            </a:pPr>
+            <a:r>
+              <a:rPr sz="1000" b="1">
                 <a:solidFill>
                   <a:srgbClr val="FFFFFF"/>
                 </a:solidFill>
               </a:rPr>
-              <a:t>Schema
-Check</a:t>
-            </a:r>
-          </a:p>
-          <a:p>
-            <a:pPr algn="l">
-              <a:spcAft>
-                <a:spcPts val="0"/>
-              </a:spcAft>
-            </a:pPr>
-            <a:r>
-              <a:rPr sz="700" b="0">
+              <a:t>Grype → Scan</a:t>
+            </a:r>
+            <a:r>
+              <a:rPr sz="800" b="0">
                 <a:solidFill>
                   <a:srgbClr val="BBBBBB"/>
                 </a:solidFill>
               </a:rPr>
-              <a:t/>
-            </a:r>
-          </a:p>
-        </p:txBody>
-      </p:sp>
-      <p:sp>
-        <p:nvSpPr>
-          <p:cNvPr id="8" name="Rounded Rectangle 7"/>
+              <a:t>  —  Scans SBOM against known vulnerability databases</a:t>
+            </a:r>
+          </a:p>
+        </p:txBody>
+      </p:sp>
+      <p:sp>
+        <p:nvSpPr>
+          <p:cNvPr id="11" name="Rounded Rectangle 10"/>
           <p:cNvSpPr/>
           <p:nvPr/>
         </p:nvSpPr>
         <p:spPr>
           <a:xfrm>
-            <a:off x="4754880" y="1645920"/>
-            <a:ext cx="2011680" cy="731520"/>
-          </a:xfrm>
-          <a:prstGeom prst="roundRect">
-            <a:avLst/>
-          </a:prstGeom>
-          <a:solidFill>
-            <a:srgbClr val="0069B0"/>
-          </a:solidFill>
-          <a:ln>
-            <a:noFill/>
-          </a:ln>
-        </p:spPr>
-        <p:style>
-          <a:lnRef idx="1">
-            <a:schemeClr val="accent1"/>
-          </a:lnRef>
-          <a:fillRef idx="3">
-            <a:schemeClr val="accent1"/>
-          </a:fillRef>
-          <a:effectRef idx="2">
-            <a:schemeClr val="accent1"/>
-          </a:effectRef>
-          <a:fontRef idx="minor">
-            <a:schemeClr val="lt1"/>
-          </a:fontRef>
-        </p:style>
-        <p:txBody>
-          <a:bodyPr rtlCol="0" anchor="ctr"/>
-          <a:lstStyle/>
-          <a:p>
-            <a:pPr algn="ctr"/>
-          </a:p>
-        </p:txBody>
-      </p:sp>
-      <p:sp>
-        <p:nvSpPr>
-          <p:cNvPr id="9" name="TextBox 8"/>
-          <p:cNvSpPr txBox="1"/>
-          <p:nvPr/>
-        </p:nvSpPr>
-        <p:spPr>
-          <a:xfrm>
-            <a:off x="4846320" y="1719072"/>
-            <a:ext cx="1828800" cy="640080"/>
-          </a:xfrm>
-          <a:prstGeom prst="rect">
-            <a:avLst/>
-          </a:prstGeom>
-          <a:noFill/>
-        </p:spPr>
-        <p:txBody>
-          <a:bodyPr wrap="square">
-            <a:spAutoFit/>
-          </a:bodyPr>
-          <a:lstStyle/>
-          <a:p>
-            <a:pPr algn="l">
-              <a:spcAft>
-                <a:spcPts val="100"/>
-              </a:spcAft>
-            </a:pPr>
-            <a:r>
-              <a:rPr sz="900" b="1">
-                <a:solidFill>
-                  <a:srgbClr val="FFFFFF"/>
-                </a:solidFill>
-              </a:rPr>
-              <a:t>Generate
-Protos</a:t>
-            </a:r>
-          </a:p>
-          <a:p>
-            <a:pPr algn="l">
-              <a:spcAft>
-                <a:spcPts val="0"/>
-              </a:spcAft>
-            </a:pPr>
-            <a:r>
-              <a:rPr sz="700" b="0">
-                <a:solidFill>
-                  <a:srgbClr val="BBBBBB"/>
-                </a:solidFill>
-              </a:rPr>
-              <a:t/>
-            </a:r>
-          </a:p>
-        </p:txBody>
-      </p:sp>
-      <p:sp>
-        <p:nvSpPr>
-          <p:cNvPr id="10" name="Rounded Rectangle 9"/>
-          <p:cNvSpPr/>
-          <p:nvPr/>
-        </p:nvSpPr>
-        <p:spPr>
-          <a:xfrm>
-            <a:off x="6903720" y="1645920"/>
-            <a:ext cx="2011680" cy="731520"/>
-          </a:xfrm>
-          <a:prstGeom prst="roundRect">
-            <a:avLst/>
-          </a:prstGeom>
-          <a:solidFill>
-            <a:srgbClr val="0069B0"/>
-          </a:solidFill>
-          <a:ln>
-            <a:noFill/>
-          </a:ln>
-        </p:spPr>
-        <p:style>
-          <a:lnRef idx="1">
-            <a:schemeClr val="accent1"/>
-          </a:lnRef>
-          <a:fillRef idx="3">
-            <a:schemeClr val="accent1"/>
-          </a:fillRef>
-          <a:effectRef idx="2">
-            <a:schemeClr val="accent1"/>
-          </a:effectRef>
-          <a:fontRef idx="minor">
-            <a:schemeClr val="lt1"/>
-          </a:fontRef>
-        </p:style>
-        <p:txBody>
-          <a:bodyPr rtlCol="0" anchor="ctr"/>
-          <a:lstStyle/>
-          <a:p>
-            <a:pPr algn="ctr"/>
-          </a:p>
-        </p:txBody>
-      </p:sp>
-      <p:sp>
-        <p:nvSpPr>
-          <p:cNvPr id="11" name="TextBox 10"/>
-          <p:cNvSpPr txBox="1"/>
-          <p:nvPr/>
-        </p:nvSpPr>
-        <p:spPr>
-          <a:xfrm>
-            <a:off x="6995160" y="1719072"/>
-            <a:ext cx="1828800" cy="640080"/>
-          </a:xfrm>
-          <a:prstGeom prst="rect">
-            <a:avLst/>
-          </a:prstGeom>
-          <a:noFill/>
-        </p:spPr>
-        <p:txBody>
-          <a:bodyPr wrap="square">
-            <a:spAutoFit/>
-          </a:bodyPr>
-          <a:lstStyle/>
-          <a:p>
-            <a:pPr algn="l">
-              <a:spcAft>
-                <a:spcPts val="100"/>
-              </a:spcAft>
-            </a:pPr>
-            <a:r>
-              <a:rPr sz="900" b="1">
-                <a:solidFill>
-                  <a:srgbClr val="FFFFFF"/>
-                </a:solidFill>
-              </a:rPr>
-              <a:t>Package
-Artifact</a:t>
-            </a:r>
-          </a:p>
-          <a:p>
-            <a:pPr algn="l">
-              <a:spcAft>
-                <a:spcPts val="0"/>
-              </a:spcAft>
-            </a:pPr>
-            <a:r>
-              <a:rPr sz="700" b="0">
-                <a:solidFill>
-                  <a:srgbClr val="BBBBBB"/>
-                </a:solidFill>
-              </a:rPr>
-              <a:t/>
-            </a:r>
-          </a:p>
-        </p:txBody>
-      </p:sp>
-      <p:sp>
-        <p:nvSpPr>
-          <p:cNvPr id="12" name="Rounded Rectangle 11"/>
-          <p:cNvSpPr/>
-          <p:nvPr/>
-        </p:nvSpPr>
-        <p:spPr>
-          <a:xfrm>
-            <a:off x="9052560" y="1645920"/>
-            <a:ext cx="2011680" cy="731520"/>
-          </a:xfrm>
-          <a:prstGeom prst="roundRect">
-            <a:avLst/>
-          </a:prstGeom>
-          <a:solidFill>
-            <a:srgbClr val="0069B0"/>
-          </a:solidFill>
-          <a:ln>
-            <a:noFill/>
-          </a:ln>
-        </p:spPr>
-        <p:style>
-          <a:lnRef idx="1">
-            <a:schemeClr val="accent1"/>
-          </a:lnRef>
-          <a:fillRef idx="3">
-            <a:schemeClr val="accent1"/>
-          </a:fillRef>
-          <a:effectRef idx="2">
-            <a:schemeClr val="accent1"/>
-          </a:effectRef>
-          <a:fontRef idx="minor">
-            <a:schemeClr val="lt1"/>
-          </a:fontRef>
-        </p:style>
-        <p:txBody>
-          <a:bodyPr rtlCol="0" anchor="ctr"/>
-          <a:lstStyle/>
-          <a:p>
-            <a:pPr algn="ctr"/>
-          </a:p>
-        </p:txBody>
-      </p:sp>
-      <p:sp>
-        <p:nvSpPr>
-          <p:cNvPr id="13" name="TextBox 12"/>
-          <p:cNvSpPr txBox="1"/>
-          <p:nvPr/>
-        </p:nvSpPr>
-        <p:spPr>
-          <a:xfrm>
-            <a:off x="9144000" y="1719072"/>
-            <a:ext cx="1828800" cy="640080"/>
-          </a:xfrm>
-          <a:prstGeom prst="rect">
-            <a:avLst/>
-          </a:prstGeom>
-          <a:noFill/>
-        </p:spPr>
-        <p:txBody>
-          <a:bodyPr wrap="square">
-            <a:spAutoFit/>
-          </a:bodyPr>
-          <a:lstStyle/>
-          <a:p>
-            <a:pPr algn="l">
-              <a:spcAft>
-                <a:spcPts val="100"/>
-              </a:spcAft>
-            </a:pPr>
-            <a:r>
-              <a:rPr sz="900" b="1">
-                <a:solidFill>
-                  <a:srgbClr val="FFFFFF"/>
-                </a:solidFill>
-              </a:rPr>
-              <a:t>Tag &amp;
-Release</a:t>
-            </a:r>
-          </a:p>
-          <a:p>
-            <a:pPr algn="l">
-              <a:spcAft>
-                <a:spcPts val="0"/>
-              </a:spcAft>
-            </a:pPr>
-            <a:r>
-              <a:rPr sz="700" b="0">
-                <a:solidFill>
-                  <a:srgbClr val="BBBBBB"/>
-                </a:solidFill>
-              </a:rPr>
-              <a:t/>
-            </a:r>
-          </a:p>
-        </p:txBody>
-      </p:sp>
-      <p:sp>
-        <p:nvSpPr>
-          <p:cNvPr id="14" name="TextBox 13"/>
-          <p:cNvSpPr txBox="1"/>
-          <p:nvPr/>
-        </p:nvSpPr>
-        <p:spPr>
-          <a:xfrm>
-            <a:off x="731520" y="2926080"/>
-            <a:ext cx="4572000" cy="274320"/>
-          </a:xfrm>
-          <a:prstGeom prst="rect">
-            <a:avLst/>
-          </a:prstGeom>
-          <a:noFill/>
-        </p:spPr>
-        <p:txBody>
-          <a:bodyPr wrap="square">
-            <a:spAutoFit/>
-          </a:bodyPr>
-          <a:lstStyle/>
-          <a:p>
-            <a:pPr algn="l">
-              <a:spcAft>
-                <a:spcPts val="0"/>
-              </a:spcAft>
-            </a:pPr>
-            <a:r>
-              <a:rPr sz="1200" b="1">
-                <a:solidFill>
-                  <a:srgbClr val="0D1B2A"/>
-                </a:solidFill>
-              </a:rPr>
-              <a:t>Repo 2: Product Pipeline (on every push)</a:t>
-            </a:r>
-          </a:p>
-        </p:txBody>
-      </p:sp>
-      <p:sp>
-        <p:nvSpPr>
-          <p:cNvPr id="15" name="Rounded Rectangle 14"/>
-          <p:cNvSpPr/>
-          <p:nvPr/>
-        </p:nvSpPr>
-        <p:spPr>
-          <a:xfrm>
-            <a:off x="274320" y="3383280"/>
-            <a:ext cx="1737360" cy="731520"/>
-          </a:xfrm>
-          <a:prstGeom prst="roundRect">
-            <a:avLst/>
-          </a:prstGeom>
-          <a:solidFill>
-            <a:srgbClr val="0069B0"/>
-          </a:solidFill>
-          <a:ln>
-            <a:noFill/>
-          </a:ln>
-        </p:spPr>
-        <p:style>
-          <a:lnRef idx="1">
-            <a:schemeClr val="accent1"/>
-          </a:lnRef>
-          <a:fillRef idx="3">
-            <a:schemeClr val="accent1"/>
-          </a:fillRef>
-          <a:effectRef idx="2">
-            <a:schemeClr val="accent1"/>
-          </a:effectRef>
-          <a:fontRef idx="minor">
-            <a:schemeClr val="lt1"/>
-          </a:fontRef>
-        </p:style>
-        <p:txBody>
-          <a:bodyPr rtlCol="0" anchor="ctr"/>
-          <a:lstStyle/>
-          <a:p>
-            <a:pPr algn="ctr"/>
-          </a:p>
-        </p:txBody>
-      </p:sp>
-      <p:sp>
-        <p:nvSpPr>
-          <p:cNvPr id="16" name="TextBox 15"/>
-          <p:cNvSpPr txBox="1"/>
-          <p:nvPr/>
-        </p:nvSpPr>
-        <p:spPr>
-          <a:xfrm>
-            <a:off x="365760" y="3456432"/>
-            <a:ext cx="1554480" cy="640080"/>
-          </a:xfrm>
-          <a:prstGeom prst="rect">
-            <a:avLst/>
-          </a:prstGeom>
-          <a:noFill/>
-        </p:spPr>
-        <p:txBody>
-          <a:bodyPr wrap="square">
-            <a:spAutoFit/>
-          </a:bodyPr>
-          <a:lstStyle/>
-          <a:p>
-            <a:pPr algn="l">
-              <a:spcAft>
-                <a:spcPts val="100"/>
-              </a:spcAft>
-            </a:pPr>
-            <a:r>
-              <a:rPr sz="900" b="1">
-                <a:solidFill>
-                  <a:srgbClr val="FFFFFF"/>
-                </a:solidFill>
-              </a:rPr>
-              <a:t>Traceability
-Check</a:t>
-            </a:r>
-          </a:p>
-          <a:p>
-            <a:pPr algn="l">
-              <a:spcAft>
-                <a:spcPts val="0"/>
-              </a:spcAft>
-            </a:pPr>
-            <a:r>
-              <a:rPr sz="700" b="0">
-                <a:solidFill>
-                  <a:srgbClr val="BBBBBB"/>
-                </a:solidFill>
-              </a:rPr>
-              <a:t/>
-            </a:r>
-          </a:p>
-        </p:txBody>
-      </p:sp>
-      <p:sp>
-        <p:nvSpPr>
-          <p:cNvPr id="17" name="Rounded Rectangle 16"/>
-          <p:cNvSpPr/>
-          <p:nvPr/>
-        </p:nvSpPr>
-        <p:spPr>
-          <a:xfrm>
-            <a:off x="2103120" y="3383280"/>
-            <a:ext cx="1737360" cy="731520"/>
+            <a:off x="457200" y="3529584"/>
+            <a:ext cx="5303520" cy="502920"/>
           </a:xfrm>
           <a:prstGeom prst="roundRect">
             <a:avLst/>
@@ -13035,77 +12189,293 @@
       </p:sp>
       <p:sp>
         <p:nvSpPr>
-          <p:cNvPr id="18" name="TextBox 17"/>
-          <p:cNvSpPr txBox="1"/>
-          <p:nvPr/>
-        </p:nvSpPr>
-        <p:spPr>
-          <a:xfrm>
-            <a:off x="2194560" y="3456432"/>
-            <a:ext cx="1554480" cy="640080"/>
-          </a:xfrm>
-          <a:prstGeom prst="rect">
-            <a:avLst/>
-          </a:prstGeom>
-          <a:noFill/>
-        </p:spPr>
-        <p:txBody>
-          <a:bodyPr wrap="square">
-            <a:spAutoFit/>
-          </a:bodyPr>
-          <a:lstStyle/>
-          <a:p>
-            <a:pPr algn="l">
-              <a:spcAft>
-                <a:spcPts val="100"/>
-              </a:spcAft>
-            </a:pPr>
-            <a:r>
-              <a:rPr sz="900" b="1">
+          <p:cNvPr id="12" name="TextBox 11"/>
+          <p:cNvSpPr txBox="1"/>
+          <p:nvPr/>
+        </p:nvSpPr>
+        <p:spPr>
+          <a:xfrm>
+            <a:off x="548640" y="3575304"/>
+            <a:ext cx="5120640" cy="411480"/>
+          </a:xfrm>
+          <a:prstGeom prst="rect">
+            <a:avLst/>
+          </a:prstGeom>
+          <a:noFill/>
+        </p:spPr>
+        <p:txBody>
+          <a:bodyPr wrap="square">
+            <a:spAutoFit/>
+          </a:bodyPr>
+          <a:lstStyle/>
+          <a:p>
+            <a:pPr algn="l">
+              <a:spcAft>
+                <a:spcPts val="0"/>
+              </a:spcAft>
+            </a:pPr>
+            <a:r>
+              <a:rPr sz="1000" b="1">
                 <a:solidFill>
                   <a:srgbClr val="FFFFFF"/>
                 </a:solidFill>
               </a:rPr>
-              <a:t>Gate A
-Coverage</a:t>
-            </a:r>
-          </a:p>
-          <a:p>
-            <a:pPr algn="l">
-              <a:spcAft>
-                <a:spcPts val="0"/>
-              </a:spcAft>
-            </a:pPr>
-            <a:r>
-              <a:rPr sz="700" b="0">
+              <a:t>Policy Gate</a:t>
+            </a:r>
+            <a:r>
+              <a:rPr sz="800" b="0">
                 <a:solidFill>
                   <a:srgbClr val="BBBBBB"/>
                 </a:solidFill>
               </a:rPr>
-              <a:t/>
-            </a:r>
-          </a:p>
-        </p:txBody>
-      </p:sp>
-      <p:sp>
-        <p:nvSpPr>
-          <p:cNvPr id="19" name="Rounded Rectangle 18"/>
+              <a:t>  —  PASS / WARNING / FAIL based on severity thresholds</a:t>
+            </a:r>
+          </a:p>
+        </p:txBody>
+      </p:sp>
+      <p:sp>
+        <p:nvSpPr>
+          <p:cNvPr id="13" name="TextBox 12"/>
+          <p:cNvSpPr txBox="1"/>
+          <p:nvPr/>
+        </p:nvSpPr>
+        <p:spPr>
+          <a:xfrm>
+            <a:off x="731520" y="4206240"/>
+            <a:ext cx="5029200" cy="274320"/>
+          </a:xfrm>
+          <a:prstGeom prst="rect">
+            <a:avLst/>
+          </a:prstGeom>
+          <a:noFill/>
+        </p:spPr>
+        <p:txBody>
+          <a:bodyPr wrap="square">
+            <a:spAutoFit/>
+          </a:bodyPr>
+          <a:lstStyle/>
+          <a:p>
+            <a:pPr algn="l">
+              <a:spcAft>
+                <a:spcPts val="0"/>
+              </a:spcAft>
+            </a:pPr>
+            <a:r>
+              <a:rPr sz="1400" b="1">
+                <a:solidFill>
+                  <a:srgbClr val="0D1B2A"/>
+                </a:solidFill>
+              </a:rPr>
+              <a:t>What Gets Produced</a:t>
+            </a:r>
+          </a:p>
+        </p:txBody>
+      </p:sp>
+      <p:sp>
+        <p:nvSpPr>
+          <p:cNvPr id="14" name="TextBox 13"/>
+          <p:cNvSpPr txBox="1"/>
+          <p:nvPr/>
+        </p:nvSpPr>
+        <p:spPr>
+          <a:xfrm>
+            <a:off x="731520" y="4572000"/>
+            <a:ext cx="5029200" cy="320040"/>
+          </a:xfrm>
+          <a:prstGeom prst="rect">
+            <a:avLst/>
+          </a:prstGeom>
+          <a:noFill/>
+        </p:spPr>
+        <p:txBody>
+          <a:bodyPr wrap="square">
+            <a:spAutoFit/>
+          </a:bodyPr>
+          <a:lstStyle/>
+          <a:p>
+            <a:pPr algn="l">
+              <a:spcAft>
+                <a:spcPts val="0"/>
+              </a:spcAft>
+            </a:pPr>
+            <a:r>
+              <a:rPr sz="1000" b="1">
+                <a:solidFill>
+                  <a:srgbClr val="0069B0"/>
+                </a:solidFill>
+              </a:rPr>
+              <a:t>SBOM (CycloneDX)</a:t>
+            </a:r>
+            <a:r>
+              <a:rPr sz="900" b="0">
+                <a:solidFill>
+                  <a:srgbClr val="555555"/>
+                </a:solidFill>
+              </a:rPr>
+              <a:t>  —  Complete component inventory with versions and sources.</a:t>
+            </a:r>
+          </a:p>
+        </p:txBody>
+      </p:sp>
+      <p:sp>
+        <p:nvSpPr>
+          <p:cNvPr id="15" name="TextBox 14"/>
+          <p:cNvSpPr txBox="1"/>
+          <p:nvPr/>
+        </p:nvSpPr>
+        <p:spPr>
+          <a:xfrm>
+            <a:off x="731520" y="4919472"/>
+            <a:ext cx="5029200" cy="320040"/>
+          </a:xfrm>
+          <a:prstGeom prst="rect">
+            <a:avLst/>
+          </a:prstGeom>
+          <a:noFill/>
+        </p:spPr>
+        <p:txBody>
+          <a:bodyPr wrap="square">
+            <a:spAutoFit/>
+          </a:bodyPr>
+          <a:lstStyle/>
+          <a:p>
+            <a:pPr algn="l">
+              <a:spcAft>
+                <a:spcPts val="0"/>
+              </a:spcAft>
+            </a:pPr>
+            <a:r>
+              <a:rPr sz="1000" b="1">
+                <a:solidFill>
+                  <a:srgbClr val="0069B0"/>
+                </a:solidFill>
+              </a:rPr>
+              <a:t>Vulnerability Report</a:t>
+            </a:r>
+            <a:r>
+              <a:rPr sz="900" b="0">
+                <a:solidFill>
+                  <a:srgbClr val="555555"/>
+                </a:solidFill>
+              </a:rPr>
+              <a:t>  —  CVE-level findings with severity and fix availability.</a:t>
+            </a:r>
+          </a:p>
+        </p:txBody>
+      </p:sp>
+      <p:sp>
+        <p:nvSpPr>
+          <p:cNvPr id="16" name="TextBox 15"/>
+          <p:cNvSpPr txBox="1"/>
+          <p:nvPr/>
+        </p:nvSpPr>
+        <p:spPr>
+          <a:xfrm>
+            <a:off x="731520" y="5266944"/>
+            <a:ext cx="5029200" cy="320040"/>
+          </a:xfrm>
+          <a:prstGeom prst="rect">
+            <a:avLst/>
+          </a:prstGeom>
+          <a:noFill/>
+        </p:spPr>
+        <p:txBody>
+          <a:bodyPr wrap="square">
+            <a:spAutoFit/>
+          </a:bodyPr>
+          <a:lstStyle/>
+          <a:p>
+            <a:pPr algn="l">
+              <a:spcAft>
+                <a:spcPts val="0"/>
+              </a:spcAft>
+            </a:pPr>
+            <a:r>
+              <a:rPr sz="1000" b="1">
+                <a:solidFill>
+                  <a:srgbClr val="0069B0"/>
+                </a:solidFill>
+              </a:rPr>
+              <a:t>Policy Verdict</a:t>
+            </a:r>
+            <a:r>
+              <a:rPr sz="900" b="0">
+                <a:solidFill>
+                  <a:srgbClr val="555555"/>
+                </a:solidFill>
+              </a:rPr>
+              <a:t>  —  Blocks deployment on Critical/High findings.</a:t>
+            </a:r>
+          </a:p>
+        </p:txBody>
+      </p:sp>
+      <p:sp>
+        <p:nvSpPr>
+          <p:cNvPr id="17" name="TextBox 16"/>
+          <p:cNvSpPr txBox="1"/>
+          <p:nvPr/>
+        </p:nvSpPr>
+        <p:spPr>
+          <a:xfrm>
+            <a:off x="731520" y="5614416"/>
+            <a:ext cx="5029200" cy="320040"/>
+          </a:xfrm>
+          <a:prstGeom prst="rect">
+            <a:avLst/>
+          </a:prstGeom>
+          <a:noFill/>
+        </p:spPr>
+        <p:txBody>
+          <a:bodyPr wrap="square">
+            <a:spAutoFit/>
+          </a:bodyPr>
+          <a:lstStyle/>
+          <a:p>
+            <a:pPr algn="l">
+              <a:spcAft>
+                <a:spcPts val="0"/>
+              </a:spcAft>
+            </a:pPr>
+            <a:r>
+              <a:rPr sz="1000" b="1">
+                <a:solidFill>
+                  <a:srgbClr val="0069B0"/>
+                </a:solidFill>
+              </a:rPr>
+              <a:t>Severity Dashboard</a:t>
+            </a:r>
+            <a:r>
+              <a:rPr sz="900" b="0">
+                <a:solidFill>
+                  <a:srgbClr val="555555"/>
+                </a:solidFill>
+              </a:rPr>
+              <a:t>  —  Visual breakdown in the Deployment Pipeline Report.</a:t>
+            </a:r>
+          </a:p>
+        </p:txBody>
+      </p:sp>
+      <p:sp>
+        <p:nvSpPr>
+          <p:cNvPr id="18" name="Rounded Rectangle 17"/>
           <p:cNvSpPr/>
           <p:nvPr/>
         </p:nvSpPr>
         <p:spPr>
           <a:xfrm>
-            <a:off x="3931920" y="3383280"/>
-            <a:ext cx="1737360" cy="731520"/>
+            <a:off x="6217920" y="1371600"/>
+            <a:ext cx="5486400" cy="4572000"/>
           </a:xfrm>
           <a:prstGeom prst="roundRect">
             <a:avLst/>
           </a:prstGeom>
           <a:solidFill>
-            <a:srgbClr val="004A87"/>
+            <a:srgbClr val="F4F7FA"/>
           </a:solidFill>
-          <a:ln>
-            <a:noFill/>
+          <a:ln w="12700">
+            <a:solidFill>
+              <a:srgbClr val="D0E8F8"/>
+            </a:solidFill>
           </a:ln>
         </p:spPr>
         <p:style>
@@ -13132,77 +12502,328 @@
       </p:sp>
       <p:sp>
         <p:nvSpPr>
+          <p:cNvPr id="19" name="TextBox 18"/>
+          <p:cNvSpPr txBox="1"/>
+          <p:nvPr/>
+        </p:nvSpPr>
+        <p:spPr>
+          <a:xfrm>
+            <a:off x="6400800" y="1508760"/>
+            <a:ext cx="5120640" cy="274320"/>
+          </a:xfrm>
+          <a:prstGeom prst="rect">
+            <a:avLst/>
+          </a:prstGeom>
+          <a:noFill/>
+        </p:spPr>
+        <p:txBody>
+          <a:bodyPr wrap="square">
+            <a:spAutoFit/>
+          </a:bodyPr>
+          <a:lstStyle/>
+          <a:p>
+            <a:pPr algn="l">
+              <a:spcAft>
+                <a:spcPts val="0"/>
+              </a:spcAft>
+            </a:pPr>
+            <a:r>
+              <a:rPr sz="1400" b="1">
+                <a:solidFill>
+                  <a:srgbClr val="0D1B2A"/>
+                </a:solidFill>
+              </a:rPr>
+              <a:t>Why This Matters for Compliance</a:t>
+            </a:r>
+          </a:p>
+        </p:txBody>
+      </p:sp>
+      <p:sp>
+        <p:nvSpPr>
           <p:cNvPr id="20" name="TextBox 19"/>
           <p:cNvSpPr txBox="1"/>
           <p:nvPr/>
         </p:nvSpPr>
         <p:spPr>
           <a:xfrm>
-            <a:off x="4023360" y="3456432"/>
-            <a:ext cx="1554480" cy="640080"/>
-          </a:xfrm>
-          <a:prstGeom prst="rect">
-            <a:avLst/>
-          </a:prstGeom>
-          <a:noFill/>
-        </p:spPr>
-        <p:txBody>
-          <a:bodyPr wrap="square">
-            <a:spAutoFit/>
-          </a:bodyPr>
-          <a:lstStyle/>
-          <a:p>
-            <a:pPr algn="l">
-              <a:spcAft>
-                <a:spcPts val="100"/>
-              </a:spcAft>
-            </a:pPr>
-            <a:r>
-              <a:rPr sz="900" b="1">
-                <a:solidFill>
-                  <a:srgbClr val="FFFFFF"/>
-                </a:solidFill>
-              </a:rPr>
-              <a:t>Gate B
-Drift</a:t>
-            </a:r>
-          </a:p>
-          <a:p>
-            <a:pPr algn="l">
-              <a:spcAft>
-                <a:spcPts val="0"/>
-              </a:spcAft>
-            </a:pPr>
-            <a:r>
-              <a:rPr sz="700" b="0">
-                <a:solidFill>
-                  <a:srgbClr val="BBBBBB"/>
-                </a:solidFill>
-              </a:rPr>
-              <a:t/>
-            </a:r>
-          </a:p>
-        </p:txBody>
-      </p:sp>
-      <p:sp>
-        <p:nvSpPr>
-          <p:cNvPr id="21" name="Rounded Rectangle 20"/>
+            <a:off x="6400800" y="1965960"/>
+            <a:ext cx="5120640" cy="640080"/>
+          </a:xfrm>
+          <a:prstGeom prst="rect">
+            <a:avLst/>
+          </a:prstGeom>
+          <a:noFill/>
+        </p:spPr>
+        <p:txBody>
+          <a:bodyPr wrap="square">
+            <a:spAutoFit/>
+          </a:bodyPr>
+          <a:lstStyle/>
+          <a:p>
+            <a:pPr algn="l">
+              <a:spcAft>
+                <a:spcPts val="200"/>
+              </a:spcAft>
+            </a:pPr>
+            <a:r>
+              <a:rPr sz="1100" b="1">
+                <a:solidFill>
+                  <a:srgbClr val="0069B0"/>
+                </a:solidFill>
+              </a:rPr>
+              <a:t>Executive Order 14028</a:t>
+            </a:r>
+          </a:p>
+          <a:p>
+            <a:pPr algn="l">
+              <a:spcAft>
+                <a:spcPts val="0"/>
+              </a:spcAft>
+            </a:pPr>
+            <a:r>
+              <a:rPr sz="900" b="0">
+                <a:solidFill>
+                  <a:srgbClr val="555555"/>
+                </a:solidFill>
+              </a:rPr>
+              <a:t>Federal mandate requiring SBOMs for all software sold to the government.</a:t>
+            </a:r>
+          </a:p>
+        </p:txBody>
+      </p:sp>
+      <p:sp>
+        <p:nvSpPr>
+          <p:cNvPr id="21" name="TextBox 20"/>
+          <p:cNvSpPr txBox="1"/>
+          <p:nvPr/>
+        </p:nvSpPr>
+        <p:spPr>
+          <a:xfrm>
+            <a:off x="6400800" y="2606040"/>
+            <a:ext cx="5120640" cy="640080"/>
+          </a:xfrm>
+          <a:prstGeom prst="rect">
+            <a:avLst/>
+          </a:prstGeom>
+          <a:noFill/>
+        </p:spPr>
+        <p:txBody>
+          <a:bodyPr wrap="square">
+            <a:spAutoFit/>
+          </a:bodyPr>
+          <a:lstStyle/>
+          <a:p>
+            <a:pPr algn="l">
+              <a:spcAft>
+                <a:spcPts val="200"/>
+              </a:spcAft>
+            </a:pPr>
+            <a:r>
+              <a:rPr sz="1100" b="1">
+                <a:solidFill>
+                  <a:srgbClr val="0069B0"/>
+                </a:solidFill>
+              </a:rPr>
+              <a:t>NIST SP 800-218 (SSDF)</a:t>
+            </a:r>
+          </a:p>
+          <a:p>
+            <a:pPr algn="l">
+              <a:spcAft>
+                <a:spcPts val="0"/>
+              </a:spcAft>
+            </a:pPr>
+            <a:r>
+              <a:rPr sz="900" b="0">
+                <a:solidFill>
+                  <a:srgbClr val="555555"/>
+                </a:solidFill>
+              </a:rPr>
+              <a:t>Requires vulnerability scanning and remediation tracking per build.</a:t>
+            </a:r>
+          </a:p>
+        </p:txBody>
+      </p:sp>
+      <p:sp>
+        <p:nvSpPr>
+          <p:cNvPr id="22" name="TextBox 21"/>
+          <p:cNvSpPr txBox="1"/>
+          <p:nvPr/>
+        </p:nvSpPr>
+        <p:spPr>
+          <a:xfrm>
+            <a:off x="6400800" y="3246120"/>
+            <a:ext cx="5120640" cy="640080"/>
+          </a:xfrm>
+          <a:prstGeom prst="rect">
+            <a:avLst/>
+          </a:prstGeom>
+          <a:noFill/>
+        </p:spPr>
+        <p:txBody>
+          <a:bodyPr wrap="square">
+            <a:spAutoFit/>
+          </a:bodyPr>
+          <a:lstStyle/>
+          <a:p>
+            <a:pPr algn="l">
+              <a:spcAft>
+                <a:spcPts val="200"/>
+              </a:spcAft>
+            </a:pPr>
+            <a:r>
+              <a:rPr sz="1100" b="1">
+                <a:solidFill>
+                  <a:srgbClr val="0069B0"/>
+                </a:solidFill>
+              </a:rPr>
+              <a:t>Supply Chain Transparency</a:t>
+            </a:r>
+          </a:p>
+          <a:p>
+            <a:pPr algn="l">
+              <a:spcAft>
+                <a:spcPts val="0"/>
+              </a:spcAft>
+            </a:pPr>
+            <a:r>
+              <a:rPr sz="900" b="0">
+                <a:solidFill>
+                  <a:srgbClr val="555555"/>
+                </a:solidFill>
+              </a:rPr>
+              <a:t>Every component inventoried with name, version, type, and package URL.</a:t>
+            </a:r>
+          </a:p>
+        </p:txBody>
+      </p:sp>
+      <p:sp>
+        <p:nvSpPr>
+          <p:cNvPr id="23" name="TextBox 22"/>
+          <p:cNvSpPr txBox="1"/>
+          <p:nvPr/>
+        </p:nvSpPr>
+        <p:spPr>
+          <a:xfrm>
+            <a:off x="6400800" y="3886200"/>
+            <a:ext cx="5120640" cy="640080"/>
+          </a:xfrm>
+          <a:prstGeom prst="rect">
+            <a:avLst/>
+          </a:prstGeom>
+          <a:noFill/>
+        </p:spPr>
+        <p:txBody>
+          <a:bodyPr wrap="square">
+            <a:spAutoFit/>
+          </a:bodyPr>
+          <a:lstStyle/>
+          <a:p>
+            <a:pPr algn="l">
+              <a:spcAft>
+                <a:spcPts val="200"/>
+              </a:spcAft>
+            </a:pPr>
+            <a:r>
+              <a:rPr sz="1100" b="1">
+                <a:solidFill>
+                  <a:srgbClr val="0069B0"/>
+                </a:solidFill>
+              </a:rPr>
+              <a:t>Audit-Ready Evidence</a:t>
+            </a:r>
+          </a:p>
+          <a:p>
+            <a:pPr algn="l">
+              <a:spcAft>
+                <a:spcPts val="0"/>
+              </a:spcAft>
+            </a:pPr>
+            <a:r>
+              <a:rPr sz="900" b="0">
+                <a:solidFill>
+                  <a:srgbClr val="555555"/>
+                </a:solidFill>
+              </a:rPr>
+              <a:t>SBOM + scan results included in evidence bundle. No manual assembly.</a:t>
+            </a:r>
+          </a:p>
+        </p:txBody>
+      </p:sp>
+      <p:sp>
+        <p:nvSpPr>
+          <p:cNvPr id="24" name="TextBox 23"/>
+          <p:cNvSpPr txBox="1"/>
+          <p:nvPr/>
+        </p:nvSpPr>
+        <p:spPr>
+          <a:xfrm>
+            <a:off x="6400800" y="4526280"/>
+            <a:ext cx="5120640" cy="640080"/>
+          </a:xfrm>
+          <a:prstGeom prst="rect">
+            <a:avLst/>
+          </a:prstGeom>
+          <a:noFill/>
+        </p:spPr>
+        <p:txBody>
+          <a:bodyPr wrap="square">
+            <a:spAutoFit/>
+          </a:bodyPr>
+          <a:lstStyle/>
+          <a:p>
+            <a:pPr algn="l">
+              <a:spcAft>
+                <a:spcPts val="200"/>
+              </a:spcAft>
+            </a:pPr>
+            <a:r>
+              <a:rPr sz="1100" b="1">
+                <a:solidFill>
+                  <a:srgbClr val="0069B0"/>
+                </a:solidFill>
+              </a:rPr>
+              <a:t>Air-Gapped Compatible</a:t>
+            </a:r>
+          </a:p>
+          <a:p>
+            <a:pPr algn="l">
+              <a:spcAft>
+                <a:spcPts val="0"/>
+              </a:spcAft>
+            </a:pPr>
+            <a:r>
+              <a:rPr sz="900" b="0">
+                <a:solidFill>
+                  <a:srgbClr val="555555"/>
+                </a:solidFill>
+              </a:rPr>
+              <a:t>Grype DB mirrored internally. Syft runs against local images. No internet.</a:t>
+            </a:r>
+          </a:p>
+        </p:txBody>
+      </p:sp>
+      <p:sp>
+        <p:nvSpPr>
+          <p:cNvPr id="25" name="Rounded Rectangle 24"/>
           <p:cNvSpPr/>
           <p:nvPr/>
         </p:nvSpPr>
         <p:spPr>
           <a:xfrm>
-            <a:off x="5760720" y="3383280"/>
-            <a:ext cx="1737360" cy="731520"/>
+            <a:off x="457200" y="6126480"/>
+            <a:ext cx="11247120" cy="365760"/>
           </a:xfrm>
           <a:prstGeom prst="roundRect">
             <a:avLst/>
           </a:prstGeom>
           <a:solidFill>
-            <a:srgbClr val="004A87"/>
+            <a:srgbClr val="F4F7FA"/>
           </a:solidFill>
-          <a:ln>
-            <a:noFill/>
+          <a:ln w="12700">
+            <a:solidFill>
+              <a:srgbClr val="0069B0"/>
+            </a:solidFill>
           </a:ln>
         </p:spPr>
         <p:style>
@@ -13229,248 +12850,38 @@
       </p:sp>
       <p:sp>
         <p:nvSpPr>
-          <p:cNvPr id="22" name="TextBox 21"/>
-          <p:cNvSpPr txBox="1"/>
-          <p:nvPr/>
-        </p:nvSpPr>
-        <p:spPr>
-          <a:xfrm>
-            <a:off x="5852160" y="3456432"/>
-            <a:ext cx="1554480" cy="640080"/>
-          </a:xfrm>
-          <a:prstGeom prst="rect">
-            <a:avLst/>
-          </a:prstGeom>
-          <a:noFill/>
-        </p:spPr>
-        <p:txBody>
-          <a:bodyPr wrap="square">
-            <a:spAutoFit/>
-          </a:bodyPr>
-          <a:lstStyle/>
-          <a:p>
-            <a:pPr algn="l">
-              <a:spcAft>
-                <a:spcPts val="100"/>
-              </a:spcAft>
-            </a:pPr>
-            <a:r>
-              <a:rPr sz="900" b="1">
-                <a:solidFill>
-                  <a:srgbClr val="FFFFFF"/>
-                </a:solidFill>
-              </a:rPr>
-              <a:t>Gate C
-Orphans</a:t>
-            </a:r>
-          </a:p>
-          <a:p>
-            <a:pPr algn="l">
-              <a:spcAft>
-                <a:spcPts val="0"/>
-              </a:spcAft>
-            </a:pPr>
-            <a:r>
-              <a:rPr sz="700" b="0">
-                <a:solidFill>
-                  <a:srgbClr val="BBBBBB"/>
-                </a:solidFill>
-              </a:rPr>
-              <a:t/>
-            </a:r>
-          </a:p>
-        </p:txBody>
-      </p:sp>
-      <p:sp>
-        <p:nvSpPr>
-          <p:cNvPr id="23" name="Rounded Rectangle 22"/>
-          <p:cNvSpPr/>
-          <p:nvPr/>
-        </p:nvSpPr>
-        <p:spPr>
-          <a:xfrm>
-            <a:off x="7589520" y="3383280"/>
-            <a:ext cx="1737360" cy="731520"/>
-          </a:xfrm>
-          <a:prstGeom prst="roundRect">
-            <a:avLst/>
-          </a:prstGeom>
-          <a:solidFill>
-            <a:srgbClr val="0082CC"/>
-          </a:solidFill>
-          <a:ln>
-            <a:noFill/>
-          </a:ln>
-        </p:spPr>
-        <p:style>
-          <a:lnRef idx="1">
-            <a:schemeClr val="accent1"/>
-          </a:lnRef>
-          <a:fillRef idx="3">
-            <a:schemeClr val="accent1"/>
-          </a:fillRef>
-          <a:effectRef idx="2">
-            <a:schemeClr val="accent1"/>
-          </a:effectRef>
-          <a:fontRef idx="minor">
-            <a:schemeClr val="lt1"/>
-          </a:fontRef>
-        </p:style>
-        <p:txBody>
-          <a:bodyPr rtlCol="0" anchor="ctr"/>
-          <a:lstStyle/>
-          <a:p>
-            <a:pPr algn="ctr"/>
-          </a:p>
-        </p:txBody>
-      </p:sp>
-      <p:sp>
-        <p:nvSpPr>
-          <p:cNvPr id="24" name="TextBox 23"/>
-          <p:cNvSpPr txBox="1"/>
-          <p:nvPr/>
-        </p:nvSpPr>
-        <p:spPr>
-          <a:xfrm>
-            <a:off x="7680960" y="3456432"/>
-            <a:ext cx="1554480" cy="640080"/>
-          </a:xfrm>
-          <a:prstGeom prst="rect">
-            <a:avLst/>
-          </a:prstGeom>
-          <a:noFill/>
-        </p:spPr>
-        <p:txBody>
-          <a:bodyPr wrap="square">
-            <a:spAutoFit/>
-          </a:bodyPr>
-          <a:lstStyle/>
-          <a:p>
-            <a:pPr algn="l">
-              <a:spcAft>
-                <a:spcPts val="100"/>
-              </a:spcAft>
-            </a:pPr>
-            <a:r>
-              <a:rPr sz="900" b="1">
-                <a:solidFill>
-                  <a:srgbClr val="FFFFFF"/>
-                </a:solidFill>
-              </a:rPr>
-              <a:t>BDD Test
-Execution</a:t>
-            </a:r>
-          </a:p>
-          <a:p>
-            <a:pPr algn="l">
-              <a:spcAft>
-                <a:spcPts val="0"/>
-              </a:spcAft>
-            </a:pPr>
-            <a:r>
-              <a:rPr sz="700" b="0">
-                <a:solidFill>
-                  <a:srgbClr val="BBBBBB"/>
-                </a:solidFill>
-              </a:rPr>
-              <a:t/>
-            </a:r>
-          </a:p>
-        </p:txBody>
-      </p:sp>
-      <p:sp>
-        <p:nvSpPr>
-          <p:cNvPr id="25" name="Rounded Rectangle 24"/>
-          <p:cNvSpPr/>
-          <p:nvPr/>
-        </p:nvSpPr>
-        <p:spPr>
-          <a:xfrm>
-            <a:off x="9418320" y="3383280"/>
-            <a:ext cx="1737360" cy="731520"/>
-          </a:xfrm>
-          <a:prstGeom prst="roundRect">
-            <a:avLst/>
-          </a:prstGeom>
-          <a:solidFill>
-            <a:srgbClr val="0082CC"/>
-          </a:solidFill>
-          <a:ln>
-            <a:noFill/>
-          </a:ln>
-        </p:spPr>
-        <p:style>
-          <a:lnRef idx="1">
-            <a:schemeClr val="accent1"/>
-          </a:lnRef>
-          <a:fillRef idx="3">
-            <a:schemeClr val="accent1"/>
-          </a:fillRef>
-          <a:effectRef idx="2">
-            <a:schemeClr val="accent1"/>
-          </a:effectRef>
-          <a:fontRef idx="minor">
-            <a:schemeClr val="lt1"/>
-          </a:fontRef>
-        </p:style>
-        <p:txBody>
-          <a:bodyPr rtlCol="0" anchor="ctr"/>
-          <a:lstStyle/>
-          <a:p>
-            <a:pPr algn="ctr"/>
-          </a:p>
-        </p:txBody>
-      </p:sp>
-      <p:sp>
-        <p:nvSpPr>
           <p:cNvPr id="26" name="TextBox 25"/>
           <p:cNvSpPr txBox="1"/>
           <p:nvPr/>
         </p:nvSpPr>
         <p:spPr>
           <a:xfrm>
-            <a:off x="9509760" y="3456432"/>
-            <a:ext cx="1554480" cy="640080"/>
-          </a:xfrm>
-          <a:prstGeom prst="rect">
-            <a:avLst/>
-          </a:prstGeom>
-          <a:noFill/>
-        </p:spPr>
-        <p:txBody>
-          <a:bodyPr wrap="square">
-            <a:spAutoFit/>
-          </a:bodyPr>
-          <a:lstStyle/>
-          <a:p>
-            <a:pPr algn="l">
-              <a:spcAft>
-                <a:spcPts val="100"/>
-              </a:spcAft>
-            </a:pPr>
-            <a:r>
-              <a:rPr sz="900" b="1">
-                <a:solidFill>
-                  <a:srgbClr val="FFFFFF"/>
-                </a:solidFill>
-              </a:rPr>
-              <a:t>Deploy +
-Report</a:t>
-            </a:r>
-          </a:p>
-          <a:p>
-            <a:pPr algn="l">
-              <a:spcAft>
-                <a:spcPts val="0"/>
-              </a:spcAft>
-            </a:pPr>
-            <a:r>
-              <a:rPr sz="700" b="0">
-                <a:solidFill>
-                  <a:srgbClr val="BBBBBB"/>
-                </a:solidFill>
-              </a:rPr>
-              <a:t/>
+            <a:off x="731520" y="6172200"/>
+            <a:ext cx="10789920" cy="274320"/>
+          </a:xfrm>
+          <a:prstGeom prst="rect">
+            <a:avLst/>
+          </a:prstGeom>
+          <a:noFill/>
+        </p:spPr>
+        <p:txBody>
+          <a:bodyPr wrap="square">
+            <a:spAutoFit/>
+          </a:bodyPr>
+          <a:lstStyle/>
+          <a:p>
+            <a:pPr algn="ctr">
+              <a:spcAft>
+                <a:spcPts val="0"/>
+              </a:spcAft>
+            </a:pPr>
+            <a:r>
+              <a:rPr sz="1000" b="1">
+                <a:solidFill>
+                  <a:srgbClr val="0D1B2A"/>
+                </a:solidFill>
+              </a:rPr>
+              <a:t>Every build produces a complete SBOM and vulnerability scan — no manual steps, no gaps, always current.</a:t>
             </a:r>
           </a:p>
         </p:txBody>
@@ -13478,44 +12889,6 @@
       <p:sp>
         <p:nvSpPr>
           <p:cNvPr id="27" name="TextBox 26"/>
-          <p:cNvSpPr txBox="1"/>
-          <p:nvPr/>
-        </p:nvSpPr>
-        <p:spPr>
-          <a:xfrm>
-            <a:off x="731520" y="4754880"/>
-            <a:ext cx="10058400" cy="274320"/>
-          </a:xfrm>
-          <a:prstGeom prst="rect">
-            <a:avLst/>
-          </a:prstGeom>
-          <a:noFill/>
-        </p:spPr>
-        <p:txBody>
-          <a:bodyPr wrap="square">
-            <a:spAutoFit/>
-          </a:bodyPr>
-          <a:lstStyle/>
-          <a:p>
-            <a:pPr algn="l">
-              <a:spcAft>
-                <a:spcPts val="0"/>
-              </a:spcAft>
-            </a:pPr>
-            <a:r>
-              <a:rPr sz="900" b="0">
-                <a:solidFill>
-                  <a:srgbClr val="888888"/>
-                </a:solidFill>
-              </a:rPr>
-              <a:t>Technology Stack:  GitHub Actions • JSON Schema • Python • Behave • Gherkin • Helm • Kubernetes</a:t>
-            </a:r>
-          </a:p>
-        </p:txBody>
-      </p:sp>
-      <p:sp>
-        <p:nvSpPr>
-          <p:cNvPr id="28" name="TextBox 27"/>
           <p:cNvSpPr txBox="1"/>
           <p:nvPr/>
         </p:nvSpPr>
@@ -13546,7 +12919,7 @@
                   <a:srgbClr val="888888"/>
                 </a:solidFill>
               </a:rPr>
-              <a:t>9 / 12</a:t>
+              <a:t>9 / 11</a:t>
             </a:r>
           </a:p>
         </p:txBody>

--- a/docs/presentations/MBSE_Pipeline_Executive_Brief.pptx
+++ b/docs/presentations/MBSE_Pipeline_Executive_Brief.pptx
@@ -5466,8 +5466,76 @@
         </p:nvSpPr>
         <p:spPr>
           <a:xfrm>
-            <a:off x="4297680" y="2194560"/>
-            <a:ext cx="3566160" cy="1920240"/>
+            <a:off x="4297680" y="2103120"/>
+            <a:ext cx="3566160" cy="822960"/>
+          </a:xfrm>
+          <a:prstGeom prst="rect">
+            <a:avLst/>
+          </a:prstGeom>
+          <a:noFill/>
+        </p:spPr>
+        <p:txBody>
+          <a:bodyPr wrap="square">
+            <a:spAutoFit/>
+          </a:bodyPr>
+          <a:lstStyle/>
+          <a:p>
+            <a:pPr algn="l">
+              <a:spcAft>
+                <a:spcPts val="300"/>
+              </a:spcAft>
+            </a:pPr>
+            <a:r>
+              <a:rPr sz="800" b="0">
+                <a:solidFill>
+                  <a:srgbClr val="FFFFFF"/>
+                </a:solidFill>
+              </a:rPr>
+              <a:t>•  Plain English that both sides can read and validate</a:t>
+            </a:r>
+          </a:p>
+          <a:p>
+            <a:pPr algn="l">
+              <a:spcAft>
+                <a:spcPts val="300"/>
+              </a:spcAft>
+            </a:pPr>
+            <a:r>
+              <a:rPr sz="800" b="0">
+                <a:solidFill>
+                  <a:srgbClr val="FFFFFF"/>
+                </a:solidFill>
+              </a:rPr>
+              <a:t>•  Machine-executable — runs as automated tests on every build</a:t>
+            </a:r>
+          </a:p>
+          <a:p>
+            <a:pPr algn="l">
+              <a:spcAft>
+                <a:spcPts val="300"/>
+              </a:spcAft>
+            </a:pPr>
+            <a:r>
+              <a:rPr sz="800" b="0">
+                <a:solidFill>
+                  <a:srgbClr val="FFFFFF"/>
+                </a:solidFill>
+              </a:rPr>
+              <a:t>•  Tagged to requirements — creates the traceability link</a:t>
+            </a:r>
+          </a:p>
+        </p:txBody>
+      </p:sp>
+      <p:sp>
+        <p:nvSpPr>
+          <p:cNvPr id="12" name="TextBox 11"/>
+          <p:cNvSpPr txBox="1"/>
+          <p:nvPr/>
+        </p:nvSpPr>
+        <p:spPr>
+          <a:xfrm>
+            <a:off x="4297680" y="2926080"/>
+            <a:ext cx="3566160" cy="1188720"/>
           </a:xfrm>
           <a:prstGeom prst="rect">
             <a:avLst/>
@@ -5486,7 +5554,7 @@
               </a:spcAft>
             </a:pPr>
             <a:r>
-              <a:rPr sz="800" b="1">
+              <a:rPr sz="700" b="1">
                 <a:solidFill>
                   <a:srgbClr val="FFFFFF"/>
                 </a:solidFill>
@@ -5501,7 +5569,7 @@
               </a:spcAft>
             </a:pPr>
             <a:r>
-              <a:rPr sz="800" b="1">
+              <a:rPr sz="700" b="1">
                 <a:solidFill>
                   <a:srgbClr val="FFFFFF"/>
                 </a:solidFill>
@@ -5516,12 +5584,27 @@
               </a:spcAft>
             </a:pPr>
             <a:r>
-              <a:rPr sz="800" b="0">
+              <a:rPr sz="700" b="1">
+                <a:solidFill>
+                  <a:srgbClr val="FFFFFF"/>
+                </a:solidFill>
+              </a:rPr>
+              <a:t>  @VC:SYS-REQ-001-VC-01 @VER:Test</a:t>
+            </a:r>
+          </a:p>
+          <a:p>
+            <a:pPr algn="l">
+              <a:spcAft>
+                <a:spcPts val="100"/>
+              </a:spcAft>
+            </a:pPr>
+            <a:r>
+              <a:rPr sz="700" b="0">
                 <a:solidFill>
                   <a:srgbClr val="BBBBBB"/>
                 </a:solidFill>
               </a:rPr>
-              <a:t> </a:t>
+              <a:t>  Scenario: Valid ICD response</a:t>
             </a:r>
           </a:p>
           <a:p>
@@ -5531,12 +5614,12 @@
               </a:spcAft>
             </a:pPr>
             <a:r>
-              <a:rPr sz="800" b="1">
-                <a:solidFill>
-                  <a:srgbClr val="FFFFFF"/>
-                </a:solidFill>
-              </a:rPr>
-              <a:t>  @VC:SYS-REQ-001-VC-01 @VER:Test</a:t>
+              <a:rPr sz="700" b="0">
+                <a:solidFill>
+                  <a:srgbClr val="BBBBBB"/>
+                </a:solidFill>
+              </a:rPr>
+              <a:t>    Given the simulation logs are loaded</a:t>
             </a:r>
           </a:p>
           <a:p>
@@ -5546,12 +5629,12 @@
               </a:spcAft>
             </a:pPr>
             <a:r>
-              <a:rPr sz="800" b="0">
+              <a:rPr sz="700" b="0">
                 <a:solidFill>
                   <a:srgbClr val="BBBBBB"/>
                 </a:solidFill>
               </a:rPr>
-              <a:t>  Scenario: Valid ICD response</a:t>
+              <a:t>    Then the logs should contain</a:t>
             </a:r>
           </a:p>
           <a:p>
@@ -5561,41 +5644,11 @@
               </a:spcAft>
             </a:pPr>
             <a:r>
-              <a:rPr sz="800" b="0">
+              <a:rPr sz="700" b="0">
                 <a:solidFill>
                   <a:srgbClr val="BBBBBB"/>
                 </a:solidFill>
               </a:rPr>
-              <a:t>    Given the simulation logs are loaded</a:t>
-            </a:r>
-          </a:p>
-          <a:p>
-            <a:pPr algn="l">
-              <a:spcAft>
-                <a:spcPts val="100"/>
-              </a:spcAft>
-            </a:pPr>
-            <a:r>
-              <a:rPr sz="800" b="0">
-                <a:solidFill>
-                  <a:srgbClr val="BBBBBB"/>
-                </a:solidFill>
-              </a:rPr>
-              <a:t>    Then the logs should contain</a:t>
-            </a:r>
-          </a:p>
-          <a:p>
-            <a:pPr algn="l">
-              <a:spcAft>
-                <a:spcPts val="100"/>
-              </a:spcAft>
-            </a:pPr>
-            <a:r>
-              <a:rPr sz="800" b="0">
-                <a:solidFill>
-                  <a:srgbClr val="BBBBBB"/>
-                </a:solidFill>
-              </a:rPr>
               <a:t>         "IcdResponse: status=OK"</a:t>
             </a:r>
           </a:p>
@@ -5603,7 +5656,7 @@
       </p:sp>
       <p:sp>
         <p:nvSpPr>
-          <p:cNvPr id="12" name="Rounded Rectangle 11"/>
+          <p:cNvPr id="13" name="Rounded Rectangle 12"/>
           <p:cNvSpPr/>
           <p:nvPr/>
         </p:nvSpPr>
@@ -5648,7 +5701,7 @@
       </p:sp>
       <p:sp>
         <p:nvSpPr>
-          <p:cNvPr id="13" name="TextBox 12"/>
+          <p:cNvPr id="14" name="TextBox 13"/>
           <p:cNvSpPr txBox="1"/>
           <p:nvPr/>
         </p:nvSpPr>
@@ -5686,7 +5739,7 @@
       </p:sp>
       <p:sp>
         <p:nvSpPr>
-          <p:cNvPr id="14" name="TextBox 13"/>
+          <p:cNvPr id="15" name="TextBox 14"/>
           <p:cNvSpPr txBox="1"/>
           <p:nvPr/>
         </p:nvSpPr>
@@ -5724,7 +5777,7 @@
       </p:sp>
       <p:sp>
         <p:nvSpPr>
-          <p:cNvPr id="15" name="TextBox 14"/>
+          <p:cNvPr id="16" name="TextBox 15"/>
           <p:cNvSpPr txBox="1"/>
           <p:nvPr/>
         </p:nvSpPr>
@@ -5807,7 +5860,7 @@
       </p:sp>
       <p:sp>
         <p:nvSpPr>
-          <p:cNvPr id="16" name="Right Arrow 15"/>
+          <p:cNvPr id="17" name="Right Arrow 16"/>
           <p:cNvSpPr/>
           <p:nvPr/>
         </p:nvSpPr>
@@ -5850,7 +5903,7 @@
       </p:sp>
       <p:sp>
         <p:nvSpPr>
-          <p:cNvPr id="17" name="Right Arrow 16"/>
+          <p:cNvPr id="18" name="Right Arrow 17"/>
           <p:cNvSpPr/>
           <p:nvPr/>
         </p:nvSpPr>
@@ -5893,7 +5946,7 @@
       </p:sp>
       <p:sp>
         <p:nvSpPr>
-          <p:cNvPr id="18" name="TextBox 17"/>
+          <p:cNvPr id="19" name="TextBox 18"/>
           <p:cNvSpPr txBox="1"/>
           <p:nvPr/>
         </p:nvSpPr>
@@ -5931,7 +5984,7 @@
       </p:sp>
       <p:sp>
         <p:nvSpPr>
-          <p:cNvPr id="19" name="Rounded Rectangle 18"/>
+          <p:cNvPr id="20" name="Rounded Rectangle 19"/>
           <p:cNvSpPr/>
           <p:nvPr/>
         </p:nvSpPr>
@@ -5976,7 +6029,7 @@
       </p:sp>
       <p:sp>
         <p:nvSpPr>
-          <p:cNvPr id="20" name="TextBox 19"/>
+          <p:cNvPr id="21" name="TextBox 20"/>
           <p:cNvSpPr txBox="1"/>
           <p:nvPr/>
         </p:nvSpPr>
@@ -6022,7 +6075,7 @@
       </p:sp>
       <p:sp>
         <p:nvSpPr>
-          <p:cNvPr id="21" name="Down Arrow 20"/>
+          <p:cNvPr id="22" name="Down Arrow 21"/>
           <p:cNvSpPr/>
           <p:nvPr/>
         </p:nvSpPr>
@@ -6065,7 +6118,7 @@
       </p:sp>
       <p:sp>
         <p:nvSpPr>
-          <p:cNvPr id="22" name="Rounded Rectangle 21"/>
+          <p:cNvPr id="23" name="Rounded Rectangle 22"/>
           <p:cNvSpPr/>
           <p:nvPr/>
         </p:nvSpPr>
@@ -6110,7 +6163,7 @@
       </p:sp>
       <p:sp>
         <p:nvSpPr>
-          <p:cNvPr id="23" name="TextBox 22"/>
+          <p:cNvPr id="24" name="TextBox 23"/>
           <p:cNvSpPr txBox="1"/>
           <p:nvPr/>
         </p:nvSpPr>
@@ -6156,7 +6209,7 @@
       </p:sp>
       <p:sp>
         <p:nvSpPr>
-          <p:cNvPr id="24" name="TextBox 23"/>
+          <p:cNvPr id="25" name="TextBox 24"/>
           <p:cNvSpPr txBox="1"/>
           <p:nvPr/>
         </p:nvSpPr>
@@ -6202,7 +6255,7 @@
       </p:sp>
       <p:sp>
         <p:nvSpPr>
-          <p:cNvPr id="25" name="TextBox 24"/>
+          <p:cNvPr id="26" name="TextBox 25"/>
           <p:cNvSpPr txBox="1"/>
           <p:nvPr/>
         </p:nvSpPr>
@@ -6248,7 +6301,7 @@
       </p:sp>
       <p:sp>
         <p:nvSpPr>
-          <p:cNvPr id="26" name="TextBox 25"/>
+          <p:cNvPr id="27" name="TextBox 26"/>
           <p:cNvSpPr txBox="1"/>
           <p:nvPr/>
         </p:nvSpPr>
@@ -6294,7 +6347,7 @@
       </p:sp>
       <p:sp>
         <p:nvSpPr>
-          <p:cNvPr id="27" name="Rounded Rectangle 26"/>
+          <p:cNvPr id="28" name="Rounded Rectangle 27"/>
           <p:cNvSpPr/>
           <p:nvPr/>
         </p:nvSpPr>
@@ -6339,7 +6392,7 @@
       </p:sp>
       <p:sp>
         <p:nvSpPr>
-          <p:cNvPr id="28" name="TextBox 27"/>
+          <p:cNvPr id="29" name="TextBox 28"/>
           <p:cNvSpPr txBox="1"/>
           <p:nvPr/>
         </p:nvSpPr>
@@ -6377,7 +6430,7 @@
       </p:sp>
       <p:sp>
         <p:nvSpPr>
-          <p:cNvPr id="29" name="TextBox 28"/>
+          <p:cNvPr id="30" name="TextBox 29"/>
           <p:cNvSpPr txBox="1"/>
           <p:nvPr/>
         </p:nvSpPr>

--- a/docs/presentations/MBSE_Pipeline_Executive_Brief.pptx
+++ b/docs/presentations/MBSE_Pipeline_Executive_Brief.pptx
@@ -4584,223 +4584,26 @@
               </a:spcAft>
             </a:pPr>
             <a:r>
-              <a:rPr sz="3000" b="1">
+              <a:rPr sz="3200" b="1">
                 <a:solidFill>
                   <a:srgbClr val="0D1B2A"/>
                 </a:solidFill>
               </a:rPr>
-              <a:t>Built for Program Velocity</a:t>
-            </a:r>
-          </a:p>
-        </p:txBody>
-      </p:sp>
-      <p:sp>
-        <p:nvSpPr>
-          <p:cNvPr id="3" name="TextBox 2"/>
-          <p:cNvSpPr txBox="1"/>
-          <p:nvPr/>
-        </p:nvSpPr>
-        <p:spPr>
-          <a:xfrm>
-            <a:off x="731520" y="1280160"/>
-            <a:ext cx="5029200" cy="274320"/>
-          </a:xfrm>
-          <a:prstGeom prst="rect">
-            <a:avLst/>
-          </a:prstGeom>
-          <a:noFill/>
-        </p:spPr>
-        <p:txBody>
-          <a:bodyPr wrap="square">
-            <a:spAutoFit/>
-          </a:bodyPr>
-          <a:lstStyle/>
-          <a:p>
-            <a:pPr algn="l">
-              <a:spcAft>
-                <a:spcPts val="0"/>
-              </a:spcAft>
-            </a:pPr>
-            <a:r>
-              <a:rPr sz="1600" b="1">
-                <a:solidFill>
-                  <a:srgbClr val="0D1B2A"/>
-                </a:solidFill>
-              </a:rPr>
-              <a:t>The Structural Gaps</a:t>
-            </a:r>
-          </a:p>
-        </p:txBody>
-      </p:sp>
-      <p:sp>
-        <p:nvSpPr>
-          <p:cNvPr id="4" name="TextBox 3"/>
-          <p:cNvSpPr txBox="1"/>
-          <p:nvPr/>
-        </p:nvSpPr>
-        <p:spPr>
-          <a:xfrm>
-            <a:off x="731520" y="1737360"/>
-            <a:ext cx="5029200" cy="685800"/>
-          </a:xfrm>
-          <a:prstGeom prst="rect">
-            <a:avLst/>
-          </a:prstGeom>
-          <a:noFill/>
-        </p:spPr>
-        <p:txBody>
-          <a:bodyPr wrap="square">
-            <a:spAutoFit/>
-          </a:bodyPr>
-          <a:lstStyle/>
-          <a:p>
-            <a:pPr algn="l">
-              <a:spcAft>
-                <a:spcPts val="200"/>
-              </a:spcAft>
-            </a:pPr>
-            <a:r>
-              <a:rPr sz="1300" b="1">
-                <a:solidFill>
-                  <a:srgbClr val="0099D6"/>
-                </a:solidFill>
-              </a:rPr>
-              <a:t>No Shared Language</a:t>
-            </a:r>
-          </a:p>
-          <a:p>
-            <a:pPr algn="l">
-              <a:spcAft>
-                <a:spcPts val="0"/>
-              </a:spcAft>
-            </a:pPr>
-            <a:r>
-              <a:rPr sz="1000" b="0">
-                <a:solidFill>
-                  <a:srgbClr val="555555"/>
-                </a:solidFill>
-              </a:rPr>
-              <a:t>SEs work in the model, developers work in code. Without a bridge, intent gets lost in translation at every handoff.</a:t>
-            </a:r>
-          </a:p>
-        </p:txBody>
-      </p:sp>
-      <p:sp>
-        <p:nvSpPr>
-          <p:cNvPr id="5" name="TextBox 4"/>
-          <p:cNvSpPr txBox="1"/>
-          <p:nvPr/>
-        </p:nvSpPr>
-        <p:spPr>
-          <a:xfrm>
-            <a:off x="731520" y="2514600"/>
-            <a:ext cx="5029200" cy="685800"/>
-          </a:xfrm>
-          <a:prstGeom prst="rect">
-            <a:avLst/>
-          </a:prstGeom>
-          <a:noFill/>
-        </p:spPr>
-        <p:txBody>
-          <a:bodyPr wrap="square">
-            <a:spAutoFit/>
-          </a:bodyPr>
-          <a:lstStyle/>
-          <a:p>
-            <a:pPr algn="l">
-              <a:spcAft>
-                <a:spcPts val="200"/>
-              </a:spcAft>
-            </a:pPr>
-            <a:r>
-              <a:rPr sz="1300" b="1">
-                <a:solidFill>
-                  <a:srgbClr val="0099D6"/>
-                </a:solidFill>
-              </a:rPr>
-              <a:t>No Reliable Handoff</a:t>
-            </a:r>
-          </a:p>
-          <a:p>
-            <a:pPr algn="l">
-              <a:spcAft>
-                <a:spcPts val="0"/>
-              </a:spcAft>
-            </a:pPr>
-            <a:r>
-              <a:rPr sz="1000" b="0">
-                <a:solidFill>
-                  <a:srgbClr val="555555"/>
-                </a:solidFill>
-              </a:rPr>
-              <a:t>Artifacts shared over email or SharePoint have no version control, no change awareness, and no enforcement.</a:t>
-            </a:r>
-          </a:p>
-        </p:txBody>
-      </p:sp>
-      <p:sp>
-        <p:nvSpPr>
-          <p:cNvPr id="6" name="TextBox 5"/>
-          <p:cNvSpPr txBox="1"/>
-          <p:nvPr/>
-        </p:nvSpPr>
-        <p:spPr>
-          <a:xfrm>
-            <a:off x="731520" y="3291840"/>
-            <a:ext cx="5029200" cy="685800"/>
-          </a:xfrm>
-          <a:prstGeom prst="rect">
-            <a:avLst/>
-          </a:prstGeom>
-          <a:noFill/>
-        </p:spPr>
-        <p:txBody>
-          <a:bodyPr wrap="square">
-            <a:spAutoFit/>
-          </a:bodyPr>
-          <a:lstStyle/>
-          <a:p>
-            <a:pPr algn="l">
-              <a:spcAft>
-                <a:spcPts val="200"/>
-              </a:spcAft>
-            </a:pPr>
-            <a:r>
-              <a:rPr sz="1300" b="1">
-                <a:solidFill>
-                  <a:srgbClr val="0099D6"/>
-                </a:solidFill>
-              </a:rPr>
-              <a:t>No Connected Toolchain</a:t>
-            </a:r>
-          </a:p>
-          <a:p>
-            <a:pPr algn="l">
-              <a:spcAft>
-                <a:spcPts val="0"/>
-              </a:spcAft>
-            </a:pPr>
-            <a:r>
-              <a:rPr sz="1000" b="0">
-                <a:solidFill>
-                  <a:srgbClr val="555555"/>
-                </a:solidFill>
-              </a:rPr>
-              <a:t>Requirements, tests, and deployment are maintained in separate tools with no automated thread between them.</a:t>
-            </a:r>
-          </a:p>
-        </p:txBody>
-      </p:sp>
-      <p:sp>
-        <p:nvSpPr>
-          <p:cNvPr id="7" name="Rounded Rectangle 6"/>
+              <a:t>One Pipeline. Model to Deployment.</a:t>
+            </a:r>
+          </a:p>
+        </p:txBody>
+      </p:sp>
+      <p:sp>
+        <p:nvSpPr>
+          <p:cNvPr id="3" name="Rounded Rectangle 2"/>
           <p:cNvSpPr/>
           <p:nvPr/>
         </p:nvSpPr>
         <p:spPr>
           <a:xfrm>
-            <a:off x="6217920" y="1188720"/>
-            <a:ext cx="5303520" cy="3657600"/>
+            <a:off x="457200" y="1371600"/>
+            <a:ext cx="6675120" cy="1234440"/>
           </a:xfrm>
           <a:prstGeom prst="roundRect">
             <a:avLst/>
@@ -4838,27 +4641,276 @@
       </p:sp>
       <p:sp>
         <p:nvSpPr>
+          <p:cNvPr id="4" name="TextBox 3"/>
+          <p:cNvSpPr txBox="1"/>
+          <p:nvPr/>
+        </p:nvSpPr>
+        <p:spPr>
+          <a:xfrm>
+            <a:off x="731520" y="1508760"/>
+            <a:ext cx="6217920" cy="1005840"/>
+          </a:xfrm>
+          <a:prstGeom prst="rect">
+            <a:avLst/>
+          </a:prstGeom>
+          <a:noFill/>
+        </p:spPr>
+        <p:txBody>
+          <a:bodyPr wrap="square">
+            <a:spAutoFit/>
+          </a:bodyPr>
+          <a:lstStyle/>
+          <a:p>
+            <a:pPr algn="l">
+              <a:spcAft>
+                <a:spcPts val="400"/>
+              </a:spcAft>
+            </a:pPr>
+            <a:r>
+              <a:rPr sz="1500" b="1">
+                <a:solidFill>
+                  <a:srgbClr val="0069B0"/>
+                </a:solidFill>
+              </a:rPr>
+              <a:t>No Shared Language</a:t>
+            </a:r>
+          </a:p>
+          <a:p>
+            <a:pPr algn="l">
+              <a:spcAft>
+                <a:spcPts val="0"/>
+              </a:spcAft>
+            </a:pPr>
+            <a:r>
+              <a:rPr sz="1000" b="0">
+                <a:solidFill>
+                  <a:srgbClr val="555555"/>
+                </a:solidFill>
+              </a:rPr>
+              <a:t>SEs work in the model, developers work in code. Intent gets lost at every handoff — misalignment surfaces at integration.</a:t>
+            </a:r>
+          </a:p>
+        </p:txBody>
+      </p:sp>
+      <p:sp>
+        <p:nvSpPr>
+          <p:cNvPr id="5" name="Rounded Rectangle 4"/>
+          <p:cNvSpPr/>
+          <p:nvPr/>
+        </p:nvSpPr>
+        <p:spPr>
+          <a:xfrm>
+            <a:off x="457200" y="2788920"/>
+            <a:ext cx="6675120" cy="1234440"/>
+          </a:xfrm>
+          <a:prstGeom prst="roundRect">
+            <a:avLst/>
+          </a:prstGeom>
+          <a:solidFill>
+            <a:srgbClr val="F4F7FA"/>
+          </a:solidFill>
+          <a:ln w="12700">
+            <a:solidFill>
+              <a:srgbClr val="D0E8F8"/>
+            </a:solidFill>
+          </a:ln>
+        </p:spPr>
+        <p:style>
+          <a:lnRef idx="1">
+            <a:schemeClr val="accent1"/>
+          </a:lnRef>
+          <a:fillRef idx="3">
+            <a:schemeClr val="accent1"/>
+          </a:fillRef>
+          <a:effectRef idx="2">
+            <a:schemeClr val="accent1"/>
+          </a:effectRef>
+          <a:fontRef idx="minor">
+            <a:schemeClr val="lt1"/>
+          </a:fontRef>
+        </p:style>
+        <p:txBody>
+          <a:bodyPr rtlCol="0" anchor="ctr"/>
+          <a:lstStyle/>
+          <a:p>
+            <a:pPr algn="ctr"/>
+          </a:p>
+        </p:txBody>
+      </p:sp>
+      <p:sp>
+        <p:nvSpPr>
+          <p:cNvPr id="6" name="TextBox 5"/>
+          <p:cNvSpPr txBox="1"/>
+          <p:nvPr/>
+        </p:nvSpPr>
+        <p:spPr>
+          <a:xfrm>
+            <a:off x="731520" y="2926080"/>
+            <a:ext cx="6217920" cy="1005840"/>
+          </a:xfrm>
+          <a:prstGeom prst="rect">
+            <a:avLst/>
+          </a:prstGeom>
+          <a:noFill/>
+        </p:spPr>
+        <p:txBody>
+          <a:bodyPr wrap="square">
+            <a:spAutoFit/>
+          </a:bodyPr>
+          <a:lstStyle/>
+          <a:p>
+            <a:pPr algn="l">
+              <a:spcAft>
+                <a:spcPts val="400"/>
+              </a:spcAft>
+            </a:pPr>
+            <a:r>
+              <a:rPr sz="1500" b="1">
+                <a:solidFill>
+                  <a:srgbClr val="0069B0"/>
+                </a:solidFill>
+              </a:rPr>
+              <a:t>No Reliable Handoff</a:t>
+            </a:r>
+          </a:p>
+          <a:p>
+            <a:pPr algn="l">
+              <a:spcAft>
+                <a:spcPts val="0"/>
+              </a:spcAft>
+            </a:pPr>
+            <a:r>
+              <a:rPr sz="1000" b="0">
+                <a:solidFill>
+                  <a:srgbClr val="555555"/>
+                </a:solidFill>
+              </a:rPr>
+              <a:t>Artifacts shared over email have no version control. When the model changes, nothing alerts the team. Tests go stale silently.</a:t>
+            </a:r>
+          </a:p>
+        </p:txBody>
+      </p:sp>
+      <p:sp>
+        <p:nvSpPr>
+          <p:cNvPr id="7" name="Rounded Rectangle 6"/>
+          <p:cNvSpPr/>
+          <p:nvPr/>
+        </p:nvSpPr>
+        <p:spPr>
+          <a:xfrm>
+            <a:off x="457200" y="4206240"/>
+            <a:ext cx="6675120" cy="1234440"/>
+          </a:xfrm>
+          <a:prstGeom prst="roundRect">
+            <a:avLst/>
+          </a:prstGeom>
+          <a:solidFill>
+            <a:srgbClr val="F4F7FA"/>
+          </a:solidFill>
+          <a:ln w="12700">
+            <a:solidFill>
+              <a:srgbClr val="D0E8F8"/>
+            </a:solidFill>
+          </a:ln>
+        </p:spPr>
+        <p:style>
+          <a:lnRef idx="1">
+            <a:schemeClr val="accent1"/>
+          </a:lnRef>
+          <a:fillRef idx="3">
+            <a:schemeClr val="accent1"/>
+          </a:fillRef>
+          <a:effectRef idx="2">
+            <a:schemeClr val="accent1"/>
+          </a:effectRef>
+          <a:fontRef idx="minor">
+            <a:schemeClr val="lt1"/>
+          </a:fontRef>
+        </p:style>
+        <p:txBody>
+          <a:bodyPr rtlCol="0" anchor="ctr"/>
+          <a:lstStyle/>
+          <a:p>
+            <a:pPr algn="ctr"/>
+          </a:p>
+        </p:txBody>
+      </p:sp>
+      <p:sp>
+        <p:nvSpPr>
           <p:cNvPr id="8" name="TextBox 7"/>
           <p:cNvSpPr txBox="1"/>
           <p:nvPr/>
         </p:nvSpPr>
         <p:spPr>
           <a:xfrm>
-            <a:off x="6400800" y="1371600"/>
-            <a:ext cx="4937760" cy="274320"/>
-          </a:xfrm>
-          <a:prstGeom prst="rect">
-            <a:avLst/>
-          </a:prstGeom>
-          <a:noFill/>
-        </p:spPr>
-        <p:txBody>
-          <a:bodyPr wrap="square">
-            <a:spAutoFit/>
-          </a:bodyPr>
-          <a:lstStyle/>
-          <a:p>
-            <a:pPr algn="l">
+            <a:off x="731520" y="4343400"/>
+            <a:ext cx="6217920" cy="1005840"/>
+          </a:xfrm>
+          <a:prstGeom prst="rect">
+            <a:avLst/>
+          </a:prstGeom>
+          <a:noFill/>
+        </p:spPr>
+        <p:txBody>
+          <a:bodyPr wrap="square">
+            <a:spAutoFit/>
+          </a:bodyPr>
+          <a:lstStyle/>
+          <a:p>
+            <a:pPr algn="l">
+              <a:spcAft>
+                <a:spcPts val="400"/>
+              </a:spcAft>
+            </a:pPr>
+            <a:r>
+              <a:rPr sz="1500" b="1">
+                <a:solidFill>
+                  <a:srgbClr val="0069B0"/>
+                </a:solidFill>
+              </a:rPr>
+              <a:t>No Connected Toolchain</a:t>
+            </a:r>
+          </a:p>
+          <a:p>
+            <a:pPr algn="l">
+              <a:spcAft>
+                <a:spcPts val="0"/>
+              </a:spcAft>
+            </a:pPr>
+            <a:r>
+              <a:rPr sz="1000" b="0">
+                <a:solidFill>
+                  <a:srgbClr val="555555"/>
+                </a:solidFill>
+              </a:rPr>
+              <a:t>Requirements, tests, and deployment live in separate tools. Audit evidence is rebuilt from scratch every review cycle.</a:t>
+            </a:r>
+          </a:p>
+        </p:txBody>
+      </p:sp>
+      <p:sp>
+        <p:nvSpPr>
+          <p:cNvPr id="9" name="TextBox 8"/>
+          <p:cNvSpPr txBox="1"/>
+          <p:nvPr/>
+        </p:nvSpPr>
+        <p:spPr>
+          <a:xfrm>
+            <a:off x="7772400" y="1371600"/>
+            <a:ext cx="3657600" cy="320040"/>
+          </a:xfrm>
+          <a:prstGeom prst="rect">
+            <a:avLst/>
+          </a:prstGeom>
+          <a:noFill/>
+        </p:spPr>
+        <p:txBody>
+          <a:bodyPr wrap="square">
+            <a:spAutoFit/>
+          </a:bodyPr>
+          <a:lstStyle/>
+          <a:p>
+            <a:pPr algn="ctr">
               <a:spcAft>
                 <a:spcPts val="0"/>
               </a:spcAft>
@@ -4866,130 +4918,464 @@
             <a:r>
               <a:rPr sz="1400" b="1">
                 <a:solidFill>
+                  <a:srgbClr val="888888"/>
+                </a:solidFill>
+              </a:rPr>
+              <a:t>Today</a:t>
+            </a:r>
+          </a:p>
+        </p:txBody>
+      </p:sp>
+      <p:sp>
+        <p:nvSpPr>
+          <p:cNvPr id="10" name="Rounded Rectangle 9"/>
+          <p:cNvSpPr/>
+          <p:nvPr/>
+        </p:nvSpPr>
+        <p:spPr>
+          <a:xfrm>
+            <a:off x="8321040" y="1920240"/>
+            <a:ext cx="2560320" cy="594360"/>
+          </a:xfrm>
+          <a:prstGeom prst="roundRect">
+            <a:avLst/>
+          </a:prstGeom>
+          <a:solidFill>
+            <a:srgbClr val="003057"/>
+          </a:solidFill>
+          <a:ln>
+            <a:noFill/>
+          </a:ln>
+        </p:spPr>
+        <p:style>
+          <a:lnRef idx="1">
+            <a:schemeClr val="accent1"/>
+          </a:lnRef>
+          <a:fillRef idx="3">
+            <a:schemeClr val="accent1"/>
+          </a:fillRef>
+          <a:effectRef idx="2">
+            <a:schemeClr val="accent1"/>
+          </a:effectRef>
+          <a:fontRef idx="minor">
+            <a:schemeClr val="lt1"/>
+          </a:fontRef>
+        </p:style>
+        <p:txBody>
+          <a:bodyPr rtlCol="0" anchor="ctr"/>
+          <a:lstStyle/>
+          <a:p>
+            <a:pPr algn="ctr"/>
+          </a:p>
+        </p:txBody>
+      </p:sp>
+      <p:sp>
+        <p:nvSpPr>
+          <p:cNvPr id="11" name="TextBox 10"/>
+          <p:cNvSpPr txBox="1"/>
+          <p:nvPr/>
+        </p:nvSpPr>
+        <p:spPr>
+          <a:xfrm>
+            <a:off x="8412480" y="2029968"/>
+            <a:ext cx="2377440" cy="411480"/>
+          </a:xfrm>
+          <a:prstGeom prst="rect">
+            <a:avLst/>
+          </a:prstGeom>
+          <a:noFill/>
+        </p:spPr>
+        <p:txBody>
+          <a:bodyPr wrap="square">
+            <a:spAutoFit/>
+          </a:bodyPr>
+          <a:lstStyle/>
+          <a:p>
+            <a:pPr algn="ctr">
+              <a:spcAft>
+                <a:spcPts val="0"/>
+              </a:spcAft>
+            </a:pPr>
+            <a:r>
+              <a:rPr sz="1100" b="1">
+                <a:solidFill>
+                  <a:srgbClr val="FFFFFF"/>
+                </a:solidFill>
+              </a:rPr>
+              <a:t>Cameo Model</a:t>
+            </a:r>
+          </a:p>
+        </p:txBody>
+      </p:sp>
+      <p:sp>
+        <p:nvSpPr>
+          <p:cNvPr id="12" name="Rounded Rectangle 11"/>
+          <p:cNvSpPr/>
+          <p:nvPr/>
+        </p:nvSpPr>
+        <p:spPr>
+          <a:xfrm>
+            <a:off x="8321040" y="2880360"/>
+            <a:ext cx="2560320" cy="594360"/>
+          </a:xfrm>
+          <a:prstGeom prst="roundRect">
+            <a:avLst/>
+          </a:prstGeom>
+          <a:solidFill>
+            <a:srgbClr val="004A87"/>
+          </a:solidFill>
+          <a:ln>
+            <a:noFill/>
+          </a:ln>
+        </p:spPr>
+        <p:style>
+          <a:lnRef idx="1">
+            <a:schemeClr val="accent1"/>
+          </a:lnRef>
+          <a:fillRef idx="3">
+            <a:schemeClr val="accent1"/>
+          </a:fillRef>
+          <a:effectRef idx="2">
+            <a:schemeClr val="accent1"/>
+          </a:effectRef>
+          <a:fontRef idx="minor">
+            <a:schemeClr val="lt1"/>
+          </a:fontRef>
+        </p:style>
+        <p:txBody>
+          <a:bodyPr rtlCol="0" anchor="ctr"/>
+          <a:lstStyle/>
+          <a:p>
+            <a:pPr algn="ctr"/>
+          </a:p>
+        </p:txBody>
+      </p:sp>
+      <p:sp>
+        <p:nvSpPr>
+          <p:cNvPr id="13" name="TextBox 12"/>
+          <p:cNvSpPr txBox="1"/>
+          <p:nvPr/>
+        </p:nvSpPr>
+        <p:spPr>
+          <a:xfrm>
+            <a:off x="8412480" y="2990088"/>
+            <a:ext cx="2377440" cy="411480"/>
+          </a:xfrm>
+          <a:prstGeom prst="rect">
+            <a:avLst/>
+          </a:prstGeom>
+          <a:noFill/>
+        </p:spPr>
+        <p:txBody>
+          <a:bodyPr wrap="square">
+            <a:spAutoFit/>
+          </a:bodyPr>
+          <a:lstStyle/>
+          <a:p>
+            <a:pPr algn="ctr">
+              <a:spcAft>
+                <a:spcPts val="0"/>
+              </a:spcAft>
+            </a:pPr>
+            <a:r>
+              <a:rPr sz="1100" b="1">
+                <a:solidFill>
+                  <a:srgbClr val="FFFFFF"/>
+                </a:solidFill>
+              </a:rPr>
+              <a:t>Test Suite</a:t>
+            </a:r>
+          </a:p>
+        </p:txBody>
+      </p:sp>
+      <p:sp>
+        <p:nvSpPr>
+          <p:cNvPr id="14" name="Rounded Rectangle 13"/>
+          <p:cNvSpPr/>
+          <p:nvPr/>
+        </p:nvSpPr>
+        <p:spPr>
+          <a:xfrm>
+            <a:off x="8321040" y="3840480"/>
+            <a:ext cx="2560320" cy="594360"/>
+          </a:xfrm>
+          <a:prstGeom prst="roundRect">
+            <a:avLst/>
+          </a:prstGeom>
+          <a:solidFill>
+            <a:srgbClr val="888888"/>
+          </a:solidFill>
+          <a:ln>
+            <a:noFill/>
+          </a:ln>
+        </p:spPr>
+        <p:style>
+          <a:lnRef idx="1">
+            <a:schemeClr val="accent1"/>
+          </a:lnRef>
+          <a:fillRef idx="3">
+            <a:schemeClr val="accent1"/>
+          </a:fillRef>
+          <a:effectRef idx="2">
+            <a:schemeClr val="accent1"/>
+          </a:effectRef>
+          <a:fontRef idx="minor">
+            <a:schemeClr val="lt1"/>
+          </a:fontRef>
+        </p:style>
+        <p:txBody>
+          <a:bodyPr rtlCol="0" anchor="ctr"/>
+          <a:lstStyle/>
+          <a:p>
+            <a:pPr algn="ctr"/>
+          </a:p>
+        </p:txBody>
+      </p:sp>
+      <p:sp>
+        <p:nvSpPr>
+          <p:cNvPr id="15" name="TextBox 14"/>
+          <p:cNvSpPr txBox="1"/>
+          <p:nvPr/>
+        </p:nvSpPr>
+        <p:spPr>
+          <a:xfrm>
+            <a:off x="8412480" y="3950208"/>
+            <a:ext cx="2377440" cy="411480"/>
+          </a:xfrm>
+          <a:prstGeom prst="rect">
+            <a:avLst/>
+          </a:prstGeom>
+          <a:noFill/>
+        </p:spPr>
+        <p:txBody>
+          <a:bodyPr wrap="square">
+            <a:spAutoFit/>
+          </a:bodyPr>
+          <a:lstStyle/>
+          <a:p>
+            <a:pPr algn="ctr">
+              <a:spcAft>
+                <a:spcPts val="0"/>
+              </a:spcAft>
+            </a:pPr>
+            <a:r>
+              <a:rPr sz="1100" b="1">
+                <a:solidFill>
+                  <a:srgbClr val="FFFFFF"/>
+                </a:solidFill>
+              </a:rPr>
+              <a:t>Deployment</a:t>
+            </a:r>
+          </a:p>
+        </p:txBody>
+      </p:sp>
+      <p:sp>
+        <p:nvSpPr>
+          <p:cNvPr id="16" name="TextBox 15"/>
+          <p:cNvSpPr txBox="1"/>
+          <p:nvPr/>
+        </p:nvSpPr>
+        <p:spPr>
+          <a:xfrm>
+            <a:off x="9326880" y="2587752"/>
+            <a:ext cx="548640" cy="274320"/>
+          </a:xfrm>
+          <a:prstGeom prst="rect">
+            <a:avLst/>
+          </a:prstGeom>
+          <a:noFill/>
+        </p:spPr>
+        <p:txBody>
+          <a:bodyPr wrap="square">
+            <a:spAutoFit/>
+          </a:bodyPr>
+          <a:lstStyle/>
+          <a:p>
+            <a:pPr algn="ctr">
+              <a:spcAft>
+                <a:spcPts val="0"/>
+              </a:spcAft>
+            </a:pPr>
+            <a:r>
+              <a:rPr sz="1600" b="1">
+                <a:solidFill>
+                  <a:srgbClr val="CC3333"/>
+                </a:solidFill>
+              </a:rPr>
+              <a:t>✘</a:t>
+            </a:r>
+          </a:p>
+        </p:txBody>
+      </p:sp>
+      <p:sp>
+        <p:nvSpPr>
+          <p:cNvPr id="17" name="TextBox 16"/>
+          <p:cNvSpPr txBox="1"/>
+          <p:nvPr/>
+        </p:nvSpPr>
+        <p:spPr>
+          <a:xfrm>
+            <a:off x="9326880" y="3547872"/>
+            <a:ext cx="548640" cy="274320"/>
+          </a:xfrm>
+          <a:prstGeom prst="rect">
+            <a:avLst/>
+          </a:prstGeom>
+          <a:noFill/>
+        </p:spPr>
+        <p:txBody>
+          <a:bodyPr wrap="square">
+            <a:spAutoFit/>
+          </a:bodyPr>
+          <a:lstStyle/>
+          <a:p>
+            <a:pPr algn="ctr">
+              <a:spcAft>
+                <a:spcPts val="0"/>
+              </a:spcAft>
+            </a:pPr>
+            <a:r>
+              <a:rPr sz="1600" b="1">
+                <a:solidFill>
+                  <a:srgbClr val="CC3333"/>
+                </a:solidFill>
+              </a:rPr>
+              <a:t>✘</a:t>
+            </a:r>
+          </a:p>
+        </p:txBody>
+      </p:sp>
+      <p:sp>
+        <p:nvSpPr>
+          <p:cNvPr id="18" name="TextBox 17"/>
+          <p:cNvSpPr txBox="1"/>
+          <p:nvPr/>
+        </p:nvSpPr>
+        <p:spPr>
+          <a:xfrm>
+            <a:off x="7772400" y="4709160"/>
+            <a:ext cx="3657600" cy="457200"/>
+          </a:xfrm>
+          <a:prstGeom prst="rect">
+            <a:avLst/>
+          </a:prstGeom>
+          <a:noFill/>
+        </p:spPr>
+        <p:txBody>
+          <a:bodyPr wrap="square">
+            <a:spAutoFit/>
+          </a:bodyPr>
+          <a:lstStyle/>
+          <a:p>
+            <a:pPr algn="ctr">
+              <a:spcAft>
+                <a:spcPts val="200"/>
+              </a:spcAft>
+            </a:pPr>
+            <a:r>
+              <a:rPr sz="1000" b="1">
+                <a:solidFill>
+                  <a:srgbClr val="CC3333"/>
+                </a:solidFill>
+              </a:rPr>
+              <a:t>No automated thread</a:t>
+            </a:r>
+          </a:p>
+          <a:p>
+            <a:pPr algn="ctr">
+              <a:spcAft>
+                <a:spcPts val="0"/>
+              </a:spcAft>
+            </a:pPr>
+            <a:r>
+              <a:rPr sz="900" b="0">
+                <a:solidFill>
+                  <a:srgbClr val="888888"/>
+                </a:solidFill>
+              </a:rPr>
+              <a:t>Manual handoffs at every stage</a:t>
+            </a:r>
+          </a:p>
+        </p:txBody>
+      </p:sp>
+      <p:sp>
+        <p:nvSpPr>
+          <p:cNvPr id="19" name="Rounded Rectangle 18"/>
+          <p:cNvSpPr/>
+          <p:nvPr/>
+        </p:nvSpPr>
+        <p:spPr>
+          <a:xfrm>
+            <a:off x="457200" y="5760720"/>
+            <a:ext cx="11247120" cy="457200"/>
+          </a:xfrm>
+          <a:prstGeom prst="roundRect">
+            <a:avLst/>
+          </a:prstGeom>
+          <a:solidFill>
+            <a:srgbClr val="F4F7FA"/>
+          </a:solidFill>
+          <a:ln w="12700">
+            <a:solidFill>
+              <a:srgbClr val="0069B0"/>
+            </a:solidFill>
+          </a:ln>
+        </p:spPr>
+        <p:style>
+          <a:lnRef idx="1">
+            <a:schemeClr val="accent1"/>
+          </a:lnRef>
+          <a:fillRef idx="3">
+            <a:schemeClr val="accent1"/>
+          </a:fillRef>
+          <a:effectRef idx="2">
+            <a:schemeClr val="accent1"/>
+          </a:effectRef>
+          <a:fontRef idx="minor">
+            <a:schemeClr val="lt1"/>
+          </a:fontRef>
+        </p:style>
+        <p:txBody>
+          <a:bodyPr rtlCol="0" anchor="ctr"/>
+          <a:lstStyle/>
+          <a:p>
+            <a:pPr algn="ctr"/>
+          </a:p>
+        </p:txBody>
+      </p:sp>
+      <p:sp>
+        <p:nvSpPr>
+          <p:cNvPr id="20" name="TextBox 19"/>
+          <p:cNvSpPr txBox="1"/>
+          <p:nvPr/>
+        </p:nvSpPr>
+        <p:spPr>
+          <a:xfrm>
+            <a:off x="731520" y="5815584"/>
+            <a:ext cx="10789920" cy="365760"/>
+          </a:xfrm>
+          <a:prstGeom prst="rect">
+            <a:avLst/>
+          </a:prstGeom>
+          <a:noFill/>
+        </p:spPr>
+        <p:txBody>
+          <a:bodyPr wrap="square">
+            <a:spAutoFit/>
+          </a:bodyPr>
+          <a:lstStyle/>
+          <a:p>
+            <a:pPr algn="ctr">
+              <a:spcAft>
+                <a:spcPts val="0"/>
+              </a:spcAft>
+            </a:pPr>
+            <a:r>
+              <a:rPr sz="1200" b="1">
+                <a:solidFill>
                   <a:srgbClr val="0D1B2A"/>
                 </a:solidFill>
               </a:rPr>
-              <a:t>Why the Old Approach Falls Short</a:t>
-            </a:r>
-          </a:p>
-        </p:txBody>
-      </p:sp>
-      <p:sp>
-        <p:nvSpPr>
-          <p:cNvPr id="9" name="TextBox 8"/>
-          <p:cNvSpPr txBox="1"/>
-          <p:nvPr/>
-        </p:nvSpPr>
-        <p:spPr>
-          <a:xfrm>
-            <a:off x="6400800" y="1920240"/>
-            <a:ext cx="4937760" cy="2560320"/>
-          </a:xfrm>
-          <a:prstGeom prst="rect">
-            <a:avLst/>
-          </a:prstGeom>
-          <a:noFill/>
-        </p:spPr>
-        <p:txBody>
-          <a:bodyPr wrap="square">
-            <a:spAutoFit/>
-          </a:bodyPr>
-          <a:lstStyle/>
-          <a:p>
-            <a:pPr algn="l">
-              <a:spcAft>
-                <a:spcPts val="800"/>
-              </a:spcAft>
-            </a:pPr>
-            <a:r>
-              <a:rPr sz="1000" b="0">
-                <a:solidFill>
-                  <a:srgbClr val="555555"/>
-                </a:solidFill>
-              </a:rPr>
-              <a:t>•  Requirements are living targets — this program moves faster than any manual process can track.</a:t>
-            </a:r>
-          </a:p>
-          <a:p>
-            <a:pPr algn="l">
-              <a:spcAft>
-                <a:spcPts val="800"/>
-              </a:spcAft>
-            </a:pPr>
-            <a:r>
-              <a:rPr sz="1000" b="0">
-                <a:solidFill>
-                  <a:srgbClr val="555555"/>
-                </a:solidFill>
-              </a:rPr>
-              <a:t>•  SE/SW misalignment surfaces at integration — the most expensive point to find it.</a:t>
-            </a:r>
-          </a:p>
-          <a:p>
-            <a:pPr algn="l">
-              <a:spcAft>
-                <a:spcPts val="800"/>
-              </a:spcAft>
-            </a:pPr>
-            <a:r>
-              <a:rPr sz="1000" b="0">
-                <a:solidFill>
-                  <a:srgbClr val="555555"/>
-                </a:solidFill>
-              </a:rPr>
-              <a:t>•  Audit evidence reconstructed from scratch each review cycle — unsustainable at this pace.</a:t>
-            </a:r>
-          </a:p>
-          <a:p>
-            <a:pPr algn="l">
-              <a:spcAft>
-                <a:spcPts val="800"/>
-              </a:spcAft>
-            </a:pPr>
-            <a:r>
-              <a:rPr sz="1000" b="0">
-                <a:solidFill>
-                  <a:srgbClr val="555555"/>
-                </a:solidFill>
-              </a:rPr>
-              <a:t>•  Requirement changes silently invalidate tests — no alert, no flag, no enforcement.</a:t>
-            </a:r>
-          </a:p>
-        </p:txBody>
-      </p:sp>
-      <p:sp>
-        <p:nvSpPr>
-          <p:cNvPr id="10" name="TextBox 9"/>
-          <p:cNvSpPr txBox="1"/>
-          <p:nvPr/>
-        </p:nvSpPr>
-        <p:spPr>
-          <a:xfrm>
-            <a:off x="731520" y="5303520"/>
-            <a:ext cx="10515600" cy="365760"/>
-          </a:xfrm>
-          <a:prstGeom prst="rect">
-            <a:avLst/>
-          </a:prstGeom>
-          <a:noFill/>
-        </p:spPr>
-        <p:txBody>
-          <a:bodyPr wrap="square">
-            <a:spAutoFit/>
-          </a:bodyPr>
-          <a:lstStyle/>
-          <a:p>
-            <a:pPr algn="l">
-              <a:spcAft>
-                <a:spcPts val="0"/>
-              </a:spcAft>
-            </a:pPr>
-            <a:r>
-              <a:rPr sz="1300" b="1">
-                <a:solidFill>
-                  <a:srgbClr val="0D1B2A"/>
-                </a:solidFill>
-              </a:rPr>
               <a:t>This program moves too fast for manual traceability. The pipeline keeps pace.</a:t>
             </a:r>
           </a:p>
@@ -4997,7 +5383,7 @@
       </p:sp>
       <p:sp>
         <p:nvSpPr>
-          <p:cNvPr id="11" name="TextBox 10"/>
+          <p:cNvPr id="21" name="TextBox 20"/>
           <p:cNvSpPr txBox="1"/>
           <p:nvPr/>
         </p:nvSpPr>
@@ -6577,7 +6963,7 @@
         <p:spPr>
           <a:xfrm>
             <a:off x="457200" y="1645920"/>
-            <a:ext cx="2103120" cy="1828800"/>
+            <a:ext cx="3474720" cy="1828800"/>
           </a:xfrm>
           <a:prstGeom prst="roundRect">
             <a:avLst/>
@@ -6622,7 +7008,7 @@
         <p:spPr>
           <a:xfrm>
             <a:off x="457200" y="1645920"/>
-            <a:ext cx="2103120" cy="411480"/>
+            <a:ext cx="3474720" cy="411480"/>
           </a:xfrm>
           <a:prstGeom prst="roundRect">
             <a:avLst/>
@@ -6665,7 +7051,7 @@
         <p:spPr>
           <a:xfrm>
             <a:off x="548640" y="1673352"/>
-            <a:ext cx="1920240" cy="320040"/>
+            <a:ext cx="3291840" cy="320040"/>
           </a:xfrm>
           <a:prstGeom prst="rect">
             <a:avLst/>
@@ -6703,7 +7089,7 @@
         <p:spPr>
           <a:xfrm>
             <a:off x="548640" y="2148840"/>
-            <a:ext cx="1920240" cy="274320"/>
+            <a:ext cx="3291840" cy="274320"/>
           </a:xfrm>
           <a:prstGeom prst="rect">
             <a:avLst/>
@@ -6741,7 +7127,7 @@
         <p:spPr>
           <a:xfrm>
             <a:off x="548640" y="2423160"/>
-            <a:ext cx="1920240" cy="822960"/>
+            <a:ext cx="3291840" cy="822960"/>
           </a:xfrm>
           <a:prstGeom prst="rect">
             <a:avLst/>
@@ -6779,8 +7165,8 @@
         </p:nvSpPr>
         <p:spPr>
           <a:xfrm>
-            <a:off x="2697480" y="1645920"/>
-            <a:ext cx="2103120" cy="1828800"/>
+            <a:off x="4160520" y="1645920"/>
+            <a:ext cx="3474720" cy="1828800"/>
           </a:xfrm>
           <a:prstGeom prst="roundRect">
             <a:avLst/>
@@ -6824,14 +7210,14 @@
         </p:nvSpPr>
         <p:spPr>
           <a:xfrm>
-            <a:off x="2697480" y="1645920"/>
-            <a:ext cx="2103120" cy="411480"/>
+            <a:off x="4160520" y="1645920"/>
+            <a:ext cx="3474720" cy="411480"/>
           </a:xfrm>
           <a:prstGeom prst="roundRect">
             <a:avLst/>
           </a:prstGeom>
           <a:solidFill>
-            <a:srgbClr val="0082CC"/>
+            <a:srgbClr val="0069B0"/>
           </a:solidFill>
           <a:ln>
             <a:noFill/>
@@ -6867,8 +7253,8 @@
         </p:nvSpPr>
         <p:spPr>
           <a:xfrm>
-            <a:off x="2788920" y="1673352"/>
-            <a:ext cx="1920240" cy="320040"/>
+            <a:off x="4251960" y="1673352"/>
+            <a:ext cx="3291840" cy="320040"/>
           </a:xfrm>
           <a:prstGeom prst="rect">
             <a:avLst/>
@@ -6892,7 +7278,7 @@
                   <a:srgbClr val="FFFFFF"/>
                 </a:solidFill>
               </a:rPr>
-              <a:t>Release 1.1.0</a:t>
+              <a:t>Release 1.2.0</a:t>
             </a:r>
           </a:p>
         </p:txBody>
@@ -6905,8 +7291,8 @@
         </p:nvSpPr>
         <p:spPr>
           <a:xfrm>
-            <a:off x="2788920" y="2148840"/>
-            <a:ext cx="1920240" cy="274320"/>
+            <a:off x="4251960" y="2148840"/>
+            <a:ext cx="3291840" cy="274320"/>
           </a:xfrm>
           <a:prstGeom prst="rect">
             <a:avLst/>
@@ -6927,10 +7313,10 @@
             <a:r>
               <a:rPr sz="800" b="1">
                 <a:solidFill>
-                  <a:srgbClr val="0099D6"/>
-                </a:solidFill>
-              </a:rPr>
-              <a:t>SHIPPED</a:t>
+                  <a:srgbClr val="0069B0"/>
+                </a:solidFill>
+              </a:rPr>
+              <a:t>CURRENT</a:t>
             </a:r>
           </a:p>
         </p:txBody>
@@ -6943,8 +7329,8 @@
         </p:nvSpPr>
         <p:spPr>
           <a:xfrm>
-            <a:off x="2788920" y="2423160"/>
-            <a:ext cx="1920240" cy="822960"/>
+            <a:off x="4251960" y="2423160"/>
+            <a:ext cx="3291840" cy="822960"/>
           </a:xfrm>
           <a:prstGeom prst="rect">
             <a:avLst/>
@@ -6968,8 +7354,8 @@
                   <a:srgbClr val="555555"/>
                 </a:solidFill>
               </a:rPr>
-              <a:t>Error Handling &amp;
-Message Validation</a:t>
+              <a:t>Degradation &amp;
+Configuration Mgmt</a:t>
             </a:r>
           </a:p>
         </p:txBody>
@@ -6982,8 +7368,8 @@
         </p:nvSpPr>
         <p:spPr>
           <a:xfrm>
-            <a:off x="4937760" y="1645920"/>
-            <a:ext cx="2103120" cy="1828800"/>
+            <a:off x="7863840" y="1645920"/>
+            <a:ext cx="3474720" cy="1828800"/>
           </a:xfrm>
           <a:prstGeom prst="roundRect">
             <a:avLst/>
@@ -7027,211 +7413,8 @@
         </p:nvSpPr>
         <p:spPr>
           <a:xfrm>
-            <a:off x="4937760" y="1645920"/>
-            <a:ext cx="2103120" cy="411480"/>
-          </a:xfrm>
-          <a:prstGeom prst="roundRect">
-            <a:avLst/>
-          </a:prstGeom>
-          <a:solidFill>
-            <a:srgbClr val="0069B0"/>
-          </a:solidFill>
-          <a:ln>
-            <a:noFill/>
-          </a:ln>
-        </p:spPr>
-        <p:style>
-          <a:lnRef idx="1">
-            <a:schemeClr val="accent1"/>
-          </a:lnRef>
-          <a:fillRef idx="3">
-            <a:schemeClr val="accent1"/>
-          </a:fillRef>
-          <a:effectRef idx="2">
-            <a:schemeClr val="accent1"/>
-          </a:effectRef>
-          <a:fontRef idx="minor">
-            <a:schemeClr val="lt1"/>
-          </a:fontRef>
-        </p:style>
-        <p:txBody>
-          <a:bodyPr rtlCol="0" anchor="ctr"/>
-          <a:lstStyle/>
-          <a:p>
-            <a:pPr algn="ctr"/>
-          </a:p>
-        </p:txBody>
-      </p:sp>
-      <p:sp>
-        <p:nvSpPr>
-          <p:cNvPr id="16" name="TextBox 15"/>
-          <p:cNvSpPr txBox="1"/>
-          <p:nvPr/>
-        </p:nvSpPr>
-        <p:spPr>
-          <a:xfrm>
-            <a:off x="5029200" y="1673352"/>
-            <a:ext cx="1920240" cy="320040"/>
-          </a:xfrm>
-          <a:prstGeom prst="rect">
-            <a:avLst/>
-          </a:prstGeom>
-          <a:noFill/>
-        </p:spPr>
-        <p:txBody>
-          <a:bodyPr wrap="square">
-            <a:spAutoFit/>
-          </a:bodyPr>
-          <a:lstStyle/>
-          <a:p>
-            <a:pPr algn="l">
-              <a:spcAft>
-                <a:spcPts val="0"/>
-              </a:spcAft>
-            </a:pPr>
-            <a:r>
-              <a:rPr sz="1100" b="1">
-                <a:solidFill>
-                  <a:srgbClr val="FFFFFF"/>
-                </a:solidFill>
-              </a:rPr>
-              <a:t>Release 1.2.0</a:t>
-            </a:r>
-          </a:p>
-        </p:txBody>
-      </p:sp>
-      <p:sp>
-        <p:nvSpPr>
-          <p:cNvPr id="17" name="TextBox 16"/>
-          <p:cNvSpPr txBox="1"/>
-          <p:nvPr/>
-        </p:nvSpPr>
-        <p:spPr>
-          <a:xfrm>
-            <a:off x="5029200" y="2148840"/>
-            <a:ext cx="1920240" cy="274320"/>
-          </a:xfrm>
-          <a:prstGeom prst="rect">
-            <a:avLst/>
-          </a:prstGeom>
-          <a:noFill/>
-        </p:spPr>
-        <p:txBody>
-          <a:bodyPr wrap="square">
-            <a:spAutoFit/>
-          </a:bodyPr>
-          <a:lstStyle/>
-          <a:p>
-            <a:pPr algn="l">
-              <a:spcAft>
-                <a:spcPts val="0"/>
-              </a:spcAft>
-            </a:pPr>
-            <a:r>
-              <a:rPr sz="800" b="1">
-                <a:solidFill>
-                  <a:srgbClr val="0069B0"/>
-                </a:solidFill>
-              </a:rPr>
-              <a:t>CURRENT</a:t>
-            </a:r>
-          </a:p>
-        </p:txBody>
-      </p:sp>
-      <p:sp>
-        <p:nvSpPr>
-          <p:cNvPr id="18" name="TextBox 17"/>
-          <p:cNvSpPr txBox="1"/>
-          <p:nvPr/>
-        </p:nvSpPr>
-        <p:spPr>
-          <a:xfrm>
-            <a:off x="5029200" y="2423160"/>
-            <a:ext cx="1920240" cy="822960"/>
-          </a:xfrm>
-          <a:prstGeom prst="rect">
-            <a:avLst/>
-          </a:prstGeom>
-          <a:noFill/>
-        </p:spPr>
-        <p:txBody>
-          <a:bodyPr wrap="square">
-            <a:spAutoFit/>
-          </a:bodyPr>
-          <a:lstStyle/>
-          <a:p>
-            <a:pPr algn="l">
-              <a:spcAft>
-                <a:spcPts val="0"/>
-              </a:spcAft>
-            </a:pPr>
-            <a:r>
-              <a:rPr sz="900" b="0">
-                <a:solidFill>
-                  <a:srgbClr val="555555"/>
-                </a:solidFill>
-              </a:rPr>
-              <a:t>Degradation &amp;
-Configuration Mgmt</a:t>
-            </a:r>
-          </a:p>
-        </p:txBody>
-      </p:sp>
-      <p:sp>
-        <p:nvSpPr>
-          <p:cNvPr id="19" name="Rounded Rectangle 18"/>
-          <p:cNvSpPr/>
-          <p:nvPr/>
-        </p:nvSpPr>
-        <p:spPr>
-          <a:xfrm>
-            <a:off x="7178040" y="1645920"/>
-            <a:ext cx="2103120" cy="1828800"/>
-          </a:xfrm>
-          <a:prstGeom prst="roundRect">
-            <a:avLst/>
-          </a:prstGeom>
-          <a:solidFill>
-            <a:srgbClr val="F4F7FA"/>
-          </a:solidFill>
-          <a:ln w="12700">
-            <a:solidFill>
-              <a:srgbClr val="D0E8F8"/>
-            </a:solidFill>
-          </a:ln>
-        </p:spPr>
-        <p:style>
-          <a:lnRef idx="1">
-            <a:schemeClr val="accent1"/>
-          </a:lnRef>
-          <a:fillRef idx="3">
-            <a:schemeClr val="accent1"/>
-          </a:fillRef>
-          <a:effectRef idx="2">
-            <a:schemeClr val="accent1"/>
-          </a:effectRef>
-          <a:fontRef idx="minor">
-            <a:schemeClr val="lt1"/>
-          </a:fontRef>
-        </p:style>
-        <p:txBody>
-          <a:bodyPr rtlCol="0" anchor="ctr"/>
-          <a:lstStyle/>
-          <a:p>
-            <a:pPr algn="ctr"/>
-          </a:p>
-        </p:txBody>
-      </p:sp>
-      <p:sp>
-        <p:nvSpPr>
-          <p:cNvPr id="20" name="Rounded Rectangle 19"/>
-          <p:cNvSpPr/>
-          <p:nvPr/>
-        </p:nvSpPr>
-        <p:spPr>
-          <a:xfrm>
-            <a:off x="7178040" y="1645920"/>
-            <a:ext cx="2103120" cy="411480"/>
+            <a:off x="7863840" y="1645920"/>
+            <a:ext cx="3474720" cy="411480"/>
           </a:xfrm>
           <a:prstGeom prst="roundRect">
             <a:avLst/>
@@ -7267,14 +7450,14 @@
       </p:sp>
       <p:sp>
         <p:nvSpPr>
-          <p:cNvPr id="21" name="TextBox 20"/>
-          <p:cNvSpPr txBox="1"/>
-          <p:nvPr/>
-        </p:nvSpPr>
-        <p:spPr>
-          <a:xfrm>
-            <a:off x="7269480" y="1673352"/>
-            <a:ext cx="1920240" cy="320040"/>
+          <p:cNvPr id="16" name="TextBox 15"/>
+          <p:cNvSpPr txBox="1"/>
+          <p:nvPr/>
+        </p:nvSpPr>
+        <p:spPr>
+          <a:xfrm>
+            <a:off x="7955280" y="1673352"/>
+            <a:ext cx="3291840" cy="320040"/>
           </a:xfrm>
           <a:prstGeom prst="rect">
             <a:avLst/>
@@ -7305,14 +7488,14 @@
       </p:sp>
       <p:sp>
         <p:nvSpPr>
-          <p:cNvPr id="22" name="TextBox 21"/>
-          <p:cNvSpPr txBox="1"/>
-          <p:nvPr/>
-        </p:nvSpPr>
-        <p:spPr>
-          <a:xfrm>
-            <a:off x="7269480" y="2148840"/>
-            <a:ext cx="1920240" cy="274320"/>
+          <p:cNvPr id="17" name="TextBox 16"/>
+          <p:cNvSpPr txBox="1"/>
+          <p:nvPr/>
+        </p:nvSpPr>
+        <p:spPr>
+          <a:xfrm>
+            <a:off x="7955280" y="2148840"/>
+            <a:ext cx="3291840" cy="274320"/>
           </a:xfrm>
           <a:prstGeom prst="rect">
             <a:avLst/>
@@ -7343,14 +7526,14 @@
       </p:sp>
       <p:sp>
         <p:nvSpPr>
-          <p:cNvPr id="23" name="TextBox 22"/>
-          <p:cNvSpPr txBox="1"/>
-          <p:nvPr/>
-        </p:nvSpPr>
-        <p:spPr>
-          <a:xfrm>
-            <a:off x="7269480" y="2423160"/>
-            <a:ext cx="1920240" cy="822960"/>
+          <p:cNvPr id="18" name="TextBox 17"/>
+          <p:cNvSpPr txBox="1"/>
+          <p:nvPr/>
+        </p:nvSpPr>
+        <p:spPr>
+          <a:xfrm>
+            <a:off x="7955280" y="2423160"/>
+            <a:ext cx="3291840" cy="822960"/>
           </a:xfrm>
           <a:prstGeom prst="rect">
             <a:avLst/>
@@ -7382,210 +7565,7 @@
       </p:sp>
       <p:sp>
         <p:nvSpPr>
-          <p:cNvPr id="24" name="Rounded Rectangle 23"/>
-          <p:cNvSpPr/>
-          <p:nvPr/>
-        </p:nvSpPr>
-        <p:spPr>
-          <a:xfrm>
-            <a:off x="9418320" y="1645920"/>
-            <a:ext cx="2103120" cy="1828800"/>
-          </a:xfrm>
-          <a:prstGeom prst="roundRect">
-            <a:avLst/>
-          </a:prstGeom>
-          <a:solidFill>
-            <a:srgbClr val="F4F7FA"/>
-          </a:solidFill>
-          <a:ln w="12700">
-            <a:solidFill>
-              <a:srgbClr val="D0E8F8"/>
-            </a:solidFill>
-          </a:ln>
-        </p:spPr>
-        <p:style>
-          <a:lnRef idx="1">
-            <a:schemeClr val="accent1"/>
-          </a:lnRef>
-          <a:fillRef idx="3">
-            <a:schemeClr val="accent1"/>
-          </a:fillRef>
-          <a:effectRef idx="2">
-            <a:schemeClr val="accent1"/>
-          </a:effectRef>
-          <a:fontRef idx="minor">
-            <a:schemeClr val="lt1"/>
-          </a:fontRef>
-        </p:style>
-        <p:txBody>
-          <a:bodyPr rtlCol="0" anchor="ctr"/>
-          <a:lstStyle/>
-          <a:p>
-            <a:pPr algn="ctr"/>
-          </a:p>
-        </p:txBody>
-      </p:sp>
-      <p:sp>
-        <p:nvSpPr>
-          <p:cNvPr id="25" name="Rounded Rectangle 24"/>
-          <p:cNvSpPr/>
-          <p:nvPr/>
-        </p:nvSpPr>
-        <p:spPr>
-          <a:xfrm>
-            <a:off x="9418320" y="1645920"/>
-            <a:ext cx="2103120" cy="411480"/>
-          </a:xfrm>
-          <a:prstGeom prst="roundRect">
-            <a:avLst/>
-          </a:prstGeom>
-          <a:solidFill>
-            <a:srgbClr val="888888"/>
-          </a:solidFill>
-          <a:ln>
-            <a:noFill/>
-          </a:ln>
-        </p:spPr>
-        <p:style>
-          <a:lnRef idx="1">
-            <a:schemeClr val="accent1"/>
-          </a:lnRef>
-          <a:fillRef idx="3">
-            <a:schemeClr val="accent1"/>
-          </a:fillRef>
-          <a:effectRef idx="2">
-            <a:schemeClr val="accent1"/>
-          </a:effectRef>
-          <a:fontRef idx="minor">
-            <a:schemeClr val="lt1"/>
-          </a:fontRef>
-        </p:style>
-        <p:txBody>
-          <a:bodyPr rtlCol="0" anchor="ctr"/>
-          <a:lstStyle/>
-          <a:p>
-            <a:pPr algn="ctr"/>
-          </a:p>
-        </p:txBody>
-      </p:sp>
-      <p:sp>
-        <p:nvSpPr>
-          <p:cNvPr id="26" name="TextBox 25"/>
-          <p:cNvSpPr txBox="1"/>
-          <p:nvPr/>
-        </p:nvSpPr>
-        <p:spPr>
-          <a:xfrm>
-            <a:off x="9509760" y="1673352"/>
-            <a:ext cx="1920240" cy="320040"/>
-          </a:xfrm>
-          <a:prstGeom prst="rect">
-            <a:avLst/>
-          </a:prstGeom>
-          <a:noFill/>
-        </p:spPr>
-        <p:txBody>
-          <a:bodyPr wrap="square">
-            <a:spAutoFit/>
-          </a:bodyPr>
-          <a:lstStyle/>
-          <a:p>
-            <a:pPr algn="l">
-              <a:spcAft>
-                <a:spcPts val="0"/>
-              </a:spcAft>
-            </a:pPr>
-            <a:r>
-              <a:rPr sz="1100" b="1">
-                <a:solidFill>
-                  <a:srgbClr val="FFFFFF"/>
-                </a:solidFill>
-              </a:rPr>
-              <a:t>Release 2.1.0</a:t>
-            </a:r>
-          </a:p>
-        </p:txBody>
-      </p:sp>
-      <p:sp>
-        <p:nvSpPr>
-          <p:cNvPr id="27" name="TextBox 26"/>
-          <p:cNvSpPr txBox="1"/>
-          <p:nvPr/>
-        </p:nvSpPr>
-        <p:spPr>
-          <a:xfrm>
-            <a:off x="9509760" y="2148840"/>
-            <a:ext cx="1920240" cy="274320"/>
-          </a:xfrm>
-          <a:prstGeom prst="rect">
-            <a:avLst/>
-          </a:prstGeom>
-          <a:noFill/>
-        </p:spPr>
-        <p:txBody>
-          <a:bodyPr wrap="square">
-            <a:spAutoFit/>
-          </a:bodyPr>
-          <a:lstStyle/>
-          <a:p>
-            <a:pPr algn="l">
-              <a:spcAft>
-                <a:spcPts val="0"/>
-              </a:spcAft>
-            </a:pPr>
-            <a:r>
-              <a:rPr sz="800" b="1">
-                <a:solidFill>
-                  <a:srgbClr val="888888"/>
-                </a:solidFill>
-              </a:rPr>
-              <a:t>PLANNED</a:t>
-            </a:r>
-          </a:p>
-        </p:txBody>
-      </p:sp>
-      <p:sp>
-        <p:nvSpPr>
-          <p:cNvPr id="28" name="TextBox 27"/>
-          <p:cNvSpPr txBox="1"/>
-          <p:nvPr/>
-        </p:nvSpPr>
-        <p:spPr>
-          <a:xfrm>
-            <a:off x="9509760" y="2423160"/>
-            <a:ext cx="1920240" cy="822960"/>
-          </a:xfrm>
-          <a:prstGeom prst="rect">
-            <a:avLst/>
-          </a:prstGeom>
-          <a:noFill/>
-        </p:spPr>
-        <p:txBody>
-          <a:bodyPr wrap="square">
-            <a:spAutoFit/>
-          </a:bodyPr>
-          <a:lstStyle/>
-          <a:p>
-            <a:pPr algn="l">
-              <a:spcAft>
-                <a:spcPts val="0"/>
-              </a:spcAft>
-            </a:pPr>
-            <a:r>
-              <a:rPr sz="900" b="0">
-                <a:solidFill>
-                  <a:srgbClr val="555555"/>
-                </a:solidFill>
-              </a:rPr>
-              <a:t>Firmware Update &amp;
-Network Tolerance</a:t>
-            </a:r>
-          </a:p>
-        </p:txBody>
-      </p:sp>
-      <p:sp>
-        <p:nvSpPr>
-          <p:cNvPr id="29" name="TextBox 28"/>
+          <p:cNvPr id="19" name="TextBox 18"/>
           <p:cNvSpPr txBox="1"/>
           <p:nvPr/>
         </p:nvSpPr>
@@ -7623,7 +7603,7 @@
       </p:sp>
       <p:sp>
         <p:nvSpPr>
-          <p:cNvPr id="30" name="TextBox 29"/>
+          <p:cNvPr id="20" name="TextBox 19"/>
           <p:cNvSpPr txBox="1"/>
           <p:nvPr/>
         </p:nvSpPr>
@@ -7676,7 +7656,7 @@
       </p:sp>
       <p:sp>
         <p:nvSpPr>
-          <p:cNvPr id="31" name="TextBox 30"/>
+          <p:cNvPr id="21" name="TextBox 20"/>
           <p:cNvSpPr txBox="1"/>
           <p:nvPr/>
         </p:nvSpPr>
@@ -7729,7 +7709,7 @@
       </p:sp>
       <p:sp>
         <p:nvSpPr>
-          <p:cNvPr id="32" name="TextBox 31"/>
+          <p:cNvPr id="22" name="TextBox 21"/>
           <p:cNvSpPr txBox="1"/>
           <p:nvPr/>
         </p:nvSpPr>
@@ -7782,7 +7762,7 @@
       </p:sp>
       <p:sp>
         <p:nvSpPr>
-          <p:cNvPr id="33" name="TextBox 32"/>
+          <p:cNvPr id="23" name="TextBox 22"/>
           <p:cNvSpPr txBox="1"/>
           <p:nvPr/>
         </p:nvSpPr>
@@ -7820,7 +7800,7 @@
       </p:sp>
       <p:sp>
         <p:nvSpPr>
-          <p:cNvPr id="34" name="TextBox 33"/>
+          <p:cNvPr id="24" name="TextBox 23"/>
           <p:cNvSpPr txBox="1"/>
           <p:nvPr/>
         </p:nvSpPr>
@@ -7873,7 +7853,7 @@
       </p:sp>
       <p:sp>
         <p:nvSpPr>
-          <p:cNvPr id="35" name="TextBox 34"/>
+          <p:cNvPr id="25" name="TextBox 24"/>
           <p:cNvSpPr txBox="1"/>
           <p:nvPr/>
         </p:nvSpPr>
@@ -7926,7 +7906,7 @@
       </p:sp>
       <p:sp>
         <p:nvSpPr>
-          <p:cNvPr id="36" name="TextBox 35"/>
+          <p:cNvPr id="26" name="TextBox 25"/>
           <p:cNvSpPr txBox="1"/>
           <p:nvPr/>
         </p:nvSpPr>
@@ -7979,7 +7959,7 @@
       </p:sp>
       <p:sp>
         <p:nvSpPr>
-          <p:cNvPr id="37" name="Rounded Rectangle 36"/>
+          <p:cNvPr id="27" name="Rounded Rectangle 26"/>
           <p:cNvSpPr/>
           <p:nvPr/>
         </p:nvSpPr>
@@ -8024,7 +8004,7 @@
       </p:sp>
       <p:sp>
         <p:nvSpPr>
-          <p:cNvPr id="38" name="TextBox 37"/>
+          <p:cNvPr id="28" name="TextBox 27"/>
           <p:cNvSpPr txBox="1"/>
           <p:nvPr/>
         </p:nvSpPr>
@@ -8062,7 +8042,7 @@
       </p:sp>
       <p:sp>
         <p:nvSpPr>
-          <p:cNvPr id="39" name="TextBox 38"/>
+          <p:cNvPr id="29" name="TextBox 28"/>
           <p:cNvSpPr txBox="1"/>
           <p:nvPr/>
         </p:nvSpPr>
@@ -10471,7 +10451,90 @@
       </p:sp>
       <p:sp>
         <p:nvSpPr>
-          <p:cNvPr id="13" name="TextBox 12"/>
+          <p:cNvPr id="13" name="Rounded Rectangle 12"/>
+          <p:cNvSpPr/>
+          <p:nvPr/>
+        </p:nvSpPr>
+        <p:spPr>
+          <a:xfrm>
+            <a:off x="457200" y="5486400"/>
+            <a:ext cx="11247120" cy="411480"/>
+          </a:xfrm>
+          <a:prstGeom prst="roundRect">
+            <a:avLst/>
+          </a:prstGeom>
+          <a:solidFill>
+            <a:srgbClr val="142538"/>
+          </a:solidFill>
+          <a:ln w="12700">
+            <a:solidFill>
+              <a:srgbClr val="0069B0"/>
+            </a:solidFill>
+          </a:ln>
+        </p:spPr>
+        <p:style>
+          <a:lnRef idx="1">
+            <a:schemeClr val="accent1"/>
+          </a:lnRef>
+          <a:fillRef idx="3">
+            <a:schemeClr val="accent1"/>
+          </a:fillRef>
+          <a:effectRef idx="2">
+            <a:schemeClr val="accent1"/>
+          </a:effectRef>
+          <a:fontRef idx="minor">
+            <a:schemeClr val="lt1"/>
+          </a:fontRef>
+        </p:style>
+        <p:txBody>
+          <a:bodyPr rtlCol="0" anchor="ctr"/>
+          <a:lstStyle/>
+          <a:p>
+            <a:pPr algn="ctr"/>
+          </a:p>
+        </p:txBody>
+      </p:sp>
+      <p:sp>
+        <p:nvSpPr>
+          <p:cNvPr id="14" name="TextBox 13"/>
+          <p:cNvSpPr txBox="1"/>
+          <p:nvPr/>
+        </p:nvSpPr>
+        <p:spPr>
+          <a:xfrm>
+            <a:off x="731520" y="5541264"/>
+            <a:ext cx="10789920" cy="320040"/>
+          </a:xfrm>
+          <a:prstGeom prst="rect">
+            <a:avLst/>
+          </a:prstGeom>
+          <a:noFill/>
+        </p:spPr>
+        <p:txBody>
+          <a:bodyPr wrap="square">
+            <a:spAutoFit/>
+          </a:bodyPr>
+          <a:lstStyle/>
+          <a:p>
+            <a:pPr algn="ctr">
+              <a:spcAft>
+                <a:spcPts val="0"/>
+              </a:spcAft>
+            </a:pPr>
+            <a:r>
+              <a:rPr sz="1100" b="1">
+                <a:solidFill>
+                  <a:srgbClr val="FFFFFF"/>
+                </a:solidFill>
+              </a:rPr>
+              <a:t>One spec. Readable by engineers. Executable by machines. Traceable to every requirement.</a:t>
+            </a:r>
+          </a:p>
+        </p:txBody>
+      </p:sp>
+      <p:sp>
+        <p:nvSpPr>
+          <p:cNvPr id="15" name="TextBox 14"/>
           <p:cNvSpPr txBox="1"/>
           <p:nvPr/>
         </p:nvSpPr>

--- a/docs/presentations/MBSE_Pipeline_Executive_Brief.pptx
+++ b/docs/presentations/MBSE_Pipeline_Executive_Brief.pptx
@@ -5177,8 +5177,8 @@
         </p:nvSpPr>
         <p:spPr>
           <a:xfrm>
-            <a:off x="9326880" y="2587752"/>
-            <a:ext cx="548640" cy="274320"/>
+            <a:off x="8321040" y="2560320"/>
+            <a:ext cx="2560320" cy="274320"/>
           </a:xfrm>
           <a:prstGeom prst="rect">
             <a:avLst/>
@@ -5197,12 +5197,12 @@
               </a:spcAft>
             </a:pPr>
             <a:r>
-              <a:rPr sz="1600" b="1">
-                <a:solidFill>
-                  <a:srgbClr val="CC3333"/>
-                </a:solidFill>
-              </a:rPr>
-              <a:t>✘</a:t>
+              <a:rPr sz="900" b="1">
+                <a:solidFill>
+                  <a:srgbClr val="924000"/>
+                </a:solidFill>
+              </a:rPr>
+              <a:t>✋  manual handoff</a:t>
             </a:r>
           </a:p>
         </p:txBody>
@@ -5215,8 +5215,8 @@
         </p:nvSpPr>
         <p:spPr>
           <a:xfrm>
-            <a:off x="9326880" y="3547872"/>
-            <a:ext cx="548640" cy="274320"/>
+            <a:off x="8321040" y="3520440"/>
+            <a:ext cx="2560320" cy="274320"/>
           </a:xfrm>
           <a:prstGeom prst="rect">
             <a:avLst/>
@@ -5235,12 +5235,12 @@
               </a:spcAft>
             </a:pPr>
             <a:r>
-              <a:rPr sz="1600" b="1">
-                <a:solidFill>
-                  <a:srgbClr val="CC3333"/>
-                </a:solidFill>
-              </a:rPr>
-              <a:t>✘</a:t>
+              <a:rPr sz="900" b="1">
+                <a:solidFill>
+                  <a:srgbClr val="924000"/>
+                </a:solidFill>
+              </a:rPr>
+              <a:t>✋  manual handoff</a:t>
             </a:r>
           </a:p>
         </p:txBody>
@@ -5275,7 +5275,7 @@
             <a:r>
               <a:rPr sz="1000" b="1">
                 <a:solidFill>
-                  <a:srgbClr val="CC3333"/>
+                  <a:srgbClr val="924000"/>
                 </a:solidFill>
               </a:rPr>
               <a:t>No automated thread</a:t>
@@ -5293,7 +5293,7 @@
                   <a:srgbClr val="888888"/>
                 </a:solidFill>
               </a:rPr>
-              <a:t>Manual handoffs at every stage</a:t>
+              <a:t>Slow, fragile, unversioned</a:t>
             </a:r>
           </a:p>
         </p:txBody>

--- a/docs/presentations/MBSE_Pipeline_Executive_Brief.pptx
+++ b/docs/presentations/MBSE_Pipeline_Executive_Brief.pptx
@@ -8188,8 +8188,8 @@
         </p:nvSpPr>
         <p:spPr>
           <a:xfrm>
-            <a:off x="457200" y="4937760"/>
-            <a:ext cx="5029200" cy="685800"/>
+            <a:off x="731520" y="5029200"/>
+            <a:ext cx="4572000" cy="640080"/>
           </a:xfrm>
           <a:prstGeom prst="roundRect">
             <a:avLst/>
@@ -8231,8 +8231,8 @@
         </p:nvSpPr>
         <p:spPr>
           <a:xfrm>
-            <a:off x="548640" y="5029200"/>
-            <a:ext cx="4846320" cy="594360"/>
+            <a:off x="822960" y="5074920"/>
+            <a:ext cx="4389120" cy="274320"/>
           </a:xfrm>
           <a:prstGeom prst="rect">
             <a:avLst/>
@@ -8263,14 +8263,52 @@
       </p:sp>
       <p:sp>
         <p:nvSpPr>
-          <p:cNvPr id="6" name="Rounded Rectangle 5"/>
+          <p:cNvPr id="6" name="TextBox 5"/>
+          <p:cNvSpPr txBox="1"/>
+          <p:nvPr/>
+        </p:nvSpPr>
+        <p:spPr>
+          <a:xfrm>
+            <a:off x="822960" y="5349240"/>
+            <a:ext cx="4389120" cy="274320"/>
+          </a:xfrm>
+          <a:prstGeom prst="rect">
+            <a:avLst/>
+          </a:prstGeom>
+          <a:noFill/>
+        </p:spPr>
+        <p:txBody>
+          <a:bodyPr wrap="square">
+            <a:spAutoFit/>
+          </a:bodyPr>
+          <a:lstStyle/>
+          <a:p>
+            <a:pPr algn="ctr">
+              <a:spcAft>
+                <a:spcPts val="0"/>
+              </a:spcAft>
+            </a:pPr>
+            <a:r>
+              <a:rPr sz="800" b="0">
+                <a:solidFill>
+                  <a:srgbClr val="FFFFFF"/>
+                </a:solidFill>
+              </a:rPr>
+              <a:t>Linting, type checks, code standards</a:t>
+            </a:r>
+          </a:p>
+        </p:txBody>
+      </p:sp>
+      <p:sp>
+        <p:nvSpPr>
+          <p:cNvPr id="7" name="Rounded Rectangle 6"/>
           <p:cNvSpPr/>
           <p:nvPr/>
         </p:nvSpPr>
         <p:spPr>
           <a:xfrm>
-            <a:off x="822960" y="4114800"/>
-            <a:ext cx="4297680" cy="685800"/>
+            <a:off x="1051560" y="4251960"/>
+            <a:ext cx="3931920" cy="640080"/>
           </a:xfrm>
           <a:prstGeom prst="roundRect">
             <a:avLst/>
@@ -8306,14 +8344,14 @@
       </p:sp>
       <p:sp>
         <p:nvSpPr>
-          <p:cNvPr id="7" name="TextBox 6"/>
-          <p:cNvSpPr txBox="1"/>
-          <p:nvPr/>
-        </p:nvSpPr>
-        <p:spPr>
-          <a:xfrm>
-            <a:off x="914400" y="4206240"/>
-            <a:ext cx="4114800" cy="594360"/>
+          <p:cNvPr id="8" name="TextBox 7"/>
+          <p:cNvSpPr txBox="1"/>
+          <p:nvPr/>
+        </p:nvSpPr>
+        <p:spPr>
+          <a:xfrm>
+            <a:off x="1143000" y="4297680"/>
+            <a:ext cx="3749040" cy="274320"/>
           </a:xfrm>
           <a:prstGeom prst="rect">
             <a:avLst/>
@@ -8344,14 +8382,52 @@
       </p:sp>
       <p:sp>
         <p:nvSpPr>
-          <p:cNvPr id="8" name="Rounded Rectangle 7"/>
+          <p:cNvPr id="9" name="TextBox 8"/>
+          <p:cNvSpPr txBox="1"/>
+          <p:nvPr/>
+        </p:nvSpPr>
+        <p:spPr>
+          <a:xfrm>
+            <a:off x="1143000" y="4572000"/>
+            <a:ext cx="3749040" cy="274320"/>
+          </a:xfrm>
+          <a:prstGeom prst="rect">
+            <a:avLst/>
+          </a:prstGeom>
+          <a:noFill/>
+        </p:spPr>
+        <p:txBody>
+          <a:bodyPr wrap="square">
+            <a:spAutoFit/>
+          </a:bodyPr>
+          <a:lstStyle/>
+          <a:p>
+            <a:pPr algn="ctr">
+              <a:spcAft>
+                <a:spcPts val="0"/>
+              </a:spcAft>
+            </a:pPr>
+            <a:r>
+              <a:rPr sz="800" b="0">
+                <a:solidFill>
+                  <a:srgbClr val="FFFFFF"/>
+                </a:solidFill>
+              </a:rPr>
+              <a:t>Individual functions, logic correctness</a:t>
+            </a:r>
+          </a:p>
+        </p:txBody>
+      </p:sp>
+      <p:sp>
+        <p:nvSpPr>
+          <p:cNvPr id="10" name="Rounded Rectangle 9"/>
           <p:cNvSpPr/>
           <p:nvPr/>
         </p:nvSpPr>
         <p:spPr>
           <a:xfrm>
-            <a:off x="1188720" y="3291840"/>
-            <a:ext cx="3566160" cy="685800"/>
+            <a:off x="1371600" y="3474720"/>
+            <a:ext cx="3291840" cy="640080"/>
           </a:xfrm>
           <a:prstGeom prst="roundRect">
             <a:avLst/>
@@ -8387,14 +8463,14 @@
       </p:sp>
       <p:sp>
         <p:nvSpPr>
-          <p:cNvPr id="9" name="TextBox 8"/>
-          <p:cNvSpPr txBox="1"/>
-          <p:nvPr/>
-        </p:nvSpPr>
-        <p:spPr>
-          <a:xfrm>
-            <a:off x="1280160" y="3383280"/>
-            <a:ext cx="3383280" cy="594360"/>
+          <p:cNvPr id="11" name="TextBox 10"/>
+          <p:cNvSpPr txBox="1"/>
+          <p:nvPr/>
+        </p:nvSpPr>
+        <p:spPr>
+          <a:xfrm>
+            <a:off x="1463040" y="3520440"/>
+            <a:ext cx="3108960" cy="274320"/>
           </a:xfrm>
           <a:prstGeom prst="rect">
             <a:avLst/>
@@ -8425,14 +8501,52 @@
       </p:sp>
       <p:sp>
         <p:nvSpPr>
-          <p:cNvPr id="10" name="Rounded Rectangle 9"/>
+          <p:cNvPr id="12" name="TextBox 11"/>
+          <p:cNvSpPr txBox="1"/>
+          <p:nvPr/>
+        </p:nvSpPr>
+        <p:spPr>
+          <a:xfrm>
+            <a:off x="1463040" y="3794760"/>
+            <a:ext cx="3108960" cy="274320"/>
+          </a:xfrm>
+          <a:prstGeom prst="rect">
+            <a:avLst/>
+          </a:prstGeom>
+          <a:noFill/>
+        </p:spPr>
+        <p:txBody>
+          <a:bodyPr wrap="square">
+            <a:spAutoFit/>
+          </a:bodyPr>
+          <a:lstStyle/>
+          <a:p>
+            <a:pPr algn="ctr">
+              <a:spcAft>
+                <a:spcPts val="0"/>
+              </a:spcAft>
+            </a:pPr>
+            <a:r>
+              <a:rPr sz="800" b="0">
+                <a:solidFill>
+                  <a:srgbClr val="FFFFFF"/>
+                </a:solidFill>
+              </a:rPr>
+              <a:t>Component interfaces, API contracts</a:t>
+            </a:r>
+          </a:p>
+        </p:txBody>
+      </p:sp>
+      <p:sp>
+        <p:nvSpPr>
+          <p:cNvPr id="13" name="Rounded Rectangle 12"/>
           <p:cNvSpPr/>
           <p:nvPr/>
         </p:nvSpPr>
         <p:spPr>
           <a:xfrm>
-            <a:off x="1554480" y="2468880"/>
-            <a:ext cx="2834640" cy="685800"/>
+            <a:off x="1691640" y="2697480"/>
+            <a:ext cx="2651760" cy="640080"/>
           </a:xfrm>
           <a:prstGeom prst="roundRect">
             <a:avLst/>
@@ -8470,14 +8584,14 @@
       </p:sp>
       <p:sp>
         <p:nvSpPr>
-          <p:cNvPr id="11" name="TextBox 10"/>
-          <p:cNvSpPr txBox="1"/>
-          <p:nvPr/>
-        </p:nvSpPr>
-        <p:spPr>
-          <a:xfrm>
-            <a:off x="1645920" y="2560320"/>
-            <a:ext cx="2651760" cy="594360"/>
+          <p:cNvPr id="14" name="TextBox 13"/>
+          <p:cNvSpPr txBox="1"/>
+          <p:nvPr/>
+        </p:nvSpPr>
+        <p:spPr>
+          <a:xfrm>
+            <a:off x="1783080" y="2743200"/>
+            <a:ext cx="2468880" cy="274320"/>
           </a:xfrm>
           <a:prstGeom prst="rect">
             <a:avLst/>
@@ -8501,21 +8615,59 @@
                   <a:srgbClr val="FFFFFF"/>
                 </a:solidFill>
               </a:rPr>
-              <a:t>E2E Tests</a:t>
-            </a:r>
-          </a:p>
-        </p:txBody>
-      </p:sp>
-      <p:sp>
-        <p:nvSpPr>
-          <p:cNvPr id="12" name="Rounded Rectangle 11"/>
+              <a:t>E2E / System Tests</a:t>
+            </a:r>
+          </a:p>
+        </p:txBody>
+      </p:sp>
+      <p:sp>
+        <p:nvSpPr>
+          <p:cNvPr id="15" name="TextBox 14"/>
+          <p:cNvSpPr txBox="1"/>
+          <p:nvPr/>
+        </p:nvSpPr>
+        <p:spPr>
+          <a:xfrm>
+            <a:off x="1783080" y="3017520"/>
+            <a:ext cx="2468880" cy="274320"/>
+          </a:xfrm>
+          <a:prstGeom prst="rect">
+            <a:avLst/>
+          </a:prstGeom>
+          <a:noFill/>
+        </p:spPr>
+        <p:txBody>
+          <a:bodyPr wrap="square">
+            <a:spAutoFit/>
+          </a:bodyPr>
+          <a:lstStyle/>
+          <a:p>
+            <a:pPr algn="ctr">
+              <a:spcAft>
+                <a:spcPts val="0"/>
+              </a:spcAft>
+            </a:pPr>
+            <a:r>
+              <a:rPr sz="800" b="0">
+                <a:solidFill>
+                  <a:srgbClr val="FFFFFF"/>
+                </a:solidFill>
+              </a:rPr>
+              <a:t>Requirements verified against deployed product</a:t>
+            </a:r>
+          </a:p>
+        </p:txBody>
+      </p:sp>
+      <p:sp>
+        <p:nvSpPr>
+          <p:cNvPr id="16" name="Rounded Rectangle 15"/>
           <p:cNvSpPr/>
           <p:nvPr/>
         </p:nvSpPr>
         <p:spPr>
           <a:xfrm>
-            <a:off x="1920240" y="1645920"/>
-            <a:ext cx="2103120" cy="685800"/>
+            <a:off x="2011680" y="1920240"/>
+            <a:ext cx="2011680" cy="640080"/>
           </a:xfrm>
           <a:prstGeom prst="roundRect">
             <a:avLst/>
@@ -8551,14 +8703,14 @@
       </p:sp>
       <p:sp>
         <p:nvSpPr>
-          <p:cNvPr id="13" name="TextBox 12"/>
-          <p:cNvSpPr txBox="1"/>
-          <p:nvPr/>
-        </p:nvSpPr>
-        <p:spPr>
-          <a:xfrm>
-            <a:off x="2011680" y="1737360"/>
-            <a:ext cx="1920240" cy="594360"/>
+          <p:cNvPr id="17" name="TextBox 16"/>
+          <p:cNvSpPr txBox="1"/>
+          <p:nvPr/>
+        </p:nvSpPr>
+        <p:spPr>
+          <a:xfrm>
+            <a:off x="2103120" y="1965960"/>
+            <a:ext cx="1828800" cy="274320"/>
           </a:xfrm>
           <a:prstGeom prst="rect">
             <a:avLst/>
@@ -8582,22 +8734,21 @@
                   <a:srgbClr val="FFFFFF"/>
                 </a:solidFill>
               </a:rPr>
-              <a:t>Manual &amp;
-Exploratory</a:t>
-            </a:r>
-          </a:p>
-        </p:txBody>
-      </p:sp>
-      <p:sp>
-        <p:nvSpPr>
-          <p:cNvPr id="14" name="TextBox 13"/>
-          <p:cNvSpPr txBox="1"/>
-          <p:nvPr/>
-        </p:nvSpPr>
-        <p:spPr>
-          <a:xfrm>
-            <a:off x="45720" y="1554480"/>
-            <a:ext cx="365760" cy="4114800"/>
+              <a:t>Manual &amp; Exploratory</a:t>
+            </a:r>
+          </a:p>
+        </p:txBody>
+      </p:sp>
+      <p:sp>
+        <p:nvSpPr>
+          <p:cNvPr id="18" name="TextBox 17"/>
+          <p:cNvSpPr txBox="1"/>
+          <p:nvPr/>
+        </p:nvSpPr>
+        <p:spPr>
+          <a:xfrm>
+            <a:off x="2103120" y="2240280"/>
+            <a:ext cx="1828800" cy="274320"/>
           </a:xfrm>
           <a:prstGeom prst="rect">
             <a:avLst/>
@@ -8616,63 +8767,25 @@
               </a:spcAft>
             </a:pPr>
             <a:r>
-              <a:rPr sz="900" b="1">
-                <a:solidFill>
-                  <a:srgbClr val="888888"/>
-                </a:solidFill>
-              </a:rPr>
-              <a:t>Cost ↑</a:t>
-            </a:r>
-          </a:p>
-        </p:txBody>
-      </p:sp>
-      <p:sp>
-        <p:nvSpPr>
-          <p:cNvPr id="15" name="TextBox 14"/>
-          <p:cNvSpPr txBox="1"/>
-          <p:nvPr/>
-        </p:nvSpPr>
-        <p:spPr>
-          <a:xfrm>
-            <a:off x="5029200" y="5669280"/>
-            <a:ext cx="731520" cy="274320"/>
-          </a:xfrm>
-          <a:prstGeom prst="rect">
-            <a:avLst/>
-          </a:prstGeom>
-          <a:noFill/>
-        </p:spPr>
-        <p:txBody>
-          <a:bodyPr wrap="square">
-            <a:spAutoFit/>
-          </a:bodyPr>
-          <a:lstStyle/>
-          <a:p>
-            <a:pPr algn="l">
-              <a:spcAft>
-                <a:spcPts val="0"/>
-              </a:spcAft>
-            </a:pPr>
-            <a:r>
-              <a:rPr sz="900" b="1">
-                <a:solidFill>
-                  <a:srgbClr val="888888"/>
-                </a:solidFill>
-              </a:rPr>
-              <a:t>Speed →</a:t>
-            </a:r>
-          </a:p>
-        </p:txBody>
-      </p:sp>
-      <p:sp>
-        <p:nvSpPr>
-          <p:cNvPr id="16" name="TextBox 15"/>
-          <p:cNvSpPr txBox="1"/>
-          <p:nvPr/>
-        </p:nvSpPr>
-        <p:spPr>
-          <a:xfrm>
-            <a:off x="4663440" y="2560320"/>
+              <a:rPr sz="800" b="0">
+                <a:solidFill>
+                  <a:srgbClr val="FFFFFF"/>
+                </a:solidFill>
+              </a:rPr>
+              <a:t>Usability, edge cases, human judgment</a:t>
+            </a:r>
+          </a:p>
+        </p:txBody>
+      </p:sp>
+      <p:sp>
+        <p:nvSpPr>
+          <p:cNvPr id="19" name="TextBox 18"/>
+          <p:cNvSpPr txBox="1"/>
+          <p:nvPr/>
+        </p:nvSpPr>
+        <p:spPr>
+          <a:xfrm>
+            <a:off x="4572000" y="2788920"/>
             <a:ext cx="1645920" cy="274320"/>
           </a:xfrm>
           <a:prstGeom prst="rect">
@@ -8704,13 +8817,13 @@
       </p:sp>
       <p:sp>
         <p:nvSpPr>
-          <p:cNvPr id="17" name="TextBox 16"/>
-          <p:cNvSpPr txBox="1"/>
-          <p:nvPr/>
-        </p:nvSpPr>
-        <p:spPr>
-          <a:xfrm>
-            <a:off x="6858000" y="1371600"/>
+          <p:cNvPr id="20" name="TextBox 19"/>
+          <p:cNvSpPr txBox="1"/>
+          <p:nvPr/>
+        </p:nvSpPr>
+        <p:spPr>
+          <a:xfrm>
+            <a:off x="6858000" y="1645920"/>
             <a:ext cx="4572000" cy="274320"/>
           </a:xfrm>
           <a:prstGeom prst="rect">
@@ -8742,14 +8855,14 @@
       </p:sp>
       <p:sp>
         <p:nvSpPr>
-          <p:cNvPr id="18" name="TextBox 17"/>
-          <p:cNvSpPr txBox="1"/>
-          <p:nvPr/>
-        </p:nvSpPr>
-        <p:spPr>
-          <a:xfrm>
-            <a:off x="6858000" y="1828800"/>
-            <a:ext cx="4754880" cy="640080"/>
+          <p:cNvPr id="21" name="TextBox 20"/>
+          <p:cNvSpPr txBox="1"/>
+          <p:nvPr/>
+        </p:nvSpPr>
+        <p:spPr>
+          <a:xfrm>
+            <a:off x="6858000" y="2103120"/>
+            <a:ext cx="4754880" cy="731520"/>
           </a:xfrm>
           <a:prstGeom prst="rect">
             <a:avLst/>
@@ -8768,7 +8881,7 @@
               </a:spcAft>
             </a:pPr>
             <a:r>
-              <a:rPr sz="1100" b="1">
+              <a:rPr sz="1200" b="1">
                 <a:solidFill>
                   <a:srgbClr val="0069B0"/>
                 </a:solidFill>
@@ -8788,21 +8901,22 @@
                   <a:srgbClr val="555555"/>
                 </a:solidFill>
               </a:rPr>
-              <a:t>Every Cameo requirement maps to a Gherkin scenario. Gate A enforces 100% coverage.</a:t>
-            </a:r>
-          </a:p>
-        </p:txBody>
-      </p:sp>
-      <p:sp>
-        <p:nvSpPr>
-          <p:cNvPr id="19" name="TextBox 18"/>
-          <p:cNvSpPr txBox="1"/>
-          <p:nvPr/>
-        </p:nvSpPr>
-        <p:spPr>
-          <a:xfrm>
-            <a:off x="6858000" y="2542032"/>
-            <a:ext cx="4754880" cy="640080"/>
+              <a:t>Every Cameo requirement maps to a Gherkin scenario.
+Gate A enforces 100% coverage.</a:t>
+            </a:r>
+          </a:p>
+        </p:txBody>
+      </p:sp>
+      <p:sp>
+        <p:nvSpPr>
+          <p:cNvPr id="22" name="TextBox 21"/>
+          <p:cNvSpPr txBox="1"/>
+          <p:nvPr/>
+        </p:nvSpPr>
+        <p:spPr>
+          <a:xfrm>
+            <a:off x="6858000" y="2971800"/>
+            <a:ext cx="4754880" cy="731520"/>
           </a:xfrm>
           <a:prstGeom prst="rect">
             <a:avLst/>
@@ -8821,12 +8935,12 @@
               </a:spcAft>
             </a:pPr>
             <a:r>
-              <a:rPr sz="1100" b="1">
+              <a:rPr sz="1200" b="1">
                 <a:solidFill>
                   <a:srgbClr val="0069B0"/>
                 </a:solidFill>
               </a:rPr>
-              <a:t>Automated E2E Verification</a:t>
+              <a:t>Automated Verification</a:t>
             </a:r>
           </a:p>
           <a:p>
@@ -8841,21 +8955,22 @@
                   <a:srgbClr val="555555"/>
                 </a:solidFill>
               </a:rPr>
-              <a:t>BDD scenarios run against simulation logs after product deployment. Results captured automatically.</a:t>
-            </a:r>
-          </a:p>
-        </p:txBody>
-      </p:sp>
-      <p:sp>
-        <p:nvSpPr>
-          <p:cNvPr id="20" name="TextBox 19"/>
-          <p:cNvSpPr txBox="1"/>
-          <p:nvPr/>
-        </p:nvSpPr>
-        <p:spPr>
-          <a:xfrm>
-            <a:off x="6858000" y="3255264"/>
-            <a:ext cx="4754880" cy="640080"/>
+              <a:t>BDD scenarios run against the deployed product.
+Results captured automatically on every build.</a:t>
+            </a:r>
+          </a:p>
+        </p:txBody>
+      </p:sp>
+      <p:sp>
+        <p:nvSpPr>
+          <p:cNvPr id="23" name="TextBox 22"/>
+          <p:cNvSpPr txBox="1"/>
+          <p:nvPr/>
+        </p:nvSpPr>
+        <p:spPr>
+          <a:xfrm>
+            <a:off x="6858000" y="3840480"/>
+            <a:ext cx="4754880" cy="731520"/>
           </a:xfrm>
           <a:prstGeom prst="rect">
             <a:avLst/>
@@ -8874,7 +8989,7 @@
               </a:spcAft>
             </a:pPr>
             <a:r>
-              <a:rPr sz="1100" b="1">
+              <a:rPr sz="1200" b="1">
                 <a:solidFill>
                   <a:srgbClr val="0069B0"/>
                 </a:solidFill>
@@ -8894,21 +9009,22 @@
                   <a:srgbClr val="555555"/>
                 </a:solidFill>
               </a:rPr>
-              <a:t>Gate B detects when the model changes and flags tests for review — no silent invalidation.</a:t>
-            </a:r>
-          </a:p>
-        </p:txBody>
-      </p:sp>
-      <p:sp>
-        <p:nvSpPr>
-          <p:cNvPr id="21" name="TextBox 20"/>
-          <p:cNvSpPr txBox="1"/>
-          <p:nvPr/>
-        </p:nvSpPr>
-        <p:spPr>
-          <a:xfrm>
-            <a:off x="6858000" y="3968496"/>
-            <a:ext cx="4754880" cy="640080"/>
+              <a:t>Gate B flags tests when the model changes —
+no silent invalidation.</a:t>
+            </a:r>
+          </a:p>
+        </p:txBody>
+      </p:sp>
+      <p:sp>
+        <p:nvSpPr>
+          <p:cNvPr id="24" name="TextBox 23"/>
+          <p:cNvSpPr txBox="1"/>
+          <p:nvPr/>
+        </p:nvSpPr>
+        <p:spPr>
+          <a:xfrm>
+            <a:off x="6858000" y="4709160"/>
+            <a:ext cx="4754880" cy="731520"/>
           </a:xfrm>
           <a:prstGeom prst="rect">
             <a:avLst/>
@@ -8927,12 +9043,12 @@
               </a:spcAft>
             </a:pPr>
             <a:r>
-              <a:rPr sz="1100" b="1">
+              <a:rPr sz="1200" b="1">
                 <a:solidFill>
                   <a:srgbClr val="0069B0"/>
                 </a:solidFill>
               </a:rPr>
-              <a:t>Evidence Generation</a:t>
+              <a:t>Audit Evidence</a:t>
             </a:r>
           </a:p>
           <a:p>
@@ -8947,67 +9063,15 @@
                   <a:srgbClr val="555555"/>
                 </a:solidFill>
               </a:rPr>
-              <a:t>The Deployment Pipeline Report is produced on every build — a complete audit trail.</a:t>
-            </a:r>
-          </a:p>
-        </p:txBody>
-      </p:sp>
-      <p:sp>
-        <p:nvSpPr>
-          <p:cNvPr id="22" name="TextBox 21"/>
-          <p:cNvSpPr txBox="1"/>
-          <p:nvPr/>
-        </p:nvSpPr>
-        <p:spPr>
-          <a:xfrm>
-            <a:off x="6858000" y="4681728"/>
-            <a:ext cx="4754880" cy="640080"/>
-          </a:xfrm>
-          <a:prstGeom prst="rect">
-            <a:avLst/>
-          </a:prstGeom>
-          <a:noFill/>
-        </p:spPr>
-        <p:txBody>
-          <a:bodyPr wrap="square">
-            <a:spAutoFit/>
-          </a:bodyPr>
-          <a:lstStyle/>
-          <a:p>
-            <a:pPr algn="l">
-              <a:spcAft>
-                <a:spcPts val="200"/>
-              </a:spcAft>
-            </a:pPr>
-            <a:r>
-              <a:rPr sz="1100" b="1">
-                <a:solidFill>
-                  <a:srgbClr val="0069B0"/>
-                </a:solidFill>
-              </a:rPr>
-              <a:t>Release-Aware Gating</a:t>
-            </a:r>
-          </a:p>
-          <a:p>
-            <a:pPr algn="l">
-              <a:spcAft>
-                <a:spcPts val="0"/>
-              </a:spcAft>
-            </a:pPr>
-            <a:r>
-              <a:rPr sz="900" b="0">
-                <a:solidFill>
-                  <a:srgbClr val="555555"/>
-                </a:solidFill>
-              </a:rPr>
-              <a:t>Quality gates only enforce VCs in scope for the current release. Future work is tracked but not blocking.</a:t>
-            </a:r>
-          </a:p>
-        </p:txBody>
-      </p:sp>
-      <p:sp>
-        <p:nvSpPr>
-          <p:cNvPr id="23" name="TextBox 22"/>
+              <a:t>The Deployment Pipeline Report is a complete,
+automatically generated audit trail.</a:t>
+            </a:r>
+          </a:p>
+        </p:txBody>
+      </p:sp>
+      <p:sp>
+        <p:nvSpPr>
+          <p:cNvPr id="25" name="TextBox 24"/>
           <p:cNvSpPr txBox="1"/>
           <p:nvPr/>
         </p:nvSpPr>
@@ -9045,7 +9109,7 @@
       </p:sp>
       <p:sp>
         <p:nvSpPr>
-          <p:cNvPr id="24" name="TextBox 23"/>
+          <p:cNvPr id="26" name="TextBox 25"/>
           <p:cNvSpPr txBox="1"/>
           <p:nvPr/>
         </p:nvSpPr>
